--- a/output/wordlabs-join-3day.pptx
+++ b/output/wordlabs-join-3day.pptx
@@ -4240,7 +4240,7 @@
                 <a:ea typeface="Calibri" pitchFamily="34" charset="-122"/>
                 <a:cs typeface="Calibri" pitchFamily="34" charset="-120"/>
               </a:rPr>
-              <a:t>"connect or bring together"</a:t>
+              <a:t>"to connect or bring together"</a:t>
             </a:r>
             <a:endParaRPr lang="en-US" sz="2200" dirty="0"/>
           </a:p>
@@ -5288,7 +5288,7 @@
                 <a:ea typeface="Calibri" pitchFamily="34" charset="-122"/>
                 <a:cs typeface="Calibri" pitchFamily="34" charset="-120"/>
               </a:rPr>
-              <a:t>Word Labs  •  wordlabs.app  •  Root: 'join' = connect or bring together</a:t>
+              <a:t>Word Labs  •  wordlabs.app  •  Root: 'join' = to connect or bring together</a:t>
             </a:r>
             <a:endParaRPr lang="en-US" sz="800" dirty="0"/>
           </a:p>
@@ -5928,7 +5928,7 @@
                 <a:ea typeface="Calibri" pitchFamily="34" charset="-122"/>
                 <a:cs typeface="Calibri" pitchFamily="34" charset="-120"/>
               </a:rPr>
-              <a:t>Word Labs  •  wordlabs.app  •  Root: 'join' = connect or bring together</a:t>
+              <a:t>Word Labs  •  wordlabs.app  •  Root: 'join' = to connect or bring together</a:t>
             </a:r>
             <a:endParaRPr lang="en-US" sz="800" dirty="0"/>
           </a:p>
@@ -6040,7 +6040,7 @@
                 <a:ea typeface="Calibri" pitchFamily="34" charset="-122"/>
                 <a:cs typeface="Calibri" pitchFamily="34" charset="-120"/>
               </a:rPr>
-              <a:t>After lunch, the students were asked to </a:t>
+              <a:t>The students were </a:t>
             </a:r>
             <a:pPr algn="l" indent="0" marL="0">
               <a:buNone/>
@@ -6057,7 +6057,7 @@
                 <a:ea typeface="Calibri" pitchFamily="34" charset="-122"/>
                 <a:cs typeface="Calibri" pitchFamily="34" charset="-120"/>
               </a:rPr>
-              <a:t>rejoin</a:t>
+              <a:t>joining</a:t>
             </a:r>
             <a:pPr algn="l" indent="0" marL="0">
               <a:buNone/>
@@ -6071,7 +6071,7 @@
                 <a:ea typeface="Calibri" pitchFamily="34" charset="-122"/>
                 <a:cs typeface="Calibri" pitchFamily="34" charset="-120"/>
               </a:rPr>
-              <a:t> their classmates and finish the </a:t>
+              <a:t> the science club, and they hoped to </a:t>
             </a:r>
             <a:pPr algn="l" indent="0" marL="0">
               <a:buNone/>
@@ -6088,7 +6088,7 @@
                 <a:ea typeface="Calibri" pitchFamily="34" charset="-122"/>
                 <a:cs typeface="Calibri" pitchFamily="34" charset="-120"/>
               </a:rPr>
-              <a:t>joining</a:t>
+              <a:t>rejoin</a:t>
             </a:r>
             <a:pPr algn="l" indent="0" marL="0">
               <a:buNone/>
@@ -6102,7 +6102,7 @@
                 <a:ea typeface="Calibri" pitchFamily="34" charset="-122"/>
                 <a:cs typeface="Calibri" pitchFamily="34" charset="-120"/>
               </a:rPr>
-              <a:t> activity together.</a:t>
+              <a:t> next year as well.</a:t>
             </a:r>
             <a:endParaRPr lang="en-US" sz="1800" dirty="0"/>
           </a:p>
@@ -6257,7 +6257,7 @@
                 <a:ea typeface="Trebuchet MS" pitchFamily="34" charset="-122"/>
                 <a:cs typeface="Trebuchet MS" pitchFamily="34" charset="-120"/>
               </a:rPr>
-              <a:t>rejoin</a:t>
+              <a:t>joining</a:t>
             </a:r>
             <a:endParaRPr lang="en-US" sz="1400" dirty="0"/>
           </a:p>
@@ -6385,7 +6385,7 @@
                 <a:ea typeface="Trebuchet MS" pitchFamily="34" charset="-122"/>
                 <a:cs typeface="Trebuchet MS" pitchFamily="34" charset="-120"/>
               </a:rPr>
-              <a:t>joining</a:t>
+              <a:t>rejoin</a:t>
             </a:r>
             <a:endParaRPr lang="en-US" sz="1400" dirty="0"/>
           </a:p>
@@ -6716,7 +6716,7 @@
                 <a:ea typeface="Calibri" pitchFamily="34" charset="-122"/>
                 <a:cs typeface="Calibri" pitchFamily="34" charset="-120"/>
               </a:rPr>
-              <a:t>Word Labs  •  wordlabs.app  •  Root: 'join' = connect or bring together</a:t>
+              <a:t>Word Labs  •  wordlabs.app  •  Root: 'join' = to connect or bring together</a:t>
             </a:r>
             <a:endParaRPr lang="en-US" sz="800" dirty="0"/>
           </a:p>
@@ -6855,7 +6855,7 @@
                 <a:ea typeface="Trebuchet MS" pitchFamily="34" charset="-122"/>
                 <a:cs typeface="Trebuchet MS" pitchFamily="34" charset="-120"/>
               </a:rPr>
-              <a:t>rejoin</a:t>
+              <a:t>joining</a:t>
             </a:r>
             <a:endParaRPr lang="en-US" sz="2800" dirty="0"/>
           </a:p>
@@ -7543,7 +7543,7 @@
                 <a:ea typeface="Calibri" pitchFamily="34" charset="-122"/>
                 <a:cs typeface="Calibri" pitchFamily="34" charset="-120"/>
               </a:rPr>
-              <a:t>Word Labs  •  wordlabs.app  •  Root: 'join' = connect or bring together</a:t>
+              <a:t>Word Labs  •  wordlabs.app  •  Root: 'join' = to connect or bring together</a:t>
             </a:r>
             <a:endParaRPr lang="en-US" sz="800" dirty="0"/>
           </a:p>
@@ -7682,7 +7682,7 @@
                 <a:ea typeface="Trebuchet MS" pitchFamily="34" charset="-122"/>
                 <a:cs typeface="Trebuchet MS" pitchFamily="34" charset="-120"/>
               </a:rPr>
-              <a:t>rejoin</a:t>
+              <a:t>joining</a:t>
             </a:r>
             <a:endParaRPr lang="en-US" sz="2800" dirty="0"/>
           </a:p>
@@ -7771,11 +7771,11 @@
             </a:avLst>
           </a:prstGeom>
           <a:solidFill>
-            <a:srgbClr val="DDD6FE"/>
+            <a:srgbClr val="CCFBF1"/>
           </a:solidFill>
           <a:ln w="19050">
             <a:solidFill>
-              <a:srgbClr val="7C3AED"/>
+              <a:srgbClr val="0D9488"/>
             </a:solidFill>
             <a:prstDash val="solid"/>
           </a:ln>
@@ -7815,13 +7815,13 @@
             <a:r>
               <a:rPr lang="en-US" sz="1300" b="1" dirty="0">
                 <a:solidFill>
-                  <a:srgbClr val="4C1D95"/>
+                  <a:srgbClr val="0F766E"/>
                 </a:solidFill>
                 <a:latin typeface="Trebuchet MS" pitchFamily="34" charset="0"/>
                 <a:ea typeface="Trebuchet MS" pitchFamily="34" charset="-122"/>
                 <a:cs typeface="Trebuchet MS" pitchFamily="34" charset="-120"/>
               </a:rPr>
-              <a:t>re</a:t>
+              <a:t>join</a:t>
             </a:r>
             <a:endParaRPr lang="en-US" sz="1300" dirty="0"/>
           </a:p>
@@ -7860,7 +7860,7 @@
                 <a:ea typeface="Calibri" pitchFamily="34" charset="-122"/>
                 <a:cs typeface="Calibri" pitchFamily="34" charset="-120"/>
               </a:rPr>
-              <a:t>again</a:t>
+              <a:t>to connect or bring together</a:t>
             </a:r>
             <a:endParaRPr lang="en-US" sz="850" dirty="0"/>
           </a:p>
@@ -7883,11 +7883,11 @@
             </a:avLst>
           </a:prstGeom>
           <a:solidFill>
-            <a:srgbClr val="CCFBF1"/>
+            <a:srgbClr val="FCE7F3"/>
           </a:solidFill>
           <a:ln w="19050">
             <a:solidFill>
-              <a:srgbClr val="0D9488"/>
+              <a:srgbClr val="DB2777"/>
             </a:solidFill>
             <a:prstDash val="solid"/>
           </a:ln>
@@ -7927,13 +7927,13 @@
             <a:r>
               <a:rPr lang="en-US" sz="1300" b="1" dirty="0">
                 <a:solidFill>
-                  <a:srgbClr val="0F766E"/>
+                  <a:srgbClr val="9D174D"/>
                 </a:solidFill>
                 <a:latin typeface="Trebuchet MS" pitchFamily="34" charset="0"/>
                 <a:ea typeface="Trebuchet MS" pitchFamily="34" charset="-122"/>
                 <a:cs typeface="Trebuchet MS" pitchFamily="34" charset="-120"/>
               </a:rPr>
-              <a:t>join</a:t>
+              <a:t>ing</a:t>
             </a:r>
             <a:endParaRPr lang="en-US" sz="1300" dirty="0"/>
           </a:p>
@@ -7972,7 +7972,7 @@
                 <a:ea typeface="Calibri" pitchFamily="34" charset="-122"/>
                 <a:cs typeface="Calibri" pitchFamily="34" charset="-120"/>
               </a:rPr>
-              <a:t>connect or bring together</a:t>
+              <a:t>action happening now</a:t>
             </a:r>
             <a:endParaRPr lang="en-US" sz="850" dirty="0"/>
           </a:p>
@@ -8528,7 +8528,7 @@
                 <a:ea typeface="Calibri" pitchFamily="34" charset="-122"/>
                 <a:cs typeface="Calibri" pitchFamily="34" charset="-120"/>
               </a:rPr>
-              <a:t>Word Labs  •  wordlabs.app  •  Root: 'join' = connect or bring together</a:t>
+              <a:t>Word Labs  •  wordlabs.app  •  Root: 'join' = to connect or bring together</a:t>
             </a:r>
             <a:endParaRPr lang="en-US" sz="800" dirty="0"/>
           </a:p>
@@ -8667,7 +8667,7 @@
                 <a:ea typeface="Trebuchet MS" pitchFamily="34" charset="-122"/>
                 <a:cs typeface="Trebuchet MS" pitchFamily="34" charset="-120"/>
               </a:rPr>
-              <a:t>rejoin</a:t>
+              <a:t>joining</a:t>
             </a:r>
             <a:endParaRPr lang="en-US" sz="2800" dirty="0"/>
           </a:p>
@@ -8756,11 +8756,11 @@
             </a:avLst>
           </a:prstGeom>
           <a:solidFill>
-            <a:srgbClr val="DDD6FE"/>
+            <a:srgbClr val="CCFBF1"/>
           </a:solidFill>
           <a:ln w="19050">
             <a:solidFill>
-              <a:srgbClr val="7C3AED"/>
+              <a:srgbClr val="0D9488"/>
             </a:solidFill>
             <a:prstDash val="solid"/>
           </a:ln>
@@ -8800,13 +8800,13 @@
             <a:r>
               <a:rPr lang="en-US" sz="1300" b="1" dirty="0">
                 <a:solidFill>
-                  <a:srgbClr val="4C1D95"/>
+                  <a:srgbClr val="0F766E"/>
                 </a:solidFill>
                 <a:latin typeface="Trebuchet MS" pitchFamily="34" charset="0"/>
                 <a:ea typeface="Trebuchet MS" pitchFamily="34" charset="-122"/>
                 <a:cs typeface="Trebuchet MS" pitchFamily="34" charset="-120"/>
               </a:rPr>
-              <a:t>re</a:t>
+              <a:t>join</a:t>
             </a:r>
             <a:endParaRPr lang="en-US" sz="1300" dirty="0"/>
           </a:p>
@@ -8845,7 +8845,7 @@
                 <a:ea typeface="Calibri" pitchFamily="34" charset="-122"/>
                 <a:cs typeface="Calibri" pitchFamily="34" charset="-120"/>
               </a:rPr>
-              <a:t>again</a:t>
+              <a:t>to connect or bring together</a:t>
             </a:r>
             <a:endParaRPr lang="en-US" sz="850" dirty="0"/>
           </a:p>
@@ -8868,11 +8868,11 @@
             </a:avLst>
           </a:prstGeom>
           <a:solidFill>
-            <a:srgbClr val="CCFBF1"/>
+            <a:srgbClr val="FCE7F3"/>
           </a:solidFill>
           <a:ln w="19050">
             <a:solidFill>
-              <a:srgbClr val="0D9488"/>
+              <a:srgbClr val="DB2777"/>
             </a:solidFill>
             <a:prstDash val="solid"/>
           </a:ln>
@@ -8912,13 +8912,13 @@
             <a:r>
               <a:rPr lang="en-US" sz="1300" b="1" dirty="0">
                 <a:solidFill>
-                  <a:srgbClr val="0F766E"/>
+                  <a:srgbClr val="9D174D"/>
                 </a:solidFill>
                 <a:latin typeface="Trebuchet MS" pitchFamily="34" charset="0"/>
                 <a:ea typeface="Trebuchet MS" pitchFamily="34" charset="-122"/>
                 <a:cs typeface="Trebuchet MS" pitchFamily="34" charset="-120"/>
               </a:rPr>
-              <a:t>join</a:t>
+              <a:t>ing</a:t>
             </a:r>
             <a:endParaRPr lang="en-US" sz="1300" dirty="0"/>
           </a:p>
@@ -8957,7 +8957,7 @@
                 <a:ea typeface="Calibri" pitchFamily="34" charset="-122"/>
                 <a:cs typeface="Calibri" pitchFamily="34" charset="-120"/>
               </a:rPr>
-              <a:t>connect or bring together</a:t>
+              <a:t>action happening now</a:t>
             </a:r>
             <a:endParaRPr lang="en-US" sz="850" dirty="0"/>
           </a:p>
@@ -9116,7 +9116,7 @@
                 <a:ea typeface="Trebuchet MS" pitchFamily="34" charset="-122"/>
                 <a:cs typeface="Trebuchet MS" pitchFamily="34" charset="-120"/>
               </a:rPr>
-              <a:t>re</a:t>
+              <a:t>join</a:t>
             </a:r>
             <a:endParaRPr lang="en-US" sz="1400" dirty="0"/>
           </a:p>
@@ -9221,7 +9221,7 @@
                 <a:ea typeface="Trebuchet MS" pitchFamily="34" charset="-122"/>
                 <a:cs typeface="Trebuchet MS" pitchFamily="34" charset="-120"/>
               </a:rPr>
-              <a:t>join</a:t>
+              <a:t>ing</a:t>
             </a:r>
             <a:endParaRPr lang="en-US" sz="1400" dirty="0"/>
           </a:p>
@@ -9645,7 +9645,7 @@
                 <a:ea typeface="Calibri" pitchFamily="34" charset="-122"/>
                 <a:cs typeface="Calibri" pitchFamily="34" charset="-120"/>
               </a:rPr>
-              <a:t>Word Labs  •  wordlabs.app  •  Root: 'join' = connect or bring together</a:t>
+              <a:t>Word Labs  •  wordlabs.app  •  Root: 'join' = to connect or bring together</a:t>
             </a:r>
             <a:endParaRPr lang="en-US" sz="800" dirty="0"/>
           </a:p>
@@ -9784,7 +9784,7 @@
                 <a:ea typeface="Trebuchet MS" pitchFamily="34" charset="-122"/>
                 <a:cs typeface="Trebuchet MS" pitchFamily="34" charset="-120"/>
               </a:rPr>
-              <a:t>rejoin</a:t>
+              <a:t>joining</a:t>
             </a:r>
             <a:endParaRPr lang="en-US" sz="2800" dirty="0"/>
           </a:p>
@@ -9873,11 +9873,11 @@
             </a:avLst>
           </a:prstGeom>
           <a:solidFill>
-            <a:srgbClr val="DDD6FE"/>
+            <a:srgbClr val="CCFBF1"/>
           </a:solidFill>
           <a:ln w="19050">
             <a:solidFill>
-              <a:srgbClr val="7C3AED"/>
+              <a:srgbClr val="0D9488"/>
             </a:solidFill>
             <a:prstDash val="solid"/>
           </a:ln>
@@ -9917,13 +9917,13 @@
             <a:r>
               <a:rPr lang="en-US" sz="1300" b="1" dirty="0">
                 <a:solidFill>
-                  <a:srgbClr val="4C1D95"/>
+                  <a:srgbClr val="0F766E"/>
                 </a:solidFill>
                 <a:latin typeface="Trebuchet MS" pitchFamily="34" charset="0"/>
                 <a:ea typeface="Trebuchet MS" pitchFamily="34" charset="-122"/>
                 <a:cs typeface="Trebuchet MS" pitchFamily="34" charset="-120"/>
               </a:rPr>
-              <a:t>re</a:t>
+              <a:t>join</a:t>
             </a:r>
             <a:endParaRPr lang="en-US" sz="1300" dirty="0"/>
           </a:p>
@@ -9962,7 +9962,7 @@
                 <a:ea typeface="Calibri" pitchFamily="34" charset="-122"/>
                 <a:cs typeface="Calibri" pitchFamily="34" charset="-120"/>
               </a:rPr>
-              <a:t>again</a:t>
+              <a:t>to connect or bring together</a:t>
             </a:r>
             <a:endParaRPr lang="en-US" sz="850" dirty="0"/>
           </a:p>
@@ -9985,11 +9985,11 @@
             </a:avLst>
           </a:prstGeom>
           <a:solidFill>
-            <a:srgbClr val="CCFBF1"/>
+            <a:srgbClr val="FCE7F3"/>
           </a:solidFill>
           <a:ln w="19050">
             <a:solidFill>
-              <a:srgbClr val="0D9488"/>
+              <a:srgbClr val="DB2777"/>
             </a:solidFill>
             <a:prstDash val="solid"/>
           </a:ln>
@@ -10029,13 +10029,13 @@
             <a:r>
               <a:rPr lang="en-US" sz="1300" b="1" dirty="0">
                 <a:solidFill>
-                  <a:srgbClr val="0F766E"/>
+                  <a:srgbClr val="9D174D"/>
                 </a:solidFill>
                 <a:latin typeface="Trebuchet MS" pitchFamily="34" charset="0"/>
                 <a:ea typeface="Trebuchet MS" pitchFamily="34" charset="-122"/>
                 <a:cs typeface="Trebuchet MS" pitchFamily="34" charset="-120"/>
               </a:rPr>
-              <a:t>join</a:t>
+              <a:t>ing</a:t>
             </a:r>
             <a:endParaRPr lang="en-US" sz="1300" dirty="0"/>
           </a:p>
@@ -10074,7 +10074,7 @@
                 <a:ea typeface="Calibri" pitchFamily="34" charset="-122"/>
                 <a:cs typeface="Calibri" pitchFamily="34" charset="-120"/>
               </a:rPr>
-              <a:t>connect or bring together</a:t>
+              <a:t>action happening now</a:t>
             </a:r>
             <a:endParaRPr lang="en-US" sz="850" dirty="0"/>
           </a:p>
@@ -10233,7 +10233,7 @@
                 <a:ea typeface="Trebuchet MS" pitchFamily="34" charset="-122"/>
                 <a:cs typeface="Trebuchet MS" pitchFamily="34" charset="-120"/>
               </a:rPr>
-              <a:t>re</a:t>
+              <a:t>join</a:t>
             </a:r>
             <a:endParaRPr lang="en-US" sz="1400" dirty="0"/>
           </a:p>
@@ -10338,7 +10338,7 @@
                 <a:ea typeface="Trebuchet MS" pitchFamily="34" charset="-122"/>
                 <a:cs typeface="Trebuchet MS" pitchFamily="34" charset="-120"/>
               </a:rPr>
-              <a:t>join</a:t>
+              <a:t>ing</a:t>
             </a:r>
             <a:endParaRPr lang="en-US" sz="1400" dirty="0"/>
           </a:p>
@@ -10497,7 +10497,7 @@
                 <a:ea typeface="Trebuchet MS" pitchFamily="34" charset="-122"/>
                 <a:cs typeface="Trebuchet MS" pitchFamily="34" charset="-120"/>
               </a:rPr>
-              <a:t>r</a:t>
+              <a:t>j</a:t>
             </a:r>
             <a:endParaRPr lang="en-US" sz="900" dirty="0"/>
           </a:p>
@@ -10563,7 +10563,7 @@
                 <a:ea typeface="Trebuchet MS" pitchFamily="34" charset="-122"/>
                 <a:cs typeface="Trebuchet MS" pitchFamily="34" charset="-120"/>
               </a:rPr>
-              <a:t>e</a:t>
+              <a:t>oi</a:t>
             </a:r>
             <a:endParaRPr lang="en-US" sz="900" dirty="0"/>
           </a:p>
@@ -10629,7 +10629,7 @@
                 <a:ea typeface="Trebuchet MS" pitchFamily="34" charset="-122"/>
                 <a:cs typeface="Trebuchet MS" pitchFamily="34" charset="-120"/>
               </a:rPr>
-              <a:t>j</a:t>
+              <a:t>n</a:t>
             </a:r>
             <a:endParaRPr lang="en-US" sz="900" dirty="0"/>
           </a:p>
@@ -10695,7 +10695,7 @@
                 <a:ea typeface="Trebuchet MS" pitchFamily="34" charset="-122"/>
                 <a:cs typeface="Trebuchet MS" pitchFamily="34" charset="-120"/>
               </a:rPr>
-              <a:t>oi</a:t>
+              <a:t>i</a:t>
             </a:r>
             <a:endParaRPr lang="en-US" sz="900" dirty="0"/>
           </a:p>
@@ -10761,7 +10761,7 @@
                 <a:ea typeface="Trebuchet MS" pitchFamily="34" charset="-122"/>
                 <a:cs typeface="Trebuchet MS" pitchFamily="34" charset="-120"/>
               </a:rPr>
-              <a:t>n</a:t>
+              <a:t>ng</a:t>
             </a:r>
             <a:endParaRPr lang="en-US" sz="900" dirty="0"/>
           </a:p>
@@ -11053,7 +11053,7 @@
                 <a:ea typeface="Calibri" pitchFamily="34" charset="-122"/>
                 <a:cs typeface="Calibri" pitchFamily="34" charset="-120"/>
               </a:rPr>
-              <a:t>Word Labs  •  wordlabs.app  •  Root: 'join' = connect or bring together</a:t>
+              <a:t>Word Labs  •  wordlabs.app  •  Root: 'join' = to connect or bring together</a:t>
             </a:r>
             <a:endParaRPr lang="en-US" sz="800" dirty="0"/>
           </a:p>
@@ -11192,7 +11192,7 @@
                 <a:ea typeface="Trebuchet MS" pitchFamily="34" charset="-122"/>
                 <a:cs typeface="Trebuchet MS" pitchFamily="34" charset="-120"/>
               </a:rPr>
-              <a:t>joining</a:t>
+              <a:t>rejoin</a:t>
             </a:r>
             <a:endParaRPr lang="en-US" sz="2800" dirty="0"/>
           </a:p>
@@ -11880,7 +11880,7 @@
                 <a:ea typeface="Calibri" pitchFamily="34" charset="-122"/>
                 <a:cs typeface="Calibri" pitchFamily="34" charset="-120"/>
               </a:rPr>
-              <a:t>Word Labs  •  wordlabs.app  •  Root: 'join' = connect or bring together</a:t>
+              <a:t>Word Labs  •  wordlabs.app  •  Root: 'join' = to connect or bring together</a:t>
             </a:r>
             <a:endParaRPr lang="en-US" sz="800" dirty="0"/>
           </a:p>
@@ -12019,7 +12019,7 @@
                 <a:ea typeface="Trebuchet MS" pitchFamily="34" charset="-122"/>
                 <a:cs typeface="Trebuchet MS" pitchFamily="34" charset="-120"/>
               </a:rPr>
-              <a:t>joining</a:t>
+              <a:t>rejoin</a:t>
             </a:r>
             <a:endParaRPr lang="en-US" sz="2800" dirty="0"/>
           </a:p>
@@ -12108,11 +12108,11 @@
             </a:avLst>
           </a:prstGeom>
           <a:solidFill>
-            <a:srgbClr val="CCFBF1"/>
+            <a:srgbClr val="DDD6FE"/>
           </a:solidFill>
           <a:ln w="19050">
             <a:solidFill>
-              <a:srgbClr val="0D9488"/>
+              <a:srgbClr val="7C3AED"/>
             </a:solidFill>
             <a:prstDash val="solid"/>
           </a:ln>
@@ -12152,13 +12152,13 @@
             <a:r>
               <a:rPr lang="en-US" sz="1300" b="1" dirty="0">
                 <a:solidFill>
-                  <a:srgbClr val="0F766E"/>
+                  <a:srgbClr val="4C1D95"/>
                 </a:solidFill>
                 <a:latin typeface="Trebuchet MS" pitchFamily="34" charset="0"/>
                 <a:ea typeface="Trebuchet MS" pitchFamily="34" charset="-122"/>
                 <a:cs typeface="Trebuchet MS" pitchFamily="34" charset="-120"/>
               </a:rPr>
-              <a:t>join</a:t>
+              <a:t>re</a:t>
             </a:r>
             <a:endParaRPr lang="en-US" sz="1300" dirty="0"/>
           </a:p>
@@ -12197,7 +12197,7 @@
                 <a:ea typeface="Calibri" pitchFamily="34" charset="-122"/>
                 <a:cs typeface="Calibri" pitchFamily="34" charset="-120"/>
               </a:rPr>
-              <a:t>connect or bring together</a:t>
+              <a:t>again</a:t>
             </a:r>
             <a:endParaRPr lang="en-US" sz="850" dirty="0"/>
           </a:p>
@@ -12220,11 +12220,11 @@
             </a:avLst>
           </a:prstGeom>
           <a:solidFill>
-            <a:srgbClr val="FCE7F3"/>
+            <a:srgbClr val="CCFBF1"/>
           </a:solidFill>
           <a:ln w="19050">
             <a:solidFill>
-              <a:srgbClr val="DB2777"/>
+              <a:srgbClr val="0D9488"/>
             </a:solidFill>
             <a:prstDash val="solid"/>
           </a:ln>
@@ -12264,13 +12264,13 @@
             <a:r>
               <a:rPr lang="en-US" sz="1300" b="1" dirty="0">
                 <a:solidFill>
-                  <a:srgbClr val="9D174D"/>
+                  <a:srgbClr val="0F766E"/>
                 </a:solidFill>
                 <a:latin typeface="Trebuchet MS" pitchFamily="34" charset="0"/>
                 <a:ea typeface="Trebuchet MS" pitchFamily="34" charset="-122"/>
                 <a:cs typeface="Trebuchet MS" pitchFamily="34" charset="-120"/>
               </a:rPr>
-              <a:t>ing</a:t>
+              <a:t>join</a:t>
             </a:r>
             <a:endParaRPr lang="en-US" sz="1300" dirty="0"/>
           </a:p>
@@ -12309,7 +12309,7 @@
                 <a:ea typeface="Calibri" pitchFamily="34" charset="-122"/>
                 <a:cs typeface="Calibri" pitchFamily="34" charset="-120"/>
               </a:rPr>
-              <a:t>action in progress</a:t>
+              <a:t>to connect or bring together</a:t>
             </a:r>
             <a:endParaRPr lang="en-US" sz="850" dirty="0"/>
           </a:p>
@@ -12865,7 +12865,7 @@
                 <a:ea typeface="Calibri" pitchFamily="34" charset="-122"/>
                 <a:cs typeface="Calibri" pitchFamily="34" charset="-120"/>
               </a:rPr>
-              <a:t>Word Labs  •  wordlabs.app  •  Root: 'join' = connect or bring together</a:t>
+              <a:t>Word Labs  •  wordlabs.app  •  Root: 'join' = to connect or bring together</a:t>
             </a:r>
             <a:endParaRPr lang="en-US" sz="800" dirty="0"/>
           </a:p>
@@ -13004,7 +13004,7 @@
                 <a:ea typeface="Trebuchet MS" pitchFamily="34" charset="-122"/>
                 <a:cs typeface="Trebuchet MS" pitchFamily="34" charset="-120"/>
               </a:rPr>
-              <a:t>joining</a:t>
+              <a:t>rejoin</a:t>
             </a:r>
             <a:endParaRPr lang="en-US" sz="2800" dirty="0"/>
           </a:p>
@@ -13093,11 +13093,11 @@
             </a:avLst>
           </a:prstGeom>
           <a:solidFill>
-            <a:srgbClr val="CCFBF1"/>
+            <a:srgbClr val="DDD6FE"/>
           </a:solidFill>
           <a:ln w="19050">
             <a:solidFill>
-              <a:srgbClr val="0D9488"/>
+              <a:srgbClr val="7C3AED"/>
             </a:solidFill>
             <a:prstDash val="solid"/>
           </a:ln>
@@ -13137,13 +13137,13 @@
             <a:r>
               <a:rPr lang="en-US" sz="1300" b="1" dirty="0">
                 <a:solidFill>
-                  <a:srgbClr val="0F766E"/>
+                  <a:srgbClr val="4C1D95"/>
                 </a:solidFill>
                 <a:latin typeface="Trebuchet MS" pitchFamily="34" charset="0"/>
                 <a:ea typeface="Trebuchet MS" pitchFamily="34" charset="-122"/>
                 <a:cs typeface="Trebuchet MS" pitchFamily="34" charset="-120"/>
               </a:rPr>
-              <a:t>join</a:t>
+              <a:t>re</a:t>
             </a:r>
             <a:endParaRPr lang="en-US" sz="1300" dirty="0"/>
           </a:p>
@@ -13182,7 +13182,7 @@
                 <a:ea typeface="Calibri" pitchFamily="34" charset="-122"/>
                 <a:cs typeface="Calibri" pitchFamily="34" charset="-120"/>
               </a:rPr>
-              <a:t>connect or bring together</a:t>
+              <a:t>again</a:t>
             </a:r>
             <a:endParaRPr lang="en-US" sz="850" dirty="0"/>
           </a:p>
@@ -13205,11 +13205,11 @@
             </a:avLst>
           </a:prstGeom>
           <a:solidFill>
-            <a:srgbClr val="FCE7F3"/>
+            <a:srgbClr val="CCFBF1"/>
           </a:solidFill>
           <a:ln w="19050">
             <a:solidFill>
-              <a:srgbClr val="DB2777"/>
+              <a:srgbClr val="0D9488"/>
             </a:solidFill>
             <a:prstDash val="solid"/>
           </a:ln>
@@ -13249,13 +13249,13 @@
             <a:r>
               <a:rPr lang="en-US" sz="1300" b="1" dirty="0">
                 <a:solidFill>
-                  <a:srgbClr val="9D174D"/>
+                  <a:srgbClr val="0F766E"/>
                 </a:solidFill>
                 <a:latin typeface="Trebuchet MS" pitchFamily="34" charset="0"/>
                 <a:ea typeface="Trebuchet MS" pitchFamily="34" charset="-122"/>
                 <a:cs typeface="Trebuchet MS" pitchFamily="34" charset="-120"/>
               </a:rPr>
-              <a:t>ing</a:t>
+              <a:t>join</a:t>
             </a:r>
             <a:endParaRPr lang="en-US" sz="1300" dirty="0"/>
           </a:p>
@@ -13294,7 +13294,7 @@
                 <a:ea typeface="Calibri" pitchFamily="34" charset="-122"/>
                 <a:cs typeface="Calibri" pitchFamily="34" charset="-120"/>
               </a:rPr>
-              <a:t>action in progress</a:t>
+              <a:t>to connect or bring together</a:t>
             </a:r>
             <a:endParaRPr lang="en-US" sz="850" dirty="0"/>
           </a:p>
@@ -13453,7 +13453,7 @@
                 <a:ea typeface="Trebuchet MS" pitchFamily="34" charset="-122"/>
                 <a:cs typeface="Trebuchet MS" pitchFamily="34" charset="-120"/>
               </a:rPr>
-              <a:t>join</a:t>
+              <a:t>re</a:t>
             </a:r>
             <a:endParaRPr lang="en-US" sz="1400" dirty="0"/>
           </a:p>
@@ -13558,7 +13558,7 @@
                 <a:ea typeface="Trebuchet MS" pitchFamily="34" charset="-122"/>
                 <a:cs typeface="Trebuchet MS" pitchFamily="34" charset="-120"/>
               </a:rPr>
-              <a:t>ing</a:t>
+              <a:t>join</a:t>
             </a:r>
             <a:endParaRPr lang="en-US" sz="1400" dirty="0"/>
           </a:p>
@@ -13891,7 +13891,7 @@
                 <a:ea typeface="Calibri" pitchFamily="34" charset="-122"/>
                 <a:cs typeface="Calibri" pitchFamily="34" charset="-120"/>
               </a:rPr>
-              <a:t>Root 'join' — connect or bring together</a:t>
+              <a:t>Root 'join' — to connect or bring together</a:t>
             </a:r>
             <a:endParaRPr lang="en-US" sz="1600" dirty="0"/>
           </a:p>
@@ -14247,7 +14247,7 @@
                 <a:ea typeface="Calibri" pitchFamily="34" charset="-122"/>
                 <a:cs typeface="Calibri" pitchFamily="34" charset="-120"/>
               </a:rPr>
-              <a:t>Word Labs  •  wordlabs.app  •  Root: 'join' = connect or bring together</a:t>
+              <a:t>Word Labs  •  wordlabs.app  •  Root: 'join' = to connect or bring together</a:t>
             </a:r>
             <a:endParaRPr lang="en-US" sz="800" dirty="0"/>
           </a:p>
@@ -14386,7 +14386,7 @@
                 <a:ea typeface="Trebuchet MS" pitchFamily="34" charset="-122"/>
                 <a:cs typeface="Trebuchet MS" pitchFamily="34" charset="-120"/>
               </a:rPr>
-              <a:t>joining</a:t>
+              <a:t>rejoin</a:t>
             </a:r>
             <a:endParaRPr lang="en-US" sz="2800" dirty="0"/>
           </a:p>
@@ -14475,11 +14475,11 @@
             </a:avLst>
           </a:prstGeom>
           <a:solidFill>
-            <a:srgbClr val="CCFBF1"/>
+            <a:srgbClr val="DDD6FE"/>
           </a:solidFill>
           <a:ln w="19050">
             <a:solidFill>
-              <a:srgbClr val="0D9488"/>
+              <a:srgbClr val="7C3AED"/>
             </a:solidFill>
             <a:prstDash val="solid"/>
           </a:ln>
@@ -14519,13 +14519,13 @@
             <a:r>
               <a:rPr lang="en-US" sz="1300" b="1" dirty="0">
                 <a:solidFill>
-                  <a:srgbClr val="0F766E"/>
+                  <a:srgbClr val="4C1D95"/>
                 </a:solidFill>
                 <a:latin typeface="Trebuchet MS" pitchFamily="34" charset="0"/>
                 <a:ea typeface="Trebuchet MS" pitchFamily="34" charset="-122"/>
                 <a:cs typeface="Trebuchet MS" pitchFamily="34" charset="-120"/>
               </a:rPr>
-              <a:t>join</a:t>
+              <a:t>re</a:t>
             </a:r>
             <a:endParaRPr lang="en-US" sz="1300" dirty="0"/>
           </a:p>
@@ -14564,7 +14564,7 @@
                 <a:ea typeface="Calibri" pitchFamily="34" charset="-122"/>
                 <a:cs typeface="Calibri" pitchFamily="34" charset="-120"/>
               </a:rPr>
-              <a:t>connect or bring together</a:t>
+              <a:t>again</a:t>
             </a:r>
             <a:endParaRPr lang="en-US" sz="850" dirty="0"/>
           </a:p>
@@ -14587,11 +14587,11 @@
             </a:avLst>
           </a:prstGeom>
           <a:solidFill>
-            <a:srgbClr val="FCE7F3"/>
+            <a:srgbClr val="CCFBF1"/>
           </a:solidFill>
           <a:ln w="19050">
             <a:solidFill>
-              <a:srgbClr val="DB2777"/>
+              <a:srgbClr val="0D9488"/>
             </a:solidFill>
             <a:prstDash val="solid"/>
           </a:ln>
@@ -14631,13 +14631,13 @@
             <a:r>
               <a:rPr lang="en-US" sz="1300" b="1" dirty="0">
                 <a:solidFill>
-                  <a:srgbClr val="9D174D"/>
+                  <a:srgbClr val="0F766E"/>
                 </a:solidFill>
                 <a:latin typeface="Trebuchet MS" pitchFamily="34" charset="0"/>
                 <a:ea typeface="Trebuchet MS" pitchFamily="34" charset="-122"/>
                 <a:cs typeface="Trebuchet MS" pitchFamily="34" charset="-120"/>
               </a:rPr>
-              <a:t>ing</a:t>
+              <a:t>join</a:t>
             </a:r>
             <a:endParaRPr lang="en-US" sz="1300" dirty="0"/>
           </a:p>
@@ -14676,7 +14676,7 @@
                 <a:ea typeface="Calibri" pitchFamily="34" charset="-122"/>
                 <a:cs typeface="Calibri" pitchFamily="34" charset="-120"/>
               </a:rPr>
-              <a:t>action in progress</a:t>
+              <a:t>to connect or bring together</a:t>
             </a:r>
             <a:endParaRPr lang="en-US" sz="850" dirty="0"/>
           </a:p>
@@ -14835,7 +14835,7 @@
                 <a:ea typeface="Trebuchet MS" pitchFamily="34" charset="-122"/>
                 <a:cs typeface="Trebuchet MS" pitchFamily="34" charset="-120"/>
               </a:rPr>
-              <a:t>join</a:t>
+              <a:t>re</a:t>
             </a:r>
             <a:endParaRPr lang="en-US" sz="1400" dirty="0"/>
           </a:p>
@@ -14940,7 +14940,7 @@
                 <a:ea typeface="Trebuchet MS" pitchFamily="34" charset="-122"/>
                 <a:cs typeface="Trebuchet MS" pitchFamily="34" charset="-120"/>
               </a:rPr>
-              <a:t>ing</a:t>
+              <a:t>join</a:t>
             </a:r>
             <a:endParaRPr lang="en-US" sz="1400" dirty="0"/>
           </a:p>
@@ -15047,7 +15047,7 @@
         </p:nvSpPr>
         <p:spPr>
           <a:xfrm>
-            <a:off x="2670048" y="4169664"/>
+            <a:off x="2427732" y="4169664"/>
             <a:ext cx="685800" cy="475488"/>
           </a:xfrm>
           <a:prstGeom prst="rect">
@@ -15074,7 +15074,7 @@
         </p:nvSpPr>
         <p:spPr>
           <a:xfrm>
-            <a:off x="2670048" y="4169664"/>
+            <a:off x="2427732" y="4169664"/>
             <a:ext cx="685800" cy="475488"/>
           </a:xfrm>
           <a:prstGeom prst="rect">
@@ -15099,7 +15099,7 @@
                 <a:ea typeface="Trebuchet MS" pitchFamily="34" charset="-122"/>
                 <a:cs typeface="Trebuchet MS" pitchFamily="34" charset="-120"/>
               </a:rPr>
-              <a:t>j</a:t>
+              <a:t>r</a:t>
             </a:r>
             <a:endParaRPr lang="en-US" sz="900" dirty="0"/>
           </a:p>
@@ -15113,7 +15113,7 @@
         </p:nvSpPr>
         <p:spPr>
           <a:xfrm>
-            <a:off x="4123944" y="4169664"/>
+            <a:off x="3639312" y="4169664"/>
             <a:ext cx="685800" cy="475488"/>
           </a:xfrm>
           <a:prstGeom prst="rect">
@@ -15140,7 +15140,7 @@
         </p:nvSpPr>
         <p:spPr>
           <a:xfrm>
-            <a:off x="4123944" y="4169664"/>
+            <a:off x="3639312" y="4169664"/>
             <a:ext cx="685800" cy="475488"/>
           </a:xfrm>
           <a:prstGeom prst="rect">
@@ -15165,7 +15165,7 @@
                 <a:ea typeface="Trebuchet MS" pitchFamily="34" charset="-122"/>
                 <a:cs typeface="Trebuchet MS" pitchFamily="34" charset="-120"/>
               </a:rPr>
-              <a:t>oi</a:t>
+              <a:t>e</a:t>
             </a:r>
             <a:endParaRPr lang="en-US" sz="900" dirty="0"/>
           </a:p>
@@ -15179,7 +15179,7 @@
         </p:nvSpPr>
         <p:spPr>
           <a:xfrm>
-            <a:off x="5577840" y="4169664"/>
+            <a:off x="4850892" y="4169664"/>
             <a:ext cx="685800" cy="475488"/>
           </a:xfrm>
           <a:prstGeom prst="rect">
@@ -15206,7 +15206,7 @@
         </p:nvSpPr>
         <p:spPr>
           <a:xfrm>
-            <a:off x="5577840" y="4169664"/>
+            <a:off x="4850892" y="4169664"/>
             <a:ext cx="685800" cy="475488"/>
           </a:xfrm>
           <a:prstGeom prst="rect">
@@ -15231,7 +15231,7 @@
                 <a:ea typeface="Trebuchet MS" pitchFamily="34" charset="-122"/>
                 <a:cs typeface="Trebuchet MS" pitchFamily="34" charset="-120"/>
               </a:rPr>
-              <a:t>n</a:t>
+              <a:t>j</a:t>
             </a:r>
             <a:endParaRPr lang="en-US" sz="900" dirty="0"/>
           </a:p>
@@ -15245,7 +15245,7 @@
         </p:nvSpPr>
         <p:spPr>
           <a:xfrm>
-            <a:off x="7031736" y="4169664"/>
+            <a:off x="6062472" y="4169664"/>
             <a:ext cx="685800" cy="475488"/>
           </a:xfrm>
           <a:prstGeom prst="rect">
@@ -15272,7 +15272,7 @@
         </p:nvSpPr>
         <p:spPr>
           <a:xfrm>
-            <a:off x="7031736" y="4169664"/>
+            <a:off x="6062472" y="4169664"/>
             <a:ext cx="685800" cy="475488"/>
           </a:xfrm>
           <a:prstGeom prst="rect">
@@ -15297,7 +15297,73 @@
                 <a:ea typeface="Trebuchet MS" pitchFamily="34" charset="-122"/>
                 <a:cs typeface="Trebuchet MS" pitchFamily="34" charset="-120"/>
               </a:rPr>
-              <a:t>ing</a:t>
+              <a:t>oi</a:t>
+            </a:r>
+            <a:endParaRPr lang="en-US" sz="900" dirty="0"/>
+          </a:p>
+        </p:txBody>
+      </p:sp>
+      <p:sp>
+        <p:nvSpPr>
+          <p:cNvPr id="41" name="Shape 39"/>
+          <p:cNvSpPr/>
+          <p:nvPr/>
+        </p:nvSpPr>
+        <p:spPr>
+          <a:xfrm>
+            <a:off x="7274052" y="4169664"/>
+            <a:ext cx="685800" cy="475488"/>
+          </a:xfrm>
+          <a:prstGeom prst="rect">
+            <a:avLst>
+              <a:gd name="adj" fmla="val 7692"/>
+            </a:avLst>
+          </a:prstGeom>
+          <a:solidFill>
+            <a:srgbClr val="FFFFFF"/>
+          </a:solidFill>
+          <a:ln w="12700">
+            <a:solidFill>
+              <a:srgbClr val="DB2777"/>
+            </a:solidFill>
+            <a:prstDash val="solid"/>
+          </a:ln>
+        </p:spPr>
+      </p:sp>
+      <p:sp>
+        <p:nvSpPr>
+          <p:cNvPr id="42" name="Text 40"/>
+          <p:cNvSpPr/>
+          <p:nvPr/>
+        </p:nvSpPr>
+        <p:spPr>
+          <a:xfrm>
+            <a:off x="7274052" y="4169664"/>
+            <a:ext cx="685800" cy="475488"/>
+          </a:xfrm>
+          <a:prstGeom prst="rect">
+            <a:avLst/>
+          </a:prstGeom>
+          <a:noFill/>
+          <a:ln/>
+        </p:spPr>
+        <p:txBody>
+          <a:bodyPr wrap="square" lIns="0" tIns="0" rIns="0" bIns="0" rtlCol="0" anchor="ctr"/>
+          <a:lstStyle/>
+          <a:p>
+            <a:pPr algn="ctr" indent="0" marL="0">
+              <a:buNone/>
+            </a:pPr>
+            <a:r>
+              <a:rPr lang="en-US" sz="900" b="1" dirty="0">
+                <a:solidFill>
+                  <a:srgbClr val="9D174D"/>
+                </a:solidFill>
+                <a:latin typeface="Trebuchet MS" pitchFamily="34" charset="0"/>
+                <a:ea typeface="Trebuchet MS" pitchFamily="34" charset="-122"/>
+                <a:cs typeface="Trebuchet MS" pitchFamily="34" charset="-120"/>
+              </a:rPr>
+              <a:t>n</a:t>
             </a:r>
             <a:endParaRPr lang="en-US" sz="900" dirty="0"/>
           </a:p>
@@ -15871,7 +15937,7 @@
                 <a:ea typeface="Calibri" pitchFamily="34" charset="-122"/>
                 <a:cs typeface="Calibri" pitchFamily="34" charset="-120"/>
               </a:rPr>
-              <a:t>Word Labs  •  wordlabs.app  •  Root: 'join' = connect or bring together</a:t>
+              <a:t>Word Labs  •  wordlabs.app  •  Root: 'join' = to connect or bring together</a:t>
             </a:r>
             <a:endParaRPr lang="en-US" sz="800" dirty="0"/>
           </a:p>
@@ -16511,7 +16577,7 @@
                 <a:ea typeface="Calibri" pitchFamily="34" charset="-122"/>
                 <a:cs typeface="Calibri" pitchFamily="34" charset="-120"/>
               </a:rPr>
-              <a:t>Word Labs  •  wordlabs.app  •  Root: 'join' = connect or bring together</a:t>
+              <a:t>Word Labs  •  wordlabs.app  •  Root: 'join' = to connect or bring together</a:t>
             </a:r>
             <a:endParaRPr lang="en-US" sz="800" dirty="0"/>
           </a:p>
@@ -16654,7 +16720,7 @@
                 <a:ea typeface="Calibri" pitchFamily="34" charset="-122"/>
                 <a:cs typeface="Calibri" pitchFamily="34" charset="-120"/>
               </a:rPr>
-              <a:t> pieces of timber were carefully </a:t>
+              <a:t> teams worked together on the project; their </a:t>
             </a:r>
             <a:pPr algn="l" indent="0" marL="0">
               <a:buNone/>
@@ -16671,7 +16737,7 @@
                 <a:ea typeface="Calibri" pitchFamily="34" charset="-122"/>
                 <a:cs typeface="Calibri" pitchFamily="34" charset="-120"/>
               </a:rPr>
-              <a:t>disjoined</a:t>
+              <a:t>joiner</a:t>
             </a:r>
             <a:pPr algn="l" indent="0" marL="0">
               <a:buNone/>
@@ -16685,7 +16751,7 @@
                 <a:ea typeface="Calibri" pitchFamily="34" charset="-122"/>
                 <a:cs typeface="Calibri" pitchFamily="34" charset="-120"/>
               </a:rPr>
-              <a:t> by the </a:t>
+              <a:t> made sure every part was connected, but they had to </a:t>
             </a:r>
             <a:pPr algn="l" indent="0" marL="0">
               <a:buNone/>
@@ -16702,7 +16768,7 @@
                 <a:ea typeface="Calibri" pitchFamily="34" charset="-122"/>
                 <a:cs typeface="Calibri" pitchFamily="34" charset="-120"/>
               </a:rPr>
-              <a:t>joiner</a:t>
+              <a:t>disjoin</a:t>
             </a:r>
             <a:pPr algn="l" indent="0" marL="0">
               <a:buNone/>
@@ -16716,7 +16782,7 @@
                 <a:ea typeface="Calibri" pitchFamily="34" charset="-122"/>
                 <a:cs typeface="Calibri" pitchFamily="34" charset="-120"/>
               </a:rPr>
-              <a:t>, who then rebuilt the frame.</a:t>
+              <a:t> the last two sections.</a:t>
             </a:r>
             <a:endParaRPr lang="en-US" sz="1800" dirty="0"/>
           </a:p>
@@ -16999,7 +17065,7 @@
                 <a:ea typeface="Trebuchet MS" pitchFamily="34" charset="-122"/>
                 <a:cs typeface="Trebuchet MS" pitchFamily="34" charset="-120"/>
               </a:rPr>
-              <a:t>disjoined</a:t>
+              <a:t>joiner</a:t>
             </a:r>
             <a:endParaRPr lang="en-US" sz="1400" dirty="0"/>
           </a:p>
@@ -17127,7 +17193,7 @@
                 <a:ea typeface="Trebuchet MS" pitchFamily="34" charset="-122"/>
                 <a:cs typeface="Trebuchet MS" pitchFamily="34" charset="-120"/>
               </a:rPr>
-              <a:t>joiner</a:t>
+              <a:t>disjoin</a:t>
             </a:r>
             <a:endParaRPr lang="en-US" sz="1400" dirty="0"/>
           </a:p>
@@ -17458,7 +17524,7 @@
                 <a:ea typeface="Calibri" pitchFamily="34" charset="-122"/>
                 <a:cs typeface="Calibri" pitchFamily="34" charset="-120"/>
               </a:rPr>
-              <a:t>Word Labs  •  wordlabs.app  •  Root: 'join' = connect or bring together</a:t>
+              <a:t>Word Labs  •  wordlabs.app  •  Root: 'join' = to connect or bring together</a:t>
             </a:r>
             <a:endParaRPr lang="en-US" sz="800" dirty="0"/>
           </a:p>
@@ -18285,7 +18351,7 @@
                 <a:ea typeface="Calibri" pitchFamily="34" charset="-122"/>
                 <a:cs typeface="Calibri" pitchFamily="34" charset="-120"/>
               </a:rPr>
-              <a:t>Word Labs  •  wordlabs.app  •  Root: 'join' = connect or bring together</a:t>
+              <a:t>Word Labs  •  wordlabs.app  •  Root: 'join' = to connect or bring together</a:t>
             </a:r>
             <a:endParaRPr lang="en-US" sz="800" dirty="0"/>
           </a:p>
@@ -18602,7 +18668,7 @@
                 <a:ea typeface="Calibri" pitchFamily="34" charset="-122"/>
                 <a:cs typeface="Calibri" pitchFamily="34" charset="-120"/>
               </a:rPr>
-              <a:t>together or with</a:t>
+              <a:t>together</a:t>
             </a:r>
             <a:endParaRPr lang="en-US" sz="850" dirty="0"/>
           </a:p>
@@ -18714,7 +18780,7 @@
                 <a:ea typeface="Calibri" pitchFamily="34" charset="-122"/>
                 <a:cs typeface="Calibri" pitchFamily="34" charset="-120"/>
               </a:rPr>
-              <a:t>connect or bring together</a:t>
+              <a:t>to connect or bring together</a:t>
             </a:r>
             <a:endParaRPr lang="en-US" sz="850" dirty="0"/>
           </a:p>
@@ -18826,7 +18892,7 @@
                 <a:ea typeface="Calibri" pitchFamily="34" charset="-122"/>
                 <a:cs typeface="Calibri" pitchFamily="34" charset="-120"/>
               </a:rPr>
-              <a:t>already happened, past tense</a:t>
+              <a:t>already happened</a:t>
             </a:r>
             <a:endParaRPr lang="en-US" sz="850" dirty="0"/>
           </a:p>
@@ -19382,7 +19448,7 @@
                 <a:ea typeface="Calibri" pitchFamily="34" charset="-122"/>
                 <a:cs typeface="Calibri" pitchFamily="34" charset="-120"/>
               </a:rPr>
-              <a:t>Word Labs  •  wordlabs.app  •  Root: 'join' = connect or bring together</a:t>
+              <a:t>Word Labs  •  wordlabs.app  •  Root: 'join' = to connect or bring together</a:t>
             </a:r>
             <a:endParaRPr lang="en-US" sz="800" dirty="0"/>
           </a:p>
@@ -19699,7 +19765,7 @@
                 <a:ea typeface="Calibri" pitchFamily="34" charset="-122"/>
                 <a:cs typeface="Calibri" pitchFamily="34" charset="-120"/>
               </a:rPr>
-              <a:t>together or with</a:t>
+              <a:t>together</a:t>
             </a:r>
             <a:endParaRPr lang="en-US" sz="850" dirty="0"/>
           </a:p>
@@ -19811,7 +19877,7 @@
                 <a:ea typeface="Calibri" pitchFamily="34" charset="-122"/>
                 <a:cs typeface="Calibri" pitchFamily="34" charset="-120"/>
               </a:rPr>
-              <a:t>connect or bring together</a:t>
+              <a:t>to connect or bring together</a:t>
             </a:r>
             <a:endParaRPr lang="en-US" sz="850" dirty="0"/>
           </a:p>
@@ -19923,7 +19989,7 @@
                 <a:ea typeface="Calibri" pitchFamily="34" charset="-122"/>
                 <a:cs typeface="Calibri" pitchFamily="34" charset="-120"/>
               </a:rPr>
-              <a:t>already happened, past tense</a:t>
+              <a:t>already happened</a:t>
             </a:r>
             <a:endParaRPr lang="en-US" sz="850" dirty="0"/>
           </a:p>
@@ -20611,7 +20677,7 @@
                 <a:ea typeface="Calibri" pitchFamily="34" charset="-122"/>
                 <a:cs typeface="Calibri" pitchFamily="34" charset="-120"/>
               </a:rPr>
-              <a:t>Word Labs  •  wordlabs.app  •  Root: 'join' = connect or bring together</a:t>
+              <a:t>Word Labs  •  wordlabs.app  •  Root: 'join' = to connect or bring together</a:t>
             </a:r>
             <a:endParaRPr lang="en-US" sz="800" dirty="0"/>
           </a:p>
@@ -20928,7 +20994,7 @@
                 <a:ea typeface="Calibri" pitchFamily="34" charset="-122"/>
                 <a:cs typeface="Calibri" pitchFamily="34" charset="-120"/>
               </a:rPr>
-              <a:t>together or with</a:t>
+              <a:t>together</a:t>
             </a:r>
             <a:endParaRPr lang="en-US" sz="850" dirty="0"/>
           </a:p>
@@ -21040,7 +21106,7 @@
                 <a:ea typeface="Calibri" pitchFamily="34" charset="-122"/>
                 <a:cs typeface="Calibri" pitchFamily="34" charset="-120"/>
               </a:rPr>
-              <a:t>connect or bring together</a:t>
+              <a:t>to connect or bring together</a:t>
             </a:r>
             <a:endParaRPr lang="en-US" sz="850" dirty="0"/>
           </a:p>
@@ -21152,7 +21218,7 @@
                 <a:ea typeface="Calibri" pitchFamily="34" charset="-122"/>
                 <a:cs typeface="Calibri" pitchFamily="34" charset="-120"/>
               </a:rPr>
-              <a:t>already happened, past tense</a:t>
+              <a:t>already happened</a:t>
             </a:r>
             <a:endParaRPr lang="en-US" sz="850" dirty="0"/>
           </a:p>
@@ -22302,7 +22368,7 @@
                 <a:ea typeface="Calibri" pitchFamily="34" charset="-122"/>
                 <a:cs typeface="Calibri" pitchFamily="34" charset="-120"/>
               </a:rPr>
-              <a:t>Word Labs  •  wordlabs.app  •  Root: 'join' = connect or bring together</a:t>
+              <a:t>Word Labs  •  wordlabs.app  •  Root: 'join' = to connect or bring together</a:t>
             </a:r>
             <a:endParaRPr lang="en-US" sz="800" dirty="0"/>
           </a:p>
@@ -22441,7 +22507,7 @@
                 <a:ea typeface="Trebuchet MS" pitchFamily="34" charset="-122"/>
                 <a:cs typeface="Trebuchet MS" pitchFamily="34" charset="-120"/>
               </a:rPr>
-              <a:t>disjoined</a:t>
+              <a:t>joiner</a:t>
             </a:r>
             <a:endParaRPr lang="en-US" sz="2800" dirty="0"/>
           </a:p>
@@ -23129,7 +23195,7 @@
                 <a:ea typeface="Calibri" pitchFamily="34" charset="-122"/>
                 <a:cs typeface="Calibri" pitchFamily="34" charset="-120"/>
               </a:rPr>
-              <a:t>Word Labs  •  wordlabs.app  •  Root: 'join' = connect or bring together</a:t>
+              <a:t>Word Labs  •  wordlabs.app  •  Root: 'join' = to connect or bring together</a:t>
             </a:r>
             <a:endParaRPr lang="en-US" sz="800" dirty="0"/>
           </a:p>
@@ -23268,7 +23334,7 @@
                 <a:ea typeface="Trebuchet MS" pitchFamily="34" charset="-122"/>
                 <a:cs typeface="Trebuchet MS" pitchFamily="34" charset="-120"/>
               </a:rPr>
-              <a:t>disjoined</a:t>
+              <a:t>joiner</a:t>
             </a:r>
             <a:endParaRPr lang="en-US" sz="2800" dirty="0"/>
           </a:p>
@@ -23348,7 +23414,7 @@
         </p:nvSpPr>
         <p:spPr>
           <a:xfrm>
-            <a:off x="2221992" y="2258568"/>
+            <a:off x="2938272" y="2258568"/>
             <a:ext cx="1828800" cy="292608"/>
           </a:xfrm>
           <a:prstGeom prst="rect">
@@ -23357,11 +23423,11 @@
             </a:avLst>
           </a:prstGeom>
           <a:solidFill>
-            <a:srgbClr val="DDD6FE"/>
+            <a:srgbClr val="CCFBF1"/>
           </a:solidFill>
           <a:ln w="19050">
             <a:solidFill>
-              <a:srgbClr val="7C3AED"/>
+              <a:srgbClr val="0D9488"/>
             </a:solidFill>
             <a:prstDash val="solid"/>
           </a:ln>
@@ -23382,7 +23448,7 @@
         </p:nvSpPr>
         <p:spPr>
           <a:xfrm>
-            <a:off x="2221992" y="2258568"/>
+            <a:off x="2938272" y="2258568"/>
             <a:ext cx="1828800" cy="292608"/>
           </a:xfrm>
           <a:prstGeom prst="rect">
@@ -23401,13 +23467,13 @@
             <a:r>
               <a:rPr lang="en-US" sz="1300" b="1" dirty="0">
                 <a:solidFill>
-                  <a:srgbClr val="4C1D95"/>
+                  <a:srgbClr val="0F766E"/>
                 </a:solidFill>
                 <a:latin typeface="Trebuchet MS" pitchFamily="34" charset="0"/>
                 <a:ea typeface="Trebuchet MS" pitchFamily="34" charset="-122"/>
                 <a:cs typeface="Trebuchet MS" pitchFamily="34" charset="-120"/>
               </a:rPr>
-              <a:t>dis</a:t>
+              <a:t>join</a:t>
             </a:r>
             <a:endParaRPr lang="en-US" sz="1300" dirty="0"/>
           </a:p>
@@ -23421,7 +23487,7 @@
         </p:nvSpPr>
         <p:spPr>
           <a:xfrm>
-            <a:off x="2221992" y="2569464"/>
+            <a:off x="2938272" y="2569464"/>
             <a:ext cx="1828800" cy="201168"/>
           </a:xfrm>
           <a:prstGeom prst="rect">
@@ -23446,7 +23512,7 @@
                 <a:ea typeface="Calibri" pitchFamily="34" charset="-122"/>
                 <a:cs typeface="Calibri" pitchFamily="34" charset="-120"/>
               </a:rPr>
-              <a:t>apart or not</a:t>
+              <a:t>to connect or bring together</a:t>
             </a:r>
             <a:endParaRPr lang="en-US" sz="850" dirty="0"/>
           </a:p>
@@ -23460,7 +23526,7 @@
         </p:nvSpPr>
         <p:spPr>
           <a:xfrm>
-            <a:off x="4370832" y="2258568"/>
+            <a:off x="5803392" y="2258568"/>
             <a:ext cx="1828800" cy="292608"/>
           </a:xfrm>
           <a:prstGeom prst="rect">
@@ -23469,11 +23535,11 @@
             </a:avLst>
           </a:prstGeom>
           <a:solidFill>
-            <a:srgbClr val="CCFBF1"/>
+            <a:srgbClr val="FCE7F3"/>
           </a:solidFill>
           <a:ln w="19050">
             <a:solidFill>
-              <a:srgbClr val="0D9488"/>
+              <a:srgbClr val="DB2777"/>
             </a:solidFill>
             <a:prstDash val="solid"/>
           </a:ln>
@@ -23494,7 +23560,7 @@
         </p:nvSpPr>
         <p:spPr>
           <a:xfrm>
-            <a:off x="4370832" y="2258568"/>
+            <a:off x="5803392" y="2258568"/>
             <a:ext cx="1828800" cy="292608"/>
           </a:xfrm>
           <a:prstGeom prst="rect">
@@ -23513,13 +23579,13 @@
             <a:r>
               <a:rPr lang="en-US" sz="1300" b="1" dirty="0">
                 <a:solidFill>
-                  <a:srgbClr val="0F766E"/>
+                  <a:srgbClr val="9D174D"/>
                 </a:solidFill>
                 <a:latin typeface="Trebuchet MS" pitchFamily="34" charset="0"/>
                 <a:ea typeface="Trebuchet MS" pitchFamily="34" charset="-122"/>
                 <a:cs typeface="Trebuchet MS" pitchFamily="34" charset="-120"/>
               </a:rPr>
-              <a:t>join</a:t>
+              <a:t>er</a:t>
             </a:r>
             <a:endParaRPr lang="en-US" sz="1300" dirty="0"/>
           </a:p>
@@ -23533,7 +23599,7 @@
         </p:nvSpPr>
         <p:spPr>
           <a:xfrm>
-            <a:off x="4370832" y="2569464"/>
+            <a:off x="5803392" y="2569464"/>
             <a:ext cx="1828800" cy="201168"/>
           </a:xfrm>
           <a:prstGeom prst="rect">
@@ -23558,7 +23624,7 @@
                 <a:ea typeface="Calibri" pitchFamily="34" charset="-122"/>
                 <a:cs typeface="Calibri" pitchFamily="34" charset="-120"/>
               </a:rPr>
-              <a:t>connect or bring together</a:t>
+              <a:t>a person or thing that does something</a:t>
             </a:r>
             <a:endParaRPr lang="en-US" sz="850" dirty="0"/>
           </a:p>
@@ -23572,30 +23638,23 @@
         </p:nvSpPr>
         <p:spPr>
           <a:xfrm>
-            <a:off x="6519672" y="2258568"/>
-            <a:ext cx="1828800" cy="292608"/>
+            <a:off x="365760" y="3273552"/>
+            <a:ext cx="1371600" cy="658368"/>
           </a:xfrm>
           <a:prstGeom prst="rect">
             <a:avLst>
-              <a:gd name="adj" fmla="val 25000"/>
+              <a:gd name="adj" fmla="val 8333"/>
             </a:avLst>
           </a:prstGeom>
           <a:solidFill>
-            <a:srgbClr val="FCE7F3"/>
-          </a:solidFill>
-          <a:ln w="19050">
-            <a:solidFill>
-              <a:srgbClr val="DB2777"/>
-            </a:solidFill>
-            <a:prstDash val="solid"/>
-          </a:ln>
-          <a:effectLst>
-            <a:outerShdw sx="100000" sy="100000" kx="0" ky="0" algn="bl" rotWithShape="0" blurRad="101600" dist="38100" dir="8100000">
-              <a:srgbClr val="000000">
-                <a:alpha val="12000"/>
-              </a:srgbClr>
-            </a:outerShdw>
-          </a:effectLst>
+            <a:srgbClr val="E2E8F0"/>
+          </a:solidFill>
+          <a:ln w="12700">
+            <a:solidFill>
+              <a:srgbClr val="E2E8F0"/>
+            </a:solidFill>
+            <a:prstDash val="solid"/>
+          </a:ln>
         </p:spPr>
       </p:sp>
       <p:sp>
@@ -23606,8 +23665,8 @@
         </p:nvSpPr>
         <p:spPr>
           <a:xfrm>
-            <a:off x="6519672" y="2258568"/>
-            <a:ext cx="1828800" cy="292608"/>
+            <a:off x="365760" y="3273552"/>
+            <a:ext cx="1371600" cy="658368"/>
           </a:xfrm>
           <a:prstGeom prst="rect">
             <a:avLst/>
@@ -23623,73 +23682,100 @@
               <a:buNone/>
             </a:pPr>
             <a:r>
-              <a:rPr lang="en-US" sz="1300" b="1" dirty="0">
-                <a:solidFill>
-                  <a:srgbClr val="9D174D"/>
+              <a:rPr lang="en-US" sz="1100" b="1" dirty="0">
+                <a:solidFill>
+                  <a:srgbClr val="475569"/>
                 </a:solidFill>
                 <a:latin typeface="Trebuchet MS" pitchFamily="34" charset="0"/>
                 <a:ea typeface="Trebuchet MS" pitchFamily="34" charset="-122"/>
                 <a:cs typeface="Trebuchet MS" pitchFamily="34" charset="-120"/>
               </a:rPr>
-              <a:t>ed</a:t>
-            </a:r>
-            <a:endParaRPr lang="en-US" sz="1300" dirty="0"/>
-          </a:p>
-        </p:txBody>
-      </p:sp>
-      <p:sp>
-        <p:nvSpPr>
-          <p:cNvPr id="24" name="Text 22"/>
-          <p:cNvSpPr/>
-          <p:nvPr/>
-        </p:nvSpPr>
-        <p:spPr>
-          <a:xfrm>
-            <a:off x="6519672" y="2569464"/>
-            <a:ext cx="1828800" cy="201168"/>
-          </a:xfrm>
-          <a:prstGeom prst="rect">
-            <a:avLst/>
-          </a:prstGeom>
-          <a:noFill/>
-          <a:ln/>
-        </p:spPr>
-        <p:txBody>
-          <a:bodyPr wrap="square" lIns="0" tIns="0" rIns="0" bIns="0" rtlCol="0" anchor="t"/>
-          <a:lstStyle/>
-          <a:p>
-            <a:pPr algn="ctr" indent="0" marL="0">
-              <a:buNone/>
-            </a:pPr>
-            <a:r>
-              <a:rPr lang="en-US" sz="850" dirty="0">
-                <a:solidFill>
-                  <a:srgbClr val="475569"/>
+              <a:t>Syllables</a:t>
+            </a:r>
+            <a:endParaRPr lang="en-US" sz="1100" dirty="0"/>
+          </a:p>
+        </p:txBody>
+      </p:sp>
+      <p:sp>
+        <p:nvSpPr>
+          <p:cNvPr id="24" name="Shape 22"/>
+          <p:cNvSpPr/>
+          <p:nvPr/>
+        </p:nvSpPr>
+        <p:spPr>
+          <a:xfrm>
+            <a:off x="1874520" y="3273552"/>
+            <a:ext cx="6903720" cy="658368"/>
+          </a:xfrm>
+          <a:prstGeom prst="rect">
+            <a:avLst>
+              <a:gd name="adj" fmla="val 8333"/>
+            </a:avLst>
+          </a:prstGeom>
+          <a:solidFill>
+            <a:srgbClr val="F8FAFC"/>
+          </a:solidFill>
+          <a:ln w="12700">
+            <a:solidFill>
+              <a:srgbClr val="E2E8F0"/>
+            </a:solidFill>
+            <a:prstDash val="dash"/>
+          </a:ln>
+        </p:spPr>
+      </p:sp>
+      <p:sp>
+        <p:nvSpPr>
+          <p:cNvPr id="25" name="Text 23"/>
+          <p:cNvSpPr/>
+          <p:nvPr/>
+        </p:nvSpPr>
+        <p:spPr>
+          <a:xfrm>
+            <a:off x="1874520" y="3273552"/>
+            <a:ext cx="6903720" cy="658368"/>
+          </a:xfrm>
+          <a:prstGeom prst="rect">
+            <a:avLst/>
+          </a:prstGeom>
+          <a:noFill/>
+          <a:ln/>
+        </p:spPr>
+        <p:txBody>
+          <a:bodyPr wrap="square" rtlCol="0" anchor="ctr"/>
+          <a:lstStyle/>
+          <a:p>
+            <a:pPr algn="ctr" indent="0" marL="0">
+              <a:buNone/>
+            </a:pPr>
+            <a:r>
+              <a:rPr lang="en-US" sz="1100" i="1" dirty="0">
+                <a:solidFill>
+                  <a:srgbClr val="CBD5E1"/>
                 </a:solidFill>
                 <a:latin typeface="Calibri" pitchFamily="34" charset="0"/>
                 <a:ea typeface="Calibri" pitchFamily="34" charset="-122"/>
                 <a:cs typeface="Calibri" pitchFamily="34" charset="-120"/>
               </a:rPr>
-              <a:t>already happened, past tense</a:t>
-            </a:r>
-            <a:endParaRPr lang="en-US" sz="850" dirty="0"/>
-          </a:p>
-        </p:txBody>
-      </p:sp>
-      <p:sp>
-        <p:nvSpPr>
-          <p:cNvPr id="25" name="Shape 23"/>
-          <p:cNvSpPr/>
-          <p:nvPr/>
-        </p:nvSpPr>
-        <p:spPr>
-          <a:xfrm>
-            <a:off x="365760" y="3273552"/>
-            <a:ext cx="1371600" cy="658368"/>
+              <a:t>Write here...</a:t>
+            </a:r>
+            <a:endParaRPr lang="en-US" sz="1100" dirty="0"/>
+          </a:p>
+        </p:txBody>
+      </p:sp>
+      <p:sp>
+        <p:nvSpPr>
+          <p:cNvPr id="26" name="Shape 24"/>
+          <p:cNvSpPr/>
+          <p:nvPr/>
+        </p:nvSpPr>
+        <p:spPr>
+          <a:xfrm>
+            <a:off x="365760" y="4096512"/>
+            <a:ext cx="1371600" cy="804672"/>
           </a:xfrm>
           <a:prstGeom prst="rect">
             <a:avLst>
-              <a:gd name="adj" fmla="val 8333"/>
+              <a:gd name="adj" fmla="val 6818"/>
             </a:avLst>
           </a:prstGeom>
           <a:solidFill>
@@ -23705,14 +23791,14 @@
       </p:sp>
       <p:sp>
         <p:nvSpPr>
-          <p:cNvPr id="26" name="Text 24"/>
-          <p:cNvSpPr/>
-          <p:nvPr/>
-        </p:nvSpPr>
-        <p:spPr>
-          <a:xfrm>
-            <a:off x="365760" y="3273552"/>
-            <a:ext cx="1371600" cy="658368"/>
+          <p:cNvPr id="27" name="Text 25"/>
+          <p:cNvSpPr/>
+          <p:nvPr/>
+        </p:nvSpPr>
+        <p:spPr>
+          <a:xfrm>
+            <a:off x="365760" y="4096512"/>
+            <a:ext cx="1371600" cy="804672"/>
           </a:xfrm>
           <a:prstGeom prst="rect">
             <a:avLst/>
@@ -23736,7 +23822,7 @@
                 <a:ea typeface="Trebuchet MS" pitchFamily="34" charset="-122"/>
                 <a:cs typeface="Trebuchet MS" pitchFamily="34" charset="-120"/>
               </a:rPr>
-              <a:t>Syllables</a:t>
+              <a:t>Phonemes</a:t>
             </a:r>
             <a:endParaRPr lang="en-US" sz="1100" dirty="0"/>
           </a:p>
@@ -23744,80 +23830,14 @@
       </p:sp>
       <p:sp>
         <p:nvSpPr>
-          <p:cNvPr id="27" name="Shape 25"/>
-          <p:cNvSpPr/>
-          <p:nvPr/>
-        </p:nvSpPr>
-        <p:spPr>
-          <a:xfrm>
-            <a:off x="1874520" y="3273552"/>
-            <a:ext cx="6903720" cy="658368"/>
-          </a:xfrm>
-          <a:prstGeom prst="rect">
-            <a:avLst>
-              <a:gd name="adj" fmla="val 8333"/>
-            </a:avLst>
-          </a:prstGeom>
-          <a:solidFill>
-            <a:srgbClr val="F8FAFC"/>
-          </a:solidFill>
-          <a:ln w="12700">
-            <a:solidFill>
-              <a:srgbClr val="E2E8F0"/>
-            </a:solidFill>
-            <a:prstDash val="dash"/>
-          </a:ln>
-        </p:spPr>
-      </p:sp>
-      <p:sp>
-        <p:nvSpPr>
-          <p:cNvPr id="28" name="Text 26"/>
-          <p:cNvSpPr/>
-          <p:nvPr/>
-        </p:nvSpPr>
-        <p:spPr>
-          <a:xfrm>
-            <a:off x="1874520" y="3273552"/>
-            <a:ext cx="6903720" cy="658368"/>
-          </a:xfrm>
-          <a:prstGeom prst="rect">
-            <a:avLst/>
-          </a:prstGeom>
-          <a:noFill/>
-          <a:ln/>
-        </p:spPr>
-        <p:txBody>
-          <a:bodyPr wrap="square" rtlCol="0" anchor="ctr"/>
-          <a:lstStyle/>
-          <a:p>
-            <a:pPr algn="ctr" indent="0" marL="0">
-              <a:buNone/>
-            </a:pPr>
-            <a:r>
-              <a:rPr lang="en-US" sz="1100" i="1" dirty="0">
-                <a:solidFill>
-                  <a:srgbClr val="CBD5E1"/>
-                </a:solidFill>
-                <a:latin typeface="Calibri" pitchFamily="34" charset="0"/>
-                <a:ea typeface="Calibri" pitchFamily="34" charset="-122"/>
-                <a:cs typeface="Calibri" pitchFamily="34" charset="-120"/>
-              </a:rPr>
-              <a:t>Write here...</a:t>
-            </a:r>
-            <a:endParaRPr lang="en-US" sz="1100" dirty="0"/>
-          </a:p>
-        </p:txBody>
-      </p:sp>
-      <p:sp>
-        <p:nvSpPr>
-          <p:cNvPr id="29" name="Shape 27"/>
-          <p:cNvSpPr/>
-          <p:nvPr/>
-        </p:nvSpPr>
-        <p:spPr>
-          <a:xfrm>
-            <a:off x="365760" y="4096512"/>
-            <a:ext cx="1371600" cy="804672"/>
+          <p:cNvPr id="28" name="Shape 26"/>
+          <p:cNvSpPr/>
+          <p:nvPr/>
+        </p:nvSpPr>
+        <p:spPr>
+          <a:xfrm>
+            <a:off x="1874520" y="4096512"/>
+            <a:ext cx="6903720" cy="804672"/>
           </a:xfrm>
           <a:prstGeom prst="rect">
             <a:avLst>
@@ -23825,85 +23845,19 @@
             </a:avLst>
           </a:prstGeom>
           <a:solidFill>
-            <a:srgbClr val="E2E8F0"/>
+            <a:srgbClr val="F8FAFC"/>
           </a:solidFill>
           <a:ln w="12700">
             <a:solidFill>
               <a:srgbClr val="E2E8F0"/>
             </a:solidFill>
-            <a:prstDash val="solid"/>
-          </a:ln>
-        </p:spPr>
-      </p:sp>
-      <p:sp>
-        <p:nvSpPr>
-          <p:cNvPr id="30" name="Text 28"/>
-          <p:cNvSpPr/>
-          <p:nvPr/>
-        </p:nvSpPr>
-        <p:spPr>
-          <a:xfrm>
-            <a:off x="365760" y="4096512"/>
-            <a:ext cx="1371600" cy="804672"/>
-          </a:xfrm>
-          <a:prstGeom prst="rect">
-            <a:avLst/>
-          </a:prstGeom>
-          <a:noFill/>
-          <a:ln/>
-        </p:spPr>
-        <p:txBody>
-          <a:bodyPr wrap="square" lIns="0" tIns="0" rIns="0" bIns="0" rtlCol="0" anchor="ctr"/>
-          <a:lstStyle/>
-          <a:p>
-            <a:pPr algn="ctr" indent="0" marL="0">
-              <a:buNone/>
-            </a:pPr>
-            <a:r>
-              <a:rPr lang="en-US" sz="1100" b="1" dirty="0">
-                <a:solidFill>
-                  <a:srgbClr val="475569"/>
-                </a:solidFill>
-                <a:latin typeface="Trebuchet MS" pitchFamily="34" charset="0"/>
-                <a:ea typeface="Trebuchet MS" pitchFamily="34" charset="-122"/>
-                <a:cs typeface="Trebuchet MS" pitchFamily="34" charset="-120"/>
-              </a:rPr>
-              <a:t>Phonemes</a:t>
-            </a:r>
-            <a:endParaRPr lang="en-US" sz="1100" dirty="0"/>
-          </a:p>
-        </p:txBody>
-      </p:sp>
-      <p:sp>
-        <p:nvSpPr>
-          <p:cNvPr id="31" name="Shape 29"/>
-          <p:cNvSpPr/>
-          <p:nvPr/>
-        </p:nvSpPr>
-        <p:spPr>
-          <a:xfrm>
-            <a:off x="1874520" y="4096512"/>
-            <a:ext cx="6903720" cy="804672"/>
-          </a:xfrm>
-          <a:prstGeom prst="rect">
-            <a:avLst>
-              <a:gd name="adj" fmla="val 6818"/>
-            </a:avLst>
-          </a:prstGeom>
-          <a:solidFill>
-            <a:srgbClr val="F8FAFC"/>
-          </a:solidFill>
-          <a:ln w="12700">
-            <a:solidFill>
-              <a:srgbClr val="E2E8F0"/>
-            </a:solidFill>
             <a:prstDash val="dash"/>
           </a:ln>
         </p:spPr>
       </p:sp>
       <p:sp>
         <p:nvSpPr>
-          <p:cNvPr id="32" name="Text 30"/>
+          <p:cNvPr id="29" name="Text 27"/>
           <p:cNvSpPr/>
           <p:nvPr/>
         </p:nvSpPr>
@@ -24226,7 +24180,7 @@
                 <a:ea typeface="Calibri" pitchFamily="34" charset="-122"/>
                 <a:cs typeface="Calibri" pitchFamily="34" charset="-120"/>
               </a:rPr>
-              <a:t>Word Labs  •  wordlabs.app  •  Root: 'join' = connect or bring together</a:t>
+              <a:t>Word Labs  •  wordlabs.app  •  Root: 'join' = to connect or bring together</a:t>
             </a:r>
             <a:endParaRPr lang="en-US" sz="800" dirty="0"/>
           </a:p>
@@ -24299,7 +24253,7 @@
                 <a:ea typeface="Trebuchet MS" pitchFamily="34" charset="-122"/>
                 <a:cs typeface="Trebuchet MS" pitchFamily="34" charset="-120"/>
               </a:rPr>
-              <a:t>We are learning that the root 'join' means 'connect or bring together'.</a:t>
+              <a:t>We are learning that the root 'join' means 'to connect or bring together'.</a:t>
             </a:r>
             <a:endParaRPr lang="en-US" sz="2000" dirty="0"/>
           </a:p>
@@ -24945,7 +24899,7 @@
                 <a:ea typeface="Calibri" pitchFamily="34" charset="-122"/>
                 <a:cs typeface="Calibri" pitchFamily="34" charset="-120"/>
               </a:rPr>
-              <a:t>Word Labs  •  wordlabs.app  •  Root: 'join' = connect or bring together</a:t>
+              <a:t>Word Labs  •  wordlabs.app  •  Root: 'join' = to connect or bring together</a:t>
             </a:r>
             <a:endParaRPr lang="en-US" sz="800" dirty="0"/>
           </a:p>
@@ -25084,7 +25038,7 @@
                 <a:ea typeface="Trebuchet MS" pitchFamily="34" charset="-122"/>
                 <a:cs typeface="Trebuchet MS" pitchFamily="34" charset="-120"/>
               </a:rPr>
-              <a:t>disjoined</a:t>
+              <a:t>joiner</a:t>
             </a:r>
             <a:endParaRPr lang="en-US" sz="2800" dirty="0"/>
           </a:p>
@@ -25164,7 +25118,7 @@
         </p:nvSpPr>
         <p:spPr>
           <a:xfrm>
-            <a:off x="2221992" y="2258568"/>
+            <a:off x="2938272" y="2258568"/>
             <a:ext cx="1828800" cy="292608"/>
           </a:xfrm>
           <a:prstGeom prst="rect">
@@ -25173,11 +25127,11 @@
             </a:avLst>
           </a:prstGeom>
           <a:solidFill>
-            <a:srgbClr val="DDD6FE"/>
+            <a:srgbClr val="CCFBF1"/>
           </a:solidFill>
           <a:ln w="19050">
             <a:solidFill>
-              <a:srgbClr val="7C3AED"/>
+              <a:srgbClr val="0D9488"/>
             </a:solidFill>
             <a:prstDash val="solid"/>
           </a:ln>
@@ -25198,7 +25152,7 @@
         </p:nvSpPr>
         <p:spPr>
           <a:xfrm>
-            <a:off x="2221992" y="2258568"/>
+            <a:off x="2938272" y="2258568"/>
             <a:ext cx="1828800" cy="292608"/>
           </a:xfrm>
           <a:prstGeom prst="rect">
@@ -25217,13 +25171,13 @@
             <a:r>
               <a:rPr lang="en-US" sz="1300" b="1" dirty="0">
                 <a:solidFill>
-                  <a:srgbClr val="4C1D95"/>
+                  <a:srgbClr val="0F766E"/>
                 </a:solidFill>
                 <a:latin typeface="Trebuchet MS" pitchFamily="34" charset="0"/>
                 <a:ea typeface="Trebuchet MS" pitchFamily="34" charset="-122"/>
                 <a:cs typeface="Trebuchet MS" pitchFamily="34" charset="-120"/>
               </a:rPr>
-              <a:t>dis</a:t>
+              <a:t>join</a:t>
             </a:r>
             <a:endParaRPr lang="en-US" sz="1300" dirty="0"/>
           </a:p>
@@ -25237,7 +25191,7 @@
         </p:nvSpPr>
         <p:spPr>
           <a:xfrm>
-            <a:off x="2221992" y="2569464"/>
+            <a:off x="2938272" y="2569464"/>
             <a:ext cx="1828800" cy="201168"/>
           </a:xfrm>
           <a:prstGeom prst="rect">
@@ -25262,7 +25216,7 @@
                 <a:ea typeface="Calibri" pitchFamily="34" charset="-122"/>
                 <a:cs typeface="Calibri" pitchFamily="34" charset="-120"/>
               </a:rPr>
-              <a:t>apart or not</a:t>
+              <a:t>to connect or bring together</a:t>
             </a:r>
             <a:endParaRPr lang="en-US" sz="850" dirty="0"/>
           </a:p>
@@ -25276,7 +25230,7 @@
         </p:nvSpPr>
         <p:spPr>
           <a:xfrm>
-            <a:off x="4370832" y="2258568"/>
+            <a:off x="5803392" y="2258568"/>
             <a:ext cx="1828800" cy="292608"/>
           </a:xfrm>
           <a:prstGeom prst="rect">
@@ -25285,11 +25239,11 @@
             </a:avLst>
           </a:prstGeom>
           <a:solidFill>
-            <a:srgbClr val="CCFBF1"/>
+            <a:srgbClr val="FCE7F3"/>
           </a:solidFill>
           <a:ln w="19050">
             <a:solidFill>
-              <a:srgbClr val="0D9488"/>
+              <a:srgbClr val="DB2777"/>
             </a:solidFill>
             <a:prstDash val="solid"/>
           </a:ln>
@@ -25310,7 +25264,7 @@
         </p:nvSpPr>
         <p:spPr>
           <a:xfrm>
-            <a:off x="4370832" y="2258568"/>
+            <a:off x="5803392" y="2258568"/>
             <a:ext cx="1828800" cy="292608"/>
           </a:xfrm>
           <a:prstGeom prst="rect">
@@ -25329,13 +25283,13 @@
             <a:r>
               <a:rPr lang="en-US" sz="1300" b="1" dirty="0">
                 <a:solidFill>
-                  <a:srgbClr val="0F766E"/>
+                  <a:srgbClr val="9D174D"/>
                 </a:solidFill>
                 <a:latin typeface="Trebuchet MS" pitchFamily="34" charset="0"/>
                 <a:ea typeface="Trebuchet MS" pitchFamily="34" charset="-122"/>
                 <a:cs typeface="Trebuchet MS" pitchFamily="34" charset="-120"/>
               </a:rPr>
-              <a:t>join</a:t>
+              <a:t>er</a:t>
             </a:r>
             <a:endParaRPr lang="en-US" sz="1300" dirty="0"/>
           </a:p>
@@ -25349,7 +25303,7 @@
         </p:nvSpPr>
         <p:spPr>
           <a:xfrm>
-            <a:off x="4370832" y="2569464"/>
+            <a:off x="5803392" y="2569464"/>
             <a:ext cx="1828800" cy="201168"/>
           </a:xfrm>
           <a:prstGeom prst="rect">
@@ -25374,7 +25328,7 @@
                 <a:ea typeface="Calibri" pitchFamily="34" charset="-122"/>
                 <a:cs typeface="Calibri" pitchFamily="34" charset="-120"/>
               </a:rPr>
-              <a:t>connect or bring together</a:t>
+              <a:t>a person or thing that does something</a:t>
             </a:r>
             <a:endParaRPr lang="en-US" sz="850" dirty="0"/>
           </a:p>
@@ -25388,30 +25342,23 @@
         </p:nvSpPr>
         <p:spPr>
           <a:xfrm>
-            <a:off x="6519672" y="2258568"/>
-            <a:ext cx="1828800" cy="292608"/>
+            <a:off x="365760" y="3273552"/>
+            <a:ext cx="1371600" cy="658368"/>
           </a:xfrm>
           <a:prstGeom prst="rect">
             <a:avLst>
-              <a:gd name="adj" fmla="val 25000"/>
+              <a:gd name="adj" fmla="val 8333"/>
             </a:avLst>
           </a:prstGeom>
           <a:solidFill>
-            <a:srgbClr val="FCE7F3"/>
-          </a:solidFill>
-          <a:ln w="19050">
-            <a:solidFill>
-              <a:srgbClr val="DB2777"/>
-            </a:solidFill>
-            <a:prstDash val="solid"/>
-          </a:ln>
-          <a:effectLst>
-            <a:outerShdw sx="100000" sy="100000" kx="0" ky="0" algn="bl" rotWithShape="0" blurRad="101600" dist="38100" dir="8100000">
-              <a:srgbClr val="000000">
-                <a:alpha val="12000"/>
-              </a:srgbClr>
-            </a:outerShdw>
-          </a:effectLst>
+            <a:srgbClr val="E2E8F0"/>
+          </a:solidFill>
+          <a:ln w="12700">
+            <a:solidFill>
+              <a:srgbClr val="E2E8F0"/>
+            </a:solidFill>
+            <a:prstDash val="solid"/>
+          </a:ln>
         </p:spPr>
       </p:sp>
       <p:sp>
@@ -25422,8 +25369,8 @@
         </p:nvSpPr>
         <p:spPr>
           <a:xfrm>
-            <a:off x="6519672" y="2258568"/>
-            <a:ext cx="1828800" cy="292608"/>
+            <a:off x="365760" y="3273552"/>
+            <a:ext cx="1371600" cy="658368"/>
           </a:xfrm>
           <a:prstGeom prst="rect">
             <a:avLst/>
@@ -25439,69 +25386,30 @@
               <a:buNone/>
             </a:pPr>
             <a:r>
-              <a:rPr lang="en-US" sz="1300" b="1" dirty="0">
-                <a:solidFill>
-                  <a:srgbClr val="9D174D"/>
+              <a:rPr lang="en-US" sz="1100" b="1" dirty="0">
+                <a:solidFill>
+                  <a:srgbClr val="475569"/>
                 </a:solidFill>
                 <a:latin typeface="Trebuchet MS" pitchFamily="34" charset="0"/>
                 <a:ea typeface="Trebuchet MS" pitchFamily="34" charset="-122"/>
                 <a:cs typeface="Trebuchet MS" pitchFamily="34" charset="-120"/>
               </a:rPr>
-              <a:t>ed</a:t>
-            </a:r>
-            <a:endParaRPr lang="en-US" sz="1300" dirty="0"/>
-          </a:p>
-        </p:txBody>
-      </p:sp>
-      <p:sp>
-        <p:nvSpPr>
-          <p:cNvPr id="24" name="Text 22"/>
-          <p:cNvSpPr/>
-          <p:nvPr/>
-        </p:nvSpPr>
-        <p:spPr>
-          <a:xfrm>
-            <a:off x="6519672" y="2569464"/>
-            <a:ext cx="1828800" cy="201168"/>
-          </a:xfrm>
-          <a:prstGeom prst="rect">
-            <a:avLst/>
-          </a:prstGeom>
-          <a:noFill/>
-          <a:ln/>
-        </p:spPr>
-        <p:txBody>
-          <a:bodyPr wrap="square" lIns="0" tIns="0" rIns="0" bIns="0" rtlCol="0" anchor="t"/>
-          <a:lstStyle/>
-          <a:p>
-            <a:pPr algn="ctr" indent="0" marL="0">
-              <a:buNone/>
-            </a:pPr>
-            <a:r>
-              <a:rPr lang="en-US" sz="850" dirty="0">
-                <a:solidFill>
-                  <a:srgbClr val="475569"/>
-                </a:solidFill>
-                <a:latin typeface="Calibri" pitchFamily="34" charset="0"/>
-                <a:ea typeface="Calibri" pitchFamily="34" charset="-122"/>
-                <a:cs typeface="Calibri" pitchFamily="34" charset="-120"/>
-              </a:rPr>
-              <a:t>already happened, past tense</a:t>
-            </a:r>
-            <a:endParaRPr lang="en-US" sz="850" dirty="0"/>
-          </a:p>
-        </p:txBody>
-      </p:sp>
-      <p:sp>
-        <p:nvSpPr>
-          <p:cNvPr id="25" name="Shape 23"/>
-          <p:cNvSpPr/>
-          <p:nvPr/>
-        </p:nvSpPr>
-        <p:spPr>
-          <a:xfrm>
-            <a:off x="365760" y="3273552"/>
-            <a:ext cx="1371600" cy="658368"/>
+              <a:t>Syllables</a:t>
+            </a:r>
+            <a:endParaRPr lang="en-US" sz="1100" dirty="0"/>
+          </a:p>
+        </p:txBody>
+      </p:sp>
+      <p:sp>
+        <p:nvSpPr>
+          <p:cNvPr id="24" name="Shape 22"/>
+          <p:cNvSpPr/>
+          <p:nvPr/>
+        </p:nvSpPr>
+        <p:spPr>
+          <a:xfrm>
+            <a:off x="1874520" y="3273552"/>
+            <a:ext cx="6903720" cy="658368"/>
           </a:xfrm>
           <a:prstGeom prst="rect">
             <a:avLst>
@@ -25509,11 +25417,38 @@
             </a:avLst>
           </a:prstGeom>
           <a:solidFill>
-            <a:srgbClr val="E2E8F0"/>
-          </a:solidFill>
-          <a:ln w="12700">
-            <a:solidFill>
-              <a:srgbClr val="E2E8F0"/>
+            <a:srgbClr val="CCFBF1"/>
+          </a:solidFill>
+          <a:ln w="12700">
+            <a:solidFill>
+              <a:srgbClr val="0D9488"/>
+            </a:solidFill>
+            <a:prstDash val="solid"/>
+          </a:ln>
+        </p:spPr>
+      </p:sp>
+      <p:sp>
+        <p:nvSpPr>
+          <p:cNvPr id="25" name="Shape 23"/>
+          <p:cNvSpPr/>
+          <p:nvPr/>
+        </p:nvSpPr>
+        <p:spPr>
+          <a:xfrm>
+            <a:off x="2999232" y="3364992"/>
+            <a:ext cx="1645920" cy="475488"/>
+          </a:xfrm>
+          <a:prstGeom prst="rect">
+            <a:avLst>
+              <a:gd name="adj" fmla="val 9615"/>
+            </a:avLst>
+          </a:prstGeom>
+          <a:solidFill>
+            <a:srgbClr val="FFFFFF"/>
+          </a:solidFill>
+          <a:ln w="12700">
+            <a:solidFill>
+              <a:srgbClr val="0D9488"/>
             </a:solidFill>
             <a:prstDash val="solid"/>
           </a:ln>
@@ -25527,8 +25462,8 @@
         </p:nvSpPr>
         <p:spPr>
           <a:xfrm>
-            <a:off x="365760" y="3273552"/>
-            <a:ext cx="1371600" cy="658368"/>
+            <a:off x="2999232" y="3364992"/>
+            <a:ext cx="1645920" cy="475488"/>
           </a:xfrm>
           <a:prstGeom prst="rect">
             <a:avLst/>
@@ -25544,46 +25479,58 @@
               <a:buNone/>
             </a:pPr>
             <a:r>
-              <a:rPr lang="en-US" sz="1100" b="1" dirty="0">
-                <a:solidFill>
-                  <a:srgbClr val="475569"/>
+              <a:rPr lang="en-US" sz="1400" b="1" dirty="0">
+                <a:solidFill>
+                  <a:srgbClr val="0D9488"/>
                 </a:solidFill>
                 <a:latin typeface="Trebuchet MS" pitchFamily="34" charset="0"/>
                 <a:ea typeface="Trebuchet MS" pitchFamily="34" charset="-122"/>
                 <a:cs typeface="Trebuchet MS" pitchFamily="34" charset="-120"/>
               </a:rPr>
-              <a:t>Syllables</a:t>
-            </a:r>
-            <a:endParaRPr lang="en-US" sz="1100" dirty="0"/>
-          </a:p>
-        </p:txBody>
-      </p:sp>
-      <p:sp>
-        <p:nvSpPr>
-          <p:cNvPr id="27" name="Shape 25"/>
-          <p:cNvSpPr/>
-          <p:nvPr/>
-        </p:nvSpPr>
-        <p:spPr>
-          <a:xfrm>
-            <a:off x="1874520" y="3273552"/>
-            <a:ext cx="6903720" cy="658368"/>
-          </a:xfrm>
-          <a:prstGeom prst="rect">
-            <a:avLst>
-              <a:gd name="adj" fmla="val 8333"/>
-            </a:avLst>
-          </a:prstGeom>
-          <a:solidFill>
-            <a:srgbClr val="CCFBF1"/>
-          </a:solidFill>
-          <a:ln w="12700">
-            <a:solidFill>
-              <a:srgbClr val="0D9488"/>
-            </a:solidFill>
-            <a:prstDash val="solid"/>
-          </a:ln>
-        </p:spPr>
+              <a:t>join</a:t>
+            </a:r>
+            <a:endParaRPr lang="en-US" sz="1400" dirty="0"/>
+          </a:p>
+        </p:txBody>
+      </p:sp>
+      <p:sp>
+        <p:nvSpPr>
+          <p:cNvPr id="27" name="Text 25"/>
+          <p:cNvSpPr/>
+          <p:nvPr/>
+        </p:nvSpPr>
+        <p:spPr>
+          <a:xfrm>
+            <a:off x="4645152" y="3364992"/>
+            <a:ext cx="1097280" cy="475488"/>
+          </a:xfrm>
+          <a:prstGeom prst="rect">
+            <a:avLst/>
+          </a:prstGeom>
+          <a:noFill/>
+          <a:ln/>
+        </p:spPr>
+        <p:txBody>
+          <a:bodyPr wrap="square" lIns="0" tIns="0" rIns="0" bIns="0" rtlCol="0" anchor="ctr"/>
+          <a:lstStyle/>
+          <a:p>
+            <a:pPr algn="ctr" indent="0" marL="0">
+              <a:buNone/>
+            </a:pPr>
+            <a:r>
+              <a:rPr lang="en-US" sz="1600" b="1" dirty="0">
+                <a:solidFill>
+                  <a:srgbClr val="0D9488"/>
+                </a:solidFill>
+                <a:latin typeface="Trebuchet MS" pitchFamily="34" charset="0"/>
+                <a:ea typeface="Trebuchet MS" pitchFamily="34" charset="-122"/>
+                <a:cs typeface="Trebuchet MS" pitchFamily="34" charset="-120"/>
+              </a:rPr>
+              <a:t>·</a:t>
+            </a:r>
+            <a:endParaRPr lang="en-US" sz="1600" dirty="0"/>
+          </a:p>
+        </p:txBody>
       </p:sp>
       <p:sp>
         <p:nvSpPr>
@@ -25593,7 +25540,7 @@
         </p:nvSpPr>
         <p:spPr>
           <a:xfrm>
-            <a:off x="2999232" y="3364992"/>
+            <a:off x="5742432" y="3364992"/>
             <a:ext cx="1645920" cy="475488"/>
           </a:xfrm>
           <a:prstGeom prst="rect">
@@ -25620,7 +25567,7 @@
         </p:nvSpPr>
         <p:spPr>
           <a:xfrm>
-            <a:off x="2999232" y="3364992"/>
+            <a:off x="5742432" y="3364992"/>
             <a:ext cx="1645920" cy="475488"/>
           </a:xfrm>
           <a:prstGeom prst="rect">
@@ -25645,7 +25592,7 @@
                 <a:ea typeface="Trebuchet MS" pitchFamily="34" charset="-122"/>
                 <a:cs typeface="Trebuchet MS" pitchFamily="34" charset="-120"/>
               </a:rPr>
-              <a:t>dis</a:t>
+              <a:t>er</a:t>
             </a:r>
             <a:endParaRPr lang="en-US" sz="1400" dirty="0"/>
           </a:p>
@@ -25653,14 +25600,41 @@
       </p:sp>
       <p:sp>
         <p:nvSpPr>
-          <p:cNvPr id="30" name="Text 28"/>
-          <p:cNvSpPr/>
-          <p:nvPr/>
-        </p:nvSpPr>
-        <p:spPr>
-          <a:xfrm>
-            <a:off x="4645152" y="3364992"/>
-            <a:ext cx="1097280" cy="475488"/>
+          <p:cNvPr id="30" name="Shape 28"/>
+          <p:cNvSpPr/>
+          <p:nvPr/>
+        </p:nvSpPr>
+        <p:spPr>
+          <a:xfrm>
+            <a:off x="365760" y="4096512"/>
+            <a:ext cx="1371600" cy="804672"/>
+          </a:xfrm>
+          <a:prstGeom prst="rect">
+            <a:avLst>
+              <a:gd name="adj" fmla="val 6818"/>
+            </a:avLst>
+          </a:prstGeom>
+          <a:solidFill>
+            <a:srgbClr val="E2E8F0"/>
+          </a:solidFill>
+          <a:ln w="12700">
+            <a:solidFill>
+              <a:srgbClr val="E2E8F0"/>
+            </a:solidFill>
+            <a:prstDash val="solid"/>
+          </a:ln>
+        </p:spPr>
+      </p:sp>
+      <p:sp>
+        <p:nvSpPr>
+          <p:cNvPr id="31" name="Text 29"/>
+          <p:cNvSpPr/>
+          <p:nvPr/>
+        </p:nvSpPr>
+        <p:spPr>
+          <a:xfrm>
+            <a:off x="365760" y="4096512"/>
+            <a:ext cx="1371600" cy="804672"/>
           </a:xfrm>
           <a:prstGeom prst="rect">
             <a:avLst/>
@@ -25676,96 +25650,30 @@
               <a:buNone/>
             </a:pPr>
             <a:r>
-              <a:rPr lang="en-US" sz="1600" b="1" dirty="0">
-                <a:solidFill>
-                  <a:srgbClr val="0D9488"/>
+              <a:rPr lang="en-US" sz="1100" b="1" dirty="0">
+                <a:solidFill>
+                  <a:srgbClr val="475569"/>
                 </a:solidFill>
                 <a:latin typeface="Trebuchet MS" pitchFamily="34" charset="0"/>
                 <a:ea typeface="Trebuchet MS" pitchFamily="34" charset="-122"/>
                 <a:cs typeface="Trebuchet MS" pitchFamily="34" charset="-120"/>
               </a:rPr>
-              <a:t>·</a:t>
-            </a:r>
-            <a:endParaRPr lang="en-US" sz="1600" dirty="0"/>
-          </a:p>
-        </p:txBody>
-      </p:sp>
-      <p:sp>
-        <p:nvSpPr>
-          <p:cNvPr id="31" name="Shape 29"/>
-          <p:cNvSpPr/>
-          <p:nvPr/>
-        </p:nvSpPr>
-        <p:spPr>
-          <a:xfrm>
-            <a:off x="5742432" y="3364992"/>
-            <a:ext cx="1645920" cy="475488"/>
-          </a:xfrm>
-          <a:prstGeom prst="rect">
-            <a:avLst>
-              <a:gd name="adj" fmla="val 9615"/>
-            </a:avLst>
-          </a:prstGeom>
-          <a:solidFill>
-            <a:srgbClr val="FFFFFF"/>
-          </a:solidFill>
-          <a:ln w="12700">
-            <a:solidFill>
-              <a:srgbClr val="0D9488"/>
-            </a:solidFill>
-            <a:prstDash val="solid"/>
-          </a:ln>
-        </p:spPr>
-      </p:sp>
-      <p:sp>
-        <p:nvSpPr>
-          <p:cNvPr id="32" name="Text 30"/>
-          <p:cNvSpPr/>
-          <p:nvPr/>
-        </p:nvSpPr>
-        <p:spPr>
-          <a:xfrm>
-            <a:off x="5742432" y="3364992"/>
-            <a:ext cx="1645920" cy="475488"/>
-          </a:xfrm>
-          <a:prstGeom prst="rect">
-            <a:avLst/>
-          </a:prstGeom>
-          <a:noFill/>
-          <a:ln/>
-        </p:spPr>
-        <p:txBody>
-          <a:bodyPr wrap="square" lIns="0" tIns="0" rIns="0" bIns="0" rtlCol="0" anchor="ctr"/>
-          <a:lstStyle/>
-          <a:p>
-            <a:pPr algn="ctr" indent="0" marL="0">
-              <a:buNone/>
-            </a:pPr>
-            <a:r>
-              <a:rPr lang="en-US" sz="1400" b="1" dirty="0">
-                <a:solidFill>
-                  <a:srgbClr val="0D9488"/>
-                </a:solidFill>
-                <a:latin typeface="Trebuchet MS" pitchFamily="34" charset="0"/>
-                <a:ea typeface="Trebuchet MS" pitchFamily="34" charset="-122"/>
-                <a:cs typeface="Trebuchet MS" pitchFamily="34" charset="-120"/>
-              </a:rPr>
-              <a:t>joined</a:t>
-            </a:r>
-            <a:endParaRPr lang="en-US" sz="1400" dirty="0"/>
-          </a:p>
-        </p:txBody>
-      </p:sp>
-      <p:sp>
-        <p:nvSpPr>
-          <p:cNvPr id="33" name="Shape 31"/>
-          <p:cNvSpPr/>
-          <p:nvPr/>
-        </p:nvSpPr>
-        <p:spPr>
-          <a:xfrm>
-            <a:off x="365760" y="4096512"/>
-            <a:ext cx="1371600" cy="804672"/>
+              <a:t>Phonemes</a:t>
+            </a:r>
+            <a:endParaRPr lang="en-US" sz="1100" dirty="0"/>
+          </a:p>
+        </p:txBody>
+      </p:sp>
+      <p:sp>
+        <p:nvSpPr>
+          <p:cNvPr id="32" name="Shape 30"/>
+          <p:cNvSpPr/>
+          <p:nvPr/>
+        </p:nvSpPr>
+        <p:spPr>
+          <a:xfrm>
+            <a:off x="1874520" y="4096512"/>
+            <a:ext cx="6903720" cy="804672"/>
           </a:xfrm>
           <a:prstGeom prst="rect">
             <a:avLst>
@@ -25773,85 +25681,19 @@
             </a:avLst>
           </a:prstGeom>
           <a:solidFill>
-            <a:srgbClr val="E2E8F0"/>
+            <a:srgbClr val="F8FAFC"/>
           </a:solidFill>
           <a:ln w="12700">
             <a:solidFill>
               <a:srgbClr val="E2E8F0"/>
             </a:solidFill>
-            <a:prstDash val="solid"/>
-          </a:ln>
-        </p:spPr>
-      </p:sp>
-      <p:sp>
-        <p:nvSpPr>
-          <p:cNvPr id="34" name="Text 32"/>
-          <p:cNvSpPr/>
-          <p:nvPr/>
-        </p:nvSpPr>
-        <p:spPr>
-          <a:xfrm>
-            <a:off x="365760" y="4096512"/>
-            <a:ext cx="1371600" cy="804672"/>
-          </a:xfrm>
-          <a:prstGeom prst="rect">
-            <a:avLst/>
-          </a:prstGeom>
-          <a:noFill/>
-          <a:ln/>
-        </p:spPr>
-        <p:txBody>
-          <a:bodyPr wrap="square" lIns="0" tIns="0" rIns="0" bIns="0" rtlCol="0" anchor="ctr"/>
-          <a:lstStyle/>
-          <a:p>
-            <a:pPr algn="ctr" indent="0" marL="0">
-              <a:buNone/>
-            </a:pPr>
-            <a:r>
-              <a:rPr lang="en-US" sz="1100" b="1" dirty="0">
-                <a:solidFill>
-                  <a:srgbClr val="475569"/>
-                </a:solidFill>
-                <a:latin typeface="Trebuchet MS" pitchFamily="34" charset="0"/>
-                <a:ea typeface="Trebuchet MS" pitchFamily="34" charset="-122"/>
-                <a:cs typeface="Trebuchet MS" pitchFamily="34" charset="-120"/>
-              </a:rPr>
-              <a:t>Phonemes</a:t>
-            </a:r>
-            <a:endParaRPr lang="en-US" sz="1100" dirty="0"/>
-          </a:p>
-        </p:txBody>
-      </p:sp>
-      <p:sp>
-        <p:nvSpPr>
-          <p:cNvPr id="35" name="Shape 33"/>
-          <p:cNvSpPr/>
-          <p:nvPr/>
-        </p:nvSpPr>
-        <p:spPr>
-          <a:xfrm>
-            <a:off x="1874520" y="4096512"/>
-            <a:ext cx="6903720" cy="804672"/>
-          </a:xfrm>
-          <a:prstGeom prst="rect">
-            <a:avLst>
-              <a:gd name="adj" fmla="val 6818"/>
-            </a:avLst>
-          </a:prstGeom>
-          <a:solidFill>
-            <a:srgbClr val="F8FAFC"/>
-          </a:solidFill>
-          <a:ln w="12700">
-            <a:solidFill>
-              <a:srgbClr val="E2E8F0"/>
-            </a:solidFill>
             <a:prstDash val="dash"/>
           </a:ln>
         </p:spPr>
       </p:sp>
       <p:sp>
         <p:nvSpPr>
-          <p:cNvPr id="36" name="Text 34"/>
+          <p:cNvPr id="33" name="Text 31"/>
           <p:cNvSpPr/>
           <p:nvPr/>
         </p:nvSpPr>
@@ -26174,7 +26016,7 @@
                 <a:ea typeface="Calibri" pitchFamily="34" charset="-122"/>
                 <a:cs typeface="Calibri" pitchFamily="34" charset="-120"/>
               </a:rPr>
-              <a:t>Word Labs  •  wordlabs.app  •  Root: 'join' = connect or bring together</a:t>
+              <a:t>Word Labs  •  wordlabs.app  •  Root: 'join' = to connect or bring together</a:t>
             </a:r>
             <a:endParaRPr lang="en-US" sz="800" dirty="0"/>
           </a:p>
@@ -26313,7 +26155,7 @@
                 <a:ea typeface="Trebuchet MS" pitchFamily="34" charset="-122"/>
                 <a:cs typeface="Trebuchet MS" pitchFamily="34" charset="-120"/>
               </a:rPr>
-              <a:t>disjoined</a:t>
+              <a:t>joiner</a:t>
             </a:r>
             <a:endParaRPr lang="en-US" sz="2800" dirty="0"/>
           </a:p>
@@ -26393,7 +26235,7 @@
         </p:nvSpPr>
         <p:spPr>
           <a:xfrm>
-            <a:off x="2221992" y="2258568"/>
+            <a:off x="2938272" y="2258568"/>
             <a:ext cx="1828800" cy="292608"/>
           </a:xfrm>
           <a:prstGeom prst="rect">
@@ -26402,11 +26244,11 @@
             </a:avLst>
           </a:prstGeom>
           <a:solidFill>
-            <a:srgbClr val="DDD6FE"/>
+            <a:srgbClr val="CCFBF1"/>
           </a:solidFill>
           <a:ln w="19050">
             <a:solidFill>
-              <a:srgbClr val="7C3AED"/>
+              <a:srgbClr val="0D9488"/>
             </a:solidFill>
             <a:prstDash val="solid"/>
           </a:ln>
@@ -26427,7 +26269,7 @@
         </p:nvSpPr>
         <p:spPr>
           <a:xfrm>
-            <a:off x="2221992" y="2258568"/>
+            <a:off x="2938272" y="2258568"/>
             <a:ext cx="1828800" cy="292608"/>
           </a:xfrm>
           <a:prstGeom prst="rect">
@@ -26446,13 +26288,13 @@
             <a:r>
               <a:rPr lang="en-US" sz="1300" b="1" dirty="0">
                 <a:solidFill>
-                  <a:srgbClr val="4C1D95"/>
+                  <a:srgbClr val="0F766E"/>
                 </a:solidFill>
                 <a:latin typeface="Trebuchet MS" pitchFamily="34" charset="0"/>
                 <a:ea typeface="Trebuchet MS" pitchFamily="34" charset="-122"/>
                 <a:cs typeface="Trebuchet MS" pitchFamily="34" charset="-120"/>
               </a:rPr>
-              <a:t>dis</a:t>
+              <a:t>join</a:t>
             </a:r>
             <a:endParaRPr lang="en-US" sz="1300" dirty="0"/>
           </a:p>
@@ -26466,7 +26308,7 @@
         </p:nvSpPr>
         <p:spPr>
           <a:xfrm>
-            <a:off x="2221992" y="2569464"/>
+            <a:off x="2938272" y="2569464"/>
             <a:ext cx="1828800" cy="201168"/>
           </a:xfrm>
           <a:prstGeom prst="rect">
@@ -26491,7 +26333,7 @@
                 <a:ea typeface="Calibri" pitchFamily="34" charset="-122"/>
                 <a:cs typeface="Calibri" pitchFamily="34" charset="-120"/>
               </a:rPr>
-              <a:t>apart or not</a:t>
+              <a:t>to connect or bring together</a:t>
             </a:r>
             <a:endParaRPr lang="en-US" sz="850" dirty="0"/>
           </a:p>
@@ -26505,7 +26347,7 @@
         </p:nvSpPr>
         <p:spPr>
           <a:xfrm>
-            <a:off x="4370832" y="2258568"/>
+            <a:off x="5803392" y="2258568"/>
             <a:ext cx="1828800" cy="292608"/>
           </a:xfrm>
           <a:prstGeom prst="rect">
@@ -26514,11 +26356,11 @@
             </a:avLst>
           </a:prstGeom>
           <a:solidFill>
-            <a:srgbClr val="CCFBF1"/>
+            <a:srgbClr val="FCE7F3"/>
           </a:solidFill>
           <a:ln w="19050">
             <a:solidFill>
-              <a:srgbClr val="0D9488"/>
+              <a:srgbClr val="DB2777"/>
             </a:solidFill>
             <a:prstDash val="solid"/>
           </a:ln>
@@ -26539,7 +26381,7 @@
         </p:nvSpPr>
         <p:spPr>
           <a:xfrm>
-            <a:off x="4370832" y="2258568"/>
+            <a:off x="5803392" y="2258568"/>
             <a:ext cx="1828800" cy="292608"/>
           </a:xfrm>
           <a:prstGeom prst="rect">
@@ -26558,13 +26400,13 @@
             <a:r>
               <a:rPr lang="en-US" sz="1300" b="1" dirty="0">
                 <a:solidFill>
-                  <a:srgbClr val="0F766E"/>
+                  <a:srgbClr val="9D174D"/>
                 </a:solidFill>
                 <a:latin typeface="Trebuchet MS" pitchFamily="34" charset="0"/>
                 <a:ea typeface="Trebuchet MS" pitchFamily="34" charset="-122"/>
                 <a:cs typeface="Trebuchet MS" pitchFamily="34" charset="-120"/>
               </a:rPr>
-              <a:t>join</a:t>
+              <a:t>er</a:t>
             </a:r>
             <a:endParaRPr lang="en-US" sz="1300" dirty="0"/>
           </a:p>
@@ -26578,7 +26420,7 @@
         </p:nvSpPr>
         <p:spPr>
           <a:xfrm>
-            <a:off x="4370832" y="2569464"/>
+            <a:off x="5803392" y="2569464"/>
             <a:ext cx="1828800" cy="201168"/>
           </a:xfrm>
           <a:prstGeom prst="rect">
@@ -26603,7 +26445,7 @@
                 <a:ea typeface="Calibri" pitchFamily="34" charset="-122"/>
                 <a:cs typeface="Calibri" pitchFamily="34" charset="-120"/>
               </a:rPr>
-              <a:t>connect or bring together</a:t>
+              <a:t>a person or thing that does something</a:t>
             </a:r>
             <a:endParaRPr lang="en-US" sz="850" dirty="0"/>
           </a:p>
@@ -26617,30 +26459,23 @@
         </p:nvSpPr>
         <p:spPr>
           <a:xfrm>
-            <a:off x="6519672" y="2258568"/>
-            <a:ext cx="1828800" cy="292608"/>
+            <a:off x="365760" y="3273552"/>
+            <a:ext cx="1371600" cy="658368"/>
           </a:xfrm>
           <a:prstGeom prst="rect">
             <a:avLst>
-              <a:gd name="adj" fmla="val 25000"/>
+              <a:gd name="adj" fmla="val 8333"/>
             </a:avLst>
           </a:prstGeom>
           <a:solidFill>
-            <a:srgbClr val="FCE7F3"/>
-          </a:solidFill>
-          <a:ln w="19050">
-            <a:solidFill>
-              <a:srgbClr val="DB2777"/>
-            </a:solidFill>
-            <a:prstDash val="solid"/>
-          </a:ln>
-          <a:effectLst>
-            <a:outerShdw sx="100000" sy="100000" kx="0" ky="0" algn="bl" rotWithShape="0" blurRad="101600" dist="38100" dir="8100000">
-              <a:srgbClr val="000000">
-                <a:alpha val="12000"/>
-              </a:srgbClr>
-            </a:outerShdw>
-          </a:effectLst>
+            <a:srgbClr val="E2E8F0"/>
+          </a:solidFill>
+          <a:ln w="12700">
+            <a:solidFill>
+              <a:srgbClr val="E2E8F0"/>
+            </a:solidFill>
+            <a:prstDash val="solid"/>
+          </a:ln>
         </p:spPr>
       </p:sp>
       <p:sp>
@@ -26651,8 +26486,8 @@
         </p:nvSpPr>
         <p:spPr>
           <a:xfrm>
-            <a:off x="6519672" y="2258568"/>
-            <a:ext cx="1828800" cy="292608"/>
+            <a:off x="365760" y="3273552"/>
+            <a:ext cx="1371600" cy="658368"/>
           </a:xfrm>
           <a:prstGeom prst="rect">
             <a:avLst/>
@@ -26668,69 +26503,30 @@
               <a:buNone/>
             </a:pPr>
             <a:r>
-              <a:rPr lang="en-US" sz="1300" b="1" dirty="0">
-                <a:solidFill>
-                  <a:srgbClr val="9D174D"/>
+              <a:rPr lang="en-US" sz="1100" b="1" dirty="0">
+                <a:solidFill>
+                  <a:srgbClr val="475569"/>
                 </a:solidFill>
                 <a:latin typeface="Trebuchet MS" pitchFamily="34" charset="0"/>
                 <a:ea typeface="Trebuchet MS" pitchFamily="34" charset="-122"/>
                 <a:cs typeface="Trebuchet MS" pitchFamily="34" charset="-120"/>
               </a:rPr>
-              <a:t>ed</a:t>
-            </a:r>
-            <a:endParaRPr lang="en-US" sz="1300" dirty="0"/>
-          </a:p>
-        </p:txBody>
-      </p:sp>
-      <p:sp>
-        <p:nvSpPr>
-          <p:cNvPr id="24" name="Text 22"/>
-          <p:cNvSpPr/>
-          <p:nvPr/>
-        </p:nvSpPr>
-        <p:spPr>
-          <a:xfrm>
-            <a:off x="6519672" y="2569464"/>
-            <a:ext cx="1828800" cy="201168"/>
-          </a:xfrm>
-          <a:prstGeom prst="rect">
-            <a:avLst/>
-          </a:prstGeom>
-          <a:noFill/>
-          <a:ln/>
-        </p:spPr>
-        <p:txBody>
-          <a:bodyPr wrap="square" lIns="0" tIns="0" rIns="0" bIns="0" rtlCol="0" anchor="t"/>
-          <a:lstStyle/>
-          <a:p>
-            <a:pPr algn="ctr" indent="0" marL="0">
-              <a:buNone/>
-            </a:pPr>
-            <a:r>
-              <a:rPr lang="en-US" sz="850" dirty="0">
-                <a:solidFill>
-                  <a:srgbClr val="475569"/>
-                </a:solidFill>
-                <a:latin typeface="Calibri" pitchFamily="34" charset="0"/>
-                <a:ea typeface="Calibri" pitchFamily="34" charset="-122"/>
-                <a:cs typeface="Calibri" pitchFamily="34" charset="-120"/>
-              </a:rPr>
-              <a:t>already happened, past tense</a:t>
-            </a:r>
-            <a:endParaRPr lang="en-US" sz="850" dirty="0"/>
-          </a:p>
-        </p:txBody>
-      </p:sp>
-      <p:sp>
-        <p:nvSpPr>
-          <p:cNvPr id="25" name="Shape 23"/>
-          <p:cNvSpPr/>
-          <p:nvPr/>
-        </p:nvSpPr>
-        <p:spPr>
-          <a:xfrm>
-            <a:off x="365760" y="3273552"/>
-            <a:ext cx="1371600" cy="658368"/>
+              <a:t>Syllables</a:t>
+            </a:r>
+            <a:endParaRPr lang="en-US" sz="1100" dirty="0"/>
+          </a:p>
+        </p:txBody>
+      </p:sp>
+      <p:sp>
+        <p:nvSpPr>
+          <p:cNvPr id="24" name="Shape 22"/>
+          <p:cNvSpPr/>
+          <p:nvPr/>
+        </p:nvSpPr>
+        <p:spPr>
+          <a:xfrm>
+            <a:off x="1874520" y="3273552"/>
+            <a:ext cx="6903720" cy="658368"/>
           </a:xfrm>
           <a:prstGeom prst="rect">
             <a:avLst>
@@ -26738,11 +26534,38 @@
             </a:avLst>
           </a:prstGeom>
           <a:solidFill>
-            <a:srgbClr val="E2E8F0"/>
-          </a:solidFill>
-          <a:ln w="12700">
-            <a:solidFill>
-              <a:srgbClr val="E2E8F0"/>
+            <a:srgbClr val="CCFBF1"/>
+          </a:solidFill>
+          <a:ln w="12700">
+            <a:solidFill>
+              <a:srgbClr val="0D9488"/>
+            </a:solidFill>
+            <a:prstDash val="solid"/>
+          </a:ln>
+        </p:spPr>
+      </p:sp>
+      <p:sp>
+        <p:nvSpPr>
+          <p:cNvPr id="25" name="Shape 23"/>
+          <p:cNvSpPr/>
+          <p:nvPr/>
+        </p:nvSpPr>
+        <p:spPr>
+          <a:xfrm>
+            <a:off x="2999232" y="3364992"/>
+            <a:ext cx="1645920" cy="475488"/>
+          </a:xfrm>
+          <a:prstGeom prst="rect">
+            <a:avLst>
+              <a:gd name="adj" fmla="val 9615"/>
+            </a:avLst>
+          </a:prstGeom>
+          <a:solidFill>
+            <a:srgbClr val="FFFFFF"/>
+          </a:solidFill>
+          <a:ln w="12700">
+            <a:solidFill>
+              <a:srgbClr val="0D9488"/>
             </a:solidFill>
             <a:prstDash val="solid"/>
           </a:ln>
@@ -26756,8 +26579,8 @@
         </p:nvSpPr>
         <p:spPr>
           <a:xfrm>
-            <a:off x="365760" y="3273552"/>
-            <a:ext cx="1371600" cy="658368"/>
+            <a:off x="2999232" y="3364992"/>
+            <a:ext cx="1645920" cy="475488"/>
           </a:xfrm>
           <a:prstGeom prst="rect">
             <a:avLst/>
@@ -26773,15 +26596,186 @@
               <a:buNone/>
             </a:pPr>
             <a:r>
-              <a:rPr lang="en-US" sz="1100" b="1" dirty="0">
-                <a:solidFill>
-                  <a:srgbClr val="475569"/>
+              <a:rPr lang="en-US" sz="1400" b="1" dirty="0">
+                <a:solidFill>
+                  <a:srgbClr val="0D9488"/>
                 </a:solidFill>
                 <a:latin typeface="Trebuchet MS" pitchFamily="34" charset="0"/>
                 <a:ea typeface="Trebuchet MS" pitchFamily="34" charset="-122"/>
                 <a:cs typeface="Trebuchet MS" pitchFamily="34" charset="-120"/>
               </a:rPr>
-              <a:t>Syllables</a:t>
+              <a:t>join</a:t>
+            </a:r>
+            <a:endParaRPr lang="en-US" sz="1400" dirty="0"/>
+          </a:p>
+        </p:txBody>
+      </p:sp>
+      <p:sp>
+        <p:nvSpPr>
+          <p:cNvPr id="27" name="Text 25"/>
+          <p:cNvSpPr/>
+          <p:nvPr/>
+        </p:nvSpPr>
+        <p:spPr>
+          <a:xfrm>
+            <a:off x="4645152" y="3364992"/>
+            <a:ext cx="1097280" cy="475488"/>
+          </a:xfrm>
+          <a:prstGeom prst="rect">
+            <a:avLst/>
+          </a:prstGeom>
+          <a:noFill/>
+          <a:ln/>
+        </p:spPr>
+        <p:txBody>
+          <a:bodyPr wrap="square" lIns="0" tIns="0" rIns="0" bIns="0" rtlCol="0" anchor="ctr"/>
+          <a:lstStyle/>
+          <a:p>
+            <a:pPr algn="ctr" indent="0" marL="0">
+              <a:buNone/>
+            </a:pPr>
+            <a:r>
+              <a:rPr lang="en-US" sz="1600" b="1" dirty="0">
+                <a:solidFill>
+                  <a:srgbClr val="0D9488"/>
+                </a:solidFill>
+                <a:latin typeface="Trebuchet MS" pitchFamily="34" charset="0"/>
+                <a:ea typeface="Trebuchet MS" pitchFamily="34" charset="-122"/>
+                <a:cs typeface="Trebuchet MS" pitchFamily="34" charset="-120"/>
+              </a:rPr>
+              <a:t>·</a:t>
+            </a:r>
+            <a:endParaRPr lang="en-US" sz="1600" dirty="0"/>
+          </a:p>
+        </p:txBody>
+      </p:sp>
+      <p:sp>
+        <p:nvSpPr>
+          <p:cNvPr id="28" name="Shape 26"/>
+          <p:cNvSpPr/>
+          <p:nvPr/>
+        </p:nvSpPr>
+        <p:spPr>
+          <a:xfrm>
+            <a:off x="5742432" y="3364992"/>
+            <a:ext cx="1645920" cy="475488"/>
+          </a:xfrm>
+          <a:prstGeom prst="rect">
+            <a:avLst>
+              <a:gd name="adj" fmla="val 9615"/>
+            </a:avLst>
+          </a:prstGeom>
+          <a:solidFill>
+            <a:srgbClr val="FFFFFF"/>
+          </a:solidFill>
+          <a:ln w="12700">
+            <a:solidFill>
+              <a:srgbClr val="0D9488"/>
+            </a:solidFill>
+            <a:prstDash val="solid"/>
+          </a:ln>
+        </p:spPr>
+      </p:sp>
+      <p:sp>
+        <p:nvSpPr>
+          <p:cNvPr id="29" name="Text 27"/>
+          <p:cNvSpPr/>
+          <p:nvPr/>
+        </p:nvSpPr>
+        <p:spPr>
+          <a:xfrm>
+            <a:off x="5742432" y="3364992"/>
+            <a:ext cx="1645920" cy="475488"/>
+          </a:xfrm>
+          <a:prstGeom prst="rect">
+            <a:avLst/>
+          </a:prstGeom>
+          <a:noFill/>
+          <a:ln/>
+        </p:spPr>
+        <p:txBody>
+          <a:bodyPr wrap="square" lIns="0" tIns="0" rIns="0" bIns="0" rtlCol="0" anchor="ctr"/>
+          <a:lstStyle/>
+          <a:p>
+            <a:pPr algn="ctr" indent="0" marL="0">
+              <a:buNone/>
+            </a:pPr>
+            <a:r>
+              <a:rPr lang="en-US" sz="1400" b="1" dirty="0">
+                <a:solidFill>
+                  <a:srgbClr val="0D9488"/>
+                </a:solidFill>
+                <a:latin typeface="Trebuchet MS" pitchFamily="34" charset="0"/>
+                <a:ea typeface="Trebuchet MS" pitchFamily="34" charset="-122"/>
+                <a:cs typeface="Trebuchet MS" pitchFamily="34" charset="-120"/>
+              </a:rPr>
+              <a:t>er</a:t>
+            </a:r>
+            <a:endParaRPr lang="en-US" sz="1400" dirty="0"/>
+          </a:p>
+        </p:txBody>
+      </p:sp>
+      <p:sp>
+        <p:nvSpPr>
+          <p:cNvPr id="30" name="Shape 28"/>
+          <p:cNvSpPr/>
+          <p:nvPr/>
+        </p:nvSpPr>
+        <p:spPr>
+          <a:xfrm>
+            <a:off x="365760" y="4096512"/>
+            <a:ext cx="1371600" cy="804672"/>
+          </a:xfrm>
+          <a:prstGeom prst="rect">
+            <a:avLst>
+              <a:gd name="adj" fmla="val 6818"/>
+            </a:avLst>
+          </a:prstGeom>
+          <a:solidFill>
+            <a:srgbClr val="E2E8F0"/>
+          </a:solidFill>
+          <a:ln w="12700">
+            <a:solidFill>
+              <a:srgbClr val="E2E8F0"/>
+            </a:solidFill>
+            <a:prstDash val="solid"/>
+          </a:ln>
+        </p:spPr>
+      </p:sp>
+      <p:sp>
+        <p:nvSpPr>
+          <p:cNvPr id="31" name="Text 29"/>
+          <p:cNvSpPr/>
+          <p:nvPr/>
+        </p:nvSpPr>
+        <p:spPr>
+          <a:xfrm>
+            <a:off x="365760" y="4096512"/>
+            <a:ext cx="1371600" cy="804672"/>
+          </a:xfrm>
+          <a:prstGeom prst="rect">
+            <a:avLst/>
+          </a:prstGeom>
+          <a:noFill/>
+          <a:ln/>
+        </p:spPr>
+        <p:txBody>
+          <a:bodyPr wrap="square" lIns="0" tIns="0" rIns="0" bIns="0" rtlCol="0" anchor="ctr"/>
+          <a:lstStyle/>
+          <a:p>
+            <a:pPr algn="ctr" indent="0" marL="0">
+              <a:buNone/>
+            </a:pPr>
+            <a:r>
+              <a:rPr lang="en-US" sz="1100" b="1" dirty="0">
+                <a:solidFill>
+                  <a:srgbClr val="475569"/>
+                </a:solidFill>
+                <a:latin typeface="Trebuchet MS" pitchFamily="34" charset="0"/>
+                <a:ea typeface="Trebuchet MS" pitchFamily="34" charset="-122"/>
+                <a:cs typeface="Trebuchet MS" pitchFamily="34" charset="-120"/>
+              </a:rPr>
+              <a:t>Phonemes</a:t>
             </a:r>
             <a:endParaRPr lang="en-US" sz="1100" dirty="0"/>
           </a:p>
@@ -26789,13 +26783,13 @@
       </p:sp>
       <p:sp>
         <p:nvSpPr>
-          <p:cNvPr id="27" name="Shape 25"/>
-          <p:cNvSpPr/>
-          <p:nvPr/>
-        </p:nvSpPr>
-        <p:spPr>
-          <a:xfrm>
-            <a:off x="1874520" y="3273552"/>
+          <p:cNvPr id="32" name="Shape 30"/>
+          <p:cNvSpPr/>
+          <p:nvPr/>
+        </p:nvSpPr>
+        <p:spPr>
+          <a:xfrm>
+            <a:off x="1874520" y="4096512"/>
             <a:ext cx="6903720" cy="658368"/>
           </a:xfrm>
           <a:prstGeom prst="rect">
@@ -26804,30 +26798,30 @@
             </a:avLst>
           </a:prstGeom>
           <a:solidFill>
-            <a:srgbClr val="CCFBF1"/>
-          </a:solidFill>
-          <a:ln w="12700">
-            <a:solidFill>
-              <a:srgbClr val="0D9488"/>
-            </a:solidFill>
-            <a:prstDash val="solid"/>
-          </a:ln>
-        </p:spPr>
-      </p:sp>
-      <p:sp>
-        <p:nvSpPr>
-          <p:cNvPr id="28" name="Shape 26"/>
-          <p:cNvSpPr/>
-          <p:nvPr/>
-        </p:nvSpPr>
-        <p:spPr>
-          <a:xfrm>
-            <a:off x="2999232" y="3364992"/>
-            <a:ext cx="1645920" cy="475488"/>
+            <a:srgbClr val="FCE7F3"/>
+          </a:solidFill>
+          <a:ln w="12700">
+            <a:solidFill>
+              <a:srgbClr val="DB2777"/>
+            </a:solidFill>
+            <a:prstDash val="solid"/>
+          </a:ln>
+        </p:spPr>
+      </p:sp>
+      <p:sp>
+        <p:nvSpPr>
+          <p:cNvPr id="33" name="Shape 31"/>
+          <p:cNvSpPr/>
+          <p:nvPr/>
+        </p:nvSpPr>
+        <p:spPr>
+          <a:xfrm>
+            <a:off x="2670048" y="4169664"/>
+            <a:ext cx="685800" cy="475488"/>
           </a:xfrm>
           <a:prstGeom prst="rect">
             <a:avLst>
-              <a:gd name="adj" fmla="val 9615"/>
+              <a:gd name="adj" fmla="val 7692"/>
             </a:avLst>
           </a:prstGeom>
           <a:solidFill>
@@ -26835,22 +26829,22 @@
           </a:solidFill>
           <a:ln w="12700">
             <a:solidFill>
-              <a:srgbClr val="0D9488"/>
-            </a:solidFill>
-            <a:prstDash val="solid"/>
-          </a:ln>
-        </p:spPr>
-      </p:sp>
-      <p:sp>
-        <p:nvSpPr>
-          <p:cNvPr id="29" name="Text 27"/>
-          <p:cNvSpPr/>
-          <p:nvPr/>
-        </p:nvSpPr>
-        <p:spPr>
-          <a:xfrm>
-            <a:off x="2999232" y="3364992"/>
-            <a:ext cx="1645920" cy="475488"/>
+              <a:srgbClr val="DB2777"/>
+            </a:solidFill>
+            <a:prstDash val="solid"/>
+          </a:ln>
+        </p:spPr>
+      </p:sp>
+      <p:sp>
+        <p:nvSpPr>
+          <p:cNvPr id="34" name="Text 32"/>
+          <p:cNvSpPr/>
+          <p:nvPr/>
+        </p:nvSpPr>
+        <p:spPr>
+          <a:xfrm>
+            <a:off x="2670048" y="4169664"/>
+            <a:ext cx="685800" cy="475488"/>
           </a:xfrm>
           <a:prstGeom prst="rect">
             <a:avLst/>
@@ -26866,30 +26860,57 @@
               <a:buNone/>
             </a:pPr>
             <a:r>
-              <a:rPr lang="en-US" sz="1400" b="1" dirty="0">
-                <a:solidFill>
-                  <a:srgbClr val="0D9488"/>
+              <a:rPr lang="en-US" sz="900" b="1" dirty="0">
+                <a:solidFill>
+                  <a:srgbClr val="9D174D"/>
                 </a:solidFill>
                 <a:latin typeface="Trebuchet MS" pitchFamily="34" charset="0"/>
                 <a:ea typeface="Trebuchet MS" pitchFamily="34" charset="-122"/>
                 <a:cs typeface="Trebuchet MS" pitchFamily="34" charset="-120"/>
               </a:rPr>
-              <a:t>dis</a:t>
-            </a:r>
-            <a:endParaRPr lang="en-US" sz="1400" dirty="0"/>
-          </a:p>
-        </p:txBody>
-      </p:sp>
-      <p:sp>
-        <p:nvSpPr>
-          <p:cNvPr id="30" name="Text 28"/>
-          <p:cNvSpPr/>
-          <p:nvPr/>
-        </p:nvSpPr>
-        <p:spPr>
-          <a:xfrm>
-            <a:off x="4645152" y="3364992"/>
-            <a:ext cx="1097280" cy="475488"/>
+              <a:t>j</a:t>
+            </a:r>
+            <a:endParaRPr lang="en-US" sz="900" dirty="0"/>
+          </a:p>
+        </p:txBody>
+      </p:sp>
+      <p:sp>
+        <p:nvSpPr>
+          <p:cNvPr id="35" name="Shape 33"/>
+          <p:cNvSpPr/>
+          <p:nvPr/>
+        </p:nvSpPr>
+        <p:spPr>
+          <a:xfrm>
+            <a:off x="4123944" y="4169664"/>
+            <a:ext cx="685800" cy="475488"/>
+          </a:xfrm>
+          <a:prstGeom prst="rect">
+            <a:avLst>
+              <a:gd name="adj" fmla="val 7692"/>
+            </a:avLst>
+          </a:prstGeom>
+          <a:solidFill>
+            <a:srgbClr val="FFFFFF"/>
+          </a:solidFill>
+          <a:ln w="12700">
+            <a:solidFill>
+              <a:srgbClr val="DB2777"/>
+            </a:solidFill>
+            <a:prstDash val="solid"/>
+          </a:ln>
+        </p:spPr>
+      </p:sp>
+      <p:sp>
+        <p:nvSpPr>
+          <p:cNvPr id="36" name="Text 34"/>
+          <p:cNvSpPr/>
+          <p:nvPr/>
+        </p:nvSpPr>
+        <p:spPr>
+          <a:xfrm>
+            <a:off x="4123944" y="4169664"/>
+            <a:ext cx="685800" cy="475488"/>
           </a:xfrm>
           <a:prstGeom prst="rect">
             <a:avLst/>
@@ -26905,34 +26926,34 @@
               <a:buNone/>
             </a:pPr>
             <a:r>
-              <a:rPr lang="en-US" sz="1600" b="1" dirty="0">
-                <a:solidFill>
-                  <a:srgbClr val="0D9488"/>
+              <a:rPr lang="en-US" sz="900" b="1" dirty="0">
+                <a:solidFill>
+                  <a:srgbClr val="9D174D"/>
                 </a:solidFill>
                 <a:latin typeface="Trebuchet MS" pitchFamily="34" charset="0"/>
                 <a:ea typeface="Trebuchet MS" pitchFamily="34" charset="-122"/>
                 <a:cs typeface="Trebuchet MS" pitchFamily="34" charset="-120"/>
               </a:rPr>
-              <a:t>·</a:t>
-            </a:r>
-            <a:endParaRPr lang="en-US" sz="1600" dirty="0"/>
-          </a:p>
-        </p:txBody>
-      </p:sp>
-      <p:sp>
-        <p:nvSpPr>
-          <p:cNvPr id="31" name="Shape 29"/>
-          <p:cNvSpPr/>
-          <p:nvPr/>
-        </p:nvSpPr>
-        <p:spPr>
-          <a:xfrm>
-            <a:off x="5742432" y="3364992"/>
-            <a:ext cx="1645920" cy="475488"/>
+              <a:t>oi</a:t>
+            </a:r>
+            <a:endParaRPr lang="en-US" sz="900" dirty="0"/>
+          </a:p>
+        </p:txBody>
+      </p:sp>
+      <p:sp>
+        <p:nvSpPr>
+          <p:cNvPr id="37" name="Shape 35"/>
+          <p:cNvSpPr/>
+          <p:nvPr/>
+        </p:nvSpPr>
+        <p:spPr>
+          <a:xfrm>
+            <a:off x="5577840" y="4169664"/>
+            <a:ext cx="685800" cy="475488"/>
           </a:xfrm>
           <a:prstGeom prst="rect">
             <a:avLst>
-              <a:gd name="adj" fmla="val 9615"/>
+              <a:gd name="adj" fmla="val 7692"/>
             </a:avLst>
           </a:prstGeom>
           <a:solidFill>
@@ -26940,22 +26961,22 @@
           </a:solidFill>
           <a:ln w="12700">
             <a:solidFill>
-              <a:srgbClr val="0D9488"/>
-            </a:solidFill>
-            <a:prstDash val="solid"/>
-          </a:ln>
-        </p:spPr>
-      </p:sp>
-      <p:sp>
-        <p:nvSpPr>
-          <p:cNvPr id="32" name="Text 30"/>
-          <p:cNvSpPr/>
-          <p:nvPr/>
-        </p:nvSpPr>
-        <p:spPr>
-          <a:xfrm>
-            <a:off x="5742432" y="3364992"/>
-            <a:ext cx="1645920" cy="475488"/>
+              <a:srgbClr val="DB2777"/>
+            </a:solidFill>
+            <a:prstDash val="solid"/>
+          </a:ln>
+        </p:spPr>
+      </p:sp>
+      <p:sp>
+        <p:nvSpPr>
+          <p:cNvPr id="38" name="Text 36"/>
+          <p:cNvSpPr/>
+          <p:nvPr/>
+        </p:nvSpPr>
+        <p:spPr>
+          <a:xfrm>
+            <a:off x="5577840" y="4169664"/>
+            <a:ext cx="685800" cy="475488"/>
           </a:xfrm>
           <a:prstGeom prst="rect">
             <a:avLst/>
@@ -26971,57 +26992,57 @@
               <a:buNone/>
             </a:pPr>
             <a:r>
-              <a:rPr lang="en-US" sz="1400" b="1" dirty="0">
-                <a:solidFill>
-                  <a:srgbClr val="0D9488"/>
+              <a:rPr lang="en-US" sz="900" b="1" dirty="0">
+                <a:solidFill>
+                  <a:srgbClr val="9D174D"/>
                 </a:solidFill>
                 <a:latin typeface="Trebuchet MS" pitchFamily="34" charset="0"/>
                 <a:ea typeface="Trebuchet MS" pitchFamily="34" charset="-122"/>
                 <a:cs typeface="Trebuchet MS" pitchFamily="34" charset="-120"/>
               </a:rPr>
-              <a:t>joined</a:t>
-            </a:r>
-            <a:endParaRPr lang="en-US" sz="1400" dirty="0"/>
-          </a:p>
-        </p:txBody>
-      </p:sp>
-      <p:sp>
-        <p:nvSpPr>
-          <p:cNvPr id="33" name="Shape 31"/>
-          <p:cNvSpPr/>
-          <p:nvPr/>
-        </p:nvSpPr>
-        <p:spPr>
-          <a:xfrm>
-            <a:off x="365760" y="4096512"/>
-            <a:ext cx="1371600" cy="804672"/>
+              <a:t>n</a:t>
+            </a:r>
+            <a:endParaRPr lang="en-US" sz="900" dirty="0"/>
+          </a:p>
+        </p:txBody>
+      </p:sp>
+      <p:sp>
+        <p:nvSpPr>
+          <p:cNvPr id="39" name="Shape 37"/>
+          <p:cNvSpPr/>
+          <p:nvPr/>
+        </p:nvSpPr>
+        <p:spPr>
+          <a:xfrm>
+            <a:off x="7031736" y="4169664"/>
+            <a:ext cx="685800" cy="475488"/>
           </a:xfrm>
           <a:prstGeom prst="rect">
             <a:avLst>
-              <a:gd name="adj" fmla="val 6818"/>
+              <a:gd name="adj" fmla="val 7692"/>
             </a:avLst>
           </a:prstGeom>
           <a:solidFill>
-            <a:srgbClr val="E2E8F0"/>
-          </a:solidFill>
-          <a:ln w="12700">
-            <a:solidFill>
-              <a:srgbClr val="E2E8F0"/>
-            </a:solidFill>
-            <a:prstDash val="solid"/>
-          </a:ln>
-        </p:spPr>
-      </p:sp>
-      <p:sp>
-        <p:nvSpPr>
-          <p:cNvPr id="34" name="Text 32"/>
-          <p:cNvSpPr/>
-          <p:nvPr/>
-        </p:nvSpPr>
-        <p:spPr>
-          <a:xfrm>
-            <a:off x="365760" y="4096512"/>
-            <a:ext cx="1371600" cy="804672"/>
+            <a:srgbClr val="FFFFFF"/>
+          </a:solidFill>
+          <a:ln w="12700">
+            <a:solidFill>
+              <a:srgbClr val="DB2777"/>
+            </a:solidFill>
+            <a:prstDash val="solid"/>
+          </a:ln>
+        </p:spPr>
+      </p:sp>
+      <p:sp>
+        <p:nvSpPr>
+          <p:cNvPr id="40" name="Text 38"/>
+          <p:cNvSpPr/>
+          <p:nvPr/>
+        </p:nvSpPr>
+        <p:spPr>
+          <a:xfrm>
+            <a:off x="7031736" y="4169664"/>
+            <a:ext cx="685800" cy="475488"/>
           </a:xfrm>
           <a:prstGeom prst="rect">
             <a:avLst/>
@@ -27037,504 +27058,15 @@
               <a:buNone/>
             </a:pPr>
             <a:r>
-              <a:rPr lang="en-US" sz="1100" b="1" dirty="0">
-                <a:solidFill>
-                  <a:srgbClr val="475569"/>
+              <a:rPr lang="en-US" sz="900" b="1" dirty="0">
+                <a:solidFill>
+                  <a:srgbClr val="9D174D"/>
                 </a:solidFill>
                 <a:latin typeface="Trebuchet MS" pitchFamily="34" charset="0"/>
                 <a:ea typeface="Trebuchet MS" pitchFamily="34" charset="-122"/>
                 <a:cs typeface="Trebuchet MS" pitchFamily="34" charset="-120"/>
               </a:rPr>
-              <a:t>Phonemes</a:t>
-            </a:r>
-            <a:endParaRPr lang="en-US" sz="1100" dirty="0"/>
-          </a:p>
-        </p:txBody>
-      </p:sp>
-      <p:sp>
-        <p:nvSpPr>
-          <p:cNvPr id="35" name="Shape 33"/>
-          <p:cNvSpPr/>
-          <p:nvPr/>
-        </p:nvSpPr>
-        <p:spPr>
-          <a:xfrm>
-            <a:off x="1874520" y="4096512"/>
-            <a:ext cx="6903720" cy="658368"/>
-          </a:xfrm>
-          <a:prstGeom prst="rect">
-            <a:avLst>
-              <a:gd name="adj" fmla="val 8333"/>
-            </a:avLst>
-          </a:prstGeom>
-          <a:solidFill>
-            <a:srgbClr val="FCE7F3"/>
-          </a:solidFill>
-          <a:ln w="12700">
-            <a:solidFill>
-              <a:srgbClr val="DB2777"/>
-            </a:solidFill>
-            <a:prstDash val="solid"/>
-          </a:ln>
-        </p:spPr>
-      </p:sp>
-      <p:sp>
-        <p:nvSpPr>
-          <p:cNvPr id="36" name="Shape 34"/>
-          <p:cNvSpPr/>
-          <p:nvPr/>
-        </p:nvSpPr>
-        <p:spPr>
-          <a:xfrm>
-            <a:off x="2124837" y="4169664"/>
-            <a:ext cx="685800" cy="475488"/>
-          </a:xfrm>
-          <a:prstGeom prst="rect">
-            <a:avLst>
-              <a:gd name="adj" fmla="val 7692"/>
-            </a:avLst>
-          </a:prstGeom>
-          <a:solidFill>
-            <a:srgbClr val="FFFFFF"/>
-          </a:solidFill>
-          <a:ln w="12700">
-            <a:solidFill>
-              <a:srgbClr val="DB2777"/>
-            </a:solidFill>
-            <a:prstDash val="solid"/>
-          </a:ln>
-        </p:spPr>
-      </p:sp>
-      <p:sp>
-        <p:nvSpPr>
-          <p:cNvPr id="37" name="Text 35"/>
-          <p:cNvSpPr/>
-          <p:nvPr/>
-        </p:nvSpPr>
-        <p:spPr>
-          <a:xfrm>
-            <a:off x="2124837" y="4169664"/>
-            <a:ext cx="685800" cy="475488"/>
-          </a:xfrm>
-          <a:prstGeom prst="rect">
-            <a:avLst/>
-          </a:prstGeom>
-          <a:noFill/>
-          <a:ln/>
-        </p:spPr>
-        <p:txBody>
-          <a:bodyPr wrap="square" lIns="0" tIns="0" rIns="0" bIns="0" rtlCol="0" anchor="ctr"/>
-          <a:lstStyle/>
-          <a:p>
-            <a:pPr algn="ctr" indent="0" marL="0">
-              <a:buNone/>
-            </a:pPr>
-            <a:r>
-              <a:rPr lang="en-US" sz="900" b="1" dirty="0">
-                <a:solidFill>
-                  <a:srgbClr val="9D174D"/>
-                </a:solidFill>
-                <a:latin typeface="Trebuchet MS" pitchFamily="34" charset="0"/>
-                <a:ea typeface="Trebuchet MS" pitchFamily="34" charset="-122"/>
-                <a:cs typeface="Trebuchet MS" pitchFamily="34" charset="-120"/>
-              </a:rPr>
-              <a:t>d</a:t>
-            </a:r>
-            <a:endParaRPr lang="en-US" sz="900" dirty="0"/>
-          </a:p>
-        </p:txBody>
-      </p:sp>
-      <p:sp>
-        <p:nvSpPr>
-          <p:cNvPr id="38" name="Shape 36"/>
-          <p:cNvSpPr/>
-          <p:nvPr/>
-        </p:nvSpPr>
-        <p:spPr>
-          <a:xfrm>
-            <a:off x="3033522" y="4169664"/>
-            <a:ext cx="685800" cy="475488"/>
-          </a:xfrm>
-          <a:prstGeom prst="rect">
-            <a:avLst>
-              <a:gd name="adj" fmla="val 7692"/>
-            </a:avLst>
-          </a:prstGeom>
-          <a:solidFill>
-            <a:srgbClr val="FFFFFF"/>
-          </a:solidFill>
-          <a:ln w="12700">
-            <a:solidFill>
-              <a:srgbClr val="DB2777"/>
-            </a:solidFill>
-            <a:prstDash val="solid"/>
-          </a:ln>
-        </p:spPr>
-      </p:sp>
-      <p:sp>
-        <p:nvSpPr>
-          <p:cNvPr id="39" name="Text 37"/>
-          <p:cNvSpPr/>
-          <p:nvPr/>
-        </p:nvSpPr>
-        <p:spPr>
-          <a:xfrm>
-            <a:off x="3033522" y="4169664"/>
-            <a:ext cx="685800" cy="475488"/>
-          </a:xfrm>
-          <a:prstGeom prst="rect">
-            <a:avLst/>
-          </a:prstGeom>
-          <a:noFill/>
-          <a:ln/>
-        </p:spPr>
-        <p:txBody>
-          <a:bodyPr wrap="square" lIns="0" tIns="0" rIns="0" bIns="0" rtlCol="0" anchor="ctr"/>
-          <a:lstStyle/>
-          <a:p>
-            <a:pPr algn="ctr" indent="0" marL="0">
-              <a:buNone/>
-            </a:pPr>
-            <a:r>
-              <a:rPr lang="en-US" sz="900" b="1" dirty="0">
-                <a:solidFill>
-                  <a:srgbClr val="9D174D"/>
-                </a:solidFill>
-                <a:latin typeface="Trebuchet MS" pitchFamily="34" charset="0"/>
-                <a:ea typeface="Trebuchet MS" pitchFamily="34" charset="-122"/>
-                <a:cs typeface="Trebuchet MS" pitchFamily="34" charset="-120"/>
-              </a:rPr>
-              <a:t>i</a:t>
-            </a:r>
-            <a:endParaRPr lang="en-US" sz="900" dirty="0"/>
-          </a:p>
-        </p:txBody>
-      </p:sp>
-      <p:sp>
-        <p:nvSpPr>
-          <p:cNvPr id="40" name="Shape 38"/>
-          <p:cNvSpPr/>
-          <p:nvPr/>
-        </p:nvSpPr>
-        <p:spPr>
-          <a:xfrm>
-            <a:off x="3942207" y="4169664"/>
-            <a:ext cx="685800" cy="475488"/>
-          </a:xfrm>
-          <a:prstGeom prst="rect">
-            <a:avLst>
-              <a:gd name="adj" fmla="val 7692"/>
-            </a:avLst>
-          </a:prstGeom>
-          <a:solidFill>
-            <a:srgbClr val="FFFFFF"/>
-          </a:solidFill>
-          <a:ln w="12700">
-            <a:solidFill>
-              <a:srgbClr val="DB2777"/>
-            </a:solidFill>
-            <a:prstDash val="solid"/>
-          </a:ln>
-        </p:spPr>
-      </p:sp>
-      <p:sp>
-        <p:nvSpPr>
-          <p:cNvPr id="41" name="Text 39"/>
-          <p:cNvSpPr/>
-          <p:nvPr/>
-        </p:nvSpPr>
-        <p:spPr>
-          <a:xfrm>
-            <a:off x="3942207" y="4169664"/>
-            <a:ext cx="685800" cy="475488"/>
-          </a:xfrm>
-          <a:prstGeom prst="rect">
-            <a:avLst/>
-          </a:prstGeom>
-          <a:noFill/>
-          <a:ln/>
-        </p:spPr>
-        <p:txBody>
-          <a:bodyPr wrap="square" lIns="0" tIns="0" rIns="0" bIns="0" rtlCol="0" anchor="ctr"/>
-          <a:lstStyle/>
-          <a:p>
-            <a:pPr algn="ctr" indent="0" marL="0">
-              <a:buNone/>
-            </a:pPr>
-            <a:r>
-              <a:rPr lang="en-US" sz="900" b="1" dirty="0">
-                <a:solidFill>
-                  <a:srgbClr val="9D174D"/>
-                </a:solidFill>
-                <a:latin typeface="Trebuchet MS" pitchFamily="34" charset="0"/>
-                <a:ea typeface="Trebuchet MS" pitchFamily="34" charset="-122"/>
-                <a:cs typeface="Trebuchet MS" pitchFamily="34" charset="-120"/>
-              </a:rPr>
-              <a:t>s</a:t>
-            </a:r>
-            <a:endParaRPr lang="en-US" sz="900" dirty="0"/>
-          </a:p>
-        </p:txBody>
-      </p:sp>
-      <p:sp>
-        <p:nvSpPr>
-          <p:cNvPr id="42" name="Shape 40"/>
-          <p:cNvSpPr/>
-          <p:nvPr/>
-        </p:nvSpPr>
-        <p:spPr>
-          <a:xfrm>
-            <a:off x="4850892" y="4169664"/>
-            <a:ext cx="685800" cy="475488"/>
-          </a:xfrm>
-          <a:prstGeom prst="rect">
-            <a:avLst>
-              <a:gd name="adj" fmla="val 7692"/>
-            </a:avLst>
-          </a:prstGeom>
-          <a:solidFill>
-            <a:srgbClr val="FFFFFF"/>
-          </a:solidFill>
-          <a:ln w="12700">
-            <a:solidFill>
-              <a:srgbClr val="DB2777"/>
-            </a:solidFill>
-            <a:prstDash val="solid"/>
-          </a:ln>
-        </p:spPr>
-      </p:sp>
-      <p:sp>
-        <p:nvSpPr>
-          <p:cNvPr id="43" name="Text 41"/>
-          <p:cNvSpPr/>
-          <p:nvPr/>
-        </p:nvSpPr>
-        <p:spPr>
-          <a:xfrm>
-            <a:off x="4850892" y="4169664"/>
-            <a:ext cx="685800" cy="475488"/>
-          </a:xfrm>
-          <a:prstGeom prst="rect">
-            <a:avLst/>
-          </a:prstGeom>
-          <a:noFill/>
-          <a:ln/>
-        </p:spPr>
-        <p:txBody>
-          <a:bodyPr wrap="square" lIns="0" tIns="0" rIns="0" bIns="0" rtlCol="0" anchor="ctr"/>
-          <a:lstStyle/>
-          <a:p>
-            <a:pPr algn="ctr" indent="0" marL="0">
-              <a:buNone/>
-            </a:pPr>
-            <a:r>
-              <a:rPr lang="en-US" sz="900" b="1" dirty="0">
-                <a:solidFill>
-                  <a:srgbClr val="9D174D"/>
-                </a:solidFill>
-                <a:latin typeface="Trebuchet MS" pitchFamily="34" charset="0"/>
-                <a:ea typeface="Trebuchet MS" pitchFamily="34" charset="-122"/>
-                <a:cs typeface="Trebuchet MS" pitchFamily="34" charset="-120"/>
-              </a:rPr>
-              <a:t>j</a:t>
-            </a:r>
-            <a:endParaRPr lang="en-US" sz="900" dirty="0"/>
-          </a:p>
-        </p:txBody>
-      </p:sp>
-      <p:sp>
-        <p:nvSpPr>
-          <p:cNvPr id="44" name="Shape 42"/>
-          <p:cNvSpPr/>
-          <p:nvPr/>
-        </p:nvSpPr>
-        <p:spPr>
-          <a:xfrm>
-            <a:off x="5759577" y="4169664"/>
-            <a:ext cx="685800" cy="475488"/>
-          </a:xfrm>
-          <a:prstGeom prst="rect">
-            <a:avLst>
-              <a:gd name="adj" fmla="val 7692"/>
-            </a:avLst>
-          </a:prstGeom>
-          <a:solidFill>
-            <a:srgbClr val="FFFFFF"/>
-          </a:solidFill>
-          <a:ln w="12700">
-            <a:solidFill>
-              <a:srgbClr val="DB2777"/>
-            </a:solidFill>
-            <a:prstDash val="solid"/>
-          </a:ln>
-        </p:spPr>
-      </p:sp>
-      <p:sp>
-        <p:nvSpPr>
-          <p:cNvPr id="45" name="Text 43"/>
-          <p:cNvSpPr/>
-          <p:nvPr/>
-        </p:nvSpPr>
-        <p:spPr>
-          <a:xfrm>
-            <a:off x="5759577" y="4169664"/>
-            <a:ext cx="685800" cy="475488"/>
-          </a:xfrm>
-          <a:prstGeom prst="rect">
-            <a:avLst/>
-          </a:prstGeom>
-          <a:noFill/>
-          <a:ln/>
-        </p:spPr>
-        <p:txBody>
-          <a:bodyPr wrap="square" lIns="0" tIns="0" rIns="0" bIns="0" rtlCol="0" anchor="ctr"/>
-          <a:lstStyle/>
-          <a:p>
-            <a:pPr algn="ctr" indent="0" marL="0">
-              <a:buNone/>
-            </a:pPr>
-            <a:r>
-              <a:rPr lang="en-US" sz="900" b="1" dirty="0">
-                <a:solidFill>
-                  <a:srgbClr val="9D174D"/>
-                </a:solidFill>
-                <a:latin typeface="Trebuchet MS" pitchFamily="34" charset="0"/>
-                <a:ea typeface="Trebuchet MS" pitchFamily="34" charset="-122"/>
-                <a:cs typeface="Trebuchet MS" pitchFamily="34" charset="-120"/>
-              </a:rPr>
-              <a:t>oi</a:t>
-            </a:r>
-            <a:endParaRPr lang="en-US" sz="900" dirty="0"/>
-          </a:p>
-        </p:txBody>
-      </p:sp>
-      <p:sp>
-        <p:nvSpPr>
-          <p:cNvPr id="46" name="Shape 44"/>
-          <p:cNvSpPr/>
-          <p:nvPr/>
-        </p:nvSpPr>
-        <p:spPr>
-          <a:xfrm>
-            <a:off x="6668262" y="4169664"/>
-            <a:ext cx="685800" cy="475488"/>
-          </a:xfrm>
-          <a:prstGeom prst="rect">
-            <a:avLst>
-              <a:gd name="adj" fmla="val 7692"/>
-            </a:avLst>
-          </a:prstGeom>
-          <a:solidFill>
-            <a:srgbClr val="FFFFFF"/>
-          </a:solidFill>
-          <a:ln w="12700">
-            <a:solidFill>
-              <a:srgbClr val="DB2777"/>
-            </a:solidFill>
-            <a:prstDash val="solid"/>
-          </a:ln>
-        </p:spPr>
-      </p:sp>
-      <p:sp>
-        <p:nvSpPr>
-          <p:cNvPr id="47" name="Text 45"/>
-          <p:cNvSpPr/>
-          <p:nvPr/>
-        </p:nvSpPr>
-        <p:spPr>
-          <a:xfrm>
-            <a:off x="6668262" y="4169664"/>
-            <a:ext cx="685800" cy="475488"/>
-          </a:xfrm>
-          <a:prstGeom prst="rect">
-            <a:avLst/>
-          </a:prstGeom>
-          <a:noFill/>
-          <a:ln/>
-        </p:spPr>
-        <p:txBody>
-          <a:bodyPr wrap="square" lIns="0" tIns="0" rIns="0" bIns="0" rtlCol="0" anchor="ctr"/>
-          <a:lstStyle/>
-          <a:p>
-            <a:pPr algn="ctr" indent="0" marL="0">
-              <a:buNone/>
-            </a:pPr>
-            <a:r>
-              <a:rPr lang="en-US" sz="900" b="1" dirty="0">
-                <a:solidFill>
-                  <a:srgbClr val="9D174D"/>
-                </a:solidFill>
-                <a:latin typeface="Trebuchet MS" pitchFamily="34" charset="0"/>
-                <a:ea typeface="Trebuchet MS" pitchFamily="34" charset="-122"/>
-                <a:cs typeface="Trebuchet MS" pitchFamily="34" charset="-120"/>
-              </a:rPr>
-              <a:t>n</a:t>
-            </a:r>
-            <a:endParaRPr lang="en-US" sz="900" dirty="0"/>
-          </a:p>
-        </p:txBody>
-      </p:sp>
-      <p:sp>
-        <p:nvSpPr>
-          <p:cNvPr id="48" name="Shape 46"/>
-          <p:cNvSpPr/>
-          <p:nvPr/>
-        </p:nvSpPr>
-        <p:spPr>
-          <a:xfrm>
-            <a:off x="7576947" y="4169664"/>
-            <a:ext cx="685800" cy="475488"/>
-          </a:xfrm>
-          <a:prstGeom prst="rect">
-            <a:avLst>
-              <a:gd name="adj" fmla="val 7692"/>
-            </a:avLst>
-          </a:prstGeom>
-          <a:solidFill>
-            <a:srgbClr val="FFFFFF"/>
-          </a:solidFill>
-          <a:ln w="12700">
-            <a:solidFill>
-              <a:srgbClr val="DB2777"/>
-            </a:solidFill>
-            <a:prstDash val="solid"/>
-          </a:ln>
-        </p:spPr>
-      </p:sp>
-      <p:sp>
-        <p:nvSpPr>
-          <p:cNvPr id="49" name="Text 47"/>
-          <p:cNvSpPr/>
-          <p:nvPr/>
-        </p:nvSpPr>
-        <p:spPr>
-          <a:xfrm>
-            <a:off x="7576947" y="4169664"/>
-            <a:ext cx="685800" cy="475488"/>
-          </a:xfrm>
-          <a:prstGeom prst="rect">
-            <a:avLst/>
-          </a:prstGeom>
-          <a:noFill/>
-          <a:ln/>
-        </p:spPr>
-        <p:txBody>
-          <a:bodyPr wrap="square" lIns="0" tIns="0" rIns="0" bIns="0" rtlCol="0" anchor="ctr"/>
-          <a:lstStyle/>
-          <a:p>
-            <a:pPr algn="ctr" indent="0" marL="0">
-              <a:buNone/>
-            </a:pPr>
-            <a:r>
-              <a:rPr lang="en-US" sz="900" b="1" dirty="0">
-                <a:solidFill>
-                  <a:srgbClr val="9D174D"/>
-                </a:solidFill>
-                <a:latin typeface="Trebuchet MS" pitchFamily="34" charset="0"/>
-                <a:ea typeface="Trebuchet MS" pitchFamily="34" charset="-122"/>
-                <a:cs typeface="Trebuchet MS" pitchFamily="34" charset="-120"/>
-              </a:rPr>
-              <a:t>ed</a:t>
+              <a:t>er</a:t>
             </a:r>
             <a:endParaRPr lang="en-US" sz="900" dirty="0"/>
           </a:p>
@@ -27826,7 +27358,7 @@
                 <a:ea typeface="Calibri" pitchFamily="34" charset="-122"/>
                 <a:cs typeface="Calibri" pitchFamily="34" charset="-120"/>
               </a:rPr>
-              <a:t>Word Labs  •  wordlabs.app  •  Root: 'join' = connect or bring together</a:t>
+              <a:t>Word Labs  •  wordlabs.app  •  Root: 'join' = to connect or bring together</a:t>
             </a:r>
             <a:endParaRPr lang="en-US" sz="800" dirty="0"/>
           </a:p>
@@ -27965,7 +27497,7 @@
                 <a:ea typeface="Trebuchet MS" pitchFamily="34" charset="-122"/>
                 <a:cs typeface="Trebuchet MS" pitchFamily="34" charset="-120"/>
               </a:rPr>
-              <a:t>joiner</a:t>
+              <a:t>disjoin</a:t>
             </a:r>
             <a:endParaRPr lang="en-US" sz="2800" dirty="0"/>
           </a:p>
@@ -28653,7 +28185,7 @@
                 <a:ea typeface="Calibri" pitchFamily="34" charset="-122"/>
                 <a:cs typeface="Calibri" pitchFamily="34" charset="-120"/>
               </a:rPr>
-              <a:t>Word Labs  •  wordlabs.app  •  Root: 'join' = connect or bring together</a:t>
+              <a:t>Word Labs  •  wordlabs.app  •  Root: 'join' = to connect or bring together</a:t>
             </a:r>
             <a:endParaRPr lang="en-US" sz="800" dirty="0"/>
           </a:p>
@@ -28792,7 +28324,7 @@
                 <a:ea typeface="Trebuchet MS" pitchFamily="34" charset="-122"/>
                 <a:cs typeface="Trebuchet MS" pitchFamily="34" charset="-120"/>
               </a:rPr>
-              <a:t>joiner</a:t>
+              <a:t>disjoin</a:t>
             </a:r>
             <a:endParaRPr lang="en-US" sz="2800" dirty="0"/>
           </a:p>
@@ -28881,11 +28413,11 @@
             </a:avLst>
           </a:prstGeom>
           <a:solidFill>
-            <a:srgbClr val="CCFBF1"/>
+            <a:srgbClr val="DDD6FE"/>
           </a:solidFill>
           <a:ln w="19050">
             <a:solidFill>
-              <a:srgbClr val="0D9488"/>
+              <a:srgbClr val="7C3AED"/>
             </a:solidFill>
             <a:prstDash val="solid"/>
           </a:ln>
@@ -28925,13 +28457,13 @@
             <a:r>
               <a:rPr lang="en-US" sz="1300" b="1" dirty="0">
                 <a:solidFill>
-                  <a:srgbClr val="0F766E"/>
+                  <a:srgbClr val="4C1D95"/>
                 </a:solidFill>
                 <a:latin typeface="Trebuchet MS" pitchFamily="34" charset="0"/>
                 <a:ea typeface="Trebuchet MS" pitchFamily="34" charset="-122"/>
                 <a:cs typeface="Trebuchet MS" pitchFamily="34" charset="-120"/>
               </a:rPr>
-              <a:t>join</a:t>
+              <a:t>dis</a:t>
             </a:r>
             <a:endParaRPr lang="en-US" sz="1300" dirty="0"/>
           </a:p>
@@ -28970,7 +28502,7 @@
                 <a:ea typeface="Calibri" pitchFamily="34" charset="-122"/>
                 <a:cs typeface="Calibri" pitchFamily="34" charset="-120"/>
               </a:rPr>
-              <a:t>connect or bring together</a:t>
+              <a:t>not or apart</a:t>
             </a:r>
             <a:endParaRPr lang="en-US" sz="850" dirty="0"/>
           </a:p>
@@ -28993,11 +28525,11 @@
             </a:avLst>
           </a:prstGeom>
           <a:solidFill>
-            <a:srgbClr val="FCE7F3"/>
+            <a:srgbClr val="CCFBF1"/>
           </a:solidFill>
           <a:ln w="19050">
             <a:solidFill>
-              <a:srgbClr val="DB2777"/>
+              <a:srgbClr val="0D9488"/>
             </a:solidFill>
             <a:prstDash val="solid"/>
           </a:ln>
@@ -29037,13 +28569,13 @@
             <a:r>
               <a:rPr lang="en-US" sz="1300" b="1" dirty="0">
                 <a:solidFill>
-                  <a:srgbClr val="9D174D"/>
+                  <a:srgbClr val="0F766E"/>
                 </a:solidFill>
                 <a:latin typeface="Trebuchet MS" pitchFamily="34" charset="0"/>
                 <a:ea typeface="Trebuchet MS" pitchFamily="34" charset="-122"/>
                 <a:cs typeface="Trebuchet MS" pitchFamily="34" charset="-120"/>
               </a:rPr>
-              <a:t>er</a:t>
+              <a:t>join</a:t>
             </a:r>
             <a:endParaRPr lang="en-US" sz="1300" dirty="0"/>
           </a:p>
@@ -29082,7 +28614,7 @@
                 <a:ea typeface="Calibri" pitchFamily="34" charset="-122"/>
                 <a:cs typeface="Calibri" pitchFamily="34" charset="-120"/>
               </a:rPr>
-              <a:t>a person who does something</a:t>
+              <a:t>to connect or bring together</a:t>
             </a:r>
             <a:endParaRPr lang="en-US" sz="850" dirty="0"/>
           </a:p>
@@ -29638,7 +29170,7 @@
                 <a:ea typeface="Calibri" pitchFamily="34" charset="-122"/>
                 <a:cs typeface="Calibri" pitchFamily="34" charset="-120"/>
               </a:rPr>
-              <a:t>Word Labs  •  wordlabs.app  •  Root: 'join' = connect or bring together</a:t>
+              <a:t>Word Labs  •  wordlabs.app  •  Root: 'join' = to connect or bring together</a:t>
             </a:r>
             <a:endParaRPr lang="en-US" sz="800" dirty="0"/>
           </a:p>
@@ -29777,7 +29309,7 @@
                 <a:ea typeface="Trebuchet MS" pitchFamily="34" charset="-122"/>
                 <a:cs typeface="Trebuchet MS" pitchFamily="34" charset="-120"/>
               </a:rPr>
-              <a:t>joiner</a:t>
+              <a:t>disjoin</a:t>
             </a:r>
             <a:endParaRPr lang="en-US" sz="2800" dirty="0"/>
           </a:p>
@@ -29866,11 +29398,11 @@
             </a:avLst>
           </a:prstGeom>
           <a:solidFill>
-            <a:srgbClr val="CCFBF1"/>
+            <a:srgbClr val="DDD6FE"/>
           </a:solidFill>
           <a:ln w="19050">
             <a:solidFill>
-              <a:srgbClr val="0D9488"/>
+              <a:srgbClr val="7C3AED"/>
             </a:solidFill>
             <a:prstDash val="solid"/>
           </a:ln>
@@ -29910,13 +29442,13 @@
             <a:r>
               <a:rPr lang="en-US" sz="1300" b="1" dirty="0">
                 <a:solidFill>
-                  <a:srgbClr val="0F766E"/>
+                  <a:srgbClr val="4C1D95"/>
                 </a:solidFill>
                 <a:latin typeface="Trebuchet MS" pitchFamily="34" charset="0"/>
                 <a:ea typeface="Trebuchet MS" pitchFamily="34" charset="-122"/>
                 <a:cs typeface="Trebuchet MS" pitchFamily="34" charset="-120"/>
               </a:rPr>
-              <a:t>join</a:t>
+              <a:t>dis</a:t>
             </a:r>
             <a:endParaRPr lang="en-US" sz="1300" dirty="0"/>
           </a:p>
@@ -29955,7 +29487,7 @@
                 <a:ea typeface="Calibri" pitchFamily="34" charset="-122"/>
                 <a:cs typeface="Calibri" pitchFamily="34" charset="-120"/>
               </a:rPr>
-              <a:t>connect or bring together</a:t>
+              <a:t>not or apart</a:t>
             </a:r>
             <a:endParaRPr lang="en-US" sz="850" dirty="0"/>
           </a:p>
@@ -29978,11 +29510,11 @@
             </a:avLst>
           </a:prstGeom>
           <a:solidFill>
-            <a:srgbClr val="FCE7F3"/>
+            <a:srgbClr val="CCFBF1"/>
           </a:solidFill>
           <a:ln w="19050">
             <a:solidFill>
-              <a:srgbClr val="DB2777"/>
+              <a:srgbClr val="0D9488"/>
             </a:solidFill>
             <a:prstDash val="solid"/>
           </a:ln>
@@ -30022,13 +29554,13 @@
             <a:r>
               <a:rPr lang="en-US" sz="1300" b="1" dirty="0">
                 <a:solidFill>
-                  <a:srgbClr val="9D174D"/>
+                  <a:srgbClr val="0F766E"/>
                 </a:solidFill>
                 <a:latin typeface="Trebuchet MS" pitchFamily="34" charset="0"/>
                 <a:ea typeface="Trebuchet MS" pitchFamily="34" charset="-122"/>
                 <a:cs typeface="Trebuchet MS" pitchFamily="34" charset="-120"/>
               </a:rPr>
-              <a:t>er</a:t>
+              <a:t>join</a:t>
             </a:r>
             <a:endParaRPr lang="en-US" sz="1300" dirty="0"/>
           </a:p>
@@ -30067,7 +29599,7 @@
                 <a:ea typeface="Calibri" pitchFamily="34" charset="-122"/>
                 <a:cs typeface="Calibri" pitchFamily="34" charset="-120"/>
               </a:rPr>
-              <a:t>a person who does something</a:t>
+              <a:t>to connect or bring together</a:t>
             </a:r>
             <a:endParaRPr lang="en-US" sz="850" dirty="0"/>
           </a:p>
@@ -30226,7 +29758,7 @@
                 <a:ea typeface="Trebuchet MS" pitchFamily="34" charset="-122"/>
                 <a:cs typeface="Trebuchet MS" pitchFamily="34" charset="-120"/>
               </a:rPr>
-              <a:t>join</a:t>
+              <a:t>dis</a:t>
             </a:r>
             <a:endParaRPr lang="en-US" sz="1400" dirty="0"/>
           </a:p>
@@ -30331,7 +29863,7 @@
                 <a:ea typeface="Trebuchet MS" pitchFamily="34" charset="-122"/>
                 <a:cs typeface="Trebuchet MS" pitchFamily="34" charset="-120"/>
               </a:rPr>
-              <a:t>er</a:t>
+              <a:t>join</a:t>
             </a:r>
             <a:endParaRPr lang="en-US" sz="1400" dirty="0"/>
           </a:p>
@@ -30755,7 +30287,7 @@
                 <a:ea typeface="Calibri" pitchFamily="34" charset="-122"/>
                 <a:cs typeface="Calibri" pitchFamily="34" charset="-120"/>
               </a:rPr>
-              <a:t>Word Labs  •  wordlabs.app  •  Root: 'join' = connect or bring together</a:t>
+              <a:t>Word Labs  •  wordlabs.app  •  Root: 'join' = to connect or bring together</a:t>
             </a:r>
             <a:endParaRPr lang="en-US" sz="800" dirty="0"/>
           </a:p>
@@ -30894,7 +30426,7 @@
                 <a:ea typeface="Trebuchet MS" pitchFamily="34" charset="-122"/>
                 <a:cs typeface="Trebuchet MS" pitchFamily="34" charset="-120"/>
               </a:rPr>
-              <a:t>joiner</a:t>
+              <a:t>disjoin</a:t>
             </a:r>
             <a:endParaRPr lang="en-US" sz="2800" dirty="0"/>
           </a:p>
@@ -30983,11 +30515,11 @@
             </a:avLst>
           </a:prstGeom>
           <a:solidFill>
-            <a:srgbClr val="CCFBF1"/>
+            <a:srgbClr val="DDD6FE"/>
           </a:solidFill>
           <a:ln w="19050">
             <a:solidFill>
-              <a:srgbClr val="0D9488"/>
+              <a:srgbClr val="7C3AED"/>
             </a:solidFill>
             <a:prstDash val="solid"/>
           </a:ln>
@@ -31027,13 +30559,13 @@
             <a:r>
               <a:rPr lang="en-US" sz="1300" b="1" dirty="0">
                 <a:solidFill>
-                  <a:srgbClr val="0F766E"/>
+                  <a:srgbClr val="4C1D95"/>
                 </a:solidFill>
                 <a:latin typeface="Trebuchet MS" pitchFamily="34" charset="0"/>
                 <a:ea typeface="Trebuchet MS" pitchFamily="34" charset="-122"/>
                 <a:cs typeface="Trebuchet MS" pitchFamily="34" charset="-120"/>
               </a:rPr>
-              <a:t>join</a:t>
+              <a:t>dis</a:t>
             </a:r>
             <a:endParaRPr lang="en-US" sz="1300" dirty="0"/>
           </a:p>
@@ -31072,7 +30604,7 @@
                 <a:ea typeface="Calibri" pitchFamily="34" charset="-122"/>
                 <a:cs typeface="Calibri" pitchFamily="34" charset="-120"/>
               </a:rPr>
-              <a:t>connect or bring together</a:t>
+              <a:t>not or apart</a:t>
             </a:r>
             <a:endParaRPr lang="en-US" sz="850" dirty="0"/>
           </a:p>
@@ -31095,11 +30627,11 @@
             </a:avLst>
           </a:prstGeom>
           <a:solidFill>
-            <a:srgbClr val="FCE7F3"/>
+            <a:srgbClr val="CCFBF1"/>
           </a:solidFill>
           <a:ln w="19050">
             <a:solidFill>
-              <a:srgbClr val="DB2777"/>
+              <a:srgbClr val="0D9488"/>
             </a:solidFill>
             <a:prstDash val="solid"/>
           </a:ln>
@@ -31139,13 +30671,13 @@
             <a:r>
               <a:rPr lang="en-US" sz="1300" b="1" dirty="0">
                 <a:solidFill>
-                  <a:srgbClr val="9D174D"/>
+                  <a:srgbClr val="0F766E"/>
                 </a:solidFill>
                 <a:latin typeface="Trebuchet MS" pitchFamily="34" charset="0"/>
                 <a:ea typeface="Trebuchet MS" pitchFamily="34" charset="-122"/>
                 <a:cs typeface="Trebuchet MS" pitchFamily="34" charset="-120"/>
               </a:rPr>
-              <a:t>er</a:t>
+              <a:t>join</a:t>
             </a:r>
             <a:endParaRPr lang="en-US" sz="1300" dirty="0"/>
           </a:p>
@@ -31184,7 +30716,7 @@
                 <a:ea typeface="Calibri" pitchFamily="34" charset="-122"/>
                 <a:cs typeface="Calibri" pitchFamily="34" charset="-120"/>
               </a:rPr>
-              <a:t>a person who does something</a:t>
+              <a:t>to connect or bring together</a:t>
             </a:r>
             <a:endParaRPr lang="en-US" sz="850" dirty="0"/>
           </a:p>
@@ -31343,7 +30875,7 @@
                 <a:ea typeface="Trebuchet MS" pitchFamily="34" charset="-122"/>
                 <a:cs typeface="Trebuchet MS" pitchFamily="34" charset="-120"/>
               </a:rPr>
-              <a:t>join</a:t>
+              <a:t>dis</a:t>
             </a:r>
             <a:endParaRPr lang="en-US" sz="1400" dirty="0"/>
           </a:p>
@@ -31448,7 +30980,7 @@
                 <a:ea typeface="Trebuchet MS" pitchFamily="34" charset="-122"/>
                 <a:cs typeface="Trebuchet MS" pitchFamily="34" charset="-120"/>
               </a:rPr>
-              <a:t>er</a:t>
+              <a:t>join</a:t>
             </a:r>
             <a:endParaRPr lang="en-US" sz="1400" dirty="0"/>
           </a:p>
@@ -31555,7 +31087,7 @@
         </p:nvSpPr>
         <p:spPr>
           <a:xfrm>
-            <a:off x="2670048" y="4169664"/>
+            <a:off x="2254649" y="4169664"/>
             <a:ext cx="685800" cy="475488"/>
           </a:xfrm>
           <a:prstGeom prst="rect">
@@ -31582,7 +31114,7 @@
         </p:nvSpPr>
         <p:spPr>
           <a:xfrm>
-            <a:off x="2670048" y="4169664"/>
+            <a:off x="2254649" y="4169664"/>
             <a:ext cx="685800" cy="475488"/>
           </a:xfrm>
           <a:prstGeom prst="rect">
@@ -31607,7 +31139,7 @@
                 <a:ea typeface="Trebuchet MS" pitchFamily="34" charset="-122"/>
                 <a:cs typeface="Trebuchet MS" pitchFamily="34" charset="-120"/>
               </a:rPr>
-              <a:t>j</a:t>
+              <a:t>d</a:t>
             </a:r>
             <a:endParaRPr lang="en-US" sz="900" dirty="0"/>
           </a:p>
@@ -31621,7 +31153,7 @@
         </p:nvSpPr>
         <p:spPr>
           <a:xfrm>
-            <a:off x="4123944" y="4169664"/>
+            <a:off x="3293146" y="4169664"/>
             <a:ext cx="685800" cy="475488"/>
           </a:xfrm>
           <a:prstGeom prst="rect">
@@ -31648,7 +31180,7 @@
         </p:nvSpPr>
         <p:spPr>
           <a:xfrm>
-            <a:off x="4123944" y="4169664"/>
+            <a:off x="3293146" y="4169664"/>
             <a:ext cx="685800" cy="475488"/>
           </a:xfrm>
           <a:prstGeom prst="rect">
@@ -31673,7 +31205,7 @@
                 <a:ea typeface="Trebuchet MS" pitchFamily="34" charset="-122"/>
                 <a:cs typeface="Trebuchet MS" pitchFamily="34" charset="-120"/>
               </a:rPr>
-              <a:t>oi</a:t>
+              <a:t>i</a:t>
             </a:r>
             <a:endParaRPr lang="en-US" sz="900" dirty="0"/>
           </a:p>
@@ -31687,7 +31219,7 @@
         </p:nvSpPr>
         <p:spPr>
           <a:xfrm>
-            <a:off x="5577840" y="4169664"/>
+            <a:off x="4331643" y="4169664"/>
             <a:ext cx="685800" cy="475488"/>
           </a:xfrm>
           <a:prstGeom prst="rect">
@@ -31714,7 +31246,7 @@
         </p:nvSpPr>
         <p:spPr>
           <a:xfrm>
-            <a:off x="5577840" y="4169664"/>
+            <a:off x="4331643" y="4169664"/>
             <a:ext cx="685800" cy="475488"/>
           </a:xfrm>
           <a:prstGeom prst="rect">
@@ -31739,7 +31271,7 @@
                 <a:ea typeface="Trebuchet MS" pitchFamily="34" charset="-122"/>
                 <a:cs typeface="Trebuchet MS" pitchFamily="34" charset="-120"/>
               </a:rPr>
-              <a:t>n</a:t>
+              <a:t>s</a:t>
             </a:r>
             <a:endParaRPr lang="en-US" sz="900" dirty="0"/>
           </a:p>
@@ -31753,7 +31285,7 @@
         </p:nvSpPr>
         <p:spPr>
           <a:xfrm>
-            <a:off x="7031736" y="4169664"/>
+            <a:off x="5370141" y="4169664"/>
             <a:ext cx="685800" cy="475488"/>
           </a:xfrm>
           <a:prstGeom prst="rect">
@@ -31780,7 +31312,7 @@
         </p:nvSpPr>
         <p:spPr>
           <a:xfrm>
-            <a:off x="7031736" y="4169664"/>
+            <a:off x="5370141" y="4169664"/>
             <a:ext cx="685800" cy="475488"/>
           </a:xfrm>
           <a:prstGeom prst="rect">
@@ -31805,7 +31337,139 @@
                 <a:ea typeface="Trebuchet MS" pitchFamily="34" charset="-122"/>
                 <a:cs typeface="Trebuchet MS" pitchFamily="34" charset="-120"/>
               </a:rPr>
-              <a:t>er</a:t>
+              <a:t>j</a:t>
+            </a:r>
+            <a:endParaRPr lang="en-US" sz="900" dirty="0"/>
+          </a:p>
+        </p:txBody>
+      </p:sp>
+      <p:sp>
+        <p:nvSpPr>
+          <p:cNvPr id="41" name="Shape 39"/>
+          <p:cNvSpPr/>
+          <p:nvPr/>
+        </p:nvSpPr>
+        <p:spPr>
+          <a:xfrm>
+            <a:off x="6408638" y="4169664"/>
+            <a:ext cx="685800" cy="475488"/>
+          </a:xfrm>
+          <a:prstGeom prst="rect">
+            <a:avLst>
+              <a:gd name="adj" fmla="val 7692"/>
+            </a:avLst>
+          </a:prstGeom>
+          <a:solidFill>
+            <a:srgbClr val="FFFFFF"/>
+          </a:solidFill>
+          <a:ln w="12700">
+            <a:solidFill>
+              <a:srgbClr val="DB2777"/>
+            </a:solidFill>
+            <a:prstDash val="solid"/>
+          </a:ln>
+        </p:spPr>
+      </p:sp>
+      <p:sp>
+        <p:nvSpPr>
+          <p:cNvPr id="42" name="Text 40"/>
+          <p:cNvSpPr/>
+          <p:nvPr/>
+        </p:nvSpPr>
+        <p:spPr>
+          <a:xfrm>
+            <a:off x="6408638" y="4169664"/>
+            <a:ext cx="685800" cy="475488"/>
+          </a:xfrm>
+          <a:prstGeom prst="rect">
+            <a:avLst/>
+          </a:prstGeom>
+          <a:noFill/>
+          <a:ln/>
+        </p:spPr>
+        <p:txBody>
+          <a:bodyPr wrap="square" lIns="0" tIns="0" rIns="0" bIns="0" rtlCol="0" anchor="ctr"/>
+          <a:lstStyle/>
+          <a:p>
+            <a:pPr algn="ctr" indent="0" marL="0">
+              <a:buNone/>
+            </a:pPr>
+            <a:r>
+              <a:rPr lang="en-US" sz="900" b="1" dirty="0">
+                <a:solidFill>
+                  <a:srgbClr val="9D174D"/>
+                </a:solidFill>
+                <a:latin typeface="Trebuchet MS" pitchFamily="34" charset="0"/>
+                <a:ea typeface="Trebuchet MS" pitchFamily="34" charset="-122"/>
+                <a:cs typeface="Trebuchet MS" pitchFamily="34" charset="-120"/>
+              </a:rPr>
+              <a:t>oi</a:t>
+            </a:r>
+            <a:endParaRPr lang="en-US" sz="900" dirty="0"/>
+          </a:p>
+        </p:txBody>
+      </p:sp>
+      <p:sp>
+        <p:nvSpPr>
+          <p:cNvPr id="43" name="Shape 41"/>
+          <p:cNvSpPr/>
+          <p:nvPr/>
+        </p:nvSpPr>
+        <p:spPr>
+          <a:xfrm>
+            <a:off x="7447135" y="4169664"/>
+            <a:ext cx="685800" cy="475488"/>
+          </a:xfrm>
+          <a:prstGeom prst="rect">
+            <a:avLst>
+              <a:gd name="adj" fmla="val 7692"/>
+            </a:avLst>
+          </a:prstGeom>
+          <a:solidFill>
+            <a:srgbClr val="FFFFFF"/>
+          </a:solidFill>
+          <a:ln w="12700">
+            <a:solidFill>
+              <a:srgbClr val="DB2777"/>
+            </a:solidFill>
+            <a:prstDash val="solid"/>
+          </a:ln>
+        </p:spPr>
+      </p:sp>
+      <p:sp>
+        <p:nvSpPr>
+          <p:cNvPr id="44" name="Text 42"/>
+          <p:cNvSpPr/>
+          <p:nvPr/>
+        </p:nvSpPr>
+        <p:spPr>
+          <a:xfrm>
+            <a:off x="7447135" y="4169664"/>
+            <a:ext cx="685800" cy="475488"/>
+          </a:xfrm>
+          <a:prstGeom prst="rect">
+            <a:avLst/>
+          </a:prstGeom>
+          <a:noFill/>
+          <a:ln/>
+        </p:spPr>
+        <p:txBody>
+          <a:bodyPr wrap="square" lIns="0" tIns="0" rIns="0" bIns="0" rtlCol="0" anchor="ctr"/>
+          <a:lstStyle/>
+          <a:p>
+            <a:pPr algn="ctr" indent="0" marL="0">
+              <a:buNone/>
+            </a:pPr>
+            <a:r>
+              <a:rPr lang="en-US" sz="900" b="1" dirty="0">
+                <a:solidFill>
+                  <a:srgbClr val="9D174D"/>
+                </a:solidFill>
+                <a:latin typeface="Trebuchet MS" pitchFamily="34" charset="0"/>
+                <a:ea typeface="Trebuchet MS" pitchFamily="34" charset="-122"/>
+                <a:cs typeface="Trebuchet MS" pitchFamily="34" charset="-120"/>
+              </a:rPr>
+              <a:t>n</a:t>
             </a:r>
             <a:endParaRPr lang="en-US" sz="900" dirty="0"/>
           </a:p>
@@ -32097,7 +31761,7 @@
                 <a:ea typeface="Calibri" pitchFamily="34" charset="-122"/>
                 <a:cs typeface="Calibri" pitchFamily="34" charset="-120"/>
               </a:rPr>
-              <a:t>Word Labs  •  wordlabs.app  •  Root: 'join' = connect or bring together</a:t>
+              <a:t>Word Labs  •  wordlabs.app  •  Root: 'join' = to connect or bring together</a:t>
             </a:r>
             <a:endParaRPr lang="en-US" sz="800" dirty="0"/>
           </a:p>
@@ -33266,7 +32930,7 @@
                 <a:ea typeface="Calibri" pitchFamily="34" charset="-122"/>
                 <a:cs typeface="Calibri" pitchFamily="34" charset="-120"/>
               </a:rPr>
-              <a:t>Word Labs  •  wordlabs.app  •  Root: 'join' = connect or bring together</a:t>
+              <a:t>Word Labs  •  wordlabs.app  •  Root: 'join' = to connect or bring together</a:t>
             </a:r>
             <a:endParaRPr lang="en-US" sz="800" dirty="0"/>
           </a:p>
@@ -34218,7 +33882,7 @@
                 <a:ea typeface="Trebuchet MS" pitchFamily="34" charset="-122"/>
                 <a:cs typeface="Trebuchet MS" pitchFamily="34" charset="-120"/>
               </a:rPr>
-              <a:t>mis-</a:t>
+              <a:t>ad-</a:t>
             </a:r>
             <a:endParaRPr lang="en-US" sz="1300" dirty="0"/>
           </a:p>
@@ -34307,7 +33971,7 @@
                 <a:ea typeface="Trebuchet MS" pitchFamily="34" charset="-122"/>
                 <a:cs typeface="Trebuchet MS" pitchFamily="34" charset="-120"/>
               </a:rPr>
-              <a:t>-ery</a:t>
+              <a:t>-s</a:t>
             </a:r>
             <a:endParaRPr lang="en-US" sz="1300" dirty="0"/>
           </a:p>
@@ -34676,7 +34340,7 @@
                 <a:ea typeface="Trebuchet MS" pitchFamily="34" charset="-122"/>
                 <a:cs typeface="Trebuchet MS" pitchFamily="34" charset="-120"/>
               </a:rPr>
-              <a:t>joint</a:t>
+              <a:t>rejoin</a:t>
             </a:r>
             <a:endParaRPr lang="en-US" sz="1200" dirty="0"/>
           </a:p>
@@ -34742,7 +34406,7 @@
                 <a:ea typeface="Trebuchet MS" pitchFamily="34" charset="-122"/>
                 <a:cs typeface="Trebuchet MS" pitchFamily="34" charset="-120"/>
               </a:rPr>
-              <a:t>rejoin</a:t>
+              <a:t>disjoin</a:t>
             </a:r>
             <a:endParaRPr lang="en-US" sz="1200" dirty="0"/>
           </a:p>
@@ -34808,7 +34472,7 @@
                 <a:ea typeface="Trebuchet MS" pitchFamily="34" charset="-122"/>
                 <a:cs typeface="Trebuchet MS" pitchFamily="34" charset="-120"/>
               </a:rPr>
-              <a:t>disjoin</a:t>
+              <a:t>conjoin</a:t>
             </a:r>
             <a:endParaRPr lang="en-US" sz="1200" dirty="0"/>
           </a:p>
@@ -34874,7 +34538,7 @@
                 <a:ea typeface="Trebuchet MS" pitchFamily="34" charset="-122"/>
                 <a:cs typeface="Trebuchet MS" pitchFamily="34" charset="-120"/>
               </a:rPr>
-              <a:t>conjoin</a:t>
+              <a:t>joint</a:t>
             </a:r>
             <a:endParaRPr lang="en-US" sz="1200" dirty="0"/>
           </a:p>
@@ -35166,7 +34830,7 @@
                 <a:ea typeface="Calibri" pitchFamily="34" charset="-122"/>
                 <a:cs typeface="Calibri" pitchFamily="34" charset="-120"/>
               </a:rPr>
-              <a:t>Word Labs  •  wordlabs.app  •  Root: 'join' = connect or bring together</a:t>
+              <a:t>Word Labs  •  wordlabs.app  •  Root: 'join' = to connect or bring together</a:t>
             </a:r>
             <a:endParaRPr lang="en-US" sz="800" dirty="0"/>
           </a:p>
@@ -35330,7 +34994,7 @@
                 <a:ea typeface="Calibri" pitchFamily="34" charset="-122"/>
                 <a:cs typeface="Calibri" pitchFamily="34" charset="-120"/>
               </a:rPr>
-              <a:t>The core part of a word carrying its basic meaning. For example, 'join' means 'connect or bring together'.</a:t>
+              <a:t>The core part of a word carrying its basic meaning. For example, 'join' means 'to connect or bring together'.</a:t>
             </a:r>
             <a:endParaRPr lang="en-US" sz="1350" dirty="0"/>
           </a:p>
@@ -35950,7 +35614,7 @@
                 <a:ea typeface="Calibri" pitchFamily="34" charset="-122"/>
                 <a:cs typeface="Calibri" pitchFamily="34" charset="-120"/>
               </a:rPr>
-              <a:t>Word Labs  •  wordlabs.app  •  Root: 'join' = connect or bring together</a:t>
+              <a:t>Word Labs  •  wordlabs.app  •  Root: 'join' = to connect or bring together</a:t>
             </a:r>
             <a:endParaRPr lang="en-US" sz="800" dirty="0"/>
           </a:p>
@@ -36062,7 +35726,7 @@
                 <a:ea typeface="Calibri" pitchFamily="34" charset="-122"/>
                 <a:cs typeface="Calibri" pitchFamily="34" charset="-120"/>
               </a:rPr>
-              <a:t>1.  The root 'join' comes from a Latin word meaning to connect or link together.</a:t>
+              <a:t>1.  The prefix 'dis' in 'disjoin' means to do more joining.</a:t>
             </a:r>
             <a:endParaRPr lang="en-US" sz="1300" dirty="0"/>
           </a:p>
@@ -36085,11 +35749,11 @@
             </a:avLst>
           </a:prstGeom>
           <a:solidFill>
-            <a:srgbClr val="DCFCE7"/>
-          </a:solidFill>
-          <a:ln w="12700">
-            <a:solidFill>
-              <a:srgbClr val="16A34A"/>
+            <a:srgbClr val="FEE2E2"/>
+          </a:solidFill>
+          <a:ln w="12700">
+            <a:solidFill>
+              <a:srgbClr val="DC2626"/>
             </a:solidFill>
             <a:prstDash val="solid"/>
           </a:ln>
@@ -36122,13 +35786,13 @@
             <a:r>
               <a:rPr lang="en-US" sz="1100" b="1" dirty="0">
                 <a:solidFill>
-                  <a:srgbClr val="16A34A"/>
+                  <a:srgbClr val="DC2626"/>
                 </a:solidFill>
                 <a:latin typeface="Trebuchet MS" pitchFamily="34" charset="0"/>
                 <a:ea typeface="Trebuchet MS" pitchFamily="34" charset="-122"/>
                 <a:cs typeface="Trebuchet MS" pitchFamily="34" charset="-120"/>
               </a:rPr>
-              <a:t>TRUE</a:t>
+              <a:t>FALSE</a:t>
             </a:r>
             <a:endParaRPr lang="en-US" sz="1100" dirty="0"/>
           </a:p>
@@ -36201,7 +35865,7 @@
                 <a:ea typeface="Calibri" pitchFamily="34" charset="-122"/>
                 <a:cs typeface="Calibri" pitchFamily="34" charset="-120"/>
               </a:rPr>
-              <a:t>2.  The word 'joint' contains the suffix '-nt' added to the root 'join'.</a:t>
+              <a:t>2.  The word 'joint' contains the root 'join' and means a place where things meet.</a:t>
             </a:r>
             <a:endParaRPr lang="en-US" sz="1300" dirty="0"/>
           </a:p>
@@ -36224,11 +35888,11 @@
             </a:avLst>
           </a:prstGeom>
           <a:solidFill>
-            <a:srgbClr val="FEE2E2"/>
-          </a:solidFill>
-          <a:ln w="12700">
-            <a:solidFill>
-              <a:srgbClr val="DC2626"/>
+            <a:srgbClr val="DCFCE7"/>
+          </a:solidFill>
+          <a:ln w="12700">
+            <a:solidFill>
+              <a:srgbClr val="16A34A"/>
             </a:solidFill>
             <a:prstDash val="solid"/>
           </a:ln>
@@ -36261,13 +35925,13 @@
             <a:r>
               <a:rPr lang="en-US" sz="1100" b="1" dirty="0">
                 <a:solidFill>
-                  <a:srgbClr val="DC2626"/>
+                  <a:srgbClr val="16A34A"/>
                 </a:solidFill>
                 <a:latin typeface="Trebuchet MS" pitchFamily="34" charset="0"/>
                 <a:ea typeface="Trebuchet MS" pitchFamily="34" charset="-122"/>
                 <a:cs typeface="Trebuchet MS" pitchFamily="34" charset="-120"/>
               </a:rPr>
-              <a:t>FALSE</a:t>
+              <a:t>TRUE</a:t>
             </a:r>
             <a:endParaRPr lang="en-US" sz="1100" dirty="0"/>
           </a:p>
@@ -36340,7 +36004,7 @@
                 <a:ea typeface="Calibri" pitchFamily="34" charset="-122"/>
                 <a:cs typeface="Calibri" pitchFamily="34" charset="-120"/>
               </a:rPr>
-              <a:t>3.  The prefix 're-' in 'rejoin' means to do something again.</a:t>
+              <a:t>3.  The root 'join' comes from a Greek word.</a:t>
             </a:r>
             <a:endParaRPr lang="en-US" sz="1300" dirty="0"/>
           </a:p>
@@ -36363,11 +36027,11 @@
             </a:avLst>
           </a:prstGeom>
           <a:solidFill>
-            <a:srgbClr val="DCFCE7"/>
-          </a:solidFill>
-          <a:ln w="12700">
-            <a:solidFill>
-              <a:srgbClr val="16A34A"/>
+            <a:srgbClr val="FEE2E2"/>
+          </a:solidFill>
+          <a:ln w="12700">
+            <a:solidFill>
+              <a:srgbClr val="DC2626"/>
             </a:solidFill>
             <a:prstDash val="solid"/>
           </a:ln>
@@ -36400,13 +36064,13 @@
             <a:r>
               <a:rPr lang="en-US" sz="1100" b="1" dirty="0">
                 <a:solidFill>
-                  <a:srgbClr val="16A34A"/>
+                  <a:srgbClr val="DC2626"/>
                 </a:solidFill>
                 <a:latin typeface="Trebuchet MS" pitchFamily="34" charset="0"/>
                 <a:ea typeface="Trebuchet MS" pitchFamily="34" charset="-122"/>
                 <a:cs typeface="Trebuchet MS" pitchFamily="34" charset="-120"/>
               </a:rPr>
-              <a:t>TRUE</a:t>
+              <a:t>FALSE</a:t>
             </a:r>
             <a:endParaRPr lang="en-US" sz="1100" dirty="0"/>
           </a:p>
@@ -36479,7 +36143,7 @@
                 <a:ea typeface="Calibri" pitchFamily="34" charset="-122"/>
                 <a:cs typeface="Calibri" pitchFamily="34" charset="-120"/>
               </a:rPr>
-              <a:t>4.  A 'joiner' is a person who joins or connects things, such as pieces of wood.</a:t>
+              <a:t>4.  A 'joiner' is someone or something that connects things together.</a:t>
             </a:r>
             <a:endParaRPr lang="en-US" sz="1300" dirty="0"/>
           </a:p>
@@ -36618,7 +36282,7 @@
                 <a:ea typeface="Calibri" pitchFamily="34" charset="-122"/>
                 <a:cs typeface="Calibri" pitchFamily="34" charset="-120"/>
               </a:rPr>
-              <a:t>5.  The prefix 'dis-' in 'disjoin' means to do something faster.</a:t>
+              <a:t>5.  The word 'rejoin' means to join again after leaving.</a:t>
             </a:r>
             <a:endParaRPr lang="en-US" sz="1300" dirty="0"/>
           </a:p>
@@ -36641,11 +36305,11 @@
             </a:avLst>
           </a:prstGeom>
           <a:solidFill>
-            <a:srgbClr val="FEE2E2"/>
-          </a:solidFill>
-          <a:ln w="12700">
-            <a:solidFill>
-              <a:srgbClr val="DC2626"/>
+            <a:srgbClr val="DCFCE7"/>
+          </a:solidFill>
+          <a:ln w="12700">
+            <a:solidFill>
+              <a:srgbClr val="16A34A"/>
             </a:solidFill>
             <a:prstDash val="solid"/>
           </a:ln>
@@ -36678,13 +36342,13 @@
             <a:r>
               <a:rPr lang="en-US" sz="1100" b="1" dirty="0">
                 <a:solidFill>
-                  <a:srgbClr val="DC2626"/>
+                  <a:srgbClr val="16A34A"/>
                 </a:solidFill>
                 <a:latin typeface="Trebuchet MS" pitchFamily="34" charset="0"/>
                 <a:ea typeface="Trebuchet MS" pitchFamily="34" charset="-122"/>
                 <a:cs typeface="Trebuchet MS" pitchFamily="34" charset="-120"/>
               </a:rPr>
-              <a:t>FALSE</a:t>
+              <a:t>TRUE</a:t>
             </a:r>
             <a:endParaRPr lang="en-US" sz="1100" dirty="0"/>
           </a:p>
@@ -36976,7 +36640,7 @@
                 <a:ea typeface="Calibri" pitchFamily="34" charset="-122"/>
                 <a:cs typeface="Calibri" pitchFamily="34" charset="-120"/>
               </a:rPr>
-              <a:t>Word Labs  •  wordlabs.app  •  Root: 'join' = connect or bring together</a:t>
+              <a:t>Word Labs  •  wordlabs.app  •  Root: 'join' = to connect or bring together</a:t>
             </a:r>
             <a:endParaRPr lang="en-US" sz="800" dirty="0"/>
           </a:p>
@@ -37113,7 +36777,7 @@
                 <a:ea typeface="Trebuchet MS" pitchFamily="34" charset="-122"/>
                 <a:cs typeface="Trebuchet MS" pitchFamily="34" charset="-120"/>
               </a:rPr>
-              <a:t>connect or bring together</a:t>
+              <a:t>to connect or bring together</a:t>
             </a:r>
             <a:endParaRPr lang="en-US" sz="2000" dirty="0"/>
           </a:p>
@@ -37521,7 +37185,7 @@
                 <a:ea typeface="Trebuchet MS" pitchFamily="34" charset="-122"/>
                 <a:cs typeface="Trebuchet MS" pitchFamily="34" charset="-120"/>
               </a:rPr>
-              <a:t>joint</a:t>
+              <a:t>rejoin</a:t>
             </a:r>
             <a:endParaRPr lang="en-US" sz="1300" dirty="0"/>
           </a:p>
@@ -37587,7 +37251,7 @@
                 <a:ea typeface="Trebuchet MS" pitchFamily="34" charset="-122"/>
                 <a:cs typeface="Trebuchet MS" pitchFamily="34" charset="-120"/>
               </a:rPr>
-              <a:t>rejoin</a:t>
+              <a:t>disjoin</a:t>
             </a:r>
             <a:endParaRPr lang="en-US" sz="1300" dirty="0"/>
           </a:p>
@@ -37653,7 +37317,7 @@
                 <a:ea typeface="Trebuchet MS" pitchFamily="34" charset="-122"/>
                 <a:cs typeface="Trebuchet MS" pitchFamily="34" charset="-120"/>
               </a:rPr>
-              <a:t>disjoin</a:t>
+              <a:t>conjoin</a:t>
             </a:r>
             <a:endParaRPr lang="en-US" sz="1300" dirty="0"/>
           </a:p>
@@ -37945,7 +37609,7 @@
                 <a:ea typeface="Calibri" pitchFamily="34" charset="-122"/>
                 <a:cs typeface="Calibri" pitchFamily="34" charset="-120"/>
               </a:rPr>
-              <a:t>Word Labs  •  wordlabs.app  •  Root: 'join' = connect or bring together</a:t>
+              <a:t>Word Labs  •  wordlabs.app  •  Root: 'join' = to connect or bring together</a:t>
             </a:r>
             <a:endParaRPr lang="en-US" sz="800" dirty="0"/>
           </a:p>
@@ -38897,7 +38561,7 @@
                 <a:ea typeface="Trebuchet MS" pitchFamily="34" charset="-122"/>
                 <a:cs typeface="Trebuchet MS" pitchFamily="34" charset="-120"/>
               </a:rPr>
-              <a:t>mis-</a:t>
+              <a:t>ad-</a:t>
             </a:r>
             <a:endParaRPr lang="en-US" sz="1300" dirty="0"/>
           </a:p>
@@ -38986,7 +38650,7 @@
                 <a:ea typeface="Trebuchet MS" pitchFamily="34" charset="-122"/>
                 <a:cs typeface="Trebuchet MS" pitchFamily="34" charset="-120"/>
               </a:rPr>
-              <a:t>-ery</a:t>
+              <a:t>-s</a:t>
             </a:r>
             <a:endParaRPr lang="en-US" sz="1300" dirty="0"/>
           </a:p>
@@ -39719,7 +39383,7 @@
                 <a:ea typeface="Calibri" pitchFamily="34" charset="-122"/>
                 <a:cs typeface="Calibri" pitchFamily="34" charset="-120"/>
               </a:rPr>
-              <a:t>Word Labs  •  wordlabs.app  •  Root: 'join' = connect or bring together</a:t>
+              <a:t>Word Labs  •  wordlabs.app  •  Root: 'join' = to connect or bring together</a:t>
             </a:r>
             <a:endParaRPr lang="en-US" sz="800" dirty="0"/>
           </a:p>
@@ -39897,7 +39561,7 @@
                 <a:ea typeface="Calibri" pitchFamily="34" charset="-122"/>
                 <a:cs typeface="Calibri" pitchFamily="34" charset="-120"/>
               </a:rPr>
-              <a:t>The act of connecting or coming together with something.</a:t>
+              <a:t>The act of connecting or coming together with others.</a:t>
             </a:r>
             <a:endParaRPr lang="en-US" sz="1200" dirty="0"/>
           </a:p>
@@ -40036,7 +39700,7 @@
                 <a:ea typeface="Calibri" pitchFamily="34" charset="-122"/>
                 <a:cs typeface="Calibri" pitchFamily="34" charset="-120"/>
               </a:rPr>
-              <a:t>To join again after being separated from a group or place.</a:t>
+              <a:t>To separate or disconnect things that were joined together.</a:t>
             </a:r>
             <a:endParaRPr lang="en-US" sz="1200" dirty="0"/>
           </a:p>
@@ -40175,7 +39839,7 @@
                 <a:ea typeface="Calibri" pitchFamily="34" charset="-122"/>
                 <a:cs typeface="Calibri" pitchFamily="34" charset="-120"/>
               </a:rPr>
-              <a:t>To connect two or more things together.</a:t>
+              <a:t>To connect two or more things or people together.</a:t>
             </a:r>
             <a:endParaRPr lang="en-US" sz="1200" dirty="0"/>
           </a:p>
@@ -40314,7 +39978,7 @@
                 <a:ea typeface="Calibri" pitchFamily="34" charset="-122"/>
                 <a:cs typeface="Calibri" pitchFamily="34" charset="-120"/>
               </a:rPr>
-              <a:t>To separate or disconnect things that were joined together.</a:t>
+              <a:t>To join two things together to make one combined thing.</a:t>
             </a:r>
             <a:endParaRPr lang="en-US" sz="1200" dirty="0"/>
           </a:p>
@@ -40387,7 +40051,7 @@
                 <a:ea typeface="Trebuchet MS" pitchFamily="34" charset="-122"/>
                 <a:cs typeface="Trebuchet MS" pitchFamily="34" charset="-120"/>
               </a:rPr>
-              <a:t>joint</a:t>
+              <a:t>rejoin</a:t>
             </a:r>
             <a:endParaRPr lang="en-US" sz="1200" dirty="0"/>
           </a:p>
@@ -40453,7 +40117,7 @@
                 <a:ea typeface="Calibri" pitchFamily="34" charset="-122"/>
                 <a:cs typeface="Calibri" pitchFamily="34" charset="-120"/>
               </a:rPr>
-              <a:t>A place where two things are joined together, like your knee joint.</a:t>
+              <a:t>To go back and connect with a group or path again.</a:t>
             </a:r>
             <a:endParaRPr lang="en-US" sz="1200" dirty="0"/>
           </a:p>
@@ -40526,7 +40190,7 @@
                 <a:ea typeface="Trebuchet MS" pitchFamily="34" charset="-122"/>
                 <a:cs typeface="Trebuchet MS" pitchFamily="34" charset="-120"/>
               </a:rPr>
-              <a:t>rejoin</a:t>
+              <a:t>disjoin</a:t>
             </a:r>
             <a:endParaRPr lang="en-US" sz="1200" dirty="0"/>
           </a:p>
@@ -40592,7 +40256,7 @@
                 <a:ea typeface="Calibri" pitchFamily="34" charset="-122"/>
                 <a:cs typeface="Calibri" pitchFamily="34" charset="-120"/>
               </a:rPr>
-              <a:t>A person who connects things, or a woodworker who joins pieces of wood.</a:t>
+              <a:t>A person who joins things together, or someone who likes to join groups.</a:t>
             </a:r>
             <a:endParaRPr lang="en-US" sz="1200" dirty="0"/>
           </a:p>
@@ -40665,7 +40329,7 @@
                 <a:ea typeface="Trebuchet MS" pitchFamily="34" charset="-122"/>
                 <a:cs typeface="Trebuchet MS" pitchFamily="34" charset="-120"/>
               </a:rPr>
-              <a:t>disjoin</a:t>
+              <a:t>conjoin</a:t>
             </a:r>
             <a:endParaRPr lang="en-US" sz="1200" dirty="0"/>
           </a:p>
@@ -40731,7 +40395,7 @@
                 <a:ea typeface="Calibri" pitchFamily="34" charset="-122"/>
                 <a:cs typeface="Calibri" pitchFamily="34" charset="-120"/>
               </a:rPr>
-              <a:t>Already connected or put together with something else.</a:t>
+              <a:t>Already connected or brought together with something else.</a:t>
             </a:r>
             <a:endParaRPr lang="en-US" sz="1200" dirty="0"/>
           </a:p>
@@ -41023,7 +40687,7 @@
                 <a:ea typeface="Calibri" pitchFamily="34" charset="-122"/>
                 <a:cs typeface="Calibri" pitchFamily="34" charset="-120"/>
               </a:rPr>
-              <a:t>Word Labs  •  wordlabs.app  •  Root: 'join' = connect or bring together</a:t>
+              <a:t>Word Labs  •  wordlabs.app  •  Root: 'join' = to connect or bring together</a:t>
             </a:r>
             <a:endParaRPr lang="en-US" sz="800" dirty="0"/>
           </a:p>
@@ -41226,7 +40890,7 @@
                 <a:ea typeface="Calibri" pitchFamily="34" charset="-122"/>
                 <a:cs typeface="Calibri" pitchFamily="34" charset="-120"/>
               </a:rPr>
-              <a:t>We asked everyone to rejoin the group after the morning tea break.</a:t>
+              <a:t>The two rivers conjoin at the bottom of the valley to form one wide, powerful river.</a:t>
             </a:r>
             <a:endParaRPr lang="en-US" sz="1500" dirty="0"/>
           </a:p>
@@ -41390,7 +41054,7 @@
                 <a:ea typeface="Calibri" pitchFamily="34" charset="-122"/>
                 <a:cs typeface="Calibri" pitchFamily="34" charset="-120"/>
               </a:rPr>
-              <a:t>The carpenter was a skilled joiner who could connect pieces of timber perfectly.</a:t>
+              <a:t>After the holidays, Marcus was excited to rejoin his friends at school and share his stories.</a:t>
             </a:r>
             <a:endParaRPr lang="en-US" sz="1500" dirty="0"/>
           </a:p>
@@ -41554,7 +41218,7 @@
                 <a:ea typeface="Calibri" pitchFamily="34" charset="-122"/>
                 <a:cs typeface="Calibri" pitchFamily="34" charset="-120"/>
               </a:rPr>
-              <a:t>Can you find the joint where the two pipes are connected under the sink?</a:t>
+              <a:t>The carpenter checked every joint carefully to make sure the wooden frame would hold together.</a:t>
             </a:r>
             <a:endParaRPr lang="en-US" sz="1500" dirty="0"/>
           </a:p>

--- a/output/wordlabs-join-3day.pptx
+++ b/output/wordlabs-join-3day.pptx
@@ -4240,7 +4240,7 @@
                 <a:ea typeface="Calibri" pitchFamily="34" charset="-122"/>
                 <a:cs typeface="Calibri" pitchFamily="34" charset="-120"/>
               </a:rPr>
-              <a:t>"to connect or bring together"</a:t>
+              <a:t>"connect"</a:t>
             </a:r>
             <a:endParaRPr lang="en-US" sz="2200" dirty="0"/>
           </a:p>
@@ -4279,7 +4279,7 @@
                 <a:ea typeface="Calibri" pitchFamily="34" charset="-122"/>
                 <a:cs typeface="Calibri" pitchFamily="34" charset="-120"/>
               </a:rPr>
-              <a:t>Origin: Latin: jungere</a:t>
+              <a:t>Origin: Core English root</a:t>
             </a:r>
             <a:endParaRPr lang="en-US" sz="1300" dirty="0"/>
           </a:p>
@@ -5288,7 +5288,7 @@
                 <a:ea typeface="Calibri" pitchFamily="34" charset="-122"/>
                 <a:cs typeface="Calibri" pitchFamily="34" charset="-120"/>
               </a:rPr>
-              <a:t>Word Labs  •  wordlabs.app  •  Root: 'join' = to connect or bring together</a:t>
+              <a:t>Word Labs  •  wordlabs.app  •  Root: 'join' = connect</a:t>
             </a:r>
             <a:endParaRPr lang="en-US" sz="800" dirty="0"/>
           </a:p>
@@ -5622,7 +5622,7 @@
                 <a:ea typeface="Trebuchet MS" pitchFamily="34" charset="-122"/>
                 <a:cs typeface="Trebuchet MS" pitchFamily="34" charset="-120"/>
               </a:rPr>
-              <a:t>1</a:t>
+              <a:t>0</a:t>
             </a:r>
             <a:pPr algn="ctr" indent="0" marL="0">
               <a:buNone/>
@@ -5928,7 +5928,7 @@
                 <a:ea typeface="Calibri" pitchFamily="34" charset="-122"/>
                 <a:cs typeface="Calibri" pitchFamily="34" charset="-120"/>
               </a:rPr>
-              <a:t>Word Labs  •  wordlabs.app  •  Root: 'join' = to connect or bring together</a:t>
+              <a:t>Word Labs  •  wordlabs.app  •  Root: 'join' = connect</a:t>
             </a:r>
             <a:endParaRPr lang="en-US" sz="800" dirty="0"/>
           </a:p>
@@ -6040,7 +6040,7 @@
                 <a:ea typeface="Calibri" pitchFamily="34" charset="-122"/>
                 <a:cs typeface="Calibri" pitchFamily="34" charset="-120"/>
               </a:rPr>
-              <a:t>The students were </a:t>
+              <a:t>She is </a:t>
             </a:r>
             <a:pPr algn="l" indent="0" marL="0">
               <a:buNone/>
@@ -6071,7 +6071,7 @@
                 <a:ea typeface="Calibri" pitchFamily="34" charset="-122"/>
                 <a:cs typeface="Calibri" pitchFamily="34" charset="-120"/>
               </a:rPr>
-              <a:t> the science club, and they hoped to </a:t>
+              <a:t> the choir this term. He </a:t>
             </a:r>
             <a:pPr algn="l" indent="0" marL="0">
               <a:buNone/>
@@ -6088,7 +6088,7 @@
                 <a:ea typeface="Calibri" pitchFamily="34" charset="-122"/>
                 <a:cs typeface="Calibri" pitchFamily="34" charset="-120"/>
               </a:rPr>
-              <a:t>rejoin</a:t>
+              <a:t>rejoined</a:t>
             </a:r>
             <a:pPr algn="l" indent="0" marL="0">
               <a:buNone/>
@@ -6102,7 +6102,7 @@
                 <a:ea typeface="Calibri" pitchFamily="34" charset="-122"/>
                 <a:cs typeface="Calibri" pitchFamily="34" charset="-120"/>
               </a:rPr>
-              <a:t> next year as well.</a:t>
+              <a:t> the football team after recovering from his injury.</a:t>
             </a:r>
             <a:endParaRPr lang="en-US" sz="1800" dirty="0"/>
           </a:p>
@@ -6385,7 +6385,7 @@
                 <a:ea typeface="Trebuchet MS" pitchFamily="34" charset="-122"/>
                 <a:cs typeface="Trebuchet MS" pitchFamily="34" charset="-120"/>
               </a:rPr>
-              <a:t>rejoin</a:t>
+              <a:t>rejoined</a:t>
             </a:r>
             <a:endParaRPr lang="en-US" sz="1400" dirty="0"/>
           </a:p>
@@ -6716,7 +6716,7 @@
                 <a:ea typeface="Calibri" pitchFamily="34" charset="-122"/>
                 <a:cs typeface="Calibri" pitchFamily="34" charset="-120"/>
               </a:rPr>
-              <a:t>Word Labs  •  wordlabs.app  •  Root: 'join' = to connect or bring together</a:t>
+              <a:t>Word Labs  •  wordlabs.app  •  Root: 'join' = connect</a:t>
             </a:r>
             <a:endParaRPr lang="en-US" sz="800" dirty="0"/>
           </a:p>
@@ -7543,7 +7543,7 @@
                 <a:ea typeface="Calibri" pitchFamily="34" charset="-122"/>
                 <a:cs typeface="Calibri" pitchFamily="34" charset="-120"/>
               </a:rPr>
-              <a:t>Word Labs  •  wordlabs.app  •  Root: 'join' = to connect or bring together</a:t>
+              <a:t>Word Labs  •  wordlabs.app  •  Root: 'join' = connect</a:t>
             </a:r>
             <a:endParaRPr lang="en-US" sz="800" dirty="0"/>
           </a:p>
@@ -7860,7 +7860,7 @@
                 <a:ea typeface="Calibri" pitchFamily="34" charset="-122"/>
                 <a:cs typeface="Calibri" pitchFamily="34" charset="-120"/>
               </a:rPr>
-              <a:t>to connect or bring together</a:t>
+              <a:t>connect</a:t>
             </a:r>
             <a:endParaRPr lang="en-US" sz="850" dirty="0"/>
           </a:p>
@@ -7972,7 +7972,7 @@
                 <a:ea typeface="Calibri" pitchFamily="34" charset="-122"/>
                 <a:cs typeface="Calibri" pitchFamily="34" charset="-120"/>
               </a:rPr>
-              <a:t>action happening now</a:t>
+              <a:t>happening now</a:t>
             </a:r>
             <a:endParaRPr lang="en-US" sz="850" dirty="0"/>
           </a:p>
@@ -8528,7 +8528,7 @@
                 <a:ea typeface="Calibri" pitchFamily="34" charset="-122"/>
                 <a:cs typeface="Calibri" pitchFamily="34" charset="-120"/>
               </a:rPr>
-              <a:t>Word Labs  •  wordlabs.app  •  Root: 'join' = to connect or bring together</a:t>
+              <a:t>Word Labs  •  wordlabs.app  •  Root: 'join' = connect</a:t>
             </a:r>
             <a:endParaRPr lang="en-US" sz="800" dirty="0"/>
           </a:p>
@@ -8845,7 +8845,7 @@
                 <a:ea typeface="Calibri" pitchFamily="34" charset="-122"/>
                 <a:cs typeface="Calibri" pitchFamily="34" charset="-120"/>
               </a:rPr>
-              <a:t>to connect or bring together</a:t>
+              <a:t>connect</a:t>
             </a:r>
             <a:endParaRPr lang="en-US" sz="850" dirty="0"/>
           </a:p>
@@ -8957,7 +8957,7 @@
                 <a:ea typeface="Calibri" pitchFamily="34" charset="-122"/>
                 <a:cs typeface="Calibri" pitchFamily="34" charset="-120"/>
               </a:rPr>
-              <a:t>action happening now</a:t>
+              <a:t>happening now</a:t>
             </a:r>
             <a:endParaRPr lang="en-US" sz="850" dirty="0"/>
           </a:p>
@@ -9645,7 +9645,7 @@
                 <a:ea typeface="Calibri" pitchFamily="34" charset="-122"/>
                 <a:cs typeface="Calibri" pitchFamily="34" charset="-120"/>
               </a:rPr>
-              <a:t>Word Labs  •  wordlabs.app  •  Root: 'join' = to connect or bring together</a:t>
+              <a:t>Word Labs  •  wordlabs.app  •  Root: 'join' = connect</a:t>
             </a:r>
             <a:endParaRPr lang="en-US" sz="800" dirty="0"/>
           </a:p>
@@ -9962,7 +9962,7 @@
                 <a:ea typeface="Calibri" pitchFamily="34" charset="-122"/>
                 <a:cs typeface="Calibri" pitchFamily="34" charset="-120"/>
               </a:rPr>
-              <a:t>to connect or bring together</a:t>
+              <a:t>connect</a:t>
             </a:r>
             <a:endParaRPr lang="en-US" sz="850" dirty="0"/>
           </a:p>
@@ -10074,7 +10074,7 @@
                 <a:ea typeface="Calibri" pitchFamily="34" charset="-122"/>
                 <a:cs typeface="Calibri" pitchFamily="34" charset="-120"/>
               </a:rPr>
-              <a:t>action happening now</a:t>
+              <a:t>happening now</a:t>
             </a:r>
             <a:endParaRPr lang="en-US" sz="850" dirty="0"/>
           </a:p>
@@ -11053,7 +11053,7 @@
                 <a:ea typeface="Calibri" pitchFamily="34" charset="-122"/>
                 <a:cs typeface="Calibri" pitchFamily="34" charset="-120"/>
               </a:rPr>
-              <a:t>Word Labs  •  wordlabs.app  •  Root: 'join' = to connect or bring together</a:t>
+              <a:t>Word Labs  •  wordlabs.app  •  Root: 'join' = connect</a:t>
             </a:r>
             <a:endParaRPr lang="en-US" sz="800" dirty="0"/>
           </a:p>
@@ -11192,7 +11192,7 @@
                 <a:ea typeface="Trebuchet MS" pitchFamily="34" charset="-122"/>
                 <a:cs typeface="Trebuchet MS" pitchFamily="34" charset="-120"/>
               </a:rPr>
-              <a:t>rejoin</a:t>
+              <a:t>rejoined</a:t>
             </a:r>
             <a:endParaRPr lang="en-US" sz="2800" dirty="0"/>
           </a:p>
@@ -11880,7 +11880,7 @@
                 <a:ea typeface="Calibri" pitchFamily="34" charset="-122"/>
                 <a:cs typeface="Calibri" pitchFamily="34" charset="-120"/>
               </a:rPr>
-              <a:t>Word Labs  •  wordlabs.app  •  Root: 'join' = to connect or bring together</a:t>
+              <a:t>Word Labs  •  wordlabs.app  •  Root: 'join' = connect</a:t>
             </a:r>
             <a:endParaRPr lang="en-US" sz="800" dirty="0"/>
           </a:p>
@@ -12019,7 +12019,7 @@
                 <a:ea typeface="Trebuchet MS" pitchFamily="34" charset="-122"/>
                 <a:cs typeface="Trebuchet MS" pitchFamily="34" charset="-120"/>
               </a:rPr>
-              <a:t>rejoin</a:t>
+              <a:t>rejoined</a:t>
             </a:r>
             <a:endParaRPr lang="en-US" sz="2800" dirty="0"/>
           </a:p>
@@ -12099,7 +12099,7 @@
         </p:nvSpPr>
         <p:spPr>
           <a:xfrm>
-            <a:off x="2938272" y="2258568"/>
+            <a:off x="2221992" y="2258568"/>
             <a:ext cx="1828800" cy="292608"/>
           </a:xfrm>
           <a:prstGeom prst="rect">
@@ -12133,7 +12133,7 @@
         </p:nvSpPr>
         <p:spPr>
           <a:xfrm>
-            <a:off x="2938272" y="2258568"/>
+            <a:off x="2221992" y="2258568"/>
             <a:ext cx="1828800" cy="292608"/>
           </a:xfrm>
           <a:prstGeom prst="rect">
@@ -12172,7 +12172,7 @@
         </p:nvSpPr>
         <p:spPr>
           <a:xfrm>
-            <a:off x="2938272" y="2569464"/>
+            <a:off x="2221992" y="2569464"/>
             <a:ext cx="1828800" cy="201168"/>
           </a:xfrm>
           <a:prstGeom prst="rect">
@@ -12211,7 +12211,7 @@
         </p:nvSpPr>
         <p:spPr>
           <a:xfrm>
-            <a:off x="5803392" y="2258568"/>
+            <a:off x="4370832" y="2258568"/>
             <a:ext cx="1828800" cy="292608"/>
           </a:xfrm>
           <a:prstGeom prst="rect">
@@ -12245,7 +12245,7 @@
         </p:nvSpPr>
         <p:spPr>
           <a:xfrm>
-            <a:off x="5803392" y="2258568"/>
+            <a:off x="4370832" y="2258568"/>
             <a:ext cx="1828800" cy="292608"/>
           </a:xfrm>
           <a:prstGeom prst="rect">
@@ -12284,7 +12284,7 @@
         </p:nvSpPr>
         <p:spPr>
           <a:xfrm>
-            <a:off x="5803392" y="2569464"/>
+            <a:off x="4370832" y="2569464"/>
             <a:ext cx="1828800" cy="201168"/>
           </a:xfrm>
           <a:prstGeom prst="rect">
@@ -12309,7 +12309,7 @@
                 <a:ea typeface="Calibri" pitchFamily="34" charset="-122"/>
                 <a:cs typeface="Calibri" pitchFamily="34" charset="-120"/>
               </a:rPr>
-              <a:t>to connect or bring together</a:t>
+              <a:t>connect</a:t>
             </a:r>
             <a:endParaRPr lang="en-US" sz="850" dirty="0"/>
           </a:p>
@@ -12318,6 +12318,118 @@
       <p:sp>
         <p:nvSpPr>
           <p:cNvPr id="22" name="Shape 20"/>
+          <p:cNvSpPr/>
+          <p:nvPr/>
+        </p:nvSpPr>
+        <p:spPr>
+          <a:xfrm>
+            <a:off x="6519672" y="2258568"/>
+            <a:ext cx="1828800" cy="292608"/>
+          </a:xfrm>
+          <a:prstGeom prst="rect">
+            <a:avLst>
+              <a:gd name="adj" fmla="val 25000"/>
+            </a:avLst>
+          </a:prstGeom>
+          <a:solidFill>
+            <a:srgbClr val="FCE7F3"/>
+          </a:solidFill>
+          <a:ln w="19050">
+            <a:solidFill>
+              <a:srgbClr val="DB2777"/>
+            </a:solidFill>
+            <a:prstDash val="solid"/>
+          </a:ln>
+          <a:effectLst>
+            <a:outerShdw sx="100000" sy="100000" kx="0" ky="0" algn="bl" rotWithShape="0" blurRad="101600" dist="38100" dir="8100000">
+              <a:srgbClr val="000000">
+                <a:alpha val="12000"/>
+              </a:srgbClr>
+            </a:outerShdw>
+          </a:effectLst>
+        </p:spPr>
+      </p:sp>
+      <p:sp>
+        <p:nvSpPr>
+          <p:cNvPr id="23" name="Text 21"/>
+          <p:cNvSpPr/>
+          <p:nvPr/>
+        </p:nvSpPr>
+        <p:spPr>
+          <a:xfrm>
+            <a:off x="6519672" y="2258568"/>
+            <a:ext cx="1828800" cy="292608"/>
+          </a:xfrm>
+          <a:prstGeom prst="rect">
+            <a:avLst/>
+          </a:prstGeom>
+          <a:noFill/>
+          <a:ln/>
+        </p:spPr>
+        <p:txBody>
+          <a:bodyPr wrap="square" lIns="0" tIns="0" rIns="0" bIns="0" rtlCol="0" anchor="ctr"/>
+          <a:lstStyle/>
+          <a:p>
+            <a:pPr algn="ctr" indent="0" marL="0">
+              <a:buNone/>
+            </a:pPr>
+            <a:r>
+              <a:rPr lang="en-US" sz="1300" b="1" dirty="0">
+                <a:solidFill>
+                  <a:srgbClr val="9D174D"/>
+                </a:solidFill>
+                <a:latin typeface="Trebuchet MS" pitchFamily="34" charset="0"/>
+                <a:ea typeface="Trebuchet MS" pitchFamily="34" charset="-122"/>
+                <a:cs typeface="Trebuchet MS" pitchFamily="34" charset="-120"/>
+              </a:rPr>
+              <a:t>ed</a:t>
+            </a:r>
+            <a:endParaRPr lang="en-US" sz="1300" dirty="0"/>
+          </a:p>
+        </p:txBody>
+      </p:sp>
+      <p:sp>
+        <p:nvSpPr>
+          <p:cNvPr id="24" name="Text 22"/>
+          <p:cNvSpPr/>
+          <p:nvPr/>
+        </p:nvSpPr>
+        <p:spPr>
+          <a:xfrm>
+            <a:off x="6519672" y="2569464"/>
+            <a:ext cx="1828800" cy="201168"/>
+          </a:xfrm>
+          <a:prstGeom prst="rect">
+            <a:avLst/>
+          </a:prstGeom>
+          <a:noFill/>
+          <a:ln/>
+        </p:spPr>
+        <p:txBody>
+          <a:bodyPr wrap="square" lIns="0" tIns="0" rIns="0" bIns="0" rtlCol="0" anchor="t"/>
+          <a:lstStyle/>
+          <a:p>
+            <a:pPr algn="ctr" indent="0" marL="0">
+              <a:buNone/>
+            </a:pPr>
+            <a:r>
+              <a:rPr lang="en-US" sz="850" dirty="0">
+                <a:solidFill>
+                  <a:srgbClr val="475569"/>
+                </a:solidFill>
+                <a:latin typeface="Calibri" pitchFamily="34" charset="0"/>
+                <a:ea typeface="Calibri" pitchFamily="34" charset="-122"/>
+                <a:cs typeface="Calibri" pitchFamily="34" charset="-120"/>
+              </a:rPr>
+              <a:t>past tense</a:t>
+            </a:r>
+            <a:endParaRPr lang="en-US" sz="850" dirty="0"/>
+          </a:p>
+        </p:txBody>
+      </p:sp>
+      <p:sp>
+        <p:nvSpPr>
+          <p:cNvPr id="25" name="Shape 23"/>
           <p:cNvSpPr/>
           <p:nvPr/>
         </p:nvSpPr>
@@ -12344,7 +12456,7 @@
       </p:sp>
       <p:sp>
         <p:nvSpPr>
-          <p:cNvPr id="23" name="Text 21"/>
+          <p:cNvPr id="26" name="Text 24"/>
           <p:cNvSpPr/>
           <p:nvPr/>
         </p:nvSpPr>
@@ -12383,7 +12495,7 @@
       </p:sp>
       <p:sp>
         <p:nvSpPr>
-          <p:cNvPr id="24" name="Shape 22"/>
+          <p:cNvPr id="27" name="Shape 25"/>
           <p:cNvSpPr/>
           <p:nvPr/>
         </p:nvSpPr>
@@ -12410,7 +12522,7 @@
       </p:sp>
       <p:sp>
         <p:nvSpPr>
-          <p:cNvPr id="25" name="Text 23"/>
+          <p:cNvPr id="28" name="Text 26"/>
           <p:cNvSpPr/>
           <p:nvPr/>
         </p:nvSpPr>
@@ -12449,7 +12561,7 @@
       </p:sp>
       <p:sp>
         <p:nvSpPr>
-          <p:cNvPr id="26" name="Shape 24"/>
+          <p:cNvPr id="29" name="Shape 27"/>
           <p:cNvSpPr/>
           <p:nvPr/>
         </p:nvSpPr>
@@ -12476,7 +12588,7 @@
       </p:sp>
       <p:sp>
         <p:nvSpPr>
-          <p:cNvPr id="27" name="Text 25"/>
+          <p:cNvPr id="30" name="Text 28"/>
           <p:cNvSpPr/>
           <p:nvPr/>
         </p:nvSpPr>
@@ -12515,7 +12627,7 @@
       </p:sp>
       <p:sp>
         <p:nvSpPr>
-          <p:cNvPr id="28" name="Shape 26"/>
+          <p:cNvPr id="31" name="Shape 29"/>
           <p:cNvSpPr/>
           <p:nvPr/>
         </p:nvSpPr>
@@ -12542,7 +12654,7 @@
       </p:sp>
       <p:sp>
         <p:nvSpPr>
-          <p:cNvPr id="29" name="Text 27"/>
+          <p:cNvPr id="32" name="Text 30"/>
           <p:cNvSpPr/>
           <p:nvPr/>
         </p:nvSpPr>
@@ -12865,7 +12977,7 @@
                 <a:ea typeface="Calibri" pitchFamily="34" charset="-122"/>
                 <a:cs typeface="Calibri" pitchFamily="34" charset="-120"/>
               </a:rPr>
-              <a:t>Word Labs  •  wordlabs.app  •  Root: 'join' = to connect or bring together</a:t>
+              <a:t>Word Labs  •  wordlabs.app  •  Root: 'join' = connect</a:t>
             </a:r>
             <a:endParaRPr lang="en-US" sz="800" dirty="0"/>
           </a:p>
@@ -13004,7 +13116,7 @@
                 <a:ea typeface="Trebuchet MS" pitchFamily="34" charset="-122"/>
                 <a:cs typeface="Trebuchet MS" pitchFamily="34" charset="-120"/>
               </a:rPr>
-              <a:t>rejoin</a:t>
+              <a:t>rejoined</a:t>
             </a:r>
             <a:endParaRPr lang="en-US" sz="2800" dirty="0"/>
           </a:p>
@@ -13084,7 +13196,7 @@
         </p:nvSpPr>
         <p:spPr>
           <a:xfrm>
-            <a:off x="2938272" y="2258568"/>
+            <a:off x="2221992" y="2258568"/>
             <a:ext cx="1828800" cy="292608"/>
           </a:xfrm>
           <a:prstGeom prst="rect">
@@ -13118,7 +13230,7 @@
         </p:nvSpPr>
         <p:spPr>
           <a:xfrm>
-            <a:off x="2938272" y="2258568"/>
+            <a:off x="2221992" y="2258568"/>
             <a:ext cx="1828800" cy="292608"/>
           </a:xfrm>
           <a:prstGeom prst="rect">
@@ -13157,7 +13269,7 @@
         </p:nvSpPr>
         <p:spPr>
           <a:xfrm>
-            <a:off x="2938272" y="2569464"/>
+            <a:off x="2221992" y="2569464"/>
             <a:ext cx="1828800" cy="201168"/>
           </a:xfrm>
           <a:prstGeom prst="rect">
@@ -13196,7 +13308,7 @@
         </p:nvSpPr>
         <p:spPr>
           <a:xfrm>
-            <a:off x="5803392" y="2258568"/>
+            <a:off x="4370832" y="2258568"/>
             <a:ext cx="1828800" cy="292608"/>
           </a:xfrm>
           <a:prstGeom prst="rect">
@@ -13230,7 +13342,7 @@
         </p:nvSpPr>
         <p:spPr>
           <a:xfrm>
-            <a:off x="5803392" y="2258568"/>
+            <a:off x="4370832" y="2258568"/>
             <a:ext cx="1828800" cy="292608"/>
           </a:xfrm>
           <a:prstGeom prst="rect">
@@ -13269,7 +13381,7 @@
         </p:nvSpPr>
         <p:spPr>
           <a:xfrm>
-            <a:off x="5803392" y="2569464"/>
+            <a:off x="4370832" y="2569464"/>
             <a:ext cx="1828800" cy="201168"/>
           </a:xfrm>
           <a:prstGeom prst="rect">
@@ -13294,7 +13406,7 @@
                 <a:ea typeface="Calibri" pitchFamily="34" charset="-122"/>
                 <a:cs typeface="Calibri" pitchFamily="34" charset="-120"/>
               </a:rPr>
-              <a:t>to connect or bring together</a:t>
+              <a:t>connect</a:t>
             </a:r>
             <a:endParaRPr lang="en-US" sz="850" dirty="0"/>
           </a:p>
@@ -13303,6 +13415,118 @@
       <p:sp>
         <p:nvSpPr>
           <p:cNvPr id="22" name="Shape 20"/>
+          <p:cNvSpPr/>
+          <p:nvPr/>
+        </p:nvSpPr>
+        <p:spPr>
+          <a:xfrm>
+            <a:off x="6519672" y="2258568"/>
+            <a:ext cx="1828800" cy="292608"/>
+          </a:xfrm>
+          <a:prstGeom prst="rect">
+            <a:avLst>
+              <a:gd name="adj" fmla="val 25000"/>
+            </a:avLst>
+          </a:prstGeom>
+          <a:solidFill>
+            <a:srgbClr val="FCE7F3"/>
+          </a:solidFill>
+          <a:ln w="19050">
+            <a:solidFill>
+              <a:srgbClr val="DB2777"/>
+            </a:solidFill>
+            <a:prstDash val="solid"/>
+          </a:ln>
+          <a:effectLst>
+            <a:outerShdw sx="100000" sy="100000" kx="0" ky="0" algn="bl" rotWithShape="0" blurRad="101600" dist="38100" dir="8100000">
+              <a:srgbClr val="000000">
+                <a:alpha val="12000"/>
+              </a:srgbClr>
+            </a:outerShdw>
+          </a:effectLst>
+        </p:spPr>
+      </p:sp>
+      <p:sp>
+        <p:nvSpPr>
+          <p:cNvPr id="23" name="Text 21"/>
+          <p:cNvSpPr/>
+          <p:nvPr/>
+        </p:nvSpPr>
+        <p:spPr>
+          <a:xfrm>
+            <a:off x="6519672" y="2258568"/>
+            <a:ext cx="1828800" cy="292608"/>
+          </a:xfrm>
+          <a:prstGeom prst="rect">
+            <a:avLst/>
+          </a:prstGeom>
+          <a:noFill/>
+          <a:ln/>
+        </p:spPr>
+        <p:txBody>
+          <a:bodyPr wrap="square" lIns="0" tIns="0" rIns="0" bIns="0" rtlCol="0" anchor="ctr"/>
+          <a:lstStyle/>
+          <a:p>
+            <a:pPr algn="ctr" indent="0" marL="0">
+              <a:buNone/>
+            </a:pPr>
+            <a:r>
+              <a:rPr lang="en-US" sz="1300" b="1" dirty="0">
+                <a:solidFill>
+                  <a:srgbClr val="9D174D"/>
+                </a:solidFill>
+                <a:latin typeface="Trebuchet MS" pitchFamily="34" charset="0"/>
+                <a:ea typeface="Trebuchet MS" pitchFamily="34" charset="-122"/>
+                <a:cs typeface="Trebuchet MS" pitchFamily="34" charset="-120"/>
+              </a:rPr>
+              <a:t>ed</a:t>
+            </a:r>
+            <a:endParaRPr lang="en-US" sz="1300" dirty="0"/>
+          </a:p>
+        </p:txBody>
+      </p:sp>
+      <p:sp>
+        <p:nvSpPr>
+          <p:cNvPr id="24" name="Text 22"/>
+          <p:cNvSpPr/>
+          <p:nvPr/>
+        </p:nvSpPr>
+        <p:spPr>
+          <a:xfrm>
+            <a:off x="6519672" y="2569464"/>
+            <a:ext cx="1828800" cy="201168"/>
+          </a:xfrm>
+          <a:prstGeom prst="rect">
+            <a:avLst/>
+          </a:prstGeom>
+          <a:noFill/>
+          <a:ln/>
+        </p:spPr>
+        <p:txBody>
+          <a:bodyPr wrap="square" lIns="0" tIns="0" rIns="0" bIns="0" rtlCol="0" anchor="t"/>
+          <a:lstStyle/>
+          <a:p>
+            <a:pPr algn="ctr" indent="0" marL="0">
+              <a:buNone/>
+            </a:pPr>
+            <a:r>
+              <a:rPr lang="en-US" sz="850" dirty="0">
+                <a:solidFill>
+                  <a:srgbClr val="475569"/>
+                </a:solidFill>
+                <a:latin typeface="Calibri" pitchFamily="34" charset="0"/>
+                <a:ea typeface="Calibri" pitchFamily="34" charset="-122"/>
+                <a:cs typeface="Calibri" pitchFamily="34" charset="-120"/>
+              </a:rPr>
+              <a:t>past tense</a:t>
+            </a:r>
+            <a:endParaRPr lang="en-US" sz="850" dirty="0"/>
+          </a:p>
+        </p:txBody>
+      </p:sp>
+      <p:sp>
+        <p:nvSpPr>
+          <p:cNvPr id="25" name="Shape 23"/>
           <p:cNvSpPr/>
           <p:nvPr/>
         </p:nvSpPr>
@@ -13329,7 +13553,7 @@
       </p:sp>
       <p:sp>
         <p:nvSpPr>
-          <p:cNvPr id="23" name="Text 21"/>
+          <p:cNvPr id="26" name="Text 24"/>
           <p:cNvSpPr/>
           <p:nvPr/>
         </p:nvSpPr>
@@ -13368,7 +13592,7 @@
       </p:sp>
       <p:sp>
         <p:nvSpPr>
-          <p:cNvPr id="24" name="Shape 22"/>
+          <p:cNvPr id="27" name="Shape 25"/>
           <p:cNvSpPr/>
           <p:nvPr/>
         </p:nvSpPr>
@@ -13395,7 +13619,7 @@
       </p:sp>
       <p:sp>
         <p:nvSpPr>
-          <p:cNvPr id="25" name="Shape 23"/>
+          <p:cNvPr id="28" name="Shape 26"/>
           <p:cNvSpPr/>
           <p:nvPr/>
         </p:nvSpPr>
@@ -13422,7 +13646,7 @@
       </p:sp>
       <p:sp>
         <p:nvSpPr>
-          <p:cNvPr id="26" name="Text 24"/>
+          <p:cNvPr id="29" name="Text 27"/>
           <p:cNvSpPr/>
           <p:nvPr/>
         </p:nvSpPr>
@@ -13461,7 +13685,7 @@
       </p:sp>
       <p:sp>
         <p:nvSpPr>
-          <p:cNvPr id="27" name="Text 25"/>
+          <p:cNvPr id="30" name="Text 28"/>
           <p:cNvSpPr/>
           <p:nvPr/>
         </p:nvSpPr>
@@ -13500,7 +13724,7 @@
       </p:sp>
       <p:sp>
         <p:nvSpPr>
-          <p:cNvPr id="28" name="Shape 26"/>
+          <p:cNvPr id="31" name="Shape 29"/>
           <p:cNvSpPr/>
           <p:nvPr/>
         </p:nvSpPr>
@@ -13527,7 +13751,7 @@
       </p:sp>
       <p:sp>
         <p:nvSpPr>
-          <p:cNvPr id="29" name="Text 27"/>
+          <p:cNvPr id="32" name="Text 30"/>
           <p:cNvSpPr/>
           <p:nvPr/>
         </p:nvSpPr>
@@ -13558,7 +13782,7 @@
                 <a:ea typeface="Trebuchet MS" pitchFamily="34" charset="-122"/>
                 <a:cs typeface="Trebuchet MS" pitchFamily="34" charset="-120"/>
               </a:rPr>
-              <a:t>join</a:t>
+              <a:t>joined</a:t>
             </a:r>
             <a:endParaRPr lang="en-US" sz="1400" dirty="0"/>
           </a:p>
@@ -13566,7 +13790,7 @@
       </p:sp>
       <p:sp>
         <p:nvSpPr>
-          <p:cNvPr id="30" name="Shape 28"/>
+          <p:cNvPr id="33" name="Shape 31"/>
           <p:cNvSpPr/>
           <p:nvPr/>
         </p:nvSpPr>
@@ -13593,7 +13817,7 @@
       </p:sp>
       <p:sp>
         <p:nvSpPr>
-          <p:cNvPr id="31" name="Text 29"/>
+          <p:cNvPr id="34" name="Text 32"/>
           <p:cNvSpPr/>
           <p:nvPr/>
         </p:nvSpPr>
@@ -13632,7 +13856,7 @@
       </p:sp>
       <p:sp>
         <p:nvSpPr>
-          <p:cNvPr id="32" name="Shape 30"/>
+          <p:cNvPr id="35" name="Shape 33"/>
           <p:cNvSpPr/>
           <p:nvPr/>
         </p:nvSpPr>
@@ -13659,7 +13883,7 @@
       </p:sp>
       <p:sp>
         <p:nvSpPr>
-          <p:cNvPr id="33" name="Text 31"/>
+          <p:cNvPr id="36" name="Text 34"/>
           <p:cNvSpPr/>
           <p:nvPr/>
         </p:nvSpPr>
@@ -13891,7 +14115,7 @@
                 <a:ea typeface="Calibri" pitchFamily="34" charset="-122"/>
                 <a:cs typeface="Calibri" pitchFamily="34" charset="-120"/>
               </a:rPr>
-              <a:t>Root 'join' — to connect or bring together</a:t>
+              <a:t>Root 'join' — connect</a:t>
             </a:r>
             <a:endParaRPr lang="en-US" sz="1600" dirty="0"/>
           </a:p>
@@ -14247,7 +14471,7 @@
                 <a:ea typeface="Calibri" pitchFamily="34" charset="-122"/>
                 <a:cs typeface="Calibri" pitchFamily="34" charset="-120"/>
               </a:rPr>
-              <a:t>Word Labs  •  wordlabs.app  •  Root: 'join' = to connect or bring together</a:t>
+              <a:t>Word Labs  •  wordlabs.app  •  Root: 'join' = connect</a:t>
             </a:r>
             <a:endParaRPr lang="en-US" sz="800" dirty="0"/>
           </a:p>
@@ -14386,7 +14610,7 @@
                 <a:ea typeface="Trebuchet MS" pitchFamily="34" charset="-122"/>
                 <a:cs typeface="Trebuchet MS" pitchFamily="34" charset="-120"/>
               </a:rPr>
-              <a:t>rejoin</a:t>
+              <a:t>rejoined</a:t>
             </a:r>
             <a:endParaRPr lang="en-US" sz="2800" dirty="0"/>
           </a:p>
@@ -14466,7 +14690,7 @@
         </p:nvSpPr>
         <p:spPr>
           <a:xfrm>
-            <a:off x="2938272" y="2258568"/>
+            <a:off x="2221992" y="2258568"/>
             <a:ext cx="1828800" cy="292608"/>
           </a:xfrm>
           <a:prstGeom prst="rect">
@@ -14500,7 +14724,7 @@
         </p:nvSpPr>
         <p:spPr>
           <a:xfrm>
-            <a:off x="2938272" y="2258568"/>
+            <a:off x="2221992" y="2258568"/>
             <a:ext cx="1828800" cy="292608"/>
           </a:xfrm>
           <a:prstGeom prst="rect">
@@ -14539,7 +14763,7 @@
         </p:nvSpPr>
         <p:spPr>
           <a:xfrm>
-            <a:off x="2938272" y="2569464"/>
+            <a:off x="2221992" y="2569464"/>
             <a:ext cx="1828800" cy="201168"/>
           </a:xfrm>
           <a:prstGeom prst="rect">
@@ -14578,7 +14802,7 @@
         </p:nvSpPr>
         <p:spPr>
           <a:xfrm>
-            <a:off x="5803392" y="2258568"/>
+            <a:off x="4370832" y="2258568"/>
             <a:ext cx="1828800" cy="292608"/>
           </a:xfrm>
           <a:prstGeom prst="rect">
@@ -14612,7 +14836,7 @@
         </p:nvSpPr>
         <p:spPr>
           <a:xfrm>
-            <a:off x="5803392" y="2258568"/>
+            <a:off x="4370832" y="2258568"/>
             <a:ext cx="1828800" cy="292608"/>
           </a:xfrm>
           <a:prstGeom prst="rect">
@@ -14651,7 +14875,7 @@
         </p:nvSpPr>
         <p:spPr>
           <a:xfrm>
-            <a:off x="5803392" y="2569464"/>
+            <a:off x="4370832" y="2569464"/>
             <a:ext cx="1828800" cy="201168"/>
           </a:xfrm>
           <a:prstGeom prst="rect">
@@ -14676,7 +14900,7 @@
                 <a:ea typeface="Calibri" pitchFamily="34" charset="-122"/>
                 <a:cs typeface="Calibri" pitchFamily="34" charset="-120"/>
               </a:rPr>
-              <a:t>to connect or bring together</a:t>
+              <a:t>connect</a:t>
             </a:r>
             <a:endParaRPr lang="en-US" sz="850" dirty="0"/>
           </a:p>
@@ -14685,6 +14909,118 @@
       <p:sp>
         <p:nvSpPr>
           <p:cNvPr id="22" name="Shape 20"/>
+          <p:cNvSpPr/>
+          <p:nvPr/>
+        </p:nvSpPr>
+        <p:spPr>
+          <a:xfrm>
+            <a:off x="6519672" y="2258568"/>
+            <a:ext cx="1828800" cy="292608"/>
+          </a:xfrm>
+          <a:prstGeom prst="rect">
+            <a:avLst>
+              <a:gd name="adj" fmla="val 25000"/>
+            </a:avLst>
+          </a:prstGeom>
+          <a:solidFill>
+            <a:srgbClr val="FCE7F3"/>
+          </a:solidFill>
+          <a:ln w="19050">
+            <a:solidFill>
+              <a:srgbClr val="DB2777"/>
+            </a:solidFill>
+            <a:prstDash val="solid"/>
+          </a:ln>
+          <a:effectLst>
+            <a:outerShdw sx="100000" sy="100000" kx="0" ky="0" algn="bl" rotWithShape="0" blurRad="101600" dist="38100" dir="8100000">
+              <a:srgbClr val="000000">
+                <a:alpha val="12000"/>
+              </a:srgbClr>
+            </a:outerShdw>
+          </a:effectLst>
+        </p:spPr>
+      </p:sp>
+      <p:sp>
+        <p:nvSpPr>
+          <p:cNvPr id="23" name="Text 21"/>
+          <p:cNvSpPr/>
+          <p:nvPr/>
+        </p:nvSpPr>
+        <p:spPr>
+          <a:xfrm>
+            <a:off x="6519672" y="2258568"/>
+            <a:ext cx="1828800" cy="292608"/>
+          </a:xfrm>
+          <a:prstGeom prst="rect">
+            <a:avLst/>
+          </a:prstGeom>
+          <a:noFill/>
+          <a:ln/>
+        </p:spPr>
+        <p:txBody>
+          <a:bodyPr wrap="square" lIns="0" tIns="0" rIns="0" bIns="0" rtlCol="0" anchor="ctr"/>
+          <a:lstStyle/>
+          <a:p>
+            <a:pPr algn="ctr" indent="0" marL="0">
+              <a:buNone/>
+            </a:pPr>
+            <a:r>
+              <a:rPr lang="en-US" sz="1300" b="1" dirty="0">
+                <a:solidFill>
+                  <a:srgbClr val="9D174D"/>
+                </a:solidFill>
+                <a:latin typeface="Trebuchet MS" pitchFamily="34" charset="0"/>
+                <a:ea typeface="Trebuchet MS" pitchFamily="34" charset="-122"/>
+                <a:cs typeface="Trebuchet MS" pitchFamily="34" charset="-120"/>
+              </a:rPr>
+              <a:t>ed</a:t>
+            </a:r>
+            <a:endParaRPr lang="en-US" sz="1300" dirty="0"/>
+          </a:p>
+        </p:txBody>
+      </p:sp>
+      <p:sp>
+        <p:nvSpPr>
+          <p:cNvPr id="24" name="Text 22"/>
+          <p:cNvSpPr/>
+          <p:nvPr/>
+        </p:nvSpPr>
+        <p:spPr>
+          <a:xfrm>
+            <a:off x="6519672" y="2569464"/>
+            <a:ext cx="1828800" cy="201168"/>
+          </a:xfrm>
+          <a:prstGeom prst="rect">
+            <a:avLst/>
+          </a:prstGeom>
+          <a:noFill/>
+          <a:ln/>
+        </p:spPr>
+        <p:txBody>
+          <a:bodyPr wrap="square" lIns="0" tIns="0" rIns="0" bIns="0" rtlCol="0" anchor="t"/>
+          <a:lstStyle/>
+          <a:p>
+            <a:pPr algn="ctr" indent="0" marL="0">
+              <a:buNone/>
+            </a:pPr>
+            <a:r>
+              <a:rPr lang="en-US" sz="850" dirty="0">
+                <a:solidFill>
+                  <a:srgbClr val="475569"/>
+                </a:solidFill>
+                <a:latin typeface="Calibri" pitchFamily="34" charset="0"/>
+                <a:ea typeface="Calibri" pitchFamily="34" charset="-122"/>
+                <a:cs typeface="Calibri" pitchFamily="34" charset="-120"/>
+              </a:rPr>
+              <a:t>past tense</a:t>
+            </a:r>
+            <a:endParaRPr lang="en-US" sz="850" dirty="0"/>
+          </a:p>
+        </p:txBody>
+      </p:sp>
+      <p:sp>
+        <p:nvSpPr>
+          <p:cNvPr id="25" name="Shape 23"/>
           <p:cNvSpPr/>
           <p:nvPr/>
         </p:nvSpPr>
@@ -14711,7 +15047,7 @@
       </p:sp>
       <p:sp>
         <p:nvSpPr>
-          <p:cNvPr id="23" name="Text 21"/>
+          <p:cNvPr id="26" name="Text 24"/>
           <p:cNvSpPr/>
           <p:nvPr/>
         </p:nvSpPr>
@@ -14750,7 +15086,7 @@
       </p:sp>
       <p:sp>
         <p:nvSpPr>
-          <p:cNvPr id="24" name="Shape 22"/>
+          <p:cNvPr id="27" name="Shape 25"/>
           <p:cNvSpPr/>
           <p:nvPr/>
         </p:nvSpPr>
@@ -14777,7 +15113,7 @@
       </p:sp>
       <p:sp>
         <p:nvSpPr>
-          <p:cNvPr id="25" name="Shape 23"/>
+          <p:cNvPr id="28" name="Shape 26"/>
           <p:cNvSpPr/>
           <p:nvPr/>
         </p:nvSpPr>
@@ -14804,7 +15140,7 @@
       </p:sp>
       <p:sp>
         <p:nvSpPr>
-          <p:cNvPr id="26" name="Text 24"/>
+          <p:cNvPr id="29" name="Text 27"/>
           <p:cNvSpPr/>
           <p:nvPr/>
         </p:nvSpPr>
@@ -14843,7 +15179,7 @@
       </p:sp>
       <p:sp>
         <p:nvSpPr>
-          <p:cNvPr id="27" name="Text 25"/>
+          <p:cNvPr id="30" name="Text 28"/>
           <p:cNvSpPr/>
           <p:nvPr/>
         </p:nvSpPr>
@@ -14882,7 +15218,7 @@
       </p:sp>
       <p:sp>
         <p:nvSpPr>
-          <p:cNvPr id="28" name="Shape 26"/>
+          <p:cNvPr id="31" name="Shape 29"/>
           <p:cNvSpPr/>
           <p:nvPr/>
         </p:nvSpPr>
@@ -14909,7 +15245,7 @@
       </p:sp>
       <p:sp>
         <p:nvSpPr>
-          <p:cNvPr id="29" name="Text 27"/>
+          <p:cNvPr id="32" name="Text 30"/>
           <p:cNvSpPr/>
           <p:nvPr/>
         </p:nvSpPr>
@@ -14940,7 +15276,7 @@
                 <a:ea typeface="Trebuchet MS" pitchFamily="34" charset="-122"/>
                 <a:cs typeface="Trebuchet MS" pitchFamily="34" charset="-120"/>
               </a:rPr>
-              <a:t>join</a:t>
+              <a:t>joined</a:t>
             </a:r>
             <a:endParaRPr lang="en-US" sz="1400" dirty="0"/>
           </a:p>
@@ -14948,7 +15284,7 @@
       </p:sp>
       <p:sp>
         <p:nvSpPr>
-          <p:cNvPr id="30" name="Shape 28"/>
+          <p:cNvPr id="33" name="Shape 31"/>
           <p:cNvSpPr/>
           <p:nvPr/>
         </p:nvSpPr>
@@ -14975,7 +15311,7 @@
       </p:sp>
       <p:sp>
         <p:nvSpPr>
-          <p:cNvPr id="31" name="Text 29"/>
+          <p:cNvPr id="34" name="Text 32"/>
           <p:cNvSpPr/>
           <p:nvPr/>
         </p:nvSpPr>
@@ -15014,7 +15350,7 @@
       </p:sp>
       <p:sp>
         <p:nvSpPr>
-          <p:cNvPr id="32" name="Shape 30"/>
+          <p:cNvPr id="35" name="Shape 33"/>
           <p:cNvSpPr/>
           <p:nvPr/>
         </p:nvSpPr>
@@ -15041,13 +15377,13 @@
       </p:sp>
       <p:sp>
         <p:nvSpPr>
-          <p:cNvPr id="33" name="Shape 31"/>
-          <p:cNvSpPr/>
-          <p:nvPr/>
-        </p:nvSpPr>
-        <p:spPr>
-          <a:xfrm>
-            <a:off x="2427732" y="4169664"/>
+          <p:cNvPr id="36" name="Shape 34"/>
+          <p:cNvSpPr/>
+          <p:nvPr/>
+        </p:nvSpPr>
+        <p:spPr>
+          <a:xfrm>
+            <a:off x="2124837" y="4169664"/>
             <a:ext cx="685800" cy="475488"/>
           </a:xfrm>
           <a:prstGeom prst="rect">
@@ -15068,13 +15404,13 @@
       </p:sp>
       <p:sp>
         <p:nvSpPr>
-          <p:cNvPr id="34" name="Text 32"/>
-          <p:cNvSpPr/>
-          <p:nvPr/>
-        </p:nvSpPr>
-        <p:spPr>
-          <a:xfrm>
-            <a:off x="2427732" y="4169664"/>
+          <p:cNvPr id="37" name="Text 35"/>
+          <p:cNvSpPr/>
+          <p:nvPr/>
+        </p:nvSpPr>
+        <p:spPr>
+          <a:xfrm>
+            <a:off x="2124837" y="4169664"/>
             <a:ext cx="685800" cy="475488"/>
           </a:xfrm>
           <a:prstGeom prst="rect">
@@ -15107,13 +15443,13 @@
       </p:sp>
       <p:sp>
         <p:nvSpPr>
-          <p:cNvPr id="35" name="Shape 33"/>
-          <p:cNvSpPr/>
-          <p:nvPr/>
-        </p:nvSpPr>
-        <p:spPr>
-          <a:xfrm>
-            <a:off x="3639312" y="4169664"/>
+          <p:cNvPr id="38" name="Shape 36"/>
+          <p:cNvSpPr/>
+          <p:nvPr/>
+        </p:nvSpPr>
+        <p:spPr>
+          <a:xfrm>
+            <a:off x="3033522" y="4169664"/>
             <a:ext cx="685800" cy="475488"/>
           </a:xfrm>
           <a:prstGeom prst="rect">
@@ -15134,13 +15470,13 @@
       </p:sp>
       <p:sp>
         <p:nvSpPr>
-          <p:cNvPr id="36" name="Text 34"/>
-          <p:cNvSpPr/>
-          <p:nvPr/>
-        </p:nvSpPr>
-        <p:spPr>
-          <a:xfrm>
-            <a:off x="3639312" y="4169664"/>
+          <p:cNvPr id="39" name="Text 37"/>
+          <p:cNvSpPr/>
+          <p:nvPr/>
+        </p:nvSpPr>
+        <p:spPr>
+          <a:xfrm>
+            <a:off x="3033522" y="4169664"/>
             <a:ext cx="685800" cy="475488"/>
           </a:xfrm>
           <a:prstGeom prst="rect">
@@ -15173,13 +15509,13 @@
       </p:sp>
       <p:sp>
         <p:nvSpPr>
-          <p:cNvPr id="37" name="Shape 35"/>
-          <p:cNvSpPr/>
-          <p:nvPr/>
-        </p:nvSpPr>
-        <p:spPr>
-          <a:xfrm>
-            <a:off x="4850892" y="4169664"/>
+          <p:cNvPr id="40" name="Shape 38"/>
+          <p:cNvSpPr/>
+          <p:nvPr/>
+        </p:nvSpPr>
+        <p:spPr>
+          <a:xfrm>
+            <a:off x="3942207" y="4169664"/>
             <a:ext cx="685800" cy="475488"/>
           </a:xfrm>
           <a:prstGeom prst="rect">
@@ -15200,13 +15536,13 @@
       </p:sp>
       <p:sp>
         <p:nvSpPr>
-          <p:cNvPr id="38" name="Text 36"/>
-          <p:cNvSpPr/>
-          <p:nvPr/>
-        </p:nvSpPr>
-        <p:spPr>
-          <a:xfrm>
-            <a:off x="4850892" y="4169664"/>
+          <p:cNvPr id="41" name="Text 39"/>
+          <p:cNvSpPr/>
+          <p:nvPr/>
+        </p:nvSpPr>
+        <p:spPr>
+          <a:xfrm>
+            <a:off x="3942207" y="4169664"/>
             <a:ext cx="685800" cy="475488"/>
           </a:xfrm>
           <a:prstGeom prst="rect">
@@ -15239,13 +15575,13 @@
       </p:sp>
       <p:sp>
         <p:nvSpPr>
-          <p:cNvPr id="39" name="Shape 37"/>
-          <p:cNvSpPr/>
-          <p:nvPr/>
-        </p:nvSpPr>
-        <p:spPr>
-          <a:xfrm>
-            <a:off x="6062472" y="4169664"/>
+          <p:cNvPr id="42" name="Shape 40"/>
+          <p:cNvSpPr/>
+          <p:nvPr/>
+        </p:nvSpPr>
+        <p:spPr>
+          <a:xfrm>
+            <a:off x="4850892" y="4169664"/>
             <a:ext cx="685800" cy="475488"/>
           </a:xfrm>
           <a:prstGeom prst="rect">
@@ -15266,13 +15602,13 @@
       </p:sp>
       <p:sp>
         <p:nvSpPr>
-          <p:cNvPr id="40" name="Text 38"/>
-          <p:cNvSpPr/>
-          <p:nvPr/>
-        </p:nvSpPr>
-        <p:spPr>
-          <a:xfrm>
-            <a:off x="6062472" y="4169664"/>
+          <p:cNvPr id="43" name="Text 41"/>
+          <p:cNvSpPr/>
+          <p:nvPr/>
+        </p:nvSpPr>
+        <p:spPr>
+          <a:xfrm>
+            <a:off x="4850892" y="4169664"/>
             <a:ext cx="685800" cy="475488"/>
           </a:xfrm>
           <a:prstGeom prst="rect">
@@ -15305,13 +15641,13 @@
       </p:sp>
       <p:sp>
         <p:nvSpPr>
-          <p:cNvPr id="41" name="Shape 39"/>
-          <p:cNvSpPr/>
-          <p:nvPr/>
-        </p:nvSpPr>
-        <p:spPr>
-          <a:xfrm>
-            <a:off x="7274052" y="4169664"/>
+          <p:cNvPr id="44" name="Shape 42"/>
+          <p:cNvSpPr/>
+          <p:nvPr/>
+        </p:nvSpPr>
+        <p:spPr>
+          <a:xfrm>
+            <a:off x="5759577" y="4169664"/>
             <a:ext cx="685800" cy="475488"/>
           </a:xfrm>
           <a:prstGeom prst="rect">
@@ -15332,13 +15668,13 @@
       </p:sp>
       <p:sp>
         <p:nvSpPr>
-          <p:cNvPr id="42" name="Text 40"/>
-          <p:cNvSpPr/>
-          <p:nvPr/>
-        </p:nvSpPr>
-        <p:spPr>
-          <a:xfrm>
-            <a:off x="7274052" y="4169664"/>
+          <p:cNvPr id="45" name="Text 43"/>
+          <p:cNvSpPr/>
+          <p:nvPr/>
+        </p:nvSpPr>
+        <p:spPr>
+          <a:xfrm>
+            <a:off x="5759577" y="4169664"/>
             <a:ext cx="685800" cy="475488"/>
           </a:xfrm>
           <a:prstGeom prst="rect">
@@ -15364,6 +15700,138 @@
                 <a:cs typeface="Trebuchet MS" pitchFamily="34" charset="-120"/>
               </a:rPr>
               <a:t>n</a:t>
+            </a:r>
+            <a:endParaRPr lang="en-US" sz="900" dirty="0"/>
+          </a:p>
+        </p:txBody>
+      </p:sp>
+      <p:sp>
+        <p:nvSpPr>
+          <p:cNvPr id="46" name="Shape 44"/>
+          <p:cNvSpPr/>
+          <p:nvPr/>
+        </p:nvSpPr>
+        <p:spPr>
+          <a:xfrm>
+            <a:off x="6668262" y="4169664"/>
+            <a:ext cx="685800" cy="475488"/>
+          </a:xfrm>
+          <a:prstGeom prst="rect">
+            <a:avLst>
+              <a:gd name="adj" fmla="val 7692"/>
+            </a:avLst>
+          </a:prstGeom>
+          <a:solidFill>
+            <a:srgbClr val="FFFFFF"/>
+          </a:solidFill>
+          <a:ln w="12700">
+            <a:solidFill>
+              <a:srgbClr val="DB2777"/>
+            </a:solidFill>
+            <a:prstDash val="solid"/>
+          </a:ln>
+        </p:spPr>
+      </p:sp>
+      <p:sp>
+        <p:nvSpPr>
+          <p:cNvPr id="47" name="Text 45"/>
+          <p:cNvSpPr/>
+          <p:nvPr/>
+        </p:nvSpPr>
+        <p:spPr>
+          <a:xfrm>
+            <a:off x="6668262" y="4169664"/>
+            <a:ext cx="685800" cy="475488"/>
+          </a:xfrm>
+          <a:prstGeom prst="rect">
+            <a:avLst/>
+          </a:prstGeom>
+          <a:noFill/>
+          <a:ln/>
+        </p:spPr>
+        <p:txBody>
+          <a:bodyPr wrap="square" lIns="0" tIns="0" rIns="0" bIns="0" rtlCol="0" anchor="ctr"/>
+          <a:lstStyle/>
+          <a:p>
+            <a:pPr algn="ctr" indent="0" marL="0">
+              <a:buNone/>
+            </a:pPr>
+            <a:r>
+              <a:rPr lang="en-US" sz="900" b="1" dirty="0">
+                <a:solidFill>
+                  <a:srgbClr val="9D174D"/>
+                </a:solidFill>
+                <a:latin typeface="Trebuchet MS" pitchFamily="34" charset="0"/>
+                <a:ea typeface="Trebuchet MS" pitchFamily="34" charset="-122"/>
+                <a:cs typeface="Trebuchet MS" pitchFamily="34" charset="-120"/>
+              </a:rPr>
+              <a:t>e</a:t>
+            </a:r>
+            <a:endParaRPr lang="en-US" sz="900" dirty="0"/>
+          </a:p>
+        </p:txBody>
+      </p:sp>
+      <p:sp>
+        <p:nvSpPr>
+          <p:cNvPr id="48" name="Shape 46"/>
+          <p:cNvSpPr/>
+          <p:nvPr/>
+        </p:nvSpPr>
+        <p:spPr>
+          <a:xfrm>
+            <a:off x="7576947" y="4169664"/>
+            <a:ext cx="685800" cy="475488"/>
+          </a:xfrm>
+          <a:prstGeom prst="rect">
+            <a:avLst>
+              <a:gd name="adj" fmla="val 7692"/>
+            </a:avLst>
+          </a:prstGeom>
+          <a:solidFill>
+            <a:srgbClr val="FFFFFF"/>
+          </a:solidFill>
+          <a:ln w="12700">
+            <a:solidFill>
+              <a:srgbClr val="DB2777"/>
+            </a:solidFill>
+            <a:prstDash val="solid"/>
+          </a:ln>
+        </p:spPr>
+      </p:sp>
+      <p:sp>
+        <p:nvSpPr>
+          <p:cNvPr id="49" name="Text 47"/>
+          <p:cNvSpPr/>
+          <p:nvPr/>
+        </p:nvSpPr>
+        <p:spPr>
+          <a:xfrm>
+            <a:off x="7576947" y="4169664"/>
+            <a:ext cx="685800" cy="475488"/>
+          </a:xfrm>
+          <a:prstGeom prst="rect">
+            <a:avLst/>
+          </a:prstGeom>
+          <a:noFill/>
+          <a:ln/>
+        </p:spPr>
+        <p:txBody>
+          <a:bodyPr wrap="square" lIns="0" tIns="0" rIns="0" bIns="0" rtlCol="0" anchor="ctr"/>
+          <a:lstStyle/>
+          <a:p>
+            <a:pPr algn="ctr" indent="0" marL="0">
+              <a:buNone/>
+            </a:pPr>
+            <a:r>
+              <a:rPr lang="en-US" sz="900" b="1" dirty="0">
+                <a:solidFill>
+                  <a:srgbClr val="9D174D"/>
+                </a:solidFill>
+                <a:latin typeface="Trebuchet MS" pitchFamily="34" charset="0"/>
+                <a:ea typeface="Trebuchet MS" pitchFamily="34" charset="-122"/>
+                <a:cs typeface="Trebuchet MS" pitchFamily="34" charset="-120"/>
+              </a:rPr>
+              <a:t>d</a:t>
             </a:r>
             <a:endParaRPr lang="en-US" sz="900" dirty="0"/>
           </a:p>
@@ -15937,7 +16405,7 @@
                 <a:ea typeface="Calibri" pitchFamily="34" charset="-122"/>
                 <a:cs typeface="Calibri" pitchFamily="34" charset="-120"/>
               </a:rPr>
-              <a:t>Word Labs  •  wordlabs.app  •  Root: 'join' = to connect or bring together</a:t>
+              <a:t>Word Labs  •  wordlabs.app  •  Root: 'join' = connect</a:t>
             </a:r>
             <a:endParaRPr lang="en-US" sz="800" dirty="0"/>
           </a:p>
@@ -16271,7 +16739,7 @@
                 <a:ea typeface="Trebuchet MS" pitchFamily="34" charset="-122"/>
                 <a:cs typeface="Trebuchet MS" pitchFamily="34" charset="-120"/>
               </a:rPr>
-              <a:t>2</a:t>
+              <a:t>0</a:t>
             </a:r>
             <a:pPr algn="ctr" indent="0" marL="0">
               <a:buNone/>
@@ -16285,7 +16753,7 @@
                 <a:ea typeface="Trebuchet MS" pitchFamily="34" charset="-122"/>
                 <a:cs typeface="Trebuchet MS" pitchFamily="34" charset="-120"/>
               </a:rPr>
-              <a:t>  punctuation marks</a:t>
+              <a:t>  punctuation mark</a:t>
             </a:r>
             <a:endParaRPr lang="en-US" sz="2800" dirty="0"/>
           </a:p>
@@ -16577,7 +17045,7 @@
                 <a:ea typeface="Calibri" pitchFamily="34" charset="-122"/>
                 <a:cs typeface="Calibri" pitchFamily="34" charset="-120"/>
               </a:rPr>
-              <a:t>Word Labs  •  wordlabs.app  •  Root: 'join' = to connect or bring together</a:t>
+              <a:t>Word Labs  •  wordlabs.app  •  Root: 'join' = connect</a:t>
             </a:r>
             <a:endParaRPr lang="en-US" sz="800" dirty="0"/>
           </a:p>
@@ -16689,7 +17157,7 @@
                 <a:ea typeface="Calibri" pitchFamily="34" charset="-122"/>
                 <a:cs typeface="Calibri" pitchFamily="34" charset="-120"/>
               </a:rPr>
-              <a:t>The </a:t>
+              <a:t>She is </a:t>
             </a:r>
             <a:pPr algn="l" indent="0" marL="0">
               <a:buNone/>
@@ -16706,7 +17174,7 @@
                 <a:ea typeface="Calibri" pitchFamily="34" charset="-122"/>
                 <a:cs typeface="Calibri" pitchFamily="34" charset="-120"/>
               </a:rPr>
-              <a:t>conjoined</a:t>
+              <a:t>rejoining</a:t>
             </a:r>
             <a:pPr algn="l" indent="0" marL="0">
               <a:buNone/>
@@ -16720,7 +17188,7 @@
                 <a:ea typeface="Calibri" pitchFamily="34" charset="-122"/>
                 <a:cs typeface="Calibri" pitchFamily="34" charset="-120"/>
               </a:rPr>
-              <a:t> teams worked together on the project; their </a:t>
+              <a:t> the swimming squad after a year away. Our classroom </a:t>
             </a:r>
             <a:pPr algn="l" indent="0" marL="0">
               <a:buNone/>
@@ -16737,7 +17205,7 @@
                 <a:ea typeface="Calibri" pitchFamily="34" charset="-122"/>
                 <a:cs typeface="Calibri" pitchFamily="34" charset="-120"/>
               </a:rPr>
-              <a:t>joiner</a:t>
+              <a:t>adjoin</a:t>
             </a:r>
             <a:pPr algn="l" indent="0" marL="0">
               <a:buNone/>
@@ -16751,7 +17219,7 @@
                 <a:ea typeface="Calibri" pitchFamily="34" charset="-122"/>
                 <a:cs typeface="Calibri" pitchFamily="34" charset="-120"/>
               </a:rPr>
-              <a:t> made sure every part was connected, but they had to </a:t>
+              <a:t>s the school library. The twins slept in </a:t>
             </a:r>
             <a:pPr algn="l" indent="0" marL="0">
               <a:buNone/>
@@ -16768,7 +17236,7 @@
                 <a:ea typeface="Calibri" pitchFamily="34" charset="-122"/>
                 <a:cs typeface="Calibri" pitchFamily="34" charset="-120"/>
               </a:rPr>
-              <a:t>disjoin</a:t>
+              <a:t>adjoining</a:t>
             </a:r>
             <a:pPr algn="l" indent="0" marL="0">
               <a:buNone/>
@@ -16782,7 +17250,7 @@
                 <a:ea typeface="Calibri" pitchFamily="34" charset="-122"/>
                 <a:cs typeface="Calibri" pitchFamily="34" charset="-120"/>
               </a:rPr>
-              <a:t> the last two sections.</a:t>
+              <a:t> bedrooms so they could talk at night.</a:t>
             </a:r>
             <a:endParaRPr lang="en-US" sz="1800" dirty="0"/>
           </a:p>
@@ -16937,7 +17405,7 @@
                 <a:ea typeface="Trebuchet MS" pitchFamily="34" charset="-122"/>
                 <a:cs typeface="Trebuchet MS" pitchFamily="34" charset="-120"/>
               </a:rPr>
-              <a:t>conjoined</a:t>
+              <a:t>rejoining</a:t>
             </a:r>
             <a:endParaRPr lang="en-US" sz="1400" dirty="0"/>
           </a:p>
@@ -17065,7 +17533,7 @@
                 <a:ea typeface="Trebuchet MS" pitchFamily="34" charset="-122"/>
                 <a:cs typeface="Trebuchet MS" pitchFamily="34" charset="-120"/>
               </a:rPr>
-              <a:t>joiner</a:t>
+              <a:t>adjoin</a:t>
             </a:r>
             <a:endParaRPr lang="en-US" sz="1400" dirty="0"/>
           </a:p>
@@ -17193,7 +17661,7 @@
                 <a:ea typeface="Trebuchet MS" pitchFamily="34" charset="-122"/>
                 <a:cs typeface="Trebuchet MS" pitchFamily="34" charset="-120"/>
               </a:rPr>
-              <a:t>disjoin</a:t>
+              <a:t>adjoining</a:t>
             </a:r>
             <a:endParaRPr lang="en-US" sz="1400" dirty="0"/>
           </a:p>
@@ -17524,7 +17992,7 @@
                 <a:ea typeface="Calibri" pitchFamily="34" charset="-122"/>
                 <a:cs typeface="Calibri" pitchFamily="34" charset="-120"/>
               </a:rPr>
-              <a:t>Word Labs  •  wordlabs.app  •  Root: 'join' = to connect or bring together</a:t>
+              <a:t>Word Labs  •  wordlabs.app  •  Root: 'join' = connect</a:t>
             </a:r>
             <a:endParaRPr lang="en-US" sz="800" dirty="0"/>
           </a:p>
@@ -17663,7 +18131,7 @@
                 <a:ea typeface="Trebuchet MS" pitchFamily="34" charset="-122"/>
                 <a:cs typeface="Trebuchet MS" pitchFamily="34" charset="-120"/>
               </a:rPr>
-              <a:t>conjoined</a:t>
+              <a:t>rejoining</a:t>
             </a:r>
             <a:endParaRPr lang="en-US" sz="2800" dirty="0"/>
           </a:p>
@@ -18351,7 +18819,7 @@
                 <a:ea typeface="Calibri" pitchFamily="34" charset="-122"/>
                 <a:cs typeface="Calibri" pitchFamily="34" charset="-120"/>
               </a:rPr>
-              <a:t>Word Labs  •  wordlabs.app  •  Root: 'join' = to connect or bring together</a:t>
+              <a:t>Word Labs  •  wordlabs.app  •  Root: 'join' = connect</a:t>
             </a:r>
             <a:endParaRPr lang="en-US" sz="800" dirty="0"/>
           </a:p>
@@ -18490,7 +18958,7 @@
                 <a:ea typeface="Trebuchet MS" pitchFamily="34" charset="-122"/>
                 <a:cs typeface="Trebuchet MS" pitchFamily="34" charset="-120"/>
               </a:rPr>
-              <a:t>conjoined</a:t>
+              <a:t>rejoining</a:t>
             </a:r>
             <a:endParaRPr lang="en-US" sz="2800" dirty="0"/>
           </a:p>
@@ -18629,7 +19097,7 @@
                 <a:ea typeface="Trebuchet MS" pitchFamily="34" charset="-122"/>
                 <a:cs typeface="Trebuchet MS" pitchFamily="34" charset="-120"/>
               </a:rPr>
-              <a:t>con</a:t>
+              <a:t>re</a:t>
             </a:r>
             <a:endParaRPr lang="en-US" sz="1300" dirty="0"/>
           </a:p>
@@ -18668,7 +19136,7 @@
                 <a:ea typeface="Calibri" pitchFamily="34" charset="-122"/>
                 <a:cs typeface="Calibri" pitchFamily="34" charset="-120"/>
               </a:rPr>
-              <a:t>together</a:t>
+              <a:t>again</a:t>
             </a:r>
             <a:endParaRPr lang="en-US" sz="850" dirty="0"/>
           </a:p>
@@ -18780,7 +19248,7 @@
                 <a:ea typeface="Calibri" pitchFamily="34" charset="-122"/>
                 <a:cs typeface="Calibri" pitchFamily="34" charset="-120"/>
               </a:rPr>
-              <a:t>to connect or bring together</a:t>
+              <a:t>connect</a:t>
             </a:r>
             <a:endParaRPr lang="en-US" sz="850" dirty="0"/>
           </a:p>
@@ -18853,7 +19321,7 @@
                 <a:ea typeface="Trebuchet MS" pitchFamily="34" charset="-122"/>
                 <a:cs typeface="Trebuchet MS" pitchFamily="34" charset="-120"/>
               </a:rPr>
-              <a:t>ed</a:t>
+              <a:t>ing</a:t>
             </a:r>
             <a:endParaRPr lang="en-US" sz="1300" dirty="0"/>
           </a:p>
@@ -18892,7 +19360,7 @@
                 <a:ea typeface="Calibri" pitchFamily="34" charset="-122"/>
                 <a:cs typeface="Calibri" pitchFamily="34" charset="-120"/>
               </a:rPr>
-              <a:t>already happened</a:t>
+              <a:t>happening now</a:t>
             </a:r>
             <a:endParaRPr lang="en-US" sz="850" dirty="0"/>
           </a:p>
@@ -19448,7 +19916,7 @@
                 <a:ea typeface="Calibri" pitchFamily="34" charset="-122"/>
                 <a:cs typeface="Calibri" pitchFamily="34" charset="-120"/>
               </a:rPr>
-              <a:t>Word Labs  •  wordlabs.app  •  Root: 'join' = to connect or bring together</a:t>
+              <a:t>Word Labs  •  wordlabs.app  •  Root: 'join' = connect</a:t>
             </a:r>
             <a:endParaRPr lang="en-US" sz="800" dirty="0"/>
           </a:p>
@@ -19587,7 +20055,7 @@
                 <a:ea typeface="Trebuchet MS" pitchFamily="34" charset="-122"/>
                 <a:cs typeface="Trebuchet MS" pitchFamily="34" charset="-120"/>
               </a:rPr>
-              <a:t>conjoined</a:t>
+              <a:t>rejoining</a:t>
             </a:r>
             <a:endParaRPr lang="en-US" sz="2800" dirty="0"/>
           </a:p>
@@ -19726,7 +20194,7 @@
                 <a:ea typeface="Trebuchet MS" pitchFamily="34" charset="-122"/>
                 <a:cs typeface="Trebuchet MS" pitchFamily="34" charset="-120"/>
               </a:rPr>
-              <a:t>con</a:t>
+              <a:t>re</a:t>
             </a:r>
             <a:endParaRPr lang="en-US" sz="1300" dirty="0"/>
           </a:p>
@@ -19765,7 +20233,7 @@
                 <a:ea typeface="Calibri" pitchFamily="34" charset="-122"/>
                 <a:cs typeface="Calibri" pitchFamily="34" charset="-120"/>
               </a:rPr>
-              <a:t>together</a:t>
+              <a:t>again</a:t>
             </a:r>
             <a:endParaRPr lang="en-US" sz="850" dirty="0"/>
           </a:p>
@@ -19877,7 +20345,7 @@
                 <a:ea typeface="Calibri" pitchFamily="34" charset="-122"/>
                 <a:cs typeface="Calibri" pitchFamily="34" charset="-120"/>
               </a:rPr>
-              <a:t>to connect or bring together</a:t>
+              <a:t>connect</a:t>
             </a:r>
             <a:endParaRPr lang="en-US" sz="850" dirty="0"/>
           </a:p>
@@ -19950,7 +20418,7 @@
                 <a:ea typeface="Trebuchet MS" pitchFamily="34" charset="-122"/>
                 <a:cs typeface="Trebuchet MS" pitchFamily="34" charset="-120"/>
               </a:rPr>
-              <a:t>ed</a:t>
+              <a:t>ing</a:t>
             </a:r>
             <a:endParaRPr lang="en-US" sz="1300" dirty="0"/>
           </a:p>
@@ -19989,7 +20457,7 @@
                 <a:ea typeface="Calibri" pitchFamily="34" charset="-122"/>
                 <a:cs typeface="Calibri" pitchFamily="34" charset="-120"/>
               </a:rPr>
-              <a:t>already happened</a:t>
+              <a:t>happening now</a:t>
             </a:r>
             <a:endParaRPr lang="en-US" sz="850" dirty="0"/>
           </a:p>
@@ -20096,7 +20564,7 @@
         </p:nvSpPr>
         <p:spPr>
           <a:xfrm>
-            <a:off x="2999232" y="3364992"/>
+            <a:off x="2313432" y="3364992"/>
             <a:ext cx="1645920" cy="475488"/>
           </a:xfrm>
           <a:prstGeom prst="rect">
@@ -20123,7 +20591,7 @@
         </p:nvSpPr>
         <p:spPr>
           <a:xfrm>
-            <a:off x="2999232" y="3364992"/>
+            <a:off x="2313432" y="3364992"/>
             <a:ext cx="1645920" cy="475488"/>
           </a:xfrm>
           <a:prstGeom prst="rect">
@@ -20148,7 +20616,7 @@
                 <a:ea typeface="Trebuchet MS" pitchFamily="34" charset="-122"/>
                 <a:cs typeface="Trebuchet MS" pitchFamily="34" charset="-120"/>
               </a:rPr>
-              <a:t>con</a:t>
+              <a:t>re</a:t>
             </a:r>
             <a:endParaRPr lang="en-US" sz="1400" dirty="0"/>
           </a:p>
@@ -20162,8 +20630,8 @@
         </p:nvSpPr>
         <p:spPr>
           <a:xfrm>
-            <a:off x="4645152" y="3364992"/>
-            <a:ext cx="1097280" cy="475488"/>
+            <a:off x="3959352" y="3364992"/>
+            <a:ext cx="411480" cy="475488"/>
           </a:xfrm>
           <a:prstGeom prst="rect">
             <a:avLst/>
@@ -20201,7 +20669,7 @@
         </p:nvSpPr>
         <p:spPr>
           <a:xfrm>
-            <a:off x="5742432" y="3364992"/>
+            <a:off x="4370832" y="3364992"/>
             <a:ext cx="1645920" cy="475488"/>
           </a:xfrm>
           <a:prstGeom prst="rect">
@@ -20228,7 +20696,7 @@
         </p:nvSpPr>
         <p:spPr>
           <a:xfrm>
-            <a:off x="5742432" y="3364992"/>
+            <a:off x="4370832" y="3364992"/>
             <a:ext cx="1645920" cy="475488"/>
           </a:xfrm>
           <a:prstGeom prst="rect">
@@ -20253,7 +20721,7 @@
                 <a:ea typeface="Trebuchet MS" pitchFamily="34" charset="-122"/>
                 <a:cs typeface="Trebuchet MS" pitchFamily="34" charset="-120"/>
               </a:rPr>
-              <a:t>joined</a:t>
+              <a:t>join</a:t>
             </a:r>
             <a:endParaRPr lang="en-US" sz="1400" dirty="0"/>
           </a:p>
@@ -20261,7 +20729,112 @@
       </p:sp>
       <p:sp>
         <p:nvSpPr>
-          <p:cNvPr id="33" name="Shape 31"/>
+          <p:cNvPr id="33" name="Text 31"/>
+          <p:cNvSpPr/>
+          <p:nvPr/>
+        </p:nvSpPr>
+        <p:spPr>
+          <a:xfrm>
+            <a:off x="6016752" y="3364992"/>
+            <a:ext cx="411480" cy="475488"/>
+          </a:xfrm>
+          <a:prstGeom prst="rect">
+            <a:avLst/>
+          </a:prstGeom>
+          <a:noFill/>
+          <a:ln/>
+        </p:spPr>
+        <p:txBody>
+          <a:bodyPr wrap="square" lIns="0" tIns="0" rIns="0" bIns="0" rtlCol="0" anchor="ctr"/>
+          <a:lstStyle/>
+          <a:p>
+            <a:pPr algn="ctr" indent="0" marL="0">
+              <a:buNone/>
+            </a:pPr>
+            <a:r>
+              <a:rPr lang="en-US" sz="1600" b="1" dirty="0">
+                <a:solidFill>
+                  <a:srgbClr val="0D9488"/>
+                </a:solidFill>
+                <a:latin typeface="Trebuchet MS" pitchFamily="34" charset="0"/>
+                <a:ea typeface="Trebuchet MS" pitchFamily="34" charset="-122"/>
+                <a:cs typeface="Trebuchet MS" pitchFamily="34" charset="-120"/>
+              </a:rPr>
+              <a:t>·</a:t>
+            </a:r>
+            <a:endParaRPr lang="en-US" sz="1600" dirty="0"/>
+          </a:p>
+        </p:txBody>
+      </p:sp>
+      <p:sp>
+        <p:nvSpPr>
+          <p:cNvPr id="34" name="Shape 32"/>
+          <p:cNvSpPr/>
+          <p:nvPr/>
+        </p:nvSpPr>
+        <p:spPr>
+          <a:xfrm>
+            <a:off x="6428232" y="3364992"/>
+            <a:ext cx="1645920" cy="475488"/>
+          </a:xfrm>
+          <a:prstGeom prst="rect">
+            <a:avLst>
+              <a:gd name="adj" fmla="val 9615"/>
+            </a:avLst>
+          </a:prstGeom>
+          <a:solidFill>
+            <a:srgbClr val="FFFFFF"/>
+          </a:solidFill>
+          <a:ln w="12700">
+            <a:solidFill>
+              <a:srgbClr val="0D9488"/>
+            </a:solidFill>
+            <a:prstDash val="solid"/>
+          </a:ln>
+        </p:spPr>
+      </p:sp>
+      <p:sp>
+        <p:nvSpPr>
+          <p:cNvPr id="35" name="Text 33"/>
+          <p:cNvSpPr/>
+          <p:nvPr/>
+        </p:nvSpPr>
+        <p:spPr>
+          <a:xfrm>
+            <a:off x="6428232" y="3364992"/>
+            <a:ext cx="1645920" cy="475488"/>
+          </a:xfrm>
+          <a:prstGeom prst="rect">
+            <a:avLst/>
+          </a:prstGeom>
+          <a:noFill/>
+          <a:ln/>
+        </p:spPr>
+        <p:txBody>
+          <a:bodyPr wrap="square" lIns="0" tIns="0" rIns="0" bIns="0" rtlCol="0" anchor="ctr"/>
+          <a:lstStyle/>
+          <a:p>
+            <a:pPr algn="ctr" indent="0" marL="0">
+              <a:buNone/>
+            </a:pPr>
+            <a:r>
+              <a:rPr lang="en-US" sz="1400" b="1" dirty="0">
+                <a:solidFill>
+                  <a:srgbClr val="0D9488"/>
+                </a:solidFill>
+                <a:latin typeface="Trebuchet MS" pitchFamily="34" charset="0"/>
+                <a:ea typeface="Trebuchet MS" pitchFamily="34" charset="-122"/>
+                <a:cs typeface="Trebuchet MS" pitchFamily="34" charset="-120"/>
+              </a:rPr>
+              <a:t>ing</a:t>
+            </a:r>
+            <a:endParaRPr lang="en-US" sz="1400" dirty="0"/>
+          </a:p>
+        </p:txBody>
+      </p:sp>
+      <p:sp>
+        <p:nvSpPr>
+          <p:cNvPr id="36" name="Shape 34"/>
           <p:cNvSpPr/>
           <p:nvPr/>
         </p:nvSpPr>
@@ -20288,7 +20861,7 @@
       </p:sp>
       <p:sp>
         <p:nvSpPr>
-          <p:cNvPr id="34" name="Text 32"/>
+          <p:cNvPr id="37" name="Text 35"/>
           <p:cNvSpPr/>
           <p:nvPr/>
         </p:nvSpPr>
@@ -20327,7 +20900,7 @@
       </p:sp>
       <p:sp>
         <p:nvSpPr>
-          <p:cNvPr id="35" name="Shape 33"/>
+          <p:cNvPr id="38" name="Shape 36"/>
           <p:cNvSpPr/>
           <p:nvPr/>
         </p:nvSpPr>
@@ -20354,7 +20927,7 @@
       </p:sp>
       <p:sp>
         <p:nvSpPr>
-          <p:cNvPr id="36" name="Text 34"/>
+          <p:cNvPr id="39" name="Text 37"/>
           <p:cNvSpPr/>
           <p:nvPr/>
         </p:nvSpPr>
@@ -20677,7 +21250,7 @@
                 <a:ea typeface="Calibri" pitchFamily="34" charset="-122"/>
                 <a:cs typeface="Calibri" pitchFamily="34" charset="-120"/>
               </a:rPr>
-              <a:t>Word Labs  •  wordlabs.app  •  Root: 'join' = to connect or bring together</a:t>
+              <a:t>Word Labs  •  wordlabs.app  •  Root: 'join' = connect</a:t>
             </a:r>
             <a:endParaRPr lang="en-US" sz="800" dirty="0"/>
           </a:p>
@@ -20816,7 +21389,7 @@
                 <a:ea typeface="Trebuchet MS" pitchFamily="34" charset="-122"/>
                 <a:cs typeface="Trebuchet MS" pitchFamily="34" charset="-120"/>
               </a:rPr>
-              <a:t>conjoined</a:t>
+              <a:t>rejoining</a:t>
             </a:r>
             <a:endParaRPr lang="en-US" sz="2800" dirty="0"/>
           </a:p>
@@ -20955,7 +21528,7 @@
                 <a:ea typeface="Trebuchet MS" pitchFamily="34" charset="-122"/>
                 <a:cs typeface="Trebuchet MS" pitchFamily="34" charset="-120"/>
               </a:rPr>
-              <a:t>con</a:t>
+              <a:t>re</a:t>
             </a:r>
             <a:endParaRPr lang="en-US" sz="1300" dirty="0"/>
           </a:p>
@@ -20994,7 +21567,7 @@
                 <a:ea typeface="Calibri" pitchFamily="34" charset="-122"/>
                 <a:cs typeface="Calibri" pitchFamily="34" charset="-120"/>
               </a:rPr>
-              <a:t>together</a:t>
+              <a:t>again</a:t>
             </a:r>
             <a:endParaRPr lang="en-US" sz="850" dirty="0"/>
           </a:p>
@@ -21106,7 +21679,7 @@
                 <a:ea typeface="Calibri" pitchFamily="34" charset="-122"/>
                 <a:cs typeface="Calibri" pitchFamily="34" charset="-120"/>
               </a:rPr>
-              <a:t>to connect or bring together</a:t>
+              <a:t>connect</a:t>
             </a:r>
             <a:endParaRPr lang="en-US" sz="850" dirty="0"/>
           </a:p>
@@ -21179,7 +21752,7 @@
                 <a:ea typeface="Trebuchet MS" pitchFamily="34" charset="-122"/>
                 <a:cs typeface="Trebuchet MS" pitchFamily="34" charset="-120"/>
               </a:rPr>
-              <a:t>ed</a:t>
+              <a:t>ing</a:t>
             </a:r>
             <a:endParaRPr lang="en-US" sz="1300" dirty="0"/>
           </a:p>
@@ -21218,7 +21791,7 @@
                 <a:ea typeface="Calibri" pitchFamily="34" charset="-122"/>
                 <a:cs typeface="Calibri" pitchFamily="34" charset="-120"/>
               </a:rPr>
-              <a:t>already happened</a:t>
+              <a:t>happening now</a:t>
             </a:r>
             <a:endParaRPr lang="en-US" sz="850" dirty="0"/>
           </a:p>
@@ -21325,7 +21898,7 @@
         </p:nvSpPr>
         <p:spPr>
           <a:xfrm>
-            <a:off x="2999232" y="3364992"/>
+            <a:off x="2313432" y="3364992"/>
             <a:ext cx="1645920" cy="475488"/>
           </a:xfrm>
           <a:prstGeom prst="rect">
@@ -21352,7 +21925,7 @@
         </p:nvSpPr>
         <p:spPr>
           <a:xfrm>
-            <a:off x="2999232" y="3364992"/>
+            <a:off x="2313432" y="3364992"/>
             <a:ext cx="1645920" cy="475488"/>
           </a:xfrm>
           <a:prstGeom prst="rect">
@@ -21377,7 +21950,7 @@
                 <a:ea typeface="Trebuchet MS" pitchFamily="34" charset="-122"/>
                 <a:cs typeface="Trebuchet MS" pitchFamily="34" charset="-120"/>
               </a:rPr>
-              <a:t>con</a:t>
+              <a:t>re</a:t>
             </a:r>
             <a:endParaRPr lang="en-US" sz="1400" dirty="0"/>
           </a:p>
@@ -21391,8 +21964,8 @@
         </p:nvSpPr>
         <p:spPr>
           <a:xfrm>
-            <a:off x="4645152" y="3364992"/>
-            <a:ext cx="1097280" cy="475488"/>
+            <a:off x="3959352" y="3364992"/>
+            <a:ext cx="411480" cy="475488"/>
           </a:xfrm>
           <a:prstGeom prst="rect">
             <a:avLst/>
@@ -21430,7 +22003,7 @@
         </p:nvSpPr>
         <p:spPr>
           <a:xfrm>
-            <a:off x="5742432" y="3364992"/>
+            <a:off x="4370832" y="3364992"/>
             <a:ext cx="1645920" cy="475488"/>
           </a:xfrm>
           <a:prstGeom prst="rect">
@@ -21457,7 +22030,7 @@
         </p:nvSpPr>
         <p:spPr>
           <a:xfrm>
-            <a:off x="5742432" y="3364992"/>
+            <a:off x="4370832" y="3364992"/>
             <a:ext cx="1645920" cy="475488"/>
           </a:xfrm>
           <a:prstGeom prst="rect">
@@ -21482,7 +22055,7 @@
                 <a:ea typeface="Trebuchet MS" pitchFamily="34" charset="-122"/>
                 <a:cs typeface="Trebuchet MS" pitchFamily="34" charset="-120"/>
               </a:rPr>
-              <a:t>joined</a:t>
+              <a:t>join</a:t>
             </a:r>
             <a:endParaRPr lang="en-US" sz="1400" dirty="0"/>
           </a:p>
@@ -21490,7 +22063,112 @@
       </p:sp>
       <p:sp>
         <p:nvSpPr>
-          <p:cNvPr id="33" name="Shape 31"/>
+          <p:cNvPr id="33" name="Text 31"/>
+          <p:cNvSpPr/>
+          <p:nvPr/>
+        </p:nvSpPr>
+        <p:spPr>
+          <a:xfrm>
+            <a:off x="6016752" y="3364992"/>
+            <a:ext cx="411480" cy="475488"/>
+          </a:xfrm>
+          <a:prstGeom prst="rect">
+            <a:avLst/>
+          </a:prstGeom>
+          <a:noFill/>
+          <a:ln/>
+        </p:spPr>
+        <p:txBody>
+          <a:bodyPr wrap="square" lIns="0" tIns="0" rIns="0" bIns="0" rtlCol="0" anchor="ctr"/>
+          <a:lstStyle/>
+          <a:p>
+            <a:pPr algn="ctr" indent="0" marL="0">
+              <a:buNone/>
+            </a:pPr>
+            <a:r>
+              <a:rPr lang="en-US" sz="1600" b="1" dirty="0">
+                <a:solidFill>
+                  <a:srgbClr val="0D9488"/>
+                </a:solidFill>
+                <a:latin typeface="Trebuchet MS" pitchFamily="34" charset="0"/>
+                <a:ea typeface="Trebuchet MS" pitchFamily="34" charset="-122"/>
+                <a:cs typeface="Trebuchet MS" pitchFamily="34" charset="-120"/>
+              </a:rPr>
+              <a:t>·</a:t>
+            </a:r>
+            <a:endParaRPr lang="en-US" sz="1600" dirty="0"/>
+          </a:p>
+        </p:txBody>
+      </p:sp>
+      <p:sp>
+        <p:nvSpPr>
+          <p:cNvPr id="34" name="Shape 32"/>
+          <p:cNvSpPr/>
+          <p:nvPr/>
+        </p:nvSpPr>
+        <p:spPr>
+          <a:xfrm>
+            <a:off x="6428232" y="3364992"/>
+            <a:ext cx="1645920" cy="475488"/>
+          </a:xfrm>
+          <a:prstGeom prst="rect">
+            <a:avLst>
+              <a:gd name="adj" fmla="val 9615"/>
+            </a:avLst>
+          </a:prstGeom>
+          <a:solidFill>
+            <a:srgbClr val="FFFFFF"/>
+          </a:solidFill>
+          <a:ln w="12700">
+            <a:solidFill>
+              <a:srgbClr val="0D9488"/>
+            </a:solidFill>
+            <a:prstDash val="solid"/>
+          </a:ln>
+        </p:spPr>
+      </p:sp>
+      <p:sp>
+        <p:nvSpPr>
+          <p:cNvPr id="35" name="Text 33"/>
+          <p:cNvSpPr/>
+          <p:nvPr/>
+        </p:nvSpPr>
+        <p:spPr>
+          <a:xfrm>
+            <a:off x="6428232" y="3364992"/>
+            <a:ext cx="1645920" cy="475488"/>
+          </a:xfrm>
+          <a:prstGeom prst="rect">
+            <a:avLst/>
+          </a:prstGeom>
+          <a:noFill/>
+          <a:ln/>
+        </p:spPr>
+        <p:txBody>
+          <a:bodyPr wrap="square" lIns="0" tIns="0" rIns="0" bIns="0" rtlCol="0" anchor="ctr"/>
+          <a:lstStyle/>
+          <a:p>
+            <a:pPr algn="ctr" indent="0" marL="0">
+              <a:buNone/>
+            </a:pPr>
+            <a:r>
+              <a:rPr lang="en-US" sz="1400" b="1" dirty="0">
+                <a:solidFill>
+                  <a:srgbClr val="0D9488"/>
+                </a:solidFill>
+                <a:latin typeface="Trebuchet MS" pitchFamily="34" charset="0"/>
+                <a:ea typeface="Trebuchet MS" pitchFamily="34" charset="-122"/>
+                <a:cs typeface="Trebuchet MS" pitchFamily="34" charset="-120"/>
+              </a:rPr>
+              <a:t>ing</a:t>
+            </a:r>
+            <a:endParaRPr lang="en-US" sz="1400" dirty="0"/>
+          </a:p>
+        </p:txBody>
+      </p:sp>
+      <p:sp>
+        <p:nvSpPr>
+          <p:cNvPr id="36" name="Shape 34"/>
           <p:cNvSpPr/>
           <p:nvPr/>
         </p:nvSpPr>
@@ -21517,7 +22195,7 @@
       </p:sp>
       <p:sp>
         <p:nvSpPr>
-          <p:cNvPr id="34" name="Text 32"/>
+          <p:cNvPr id="37" name="Text 35"/>
           <p:cNvSpPr/>
           <p:nvPr/>
         </p:nvSpPr>
@@ -21556,18 +22234,18 @@
       </p:sp>
       <p:sp>
         <p:nvSpPr>
-          <p:cNvPr id="35" name="Shape 33"/>
+          <p:cNvPr id="38" name="Shape 36"/>
           <p:cNvSpPr/>
           <p:nvPr/>
         </p:nvSpPr>
         <p:spPr>
           <a:xfrm>
             <a:off x="1874520" y="4096512"/>
-            <a:ext cx="6903720" cy="804672"/>
+            <a:ext cx="6903720" cy="658368"/>
           </a:xfrm>
           <a:prstGeom prst="rect">
             <a:avLst>
-              <a:gd name="adj" fmla="val 6818"/>
+              <a:gd name="adj" fmla="val 8333"/>
             </a:avLst>
           </a:prstGeom>
           <a:solidFill>
@@ -21583,18 +22261,18 @@
       </p:sp>
       <p:sp>
         <p:nvSpPr>
-          <p:cNvPr id="36" name="Shape 34"/>
+          <p:cNvPr id="39" name="Shape 37"/>
           <p:cNvSpPr/>
           <p:nvPr/>
         </p:nvSpPr>
         <p:spPr>
           <a:xfrm>
             <a:off x="2124837" y="4169664"/>
-            <a:ext cx="685800" cy="384048"/>
+            <a:ext cx="685800" cy="475488"/>
           </a:xfrm>
           <a:prstGeom prst="rect">
             <a:avLst>
-              <a:gd name="adj" fmla="val 9524"/>
+              <a:gd name="adj" fmla="val 7692"/>
             </a:avLst>
           </a:prstGeom>
           <a:solidFill>
@@ -21610,14 +22288,14 @@
       </p:sp>
       <p:sp>
         <p:nvSpPr>
-          <p:cNvPr id="37" name="Text 35"/>
+          <p:cNvPr id="40" name="Text 38"/>
           <p:cNvSpPr/>
           <p:nvPr/>
         </p:nvSpPr>
         <p:spPr>
           <a:xfrm>
             <a:off x="2124837" y="4169664"/>
-            <a:ext cx="685800" cy="384048"/>
+            <a:ext cx="685800" cy="475488"/>
           </a:xfrm>
           <a:prstGeom prst="rect">
             <a:avLst/>
@@ -21641,7 +22319,7 @@
                 <a:ea typeface="Trebuchet MS" pitchFamily="34" charset="-122"/>
                 <a:cs typeface="Trebuchet MS" pitchFamily="34" charset="-120"/>
               </a:rPr>
-              <a:t>c</a:t>
+              <a:t>r</a:t>
             </a:r>
             <a:endParaRPr lang="en-US" sz="900" dirty="0"/>
           </a:p>
@@ -21649,57 +22327,18 @@
       </p:sp>
       <p:sp>
         <p:nvSpPr>
-          <p:cNvPr id="38" name="Text 36"/>
-          <p:cNvSpPr/>
-          <p:nvPr/>
-        </p:nvSpPr>
-        <p:spPr>
-          <a:xfrm>
-            <a:off x="2124837" y="4572000"/>
-            <a:ext cx="685800" cy="219456"/>
-          </a:xfrm>
-          <a:prstGeom prst="rect">
-            <a:avLst/>
-          </a:prstGeom>
-          <a:noFill/>
-          <a:ln/>
-        </p:spPr>
-        <p:txBody>
-          <a:bodyPr wrap="square" lIns="0" tIns="0" rIns="0" bIns="0" rtlCol="0" anchor="t"/>
-          <a:lstStyle/>
-          <a:p>
-            <a:pPr algn="ctr" indent="0" marL="0">
-              <a:buNone/>
-            </a:pPr>
-            <a:r>
-              <a:rPr lang="en-US" sz="750" i="1" dirty="0">
-                <a:solidFill>
-                  <a:srgbClr val="94A3B8"/>
-                </a:solidFill>
-                <a:latin typeface="Calibri" pitchFamily="34" charset="0"/>
-                <a:ea typeface="Calibri" pitchFamily="34" charset="-122"/>
-                <a:cs typeface="Calibri" pitchFamily="34" charset="-120"/>
-              </a:rPr>
-              <a:t>/k/</a:t>
-            </a:r>
-            <a:endParaRPr lang="en-US" sz="750" dirty="0"/>
-          </a:p>
-        </p:txBody>
-      </p:sp>
-      <p:sp>
-        <p:nvSpPr>
-          <p:cNvPr id="39" name="Shape 37"/>
+          <p:cNvPr id="41" name="Shape 39"/>
           <p:cNvSpPr/>
           <p:nvPr/>
         </p:nvSpPr>
         <p:spPr>
           <a:xfrm>
             <a:off x="3033522" y="4169664"/>
-            <a:ext cx="685800" cy="384048"/>
+            <a:ext cx="685800" cy="475488"/>
           </a:xfrm>
           <a:prstGeom prst="rect">
             <a:avLst>
-              <a:gd name="adj" fmla="val 9524"/>
+              <a:gd name="adj" fmla="val 7692"/>
             </a:avLst>
           </a:prstGeom>
           <a:solidFill>
@@ -21715,14 +22354,14 @@
       </p:sp>
       <p:sp>
         <p:nvSpPr>
-          <p:cNvPr id="40" name="Text 38"/>
+          <p:cNvPr id="42" name="Text 40"/>
           <p:cNvSpPr/>
           <p:nvPr/>
         </p:nvSpPr>
         <p:spPr>
           <a:xfrm>
             <a:off x="3033522" y="4169664"/>
-            <a:ext cx="685800" cy="384048"/>
+            <a:ext cx="685800" cy="475488"/>
           </a:xfrm>
           <a:prstGeom prst="rect">
             <a:avLst/>
@@ -21746,7 +22385,7 @@
                 <a:ea typeface="Trebuchet MS" pitchFamily="34" charset="-122"/>
                 <a:cs typeface="Trebuchet MS" pitchFamily="34" charset="-120"/>
               </a:rPr>
-              <a:t>o</a:t>
+              <a:t>e</a:t>
             </a:r>
             <a:endParaRPr lang="en-US" sz="900" dirty="0"/>
           </a:p>
@@ -21754,18 +22393,18 @@
       </p:sp>
       <p:sp>
         <p:nvSpPr>
-          <p:cNvPr id="41" name="Shape 39"/>
+          <p:cNvPr id="43" name="Shape 41"/>
           <p:cNvSpPr/>
           <p:nvPr/>
         </p:nvSpPr>
         <p:spPr>
           <a:xfrm>
             <a:off x="3942207" y="4169664"/>
-            <a:ext cx="685800" cy="384048"/>
+            <a:ext cx="685800" cy="475488"/>
           </a:xfrm>
           <a:prstGeom prst="rect">
             <a:avLst>
-              <a:gd name="adj" fmla="val 9524"/>
+              <a:gd name="adj" fmla="val 7692"/>
             </a:avLst>
           </a:prstGeom>
           <a:solidFill>
@@ -21781,14 +22420,14 @@
       </p:sp>
       <p:sp>
         <p:nvSpPr>
-          <p:cNvPr id="42" name="Text 40"/>
+          <p:cNvPr id="44" name="Text 42"/>
           <p:cNvSpPr/>
           <p:nvPr/>
         </p:nvSpPr>
         <p:spPr>
           <a:xfrm>
             <a:off x="3942207" y="4169664"/>
-            <a:ext cx="685800" cy="384048"/>
+            <a:ext cx="685800" cy="475488"/>
           </a:xfrm>
           <a:prstGeom prst="rect">
             <a:avLst/>
@@ -21812,7 +22451,7 @@
                 <a:ea typeface="Trebuchet MS" pitchFamily="34" charset="-122"/>
                 <a:cs typeface="Trebuchet MS" pitchFamily="34" charset="-120"/>
               </a:rPr>
-              <a:t>n</a:t>
+              <a:t>j</a:t>
             </a:r>
             <a:endParaRPr lang="en-US" sz="900" dirty="0"/>
           </a:p>
@@ -21820,18 +22459,18 @@
       </p:sp>
       <p:sp>
         <p:nvSpPr>
-          <p:cNvPr id="43" name="Shape 41"/>
+          <p:cNvPr id="45" name="Shape 43"/>
           <p:cNvSpPr/>
           <p:nvPr/>
         </p:nvSpPr>
         <p:spPr>
           <a:xfrm>
             <a:off x="4850892" y="4169664"/>
-            <a:ext cx="685800" cy="384048"/>
+            <a:ext cx="685800" cy="475488"/>
           </a:xfrm>
           <a:prstGeom prst="rect">
             <a:avLst>
-              <a:gd name="adj" fmla="val 9524"/>
+              <a:gd name="adj" fmla="val 7692"/>
             </a:avLst>
           </a:prstGeom>
           <a:solidFill>
@@ -21847,14 +22486,14 @@
       </p:sp>
       <p:sp>
         <p:nvSpPr>
-          <p:cNvPr id="44" name="Text 42"/>
+          <p:cNvPr id="46" name="Text 44"/>
           <p:cNvSpPr/>
           <p:nvPr/>
         </p:nvSpPr>
         <p:spPr>
           <a:xfrm>
             <a:off x="4850892" y="4169664"/>
-            <a:ext cx="685800" cy="384048"/>
+            <a:ext cx="685800" cy="475488"/>
           </a:xfrm>
           <a:prstGeom prst="rect">
             <a:avLst/>
@@ -21878,7 +22517,7 @@
                 <a:ea typeface="Trebuchet MS" pitchFamily="34" charset="-122"/>
                 <a:cs typeface="Trebuchet MS" pitchFamily="34" charset="-120"/>
               </a:rPr>
-              <a:t>j</a:t>
+              <a:t>oi</a:t>
             </a:r>
             <a:endParaRPr lang="en-US" sz="900" dirty="0"/>
           </a:p>
@@ -21886,18 +22525,18 @@
       </p:sp>
       <p:sp>
         <p:nvSpPr>
-          <p:cNvPr id="45" name="Shape 43"/>
+          <p:cNvPr id="47" name="Shape 45"/>
           <p:cNvSpPr/>
           <p:nvPr/>
         </p:nvSpPr>
         <p:spPr>
           <a:xfrm>
             <a:off x="5759577" y="4169664"/>
-            <a:ext cx="685800" cy="384048"/>
+            <a:ext cx="685800" cy="475488"/>
           </a:xfrm>
           <a:prstGeom prst="rect">
             <a:avLst>
-              <a:gd name="adj" fmla="val 9524"/>
+              <a:gd name="adj" fmla="val 7692"/>
             </a:avLst>
           </a:prstGeom>
           <a:solidFill>
@@ -21913,14 +22552,14 @@
       </p:sp>
       <p:sp>
         <p:nvSpPr>
-          <p:cNvPr id="46" name="Text 44"/>
+          <p:cNvPr id="48" name="Text 46"/>
           <p:cNvSpPr/>
           <p:nvPr/>
         </p:nvSpPr>
         <p:spPr>
           <a:xfrm>
             <a:off x="5759577" y="4169664"/>
-            <a:ext cx="685800" cy="384048"/>
+            <a:ext cx="685800" cy="475488"/>
           </a:xfrm>
           <a:prstGeom prst="rect">
             <a:avLst/>
@@ -21944,7 +22583,7 @@
                 <a:ea typeface="Trebuchet MS" pitchFamily="34" charset="-122"/>
                 <a:cs typeface="Trebuchet MS" pitchFamily="34" charset="-120"/>
               </a:rPr>
-              <a:t>oi</a:t>
+              <a:t>n</a:t>
             </a:r>
             <a:endParaRPr lang="en-US" sz="900" dirty="0"/>
           </a:p>
@@ -21952,18 +22591,18 @@
       </p:sp>
       <p:sp>
         <p:nvSpPr>
-          <p:cNvPr id="47" name="Shape 45"/>
+          <p:cNvPr id="49" name="Shape 47"/>
           <p:cNvSpPr/>
           <p:nvPr/>
         </p:nvSpPr>
         <p:spPr>
           <a:xfrm>
             <a:off x="6668262" y="4169664"/>
-            <a:ext cx="685800" cy="384048"/>
+            <a:ext cx="685800" cy="475488"/>
           </a:xfrm>
           <a:prstGeom prst="rect">
             <a:avLst>
-              <a:gd name="adj" fmla="val 9524"/>
+              <a:gd name="adj" fmla="val 7692"/>
             </a:avLst>
           </a:prstGeom>
           <a:solidFill>
@@ -21979,14 +22618,14 @@
       </p:sp>
       <p:sp>
         <p:nvSpPr>
-          <p:cNvPr id="48" name="Text 46"/>
+          <p:cNvPr id="50" name="Text 48"/>
           <p:cNvSpPr/>
           <p:nvPr/>
         </p:nvSpPr>
         <p:spPr>
           <a:xfrm>
             <a:off x="6668262" y="4169664"/>
-            <a:ext cx="685800" cy="384048"/>
+            <a:ext cx="685800" cy="475488"/>
           </a:xfrm>
           <a:prstGeom prst="rect">
             <a:avLst/>
@@ -22010,7 +22649,7 @@
                 <a:ea typeface="Trebuchet MS" pitchFamily="34" charset="-122"/>
                 <a:cs typeface="Trebuchet MS" pitchFamily="34" charset="-120"/>
               </a:rPr>
-              <a:t>n</a:t>
+              <a:t>i</a:t>
             </a:r>
             <a:endParaRPr lang="en-US" sz="900" dirty="0"/>
           </a:p>
@@ -22018,18 +22657,18 @@
       </p:sp>
       <p:sp>
         <p:nvSpPr>
-          <p:cNvPr id="49" name="Shape 47"/>
+          <p:cNvPr id="51" name="Shape 49"/>
           <p:cNvSpPr/>
           <p:nvPr/>
         </p:nvSpPr>
         <p:spPr>
           <a:xfrm>
             <a:off x="7576947" y="4169664"/>
-            <a:ext cx="685800" cy="384048"/>
+            <a:ext cx="685800" cy="475488"/>
           </a:xfrm>
           <a:prstGeom prst="rect">
             <a:avLst>
-              <a:gd name="adj" fmla="val 9524"/>
+              <a:gd name="adj" fmla="val 7692"/>
             </a:avLst>
           </a:prstGeom>
           <a:solidFill>
@@ -22045,14 +22684,14 @@
       </p:sp>
       <p:sp>
         <p:nvSpPr>
-          <p:cNvPr id="50" name="Text 48"/>
+          <p:cNvPr id="52" name="Text 50"/>
           <p:cNvSpPr/>
           <p:nvPr/>
         </p:nvSpPr>
         <p:spPr>
           <a:xfrm>
             <a:off x="7576947" y="4169664"/>
-            <a:ext cx="685800" cy="384048"/>
+            <a:ext cx="685800" cy="475488"/>
           </a:xfrm>
           <a:prstGeom prst="rect">
             <a:avLst/>
@@ -22076,7 +22715,7 @@
                 <a:ea typeface="Trebuchet MS" pitchFamily="34" charset="-122"/>
                 <a:cs typeface="Trebuchet MS" pitchFamily="34" charset="-120"/>
               </a:rPr>
-              <a:t>ed</a:t>
+              <a:t>ng</a:t>
             </a:r>
             <a:endParaRPr lang="en-US" sz="900" dirty="0"/>
           </a:p>
@@ -22368,7 +23007,7 @@
                 <a:ea typeface="Calibri" pitchFamily="34" charset="-122"/>
                 <a:cs typeface="Calibri" pitchFamily="34" charset="-120"/>
               </a:rPr>
-              <a:t>Word Labs  •  wordlabs.app  •  Root: 'join' = to connect or bring together</a:t>
+              <a:t>Word Labs  •  wordlabs.app  •  Root: 'join' = connect</a:t>
             </a:r>
             <a:endParaRPr lang="en-US" sz="800" dirty="0"/>
           </a:p>
@@ -22507,7 +23146,7 @@
                 <a:ea typeface="Trebuchet MS" pitchFamily="34" charset="-122"/>
                 <a:cs typeface="Trebuchet MS" pitchFamily="34" charset="-120"/>
               </a:rPr>
-              <a:t>joiner</a:t>
+              <a:t>adjoin</a:t>
             </a:r>
             <a:endParaRPr lang="en-US" sz="2800" dirty="0"/>
           </a:p>
@@ -23195,7 +23834,7 @@
                 <a:ea typeface="Calibri" pitchFamily="34" charset="-122"/>
                 <a:cs typeface="Calibri" pitchFamily="34" charset="-120"/>
               </a:rPr>
-              <a:t>Word Labs  •  wordlabs.app  •  Root: 'join' = to connect or bring together</a:t>
+              <a:t>Word Labs  •  wordlabs.app  •  Root: 'join' = connect</a:t>
             </a:r>
             <a:endParaRPr lang="en-US" sz="800" dirty="0"/>
           </a:p>
@@ -23334,7 +23973,7 @@
                 <a:ea typeface="Trebuchet MS" pitchFamily="34" charset="-122"/>
                 <a:cs typeface="Trebuchet MS" pitchFamily="34" charset="-120"/>
               </a:rPr>
-              <a:t>joiner</a:t>
+              <a:t>adjoin</a:t>
             </a:r>
             <a:endParaRPr lang="en-US" sz="2800" dirty="0"/>
           </a:p>
@@ -23423,11 +24062,11 @@
             </a:avLst>
           </a:prstGeom>
           <a:solidFill>
-            <a:srgbClr val="CCFBF1"/>
+            <a:srgbClr val="DDD6FE"/>
           </a:solidFill>
           <a:ln w="19050">
             <a:solidFill>
-              <a:srgbClr val="0D9488"/>
+              <a:srgbClr val="7C3AED"/>
             </a:solidFill>
             <a:prstDash val="solid"/>
           </a:ln>
@@ -23467,13 +24106,13 @@
             <a:r>
               <a:rPr lang="en-US" sz="1300" b="1" dirty="0">
                 <a:solidFill>
-                  <a:srgbClr val="0F766E"/>
+                  <a:srgbClr val="4C1D95"/>
                 </a:solidFill>
                 <a:latin typeface="Trebuchet MS" pitchFamily="34" charset="0"/>
                 <a:ea typeface="Trebuchet MS" pitchFamily="34" charset="-122"/>
                 <a:cs typeface="Trebuchet MS" pitchFamily="34" charset="-120"/>
               </a:rPr>
-              <a:t>join</a:t>
+              <a:t>ad</a:t>
             </a:r>
             <a:endParaRPr lang="en-US" sz="1300" dirty="0"/>
           </a:p>
@@ -23512,7 +24151,7 @@
                 <a:ea typeface="Calibri" pitchFamily="34" charset="-122"/>
                 <a:cs typeface="Calibri" pitchFamily="34" charset="-120"/>
               </a:rPr>
-              <a:t>to connect or bring together</a:t>
+              <a:t>towards; to</a:t>
             </a:r>
             <a:endParaRPr lang="en-US" sz="850" dirty="0"/>
           </a:p>
@@ -23535,11 +24174,11 @@
             </a:avLst>
           </a:prstGeom>
           <a:solidFill>
-            <a:srgbClr val="FCE7F3"/>
+            <a:srgbClr val="CCFBF1"/>
           </a:solidFill>
           <a:ln w="19050">
             <a:solidFill>
-              <a:srgbClr val="DB2777"/>
+              <a:srgbClr val="0D9488"/>
             </a:solidFill>
             <a:prstDash val="solid"/>
           </a:ln>
@@ -23579,13 +24218,13 @@
             <a:r>
               <a:rPr lang="en-US" sz="1300" b="1" dirty="0">
                 <a:solidFill>
-                  <a:srgbClr val="9D174D"/>
+                  <a:srgbClr val="0F766E"/>
                 </a:solidFill>
                 <a:latin typeface="Trebuchet MS" pitchFamily="34" charset="0"/>
                 <a:ea typeface="Trebuchet MS" pitchFamily="34" charset="-122"/>
                 <a:cs typeface="Trebuchet MS" pitchFamily="34" charset="-120"/>
               </a:rPr>
-              <a:t>er</a:t>
+              <a:t>join</a:t>
             </a:r>
             <a:endParaRPr lang="en-US" sz="1300" dirty="0"/>
           </a:p>
@@ -23624,7 +24263,7 @@
                 <a:ea typeface="Calibri" pitchFamily="34" charset="-122"/>
                 <a:cs typeface="Calibri" pitchFamily="34" charset="-120"/>
               </a:rPr>
-              <a:t>a person or thing that does something</a:t>
+              <a:t>connect</a:t>
             </a:r>
             <a:endParaRPr lang="en-US" sz="850" dirty="0"/>
           </a:p>
@@ -24180,7 +24819,7 @@
                 <a:ea typeface="Calibri" pitchFamily="34" charset="-122"/>
                 <a:cs typeface="Calibri" pitchFamily="34" charset="-120"/>
               </a:rPr>
-              <a:t>Word Labs  •  wordlabs.app  •  Root: 'join' = to connect or bring together</a:t>
+              <a:t>Word Labs  •  wordlabs.app  •  Root: 'join' = connect</a:t>
             </a:r>
             <a:endParaRPr lang="en-US" sz="800" dirty="0"/>
           </a:p>
@@ -24253,7 +24892,7 @@
                 <a:ea typeface="Trebuchet MS" pitchFamily="34" charset="-122"/>
                 <a:cs typeface="Trebuchet MS" pitchFamily="34" charset="-120"/>
               </a:rPr>
-              <a:t>We are learning that the root 'join' means 'to connect or bring together'.</a:t>
+              <a:t>We are learning that the root 'join' means 'connect'.</a:t>
             </a:r>
             <a:endParaRPr lang="en-US" sz="2000" dirty="0"/>
           </a:p>
@@ -24899,7 +25538,7 @@
                 <a:ea typeface="Calibri" pitchFamily="34" charset="-122"/>
                 <a:cs typeface="Calibri" pitchFamily="34" charset="-120"/>
               </a:rPr>
-              <a:t>Word Labs  •  wordlabs.app  •  Root: 'join' = to connect or bring together</a:t>
+              <a:t>Word Labs  •  wordlabs.app  •  Root: 'join' = connect</a:t>
             </a:r>
             <a:endParaRPr lang="en-US" sz="800" dirty="0"/>
           </a:p>
@@ -25038,7 +25677,7 @@
                 <a:ea typeface="Trebuchet MS" pitchFamily="34" charset="-122"/>
                 <a:cs typeface="Trebuchet MS" pitchFamily="34" charset="-120"/>
               </a:rPr>
-              <a:t>joiner</a:t>
+              <a:t>adjoin</a:t>
             </a:r>
             <a:endParaRPr lang="en-US" sz="2800" dirty="0"/>
           </a:p>
@@ -25127,11 +25766,11 @@
             </a:avLst>
           </a:prstGeom>
           <a:solidFill>
-            <a:srgbClr val="CCFBF1"/>
+            <a:srgbClr val="DDD6FE"/>
           </a:solidFill>
           <a:ln w="19050">
             <a:solidFill>
-              <a:srgbClr val="0D9488"/>
+              <a:srgbClr val="7C3AED"/>
             </a:solidFill>
             <a:prstDash val="solid"/>
           </a:ln>
@@ -25171,13 +25810,13 @@
             <a:r>
               <a:rPr lang="en-US" sz="1300" b="1" dirty="0">
                 <a:solidFill>
-                  <a:srgbClr val="0F766E"/>
+                  <a:srgbClr val="4C1D95"/>
                 </a:solidFill>
                 <a:latin typeface="Trebuchet MS" pitchFamily="34" charset="0"/>
                 <a:ea typeface="Trebuchet MS" pitchFamily="34" charset="-122"/>
                 <a:cs typeface="Trebuchet MS" pitchFamily="34" charset="-120"/>
               </a:rPr>
-              <a:t>join</a:t>
+              <a:t>ad</a:t>
             </a:r>
             <a:endParaRPr lang="en-US" sz="1300" dirty="0"/>
           </a:p>
@@ -25216,7 +25855,7 @@
                 <a:ea typeface="Calibri" pitchFamily="34" charset="-122"/>
                 <a:cs typeface="Calibri" pitchFamily="34" charset="-120"/>
               </a:rPr>
-              <a:t>to connect or bring together</a:t>
+              <a:t>towards; to</a:t>
             </a:r>
             <a:endParaRPr lang="en-US" sz="850" dirty="0"/>
           </a:p>
@@ -25239,11 +25878,11 @@
             </a:avLst>
           </a:prstGeom>
           <a:solidFill>
-            <a:srgbClr val="FCE7F3"/>
+            <a:srgbClr val="CCFBF1"/>
           </a:solidFill>
           <a:ln w="19050">
             <a:solidFill>
-              <a:srgbClr val="DB2777"/>
+              <a:srgbClr val="0D9488"/>
             </a:solidFill>
             <a:prstDash val="solid"/>
           </a:ln>
@@ -25283,13 +25922,13 @@
             <a:r>
               <a:rPr lang="en-US" sz="1300" b="1" dirty="0">
                 <a:solidFill>
-                  <a:srgbClr val="9D174D"/>
+                  <a:srgbClr val="0F766E"/>
                 </a:solidFill>
                 <a:latin typeface="Trebuchet MS" pitchFamily="34" charset="0"/>
                 <a:ea typeface="Trebuchet MS" pitchFamily="34" charset="-122"/>
                 <a:cs typeface="Trebuchet MS" pitchFamily="34" charset="-120"/>
               </a:rPr>
-              <a:t>er</a:t>
+              <a:t>join</a:t>
             </a:r>
             <a:endParaRPr lang="en-US" sz="1300" dirty="0"/>
           </a:p>
@@ -25328,7 +25967,7 @@
                 <a:ea typeface="Calibri" pitchFamily="34" charset="-122"/>
                 <a:cs typeface="Calibri" pitchFamily="34" charset="-120"/>
               </a:rPr>
-              <a:t>a person or thing that does something</a:t>
+              <a:t>connect</a:t>
             </a:r>
             <a:endParaRPr lang="en-US" sz="850" dirty="0"/>
           </a:p>
@@ -25487,7 +26126,7 @@
                 <a:ea typeface="Trebuchet MS" pitchFamily="34" charset="-122"/>
                 <a:cs typeface="Trebuchet MS" pitchFamily="34" charset="-120"/>
               </a:rPr>
-              <a:t>join</a:t>
+              <a:t>ad</a:t>
             </a:r>
             <a:endParaRPr lang="en-US" sz="1400" dirty="0"/>
           </a:p>
@@ -25592,7 +26231,7 @@
                 <a:ea typeface="Trebuchet MS" pitchFamily="34" charset="-122"/>
                 <a:cs typeface="Trebuchet MS" pitchFamily="34" charset="-120"/>
               </a:rPr>
-              <a:t>er</a:t>
+              <a:t>join</a:t>
             </a:r>
             <a:endParaRPr lang="en-US" sz="1400" dirty="0"/>
           </a:p>
@@ -26016,7 +26655,7 @@
                 <a:ea typeface="Calibri" pitchFamily="34" charset="-122"/>
                 <a:cs typeface="Calibri" pitchFamily="34" charset="-120"/>
               </a:rPr>
-              <a:t>Word Labs  •  wordlabs.app  •  Root: 'join' = to connect or bring together</a:t>
+              <a:t>Word Labs  •  wordlabs.app  •  Root: 'join' = connect</a:t>
             </a:r>
             <a:endParaRPr lang="en-US" sz="800" dirty="0"/>
           </a:p>
@@ -26155,7 +26794,7 @@
                 <a:ea typeface="Trebuchet MS" pitchFamily="34" charset="-122"/>
                 <a:cs typeface="Trebuchet MS" pitchFamily="34" charset="-120"/>
               </a:rPr>
-              <a:t>joiner</a:t>
+              <a:t>adjoin</a:t>
             </a:r>
             <a:endParaRPr lang="en-US" sz="2800" dirty="0"/>
           </a:p>
@@ -26244,11 +26883,11 @@
             </a:avLst>
           </a:prstGeom>
           <a:solidFill>
-            <a:srgbClr val="CCFBF1"/>
+            <a:srgbClr val="DDD6FE"/>
           </a:solidFill>
           <a:ln w="19050">
             <a:solidFill>
-              <a:srgbClr val="0D9488"/>
+              <a:srgbClr val="7C3AED"/>
             </a:solidFill>
             <a:prstDash val="solid"/>
           </a:ln>
@@ -26288,13 +26927,13 @@
             <a:r>
               <a:rPr lang="en-US" sz="1300" b="1" dirty="0">
                 <a:solidFill>
-                  <a:srgbClr val="0F766E"/>
+                  <a:srgbClr val="4C1D95"/>
                 </a:solidFill>
                 <a:latin typeface="Trebuchet MS" pitchFamily="34" charset="0"/>
                 <a:ea typeface="Trebuchet MS" pitchFamily="34" charset="-122"/>
                 <a:cs typeface="Trebuchet MS" pitchFamily="34" charset="-120"/>
               </a:rPr>
-              <a:t>join</a:t>
+              <a:t>ad</a:t>
             </a:r>
             <a:endParaRPr lang="en-US" sz="1300" dirty="0"/>
           </a:p>
@@ -26333,7 +26972,7 @@
                 <a:ea typeface="Calibri" pitchFamily="34" charset="-122"/>
                 <a:cs typeface="Calibri" pitchFamily="34" charset="-120"/>
               </a:rPr>
-              <a:t>to connect or bring together</a:t>
+              <a:t>towards; to</a:t>
             </a:r>
             <a:endParaRPr lang="en-US" sz="850" dirty="0"/>
           </a:p>
@@ -26356,11 +26995,11 @@
             </a:avLst>
           </a:prstGeom>
           <a:solidFill>
-            <a:srgbClr val="FCE7F3"/>
+            <a:srgbClr val="CCFBF1"/>
           </a:solidFill>
           <a:ln w="19050">
             <a:solidFill>
-              <a:srgbClr val="DB2777"/>
+              <a:srgbClr val="0D9488"/>
             </a:solidFill>
             <a:prstDash val="solid"/>
           </a:ln>
@@ -26400,13 +27039,13 @@
             <a:r>
               <a:rPr lang="en-US" sz="1300" b="1" dirty="0">
                 <a:solidFill>
-                  <a:srgbClr val="9D174D"/>
+                  <a:srgbClr val="0F766E"/>
                 </a:solidFill>
                 <a:latin typeface="Trebuchet MS" pitchFamily="34" charset="0"/>
                 <a:ea typeface="Trebuchet MS" pitchFamily="34" charset="-122"/>
                 <a:cs typeface="Trebuchet MS" pitchFamily="34" charset="-120"/>
               </a:rPr>
-              <a:t>er</a:t>
+              <a:t>join</a:t>
             </a:r>
             <a:endParaRPr lang="en-US" sz="1300" dirty="0"/>
           </a:p>
@@ -26445,7 +27084,7 @@
                 <a:ea typeface="Calibri" pitchFamily="34" charset="-122"/>
                 <a:cs typeface="Calibri" pitchFamily="34" charset="-120"/>
               </a:rPr>
-              <a:t>a person or thing that does something</a:t>
+              <a:t>connect</a:t>
             </a:r>
             <a:endParaRPr lang="en-US" sz="850" dirty="0"/>
           </a:p>
@@ -26604,7 +27243,7 @@
                 <a:ea typeface="Trebuchet MS" pitchFamily="34" charset="-122"/>
                 <a:cs typeface="Trebuchet MS" pitchFamily="34" charset="-120"/>
               </a:rPr>
-              <a:t>join</a:t>
+              <a:t>ad</a:t>
             </a:r>
             <a:endParaRPr lang="en-US" sz="1400" dirty="0"/>
           </a:p>
@@ -26709,7 +27348,7 @@
                 <a:ea typeface="Trebuchet MS" pitchFamily="34" charset="-122"/>
                 <a:cs typeface="Trebuchet MS" pitchFamily="34" charset="-120"/>
               </a:rPr>
-              <a:t>er</a:t>
+              <a:t>join</a:t>
             </a:r>
             <a:endParaRPr lang="en-US" sz="1400" dirty="0"/>
           </a:p>
@@ -26816,7 +27455,7 @@
         </p:nvSpPr>
         <p:spPr>
           <a:xfrm>
-            <a:off x="2670048" y="4169664"/>
+            <a:off x="2427732" y="4169664"/>
             <a:ext cx="685800" cy="475488"/>
           </a:xfrm>
           <a:prstGeom prst="rect">
@@ -26843,7 +27482,7 @@
         </p:nvSpPr>
         <p:spPr>
           <a:xfrm>
-            <a:off x="2670048" y="4169664"/>
+            <a:off x="2427732" y="4169664"/>
             <a:ext cx="685800" cy="475488"/>
           </a:xfrm>
           <a:prstGeom prst="rect">
@@ -26868,7 +27507,7 @@
                 <a:ea typeface="Trebuchet MS" pitchFamily="34" charset="-122"/>
                 <a:cs typeface="Trebuchet MS" pitchFamily="34" charset="-120"/>
               </a:rPr>
-              <a:t>j</a:t>
+              <a:t>a</a:t>
             </a:r>
             <a:endParaRPr lang="en-US" sz="900" dirty="0"/>
           </a:p>
@@ -26882,7 +27521,7 @@
         </p:nvSpPr>
         <p:spPr>
           <a:xfrm>
-            <a:off x="4123944" y="4169664"/>
+            <a:off x="3639312" y="4169664"/>
             <a:ext cx="685800" cy="475488"/>
           </a:xfrm>
           <a:prstGeom prst="rect">
@@ -26909,7 +27548,7 @@
         </p:nvSpPr>
         <p:spPr>
           <a:xfrm>
-            <a:off x="4123944" y="4169664"/>
+            <a:off x="3639312" y="4169664"/>
             <a:ext cx="685800" cy="475488"/>
           </a:xfrm>
           <a:prstGeom prst="rect">
@@ -26934,7 +27573,7 @@
                 <a:ea typeface="Trebuchet MS" pitchFamily="34" charset="-122"/>
                 <a:cs typeface="Trebuchet MS" pitchFamily="34" charset="-120"/>
               </a:rPr>
-              <a:t>oi</a:t>
+              <a:t>d</a:t>
             </a:r>
             <a:endParaRPr lang="en-US" sz="900" dirty="0"/>
           </a:p>
@@ -26948,7 +27587,7 @@
         </p:nvSpPr>
         <p:spPr>
           <a:xfrm>
-            <a:off x="5577840" y="4169664"/>
+            <a:off x="4850892" y="4169664"/>
             <a:ext cx="685800" cy="475488"/>
           </a:xfrm>
           <a:prstGeom prst="rect">
@@ -26975,7 +27614,7 @@
         </p:nvSpPr>
         <p:spPr>
           <a:xfrm>
-            <a:off x="5577840" y="4169664"/>
+            <a:off x="4850892" y="4169664"/>
             <a:ext cx="685800" cy="475488"/>
           </a:xfrm>
           <a:prstGeom prst="rect">
@@ -27000,7 +27639,7 @@
                 <a:ea typeface="Trebuchet MS" pitchFamily="34" charset="-122"/>
                 <a:cs typeface="Trebuchet MS" pitchFamily="34" charset="-120"/>
               </a:rPr>
-              <a:t>n</a:t>
+              <a:t>j</a:t>
             </a:r>
             <a:endParaRPr lang="en-US" sz="900" dirty="0"/>
           </a:p>
@@ -27014,7 +27653,7 @@
         </p:nvSpPr>
         <p:spPr>
           <a:xfrm>
-            <a:off x="7031736" y="4169664"/>
+            <a:off x="6062472" y="4169664"/>
             <a:ext cx="685800" cy="475488"/>
           </a:xfrm>
           <a:prstGeom prst="rect">
@@ -27041,7 +27680,7 @@
         </p:nvSpPr>
         <p:spPr>
           <a:xfrm>
-            <a:off x="7031736" y="4169664"/>
+            <a:off x="6062472" y="4169664"/>
             <a:ext cx="685800" cy="475488"/>
           </a:xfrm>
           <a:prstGeom prst="rect">
@@ -27066,7 +27705,73 @@
                 <a:ea typeface="Trebuchet MS" pitchFamily="34" charset="-122"/>
                 <a:cs typeface="Trebuchet MS" pitchFamily="34" charset="-120"/>
               </a:rPr>
-              <a:t>er</a:t>
+              <a:t>oi</a:t>
+            </a:r>
+            <a:endParaRPr lang="en-US" sz="900" dirty="0"/>
+          </a:p>
+        </p:txBody>
+      </p:sp>
+      <p:sp>
+        <p:nvSpPr>
+          <p:cNvPr id="41" name="Shape 39"/>
+          <p:cNvSpPr/>
+          <p:nvPr/>
+        </p:nvSpPr>
+        <p:spPr>
+          <a:xfrm>
+            <a:off x="7274052" y="4169664"/>
+            <a:ext cx="685800" cy="475488"/>
+          </a:xfrm>
+          <a:prstGeom prst="rect">
+            <a:avLst>
+              <a:gd name="adj" fmla="val 7692"/>
+            </a:avLst>
+          </a:prstGeom>
+          <a:solidFill>
+            <a:srgbClr val="FFFFFF"/>
+          </a:solidFill>
+          <a:ln w="12700">
+            <a:solidFill>
+              <a:srgbClr val="DB2777"/>
+            </a:solidFill>
+            <a:prstDash val="solid"/>
+          </a:ln>
+        </p:spPr>
+      </p:sp>
+      <p:sp>
+        <p:nvSpPr>
+          <p:cNvPr id="42" name="Text 40"/>
+          <p:cNvSpPr/>
+          <p:nvPr/>
+        </p:nvSpPr>
+        <p:spPr>
+          <a:xfrm>
+            <a:off x="7274052" y="4169664"/>
+            <a:ext cx="685800" cy="475488"/>
+          </a:xfrm>
+          <a:prstGeom prst="rect">
+            <a:avLst/>
+          </a:prstGeom>
+          <a:noFill/>
+          <a:ln/>
+        </p:spPr>
+        <p:txBody>
+          <a:bodyPr wrap="square" lIns="0" tIns="0" rIns="0" bIns="0" rtlCol="0" anchor="ctr"/>
+          <a:lstStyle/>
+          <a:p>
+            <a:pPr algn="ctr" indent="0" marL="0">
+              <a:buNone/>
+            </a:pPr>
+            <a:r>
+              <a:rPr lang="en-US" sz="900" b="1" dirty="0">
+                <a:solidFill>
+                  <a:srgbClr val="9D174D"/>
+                </a:solidFill>
+                <a:latin typeface="Trebuchet MS" pitchFamily="34" charset="0"/>
+                <a:ea typeface="Trebuchet MS" pitchFamily="34" charset="-122"/>
+                <a:cs typeface="Trebuchet MS" pitchFamily="34" charset="-120"/>
+              </a:rPr>
+              <a:t>n</a:t>
             </a:r>
             <a:endParaRPr lang="en-US" sz="900" dirty="0"/>
           </a:p>
@@ -27358,7 +28063,7 @@
                 <a:ea typeface="Calibri" pitchFamily="34" charset="-122"/>
                 <a:cs typeface="Calibri" pitchFamily="34" charset="-120"/>
               </a:rPr>
-              <a:t>Word Labs  •  wordlabs.app  •  Root: 'join' = to connect or bring together</a:t>
+              <a:t>Word Labs  •  wordlabs.app  •  Root: 'join' = connect</a:t>
             </a:r>
             <a:endParaRPr lang="en-US" sz="800" dirty="0"/>
           </a:p>
@@ -27497,7 +28202,7 @@
                 <a:ea typeface="Trebuchet MS" pitchFamily="34" charset="-122"/>
                 <a:cs typeface="Trebuchet MS" pitchFamily="34" charset="-120"/>
               </a:rPr>
-              <a:t>disjoin</a:t>
+              <a:t>adjoining</a:t>
             </a:r>
             <a:endParaRPr lang="en-US" sz="2800" dirty="0"/>
           </a:p>
@@ -28185,7 +28890,7 @@
                 <a:ea typeface="Calibri" pitchFamily="34" charset="-122"/>
                 <a:cs typeface="Calibri" pitchFamily="34" charset="-120"/>
               </a:rPr>
-              <a:t>Word Labs  •  wordlabs.app  •  Root: 'join' = to connect or bring together</a:t>
+              <a:t>Word Labs  •  wordlabs.app  •  Root: 'join' = connect</a:t>
             </a:r>
             <a:endParaRPr lang="en-US" sz="800" dirty="0"/>
           </a:p>
@@ -28324,7 +29029,7 @@
                 <a:ea typeface="Trebuchet MS" pitchFamily="34" charset="-122"/>
                 <a:cs typeface="Trebuchet MS" pitchFamily="34" charset="-120"/>
               </a:rPr>
-              <a:t>disjoin</a:t>
+              <a:t>adjoining</a:t>
             </a:r>
             <a:endParaRPr lang="en-US" sz="2800" dirty="0"/>
           </a:p>
@@ -28404,7 +29109,7 @@
         </p:nvSpPr>
         <p:spPr>
           <a:xfrm>
-            <a:off x="2938272" y="2258568"/>
+            <a:off x="2221992" y="2258568"/>
             <a:ext cx="1828800" cy="292608"/>
           </a:xfrm>
           <a:prstGeom prst="rect">
@@ -28438,7 +29143,7 @@
         </p:nvSpPr>
         <p:spPr>
           <a:xfrm>
-            <a:off x="2938272" y="2258568"/>
+            <a:off x="2221992" y="2258568"/>
             <a:ext cx="1828800" cy="292608"/>
           </a:xfrm>
           <a:prstGeom prst="rect">
@@ -28463,7 +29168,7 @@
                 <a:ea typeface="Trebuchet MS" pitchFamily="34" charset="-122"/>
                 <a:cs typeface="Trebuchet MS" pitchFamily="34" charset="-120"/>
               </a:rPr>
-              <a:t>dis</a:t>
+              <a:t>ad</a:t>
             </a:r>
             <a:endParaRPr lang="en-US" sz="1300" dirty="0"/>
           </a:p>
@@ -28477,7 +29182,7 @@
         </p:nvSpPr>
         <p:spPr>
           <a:xfrm>
-            <a:off x="2938272" y="2569464"/>
+            <a:off x="2221992" y="2569464"/>
             <a:ext cx="1828800" cy="201168"/>
           </a:xfrm>
           <a:prstGeom prst="rect">
@@ -28502,7 +29207,7 @@
                 <a:ea typeface="Calibri" pitchFamily="34" charset="-122"/>
                 <a:cs typeface="Calibri" pitchFamily="34" charset="-120"/>
               </a:rPr>
-              <a:t>not or apart</a:t>
+              <a:t>towards; to</a:t>
             </a:r>
             <a:endParaRPr lang="en-US" sz="850" dirty="0"/>
           </a:p>
@@ -28516,7 +29221,7 @@
         </p:nvSpPr>
         <p:spPr>
           <a:xfrm>
-            <a:off x="5803392" y="2258568"/>
+            <a:off x="4370832" y="2258568"/>
             <a:ext cx="1828800" cy="292608"/>
           </a:xfrm>
           <a:prstGeom prst="rect">
@@ -28550,7 +29255,7 @@
         </p:nvSpPr>
         <p:spPr>
           <a:xfrm>
-            <a:off x="5803392" y="2258568"/>
+            <a:off x="4370832" y="2258568"/>
             <a:ext cx="1828800" cy="292608"/>
           </a:xfrm>
           <a:prstGeom prst="rect">
@@ -28589,7 +29294,7 @@
         </p:nvSpPr>
         <p:spPr>
           <a:xfrm>
-            <a:off x="5803392" y="2569464"/>
+            <a:off x="4370832" y="2569464"/>
             <a:ext cx="1828800" cy="201168"/>
           </a:xfrm>
           <a:prstGeom prst="rect">
@@ -28614,7 +29319,7 @@
                 <a:ea typeface="Calibri" pitchFamily="34" charset="-122"/>
                 <a:cs typeface="Calibri" pitchFamily="34" charset="-120"/>
               </a:rPr>
-              <a:t>to connect or bring together</a:t>
+              <a:t>connect</a:t>
             </a:r>
             <a:endParaRPr lang="en-US" sz="850" dirty="0"/>
           </a:p>
@@ -28623,6 +29328,118 @@
       <p:sp>
         <p:nvSpPr>
           <p:cNvPr id="22" name="Shape 20"/>
+          <p:cNvSpPr/>
+          <p:nvPr/>
+        </p:nvSpPr>
+        <p:spPr>
+          <a:xfrm>
+            <a:off x="6519672" y="2258568"/>
+            <a:ext cx="1828800" cy="292608"/>
+          </a:xfrm>
+          <a:prstGeom prst="rect">
+            <a:avLst>
+              <a:gd name="adj" fmla="val 25000"/>
+            </a:avLst>
+          </a:prstGeom>
+          <a:solidFill>
+            <a:srgbClr val="FCE7F3"/>
+          </a:solidFill>
+          <a:ln w="19050">
+            <a:solidFill>
+              <a:srgbClr val="DB2777"/>
+            </a:solidFill>
+            <a:prstDash val="solid"/>
+          </a:ln>
+          <a:effectLst>
+            <a:outerShdw sx="100000" sy="100000" kx="0" ky="0" algn="bl" rotWithShape="0" blurRad="101600" dist="38100" dir="8100000">
+              <a:srgbClr val="000000">
+                <a:alpha val="12000"/>
+              </a:srgbClr>
+            </a:outerShdw>
+          </a:effectLst>
+        </p:spPr>
+      </p:sp>
+      <p:sp>
+        <p:nvSpPr>
+          <p:cNvPr id="23" name="Text 21"/>
+          <p:cNvSpPr/>
+          <p:nvPr/>
+        </p:nvSpPr>
+        <p:spPr>
+          <a:xfrm>
+            <a:off x="6519672" y="2258568"/>
+            <a:ext cx="1828800" cy="292608"/>
+          </a:xfrm>
+          <a:prstGeom prst="rect">
+            <a:avLst/>
+          </a:prstGeom>
+          <a:noFill/>
+          <a:ln/>
+        </p:spPr>
+        <p:txBody>
+          <a:bodyPr wrap="square" lIns="0" tIns="0" rIns="0" bIns="0" rtlCol="0" anchor="ctr"/>
+          <a:lstStyle/>
+          <a:p>
+            <a:pPr algn="ctr" indent="0" marL="0">
+              <a:buNone/>
+            </a:pPr>
+            <a:r>
+              <a:rPr lang="en-US" sz="1300" b="1" dirty="0">
+                <a:solidFill>
+                  <a:srgbClr val="9D174D"/>
+                </a:solidFill>
+                <a:latin typeface="Trebuchet MS" pitchFamily="34" charset="0"/>
+                <a:ea typeface="Trebuchet MS" pitchFamily="34" charset="-122"/>
+                <a:cs typeface="Trebuchet MS" pitchFamily="34" charset="-120"/>
+              </a:rPr>
+              <a:t>ing</a:t>
+            </a:r>
+            <a:endParaRPr lang="en-US" sz="1300" dirty="0"/>
+          </a:p>
+        </p:txBody>
+      </p:sp>
+      <p:sp>
+        <p:nvSpPr>
+          <p:cNvPr id="24" name="Text 22"/>
+          <p:cNvSpPr/>
+          <p:nvPr/>
+        </p:nvSpPr>
+        <p:spPr>
+          <a:xfrm>
+            <a:off x="6519672" y="2569464"/>
+            <a:ext cx="1828800" cy="201168"/>
+          </a:xfrm>
+          <a:prstGeom prst="rect">
+            <a:avLst/>
+          </a:prstGeom>
+          <a:noFill/>
+          <a:ln/>
+        </p:spPr>
+        <p:txBody>
+          <a:bodyPr wrap="square" lIns="0" tIns="0" rIns="0" bIns="0" rtlCol="0" anchor="t"/>
+          <a:lstStyle/>
+          <a:p>
+            <a:pPr algn="ctr" indent="0" marL="0">
+              <a:buNone/>
+            </a:pPr>
+            <a:r>
+              <a:rPr lang="en-US" sz="850" dirty="0">
+                <a:solidFill>
+                  <a:srgbClr val="475569"/>
+                </a:solidFill>
+                <a:latin typeface="Calibri" pitchFamily="34" charset="0"/>
+                <a:ea typeface="Calibri" pitchFamily="34" charset="-122"/>
+                <a:cs typeface="Calibri" pitchFamily="34" charset="-120"/>
+              </a:rPr>
+              <a:t>happening now</a:t>
+            </a:r>
+            <a:endParaRPr lang="en-US" sz="850" dirty="0"/>
+          </a:p>
+        </p:txBody>
+      </p:sp>
+      <p:sp>
+        <p:nvSpPr>
+          <p:cNvPr id="25" name="Shape 23"/>
           <p:cNvSpPr/>
           <p:nvPr/>
         </p:nvSpPr>
@@ -28649,7 +29466,7 @@
       </p:sp>
       <p:sp>
         <p:nvSpPr>
-          <p:cNvPr id="23" name="Text 21"/>
+          <p:cNvPr id="26" name="Text 24"/>
           <p:cNvSpPr/>
           <p:nvPr/>
         </p:nvSpPr>
@@ -28688,7 +29505,7 @@
       </p:sp>
       <p:sp>
         <p:nvSpPr>
-          <p:cNvPr id="24" name="Shape 22"/>
+          <p:cNvPr id="27" name="Shape 25"/>
           <p:cNvSpPr/>
           <p:nvPr/>
         </p:nvSpPr>
@@ -28715,7 +29532,7 @@
       </p:sp>
       <p:sp>
         <p:nvSpPr>
-          <p:cNvPr id="25" name="Text 23"/>
+          <p:cNvPr id="28" name="Text 26"/>
           <p:cNvSpPr/>
           <p:nvPr/>
         </p:nvSpPr>
@@ -28754,7 +29571,7 @@
       </p:sp>
       <p:sp>
         <p:nvSpPr>
-          <p:cNvPr id="26" name="Shape 24"/>
+          <p:cNvPr id="29" name="Shape 27"/>
           <p:cNvSpPr/>
           <p:nvPr/>
         </p:nvSpPr>
@@ -28781,7 +29598,7 @@
       </p:sp>
       <p:sp>
         <p:nvSpPr>
-          <p:cNvPr id="27" name="Text 25"/>
+          <p:cNvPr id="30" name="Text 28"/>
           <p:cNvSpPr/>
           <p:nvPr/>
         </p:nvSpPr>
@@ -28820,7 +29637,7 @@
       </p:sp>
       <p:sp>
         <p:nvSpPr>
-          <p:cNvPr id="28" name="Shape 26"/>
+          <p:cNvPr id="31" name="Shape 29"/>
           <p:cNvSpPr/>
           <p:nvPr/>
         </p:nvSpPr>
@@ -28847,7 +29664,7 @@
       </p:sp>
       <p:sp>
         <p:nvSpPr>
-          <p:cNvPr id="29" name="Text 27"/>
+          <p:cNvPr id="32" name="Text 30"/>
           <p:cNvSpPr/>
           <p:nvPr/>
         </p:nvSpPr>
@@ -29170,7 +29987,7 @@
                 <a:ea typeface="Calibri" pitchFamily="34" charset="-122"/>
                 <a:cs typeface="Calibri" pitchFamily="34" charset="-120"/>
               </a:rPr>
-              <a:t>Word Labs  •  wordlabs.app  •  Root: 'join' = to connect or bring together</a:t>
+              <a:t>Word Labs  •  wordlabs.app  •  Root: 'join' = connect</a:t>
             </a:r>
             <a:endParaRPr lang="en-US" sz="800" dirty="0"/>
           </a:p>
@@ -29309,7 +30126,7 @@
                 <a:ea typeface="Trebuchet MS" pitchFamily="34" charset="-122"/>
                 <a:cs typeface="Trebuchet MS" pitchFamily="34" charset="-120"/>
               </a:rPr>
-              <a:t>disjoin</a:t>
+              <a:t>adjoining</a:t>
             </a:r>
             <a:endParaRPr lang="en-US" sz="2800" dirty="0"/>
           </a:p>
@@ -29389,7 +30206,7 @@
         </p:nvSpPr>
         <p:spPr>
           <a:xfrm>
-            <a:off x="2938272" y="2258568"/>
+            <a:off x="2221992" y="2258568"/>
             <a:ext cx="1828800" cy="292608"/>
           </a:xfrm>
           <a:prstGeom prst="rect">
@@ -29423,7 +30240,7 @@
         </p:nvSpPr>
         <p:spPr>
           <a:xfrm>
-            <a:off x="2938272" y="2258568"/>
+            <a:off x="2221992" y="2258568"/>
             <a:ext cx="1828800" cy="292608"/>
           </a:xfrm>
           <a:prstGeom prst="rect">
@@ -29448,7 +30265,7 @@
                 <a:ea typeface="Trebuchet MS" pitchFamily="34" charset="-122"/>
                 <a:cs typeface="Trebuchet MS" pitchFamily="34" charset="-120"/>
               </a:rPr>
-              <a:t>dis</a:t>
+              <a:t>ad</a:t>
             </a:r>
             <a:endParaRPr lang="en-US" sz="1300" dirty="0"/>
           </a:p>
@@ -29462,7 +30279,7 @@
         </p:nvSpPr>
         <p:spPr>
           <a:xfrm>
-            <a:off x="2938272" y="2569464"/>
+            <a:off x="2221992" y="2569464"/>
             <a:ext cx="1828800" cy="201168"/>
           </a:xfrm>
           <a:prstGeom prst="rect">
@@ -29487,7 +30304,7 @@
                 <a:ea typeface="Calibri" pitchFamily="34" charset="-122"/>
                 <a:cs typeface="Calibri" pitchFamily="34" charset="-120"/>
               </a:rPr>
-              <a:t>not or apart</a:t>
+              <a:t>towards; to</a:t>
             </a:r>
             <a:endParaRPr lang="en-US" sz="850" dirty="0"/>
           </a:p>
@@ -29501,7 +30318,7 @@
         </p:nvSpPr>
         <p:spPr>
           <a:xfrm>
-            <a:off x="5803392" y="2258568"/>
+            <a:off x="4370832" y="2258568"/>
             <a:ext cx="1828800" cy="292608"/>
           </a:xfrm>
           <a:prstGeom prst="rect">
@@ -29535,7 +30352,7 @@
         </p:nvSpPr>
         <p:spPr>
           <a:xfrm>
-            <a:off x="5803392" y="2258568"/>
+            <a:off x="4370832" y="2258568"/>
             <a:ext cx="1828800" cy="292608"/>
           </a:xfrm>
           <a:prstGeom prst="rect">
@@ -29574,7 +30391,7 @@
         </p:nvSpPr>
         <p:spPr>
           <a:xfrm>
-            <a:off x="5803392" y="2569464"/>
+            <a:off x="4370832" y="2569464"/>
             <a:ext cx="1828800" cy="201168"/>
           </a:xfrm>
           <a:prstGeom prst="rect">
@@ -29599,7 +30416,7 @@
                 <a:ea typeface="Calibri" pitchFamily="34" charset="-122"/>
                 <a:cs typeface="Calibri" pitchFamily="34" charset="-120"/>
               </a:rPr>
-              <a:t>to connect or bring together</a:t>
+              <a:t>connect</a:t>
             </a:r>
             <a:endParaRPr lang="en-US" sz="850" dirty="0"/>
           </a:p>
@@ -29608,6 +30425,118 @@
       <p:sp>
         <p:nvSpPr>
           <p:cNvPr id="22" name="Shape 20"/>
+          <p:cNvSpPr/>
+          <p:nvPr/>
+        </p:nvSpPr>
+        <p:spPr>
+          <a:xfrm>
+            <a:off x="6519672" y="2258568"/>
+            <a:ext cx="1828800" cy="292608"/>
+          </a:xfrm>
+          <a:prstGeom prst="rect">
+            <a:avLst>
+              <a:gd name="adj" fmla="val 25000"/>
+            </a:avLst>
+          </a:prstGeom>
+          <a:solidFill>
+            <a:srgbClr val="FCE7F3"/>
+          </a:solidFill>
+          <a:ln w="19050">
+            <a:solidFill>
+              <a:srgbClr val="DB2777"/>
+            </a:solidFill>
+            <a:prstDash val="solid"/>
+          </a:ln>
+          <a:effectLst>
+            <a:outerShdw sx="100000" sy="100000" kx="0" ky="0" algn="bl" rotWithShape="0" blurRad="101600" dist="38100" dir="8100000">
+              <a:srgbClr val="000000">
+                <a:alpha val="12000"/>
+              </a:srgbClr>
+            </a:outerShdw>
+          </a:effectLst>
+        </p:spPr>
+      </p:sp>
+      <p:sp>
+        <p:nvSpPr>
+          <p:cNvPr id="23" name="Text 21"/>
+          <p:cNvSpPr/>
+          <p:nvPr/>
+        </p:nvSpPr>
+        <p:spPr>
+          <a:xfrm>
+            <a:off x="6519672" y="2258568"/>
+            <a:ext cx="1828800" cy="292608"/>
+          </a:xfrm>
+          <a:prstGeom prst="rect">
+            <a:avLst/>
+          </a:prstGeom>
+          <a:noFill/>
+          <a:ln/>
+        </p:spPr>
+        <p:txBody>
+          <a:bodyPr wrap="square" lIns="0" tIns="0" rIns="0" bIns="0" rtlCol="0" anchor="ctr"/>
+          <a:lstStyle/>
+          <a:p>
+            <a:pPr algn="ctr" indent="0" marL="0">
+              <a:buNone/>
+            </a:pPr>
+            <a:r>
+              <a:rPr lang="en-US" sz="1300" b="1" dirty="0">
+                <a:solidFill>
+                  <a:srgbClr val="9D174D"/>
+                </a:solidFill>
+                <a:latin typeface="Trebuchet MS" pitchFamily="34" charset="0"/>
+                <a:ea typeface="Trebuchet MS" pitchFamily="34" charset="-122"/>
+                <a:cs typeface="Trebuchet MS" pitchFamily="34" charset="-120"/>
+              </a:rPr>
+              <a:t>ing</a:t>
+            </a:r>
+            <a:endParaRPr lang="en-US" sz="1300" dirty="0"/>
+          </a:p>
+        </p:txBody>
+      </p:sp>
+      <p:sp>
+        <p:nvSpPr>
+          <p:cNvPr id="24" name="Text 22"/>
+          <p:cNvSpPr/>
+          <p:nvPr/>
+        </p:nvSpPr>
+        <p:spPr>
+          <a:xfrm>
+            <a:off x="6519672" y="2569464"/>
+            <a:ext cx="1828800" cy="201168"/>
+          </a:xfrm>
+          <a:prstGeom prst="rect">
+            <a:avLst/>
+          </a:prstGeom>
+          <a:noFill/>
+          <a:ln/>
+        </p:spPr>
+        <p:txBody>
+          <a:bodyPr wrap="square" lIns="0" tIns="0" rIns="0" bIns="0" rtlCol="0" anchor="t"/>
+          <a:lstStyle/>
+          <a:p>
+            <a:pPr algn="ctr" indent="0" marL="0">
+              <a:buNone/>
+            </a:pPr>
+            <a:r>
+              <a:rPr lang="en-US" sz="850" dirty="0">
+                <a:solidFill>
+                  <a:srgbClr val="475569"/>
+                </a:solidFill>
+                <a:latin typeface="Calibri" pitchFamily="34" charset="0"/>
+                <a:ea typeface="Calibri" pitchFamily="34" charset="-122"/>
+                <a:cs typeface="Calibri" pitchFamily="34" charset="-120"/>
+              </a:rPr>
+              <a:t>happening now</a:t>
+            </a:r>
+            <a:endParaRPr lang="en-US" sz="850" dirty="0"/>
+          </a:p>
+        </p:txBody>
+      </p:sp>
+      <p:sp>
+        <p:nvSpPr>
+          <p:cNvPr id="25" name="Shape 23"/>
           <p:cNvSpPr/>
           <p:nvPr/>
         </p:nvSpPr>
@@ -29634,7 +30563,7 @@
       </p:sp>
       <p:sp>
         <p:nvSpPr>
-          <p:cNvPr id="23" name="Text 21"/>
+          <p:cNvPr id="26" name="Text 24"/>
           <p:cNvSpPr/>
           <p:nvPr/>
         </p:nvSpPr>
@@ -29673,7 +30602,7 @@
       </p:sp>
       <p:sp>
         <p:nvSpPr>
-          <p:cNvPr id="24" name="Shape 22"/>
+          <p:cNvPr id="27" name="Shape 25"/>
           <p:cNvSpPr/>
           <p:nvPr/>
         </p:nvSpPr>
@@ -29700,13 +30629,13 @@
       </p:sp>
       <p:sp>
         <p:nvSpPr>
-          <p:cNvPr id="25" name="Shape 23"/>
-          <p:cNvSpPr/>
-          <p:nvPr/>
-        </p:nvSpPr>
-        <p:spPr>
-          <a:xfrm>
-            <a:off x="2999232" y="3364992"/>
+          <p:cNvPr id="28" name="Shape 26"/>
+          <p:cNvSpPr/>
+          <p:nvPr/>
+        </p:nvSpPr>
+        <p:spPr>
+          <a:xfrm>
+            <a:off x="2313432" y="3364992"/>
             <a:ext cx="1645920" cy="475488"/>
           </a:xfrm>
           <a:prstGeom prst="rect">
@@ -29727,13 +30656,13 @@
       </p:sp>
       <p:sp>
         <p:nvSpPr>
-          <p:cNvPr id="26" name="Text 24"/>
-          <p:cNvSpPr/>
-          <p:nvPr/>
-        </p:nvSpPr>
-        <p:spPr>
-          <a:xfrm>
-            <a:off x="2999232" y="3364992"/>
+          <p:cNvPr id="29" name="Text 27"/>
+          <p:cNvSpPr/>
+          <p:nvPr/>
+        </p:nvSpPr>
+        <p:spPr>
+          <a:xfrm>
+            <a:off x="2313432" y="3364992"/>
             <a:ext cx="1645920" cy="475488"/>
           </a:xfrm>
           <a:prstGeom prst="rect">
@@ -29758,7 +30687,7 @@
                 <a:ea typeface="Trebuchet MS" pitchFamily="34" charset="-122"/>
                 <a:cs typeface="Trebuchet MS" pitchFamily="34" charset="-120"/>
               </a:rPr>
-              <a:t>dis</a:t>
+              <a:t>ad</a:t>
             </a:r>
             <a:endParaRPr lang="en-US" sz="1400" dirty="0"/>
           </a:p>
@@ -29766,14 +30695,14 @@
       </p:sp>
       <p:sp>
         <p:nvSpPr>
-          <p:cNvPr id="27" name="Text 25"/>
-          <p:cNvSpPr/>
-          <p:nvPr/>
-        </p:nvSpPr>
-        <p:spPr>
-          <a:xfrm>
-            <a:off x="4645152" y="3364992"/>
-            <a:ext cx="1097280" cy="475488"/>
+          <p:cNvPr id="30" name="Text 28"/>
+          <p:cNvSpPr/>
+          <p:nvPr/>
+        </p:nvSpPr>
+        <p:spPr>
+          <a:xfrm>
+            <a:off x="3959352" y="3364992"/>
+            <a:ext cx="411480" cy="475488"/>
           </a:xfrm>
           <a:prstGeom prst="rect">
             <a:avLst/>
@@ -29805,13 +30734,13 @@
       </p:sp>
       <p:sp>
         <p:nvSpPr>
-          <p:cNvPr id="28" name="Shape 26"/>
-          <p:cNvSpPr/>
-          <p:nvPr/>
-        </p:nvSpPr>
-        <p:spPr>
-          <a:xfrm>
-            <a:off x="5742432" y="3364992"/>
+          <p:cNvPr id="31" name="Shape 29"/>
+          <p:cNvSpPr/>
+          <p:nvPr/>
+        </p:nvSpPr>
+        <p:spPr>
+          <a:xfrm>
+            <a:off x="4370832" y="3364992"/>
             <a:ext cx="1645920" cy="475488"/>
           </a:xfrm>
           <a:prstGeom prst="rect">
@@ -29832,13 +30761,13 @@
       </p:sp>
       <p:sp>
         <p:nvSpPr>
-          <p:cNvPr id="29" name="Text 27"/>
-          <p:cNvSpPr/>
-          <p:nvPr/>
-        </p:nvSpPr>
-        <p:spPr>
-          <a:xfrm>
-            <a:off x="5742432" y="3364992"/>
+          <p:cNvPr id="32" name="Text 30"/>
+          <p:cNvSpPr/>
+          <p:nvPr/>
+        </p:nvSpPr>
+        <p:spPr>
+          <a:xfrm>
+            <a:off x="4370832" y="3364992"/>
             <a:ext cx="1645920" cy="475488"/>
           </a:xfrm>
           <a:prstGeom prst="rect">
@@ -29871,7 +30800,112 @@
       </p:sp>
       <p:sp>
         <p:nvSpPr>
-          <p:cNvPr id="30" name="Shape 28"/>
+          <p:cNvPr id="33" name="Text 31"/>
+          <p:cNvSpPr/>
+          <p:nvPr/>
+        </p:nvSpPr>
+        <p:spPr>
+          <a:xfrm>
+            <a:off x="6016752" y="3364992"/>
+            <a:ext cx="411480" cy="475488"/>
+          </a:xfrm>
+          <a:prstGeom prst="rect">
+            <a:avLst/>
+          </a:prstGeom>
+          <a:noFill/>
+          <a:ln/>
+        </p:spPr>
+        <p:txBody>
+          <a:bodyPr wrap="square" lIns="0" tIns="0" rIns="0" bIns="0" rtlCol="0" anchor="ctr"/>
+          <a:lstStyle/>
+          <a:p>
+            <a:pPr algn="ctr" indent="0" marL="0">
+              <a:buNone/>
+            </a:pPr>
+            <a:r>
+              <a:rPr lang="en-US" sz="1600" b="1" dirty="0">
+                <a:solidFill>
+                  <a:srgbClr val="0D9488"/>
+                </a:solidFill>
+                <a:latin typeface="Trebuchet MS" pitchFamily="34" charset="0"/>
+                <a:ea typeface="Trebuchet MS" pitchFamily="34" charset="-122"/>
+                <a:cs typeface="Trebuchet MS" pitchFamily="34" charset="-120"/>
+              </a:rPr>
+              <a:t>·</a:t>
+            </a:r>
+            <a:endParaRPr lang="en-US" sz="1600" dirty="0"/>
+          </a:p>
+        </p:txBody>
+      </p:sp>
+      <p:sp>
+        <p:nvSpPr>
+          <p:cNvPr id="34" name="Shape 32"/>
+          <p:cNvSpPr/>
+          <p:nvPr/>
+        </p:nvSpPr>
+        <p:spPr>
+          <a:xfrm>
+            <a:off x="6428232" y="3364992"/>
+            <a:ext cx="1645920" cy="475488"/>
+          </a:xfrm>
+          <a:prstGeom prst="rect">
+            <a:avLst>
+              <a:gd name="adj" fmla="val 9615"/>
+            </a:avLst>
+          </a:prstGeom>
+          <a:solidFill>
+            <a:srgbClr val="FFFFFF"/>
+          </a:solidFill>
+          <a:ln w="12700">
+            <a:solidFill>
+              <a:srgbClr val="0D9488"/>
+            </a:solidFill>
+            <a:prstDash val="solid"/>
+          </a:ln>
+        </p:spPr>
+      </p:sp>
+      <p:sp>
+        <p:nvSpPr>
+          <p:cNvPr id="35" name="Text 33"/>
+          <p:cNvSpPr/>
+          <p:nvPr/>
+        </p:nvSpPr>
+        <p:spPr>
+          <a:xfrm>
+            <a:off x="6428232" y="3364992"/>
+            <a:ext cx="1645920" cy="475488"/>
+          </a:xfrm>
+          <a:prstGeom prst="rect">
+            <a:avLst/>
+          </a:prstGeom>
+          <a:noFill/>
+          <a:ln/>
+        </p:spPr>
+        <p:txBody>
+          <a:bodyPr wrap="square" lIns="0" tIns="0" rIns="0" bIns="0" rtlCol="0" anchor="ctr"/>
+          <a:lstStyle/>
+          <a:p>
+            <a:pPr algn="ctr" indent="0" marL="0">
+              <a:buNone/>
+            </a:pPr>
+            <a:r>
+              <a:rPr lang="en-US" sz="1400" b="1" dirty="0">
+                <a:solidFill>
+                  <a:srgbClr val="0D9488"/>
+                </a:solidFill>
+                <a:latin typeface="Trebuchet MS" pitchFamily="34" charset="0"/>
+                <a:ea typeface="Trebuchet MS" pitchFamily="34" charset="-122"/>
+                <a:cs typeface="Trebuchet MS" pitchFamily="34" charset="-120"/>
+              </a:rPr>
+              <a:t>ing</a:t>
+            </a:r>
+            <a:endParaRPr lang="en-US" sz="1400" dirty="0"/>
+          </a:p>
+        </p:txBody>
+      </p:sp>
+      <p:sp>
+        <p:nvSpPr>
+          <p:cNvPr id="36" name="Shape 34"/>
           <p:cNvSpPr/>
           <p:nvPr/>
         </p:nvSpPr>
@@ -29898,7 +30932,7 @@
       </p:sp>
       <p:sp>
         <p:nvSpPr>
-          <p:cNvPr id="31" name="Text 29"/>
+          <p:cNvPr id="37" name="Text 35"/>
           <p:cNvSpPr/>
           <p:nvPr/>
         </p:nvSpPr>
@@ -29937,7 +30971,7 @@
       </p:sp>
       <p:sp>
         <p:nvSpPr>
-          <p:cNvPr id="32" name="Shape 30"/>
+          <p:cNvPr id="38" name="Shape 36"/>
           <p:cNvSpPr/>
           <p:nvPr/>
         </p:nvSpPr>
@@ -29964,7 +30998,7 @@
       </p:sp>
       <p:sp>
         <p:nvSpPr>
-          <p:cNvPr id="33" name="Text 31"/>
+          <p:cNvPr id="39" name="Text 37"/>
           <p:cNvSpPr/>
           <p:nvPr/>
         </p:nvSpPr>
@@ -30287,7 +31321,7 @@
                 <a:ea typeface="Calibri" pitchFamily="34" charset="-122"/>
                 <a:cs typeface="Calibri" pitchFamily="34" charset="-120"/>
               </a:rPr>
-              <a:t>Word Labs  •  wordlabs.app  •  Root: 'join' = to connect or bring together</a:t>
+              <a:t>Word Labs  •  wordlabs.app  •  Root: 'join' = connect</a:t>
             </a:r>
             <a:endParaRPr lang="en-US" sz="800" dirty="0"/>
           </a:p>
@@ -30426,7 +31460,7 @@
                 <a:ea typeface="Trebuchet MS" pitchFamily="34" charset="-122"/>
                 <a:cs typeface="Trebuchet MS" pitchFamily="34" charset="-120"/>
               </a:rPr>
-              <a:t>disjoin</a:t>
+              <a:t>adjoining</a:t>
             </a:r>
             <a:endParaRPr lang="en-US" sz="2800" dirty="0"/>
           </a:p>
@@ -30506,7 +31540,7 @@
         </p:nvSpPr>
         <p:spPr>
           <a:xfrm>
-            <a:off x="2938272" y="2258568"/>
+            <a:off x="2221992" y="2258568"/>
             <a:ext cx="1828800" cy="292608"/>
           </a:xfrm>
           <a:prstGeom prst="rect">
@@ -30540,7 +31574,7 @@
         </p:nvSpPr>
         <p:spPr>
           <a:xfrm>
-            <a:off x="2938272" y="2258568"/>
+            <a:off x="2221992" y="2258568"/>
             <a:ext cx="1828800" cy="292608"/>
           </a:xfrm>
           <a:prstGeom prst="rect">
@@ -30565,7 +31599,7 @@
                 <a:ea typeface="Trebuchet MS" pitchFamily="34" charset="-122"/>
                 <a:cs typeface="Trebuchet MS" pitchFamily="34" charset="-120"/>
               </a:rPr>
-              <a:t>dis</a:t>
+              <a:t>ad</a:t>
             </a:r>
             <a:endParaRPr lang="en-US" sz="1300" dirty="0"/>
           </a:p>
@@ -30579,7 +31613,7 @@
         </p:nvSpPr>
         <p:spPr>
           <a:xfrm>
-            <a:off x="2938272" y="2569464"/>
+            <a:off x="2221992" y="2569464"/>
             <a:ext cx="1828800" cy="201168"/>
           </a:xfrm>
           <a:prstGeom prst="rect">
@@ -30604,7 +31638,7 @@
                 <a:ea typeface="Calibri" pitchFamily="34" charset="-122"/>
                 <a:cs typeface="Calibri" pitchFamily="34" charset="-120"/>
               </a:rPr>
-              <a:t>not or apart</a:t>
+              <a:t>towards; to</a:t>
             </a:r>
             <a:endParaRPr lang="en-US" sz="850" dirty="0"/>
           </a:p>
@@ -30618,7 +31652,7 @@
         </p:nvSpPr>
         <p:spPr>
           <a:xfrm>
-            <a:off x="5803392" y="2258568"/>
+            <a:off x="4370832" y="2258568"/>
             <a:ext cx="1828800" cy="292608"/>
           </a:xfrm>
           <a:prstGeom prst="rect">
@@ -30652,7 +31686,7 @@
         </p:nvSpPr>
         <p:spPr>
           <a:xfrm>
-            <a:off x="5803392" y="2258568"/>
+            <a:off x="4370832" y="2258568"/>
             <a:ext cx="1828800" cy="292608"/>
           </a:xfrm>
           <a:prstGeom prst="rect">
@@ -30691,7 +31725,7 @@
         </p:nvSpPr>
         <p:spPr>
           <a:xfrm>
-            <a:off x="5803392" y="2569464"/>
+            <a:off x="4370832" y="2569464"/>
             <a:ext cx="1828800" cy="201168"/>
           </a:xfrm>
           <a:prstGeom prst="rect">
@@ -30716,7 +31750,7 @@
                 <a:ea typeface="Calibri" pitchFamily="34" charset="-122"/>
                 <a:cs typeface="Calibri" pitchFamily="34" charset="-120"/>
               </a:rPr>
-              <a:t>to connect or bring together</a:t>
+              <a:t>connect</a:t>
             </a:r>
             <a:endParaRPr lang="en-US" sz="850" dirty="0"/>
           </a:p>
@@ -30725,6 +31759,118 @@
       <p:sp>
         <p:nvSpPr>
           <p:cNvPr id="22" name="Shape 20"/>
+          <p:cNvSpPr/>
+          <p:nvPr/>
+        </p:nvSpPr>
+        <p:spPr>
+          <a:xfrm>
+            <a:off x="6519672" y="2258568"/>
+            <a:ext cx="1828800" cy="292608"/>
+          </a:xfrm>
+          <a:prstGeom prst="rect">
+            <a:avLst>
+              <a:gd name="adj" fmla="val 25000"/>
+            </a:avLst>
+          </a:prstGeom>
+          <a:solidFill>
+            <a:srgbClr val="FCE7F3"/>
+          </a:solidFill>
+          <a:ln w="19050">
+            <a:solidFill>
+              <a:srgbClr val="DB2777"/>
+            </a:solidFill>
+            <a:prstDash val="solid"/>
+          </a:ln>
+          <a:effectLst>
+            <a:outerShdw sx="100000" sy="100000" kx="0" ky="0" algn="bl" rotWithShape="0" blurRad="101600" dist="38100" dir="8100000">
+              <a:srgbClr val="000000">
+                <a:alpha val="12000"/>
+              </a:srgbClr>
+            </a:outerShdw>
+          </a:effectLst>
+        </p:spPr>
+      </p:sp>
+      <p:sp>
+        <p:nvSpPr>
+          <p:cNvPr id="23" name="Text 21"/>
+          <p:cNvSpPr/>
+          <p:nvPr/>
+        </p:nvSpPr>
+        <p:spPr>
+          <a:xfrm>
+            <a:off x="6519672" y="2258568"/>
+            <a:ext cx="1828800" cy="292608"/>
+          </a:xfrm>
+          <a:prstGeom prst="rect">
+            <a:avLst/>
+          </a:prstGeom>
+          <a:noFill/>
+          <a:ln/>
+        </p:spPr>
+        <p:txBody>
+          <a:bodyPr wrap="square" lIns="0" tIns="0" rIns="0" bIns="0" rtlCol="0" anchor="ctr"/>
+          <a:lstStyle/>
+          <a:p>
+            <a:pPr algn="ctr" indent="0" marL="0">
+              <a:buNone/>
+            </a:pPr>
+            <a:r>
+              <a:rPr lang="en-US" sz="1300" b="1" dirty="0">
+                <a:solidFill>
+                  <a:srgbClr val="9D174D"/>
+                </a:solidFill>
+                <a:latin typeface="Trebuchet MS" pitchFamily="34" charset="0"/>
+                <a:ea typeface="Trebuchet MS" pitchFamily="34" charset="-122"/>
+                <a:cs typeface="Trebuchet MS" pitchFamily="34" charset="-120"/>
+              </a:rPr>
+              <a:t>ing</a:t>
+            </a:r>
+            <a:endParaRPr lang="en-US" sz="1300" dirty="0"/>
+          </a:p>
+        </p:txBody>
+      </p:sp>
+      <p:sp>
+        <p:nvSpPr>
+          <p:cNvPr id="24" name="Text 22"/>
+          <p:cNvSpPr/>
+          <p:nvPr/>
+        </p:nvSpPr>
+        <p:spPr>
+          <a:xfrm>
+            <a:off x="6519672" y="2569464"/>
+            <a:ext cx="1828800" cy="201168"/>
+          </a:xfrm>
+          <a:prstGeom prst="rect">
+            <a:avLst/>
+          </a:prstGeom>
+          <a:noFill/>
+          <a:ln/>
+        </p:spPr>
+        <p:txBody>
+          <a:bodyPr wrap="square" lIns="0" tIns="0" rIns="0" bIns="0" rtlCol="0" anchor="t"/>
+          <a:lstStyle/>
+          <a:p>
+            <a:pPr algn="ctr" indent="0" marL="0">
+              <a:buNone/>
+            </a:pPr>
+            <a:r>
+              <a:rPr lang="en-US" sz="850" dirty="0">
+                <a:solidFill>
+                  <a:srgbClr val="475569"/>
+                </a:solidFill>
+                <a:latin typeface="Calibri" pitchFamily="34" charset="0"/>
+                <a:ea typeface="Calibri" pitchFamily="34" charset="-122"/>
+                <a:cs typeface="Calibri" pitchFamily="34" charset="-120"/>
+              </a:rPr>
+              <a:t>happening now</a:t>
+            </a:r>
+            <a:endParaRPr lang="en-US" sz="850" dirty="0"/>
+          </a:p>
+        </p:txBody>
+      </p:sp>
+      <p:sp>
+        <p:nvSpPr>
+          <p:cNvPr id="25" name="Shape 23"/>
           <p:cNvSpPr/>
           <p:nvPr/>
         </p:nvSpPr>
@@ -30751,7 +31897,7 @@
       </p:sp>
       <p:sp>
         <p:nvSpPr>
-          <p:cNvPr id="23" name="Text 21"/>
+          <p:cNvPr id="26" name="Text 24"/>
           <p:cNvSpPr/>
           <p:nvPr/>
         </p:nvSpPr>
@@ -30790,7 +31936,7 @@
       </p:sp>
       <p:sp>
         <p:nvSpPr>
-          <p:cNvPr id="24" name="Shape 22"/>
+          <p:cNvPr id="27" name="Shape 25"/>
           <p:cNvSpPr/>
           <p:nvPr/>
         </p:nvSpPr>
@@ -30817,13 +31963,13 @@
       </p:sp>
       <p:sp>
         <p:nvSpPr>
-          <p:cNvPr id="25" name="Shape 23"/>
-          <p:cNvSpPr/>
-          <p:nvPr/>
-        </p:nvSpPr>
-        <p:spPr>
-          <a:xfrm>
-            <a:off x="2999232" y="3364992"/>
+          <p:cNvPr id="28" name="Shape 26"/>
+          <p:cNvSpPr/>
+          <p:nvPr/>
+        </p:nvSpPr>
+        <p:spPr>
+          <a:xfrm>
+            <a:off x="2313432" y="3364992"/>
             <a:ext cx="1645920" cy="475488"/>
           </a:xfrm>
           <a:prstGeom prst="rect">
@@ -30844,13 +31990,13 @@
       </p:sp>
       <p:sp>
         <p:nvSpPr>
-          <p:cNvPr id="26" name="Text 24"/>
-          <p:cNvSpPr/>
-          <p:nvPr/>
-        </p:nvSpPr>
-        <p:spPr>
-          <a:xfrm>
-            <a:off x="2999232" y="3364992"/>
+          <p:cNvPr id="29" name="Text 27"/>
+          <p:cNvSpPr/>
+          <p:nvPr/>
+        </p:nvSpPr>
+        <p:spPr>
+          <a:xfrm>
+            <a:off x="2313432" y="3364992"/>
             <a:ext cx="1645920" cy="475488"/>
           </a:xfrm>
           <a:prstGeom prst="rect">
@@ -30875,7 +32021,7 @@
                 <a:ea typeface="Trebuchet MS" pitchFamily="34" charset="-122"/>
                 <a:cs typeface="Trebuchet MS" pitchFamily="34" charset="-120"/>
               </a:rPr>
-              <a:t>dis</a:t>
+              <a:t>ad</a:t>
             </a:r>
             <a:endParaRPr lang="en-US" sz="1400" dirty="0"/>
           </a:p>
@@ -30883,14 +32029,14 @@
       </p:sp>
       <p:sp>
         <p:nvSpPr>
-          <p:cNvPr id="27" name="Text 25"/>
-          <p:cNvSpPr/>
-          <p:nvPr/>
-        </p:nvSpPr>
-        <p:spPr>
-          <a:xfrm>
-            <a:off x="4645152" y="3364992"/>
-            <a:ext cx="1097280" cy="475488"/>
+          <p:cNvPr id="30" name="Text 28"/>
+          <p:cNvSpPr/>
+          <p:nvPr/>
+        </p:nvSpPr>
+        <p:spPr>
+          <a:xfrm>
+            <a:off x="3959352" y="3364992"/>
+            <a:ext cx="411480" cy="475488"/>
           </a:xfrm>
           <a:prstGeom prst="rect">
             <a:avLst/>
@@ -30922,13 +32068,13 @@
       </p:sp>
       <p:sp>
         <p:nvSpPr>
-          <p:cNvPr id="28" name="Shape 26"/>
-          <p:cNvSpPr/>
-          <p:nvPr/>
-        </p:nvSpPr>
-        <p:spPr>
-          <a:xfrm>
-            <a:off x="5742432" y="3364992"/>
+          <p:cNvPr id="31" name="Shape 29"/>
+          <p:cNvSpPr/>
+          <p:nvPr/>
+        </p:nvSpPr>
+        <p:spPr>
+          <a:xfrm>
+            <a:off x="4370832" y="3364992"/>
             <a:ext cx="1645920" cy="475488"/>
           </a:xfrm>
           <a:prstGeom prst="rect">
@@ -30949,13 +32095,13 @@
       </p:sp>
       <p:sp>
         <p:nvSpPr>
-          <p:cNvPr id="29" name="Text 27"/>
-          <p:cNvSpPr/>
-          <p:nvPr/>
-        </p:nvSpPr>
-        <p:spPr>
-          <a:xfrm>
-            <a:off x="5742432" y="3364992"/>
+          <p:cNvPr id="32" name="Text 30"/>
+          <p:cNvSpPr/>
+          <p:nvPr/>
+        </p:nvSpPr>
+        <p:spPr>
+          <a:xfrm>
+            <a:off x="4370832" y="3364992"/>
             <a:ext cx="1645920" cy="475488"/>
           </a:xfrm>
           <a:prstGeom prst="rect">
@@ -30988,7 +32134,112 @@
       </p:sp>
       <p:sp>
         <p:nvSpPr>
-          <p:cNvPr id="30" name="Shape 28"/>
+          <p:cNvPr id="33" name="Text 31"/>
+          <p:cNvSpPr/>
+          <p:nvPr/>
+        </p:nvSpPr>
+        <p:spPr>
+          <a:xfrm>
+            <a:off x="6016752" y="3364992"/>
+            <a:ext cx="411480" cy="475488"/>
+          </a:xfrm>
+          <a:prstGeom prst="rect">
+            <a:avLst/>
+          </a:prstGeom>
+          <a:noFill/>
+          <a:ln/>
+        </p:spPr>
+        <p:txBody>
+          <a:bodyPr wrap="square" lIns="0" tIns="0" rIns="0" bIns="0" rtlCol="0" anchor="ctr"/>
+          <a:lstStyle/>
+          <a:p>
+            <a:pPr algn="ctr" indent="0" marL="0">
+              <a:buNone/>
+            </a:pPr>
+            <a:r>
+              <a:rPr lang="en-US" sz="1600" b="1" dirty="0">
+                <a:solidFill>
+                  <a:srgbClr val="0D9488"/>
+                </a:solidFill>
+                <a:latin typeface="Trebuchet MS" pitchFamily="34" charset="0"/>
+                <a:ea typeface="Trebuchet MS" pitchFamily="34" charset="-122"/>
+                <a:cs typeface="Trebuchet MS" pitchFamily="34" charset="-120"/>
+              </a:rPr>
+              <a:t>·</a:t>
+            </a:r>
+            <a:endParaRPr lang="en-US" sz="1600" dirty="0"/>
+          </a:p>
+        </p:txBody>
+      </p:sp>
+      <p:sp>
+        <p:nvSpPr>
+          <p:cNvPr id="34" name="Shape 32"/>
+          <p:cNvSpPr/>
+          <p:nvPr/>
+        </p:nvSpPr>
+        <p:spPr>
+          <a:xfrm>
+            <a:off x="6428232" y="3364992"/>
+            <a:ext cx="1645920" cy="475488"/>
+          </a:xfrm>
+          <a:prstGeom prst="rect">
+            <a:avLst>
+              <a:gd name="adj" fmla="val 9615"/>
+            </a:avLst>
+          </a:prstGeom>
+          <a:solidFill>
+            <a:srgbClr val="FFFFFF"/>
+          </a:solidFill>
+          <a:ln w="12700">
+            <a:solidFill>
+              <a:srgbClr val="0D9488"/>
+            </a:solidFill>
+            <a:prstDash val="solid"/>
+          </a:ln>
+        </p:spPr>
+      </p:sp>
+      <p:sp>
+        <p:nvSpPr>
+          <p:cNvPr id="35" name="Text 33"/>
+          <p:cNvSpPr/>
+          <p:nvPr/>
+        </p:nvSpPr>
+        <p:spPr>
+          <a:xfrm>
+            <a:off x="6428232" y="3364992"/>
+            <a:ext cx="1645920" cy="475488"/>
+          </a:xfrm>
+          <a:prstGeom prst="rect">
+            <a:avLst/>
+          </a:prstGeom>
+          <a:noFill/>
+          <a:ln/>
+        </p:spPr>
+        <p:txBody>
+          <a:bodyPr wrap="square" lIns="0" tIns="0" rIns="0" bIns="0" rtlCol="0" anchor="ctr"/>
+          <a:lstStyle/>
+          <a:p>
+            <a:pPr algn="ctr" indent="0" marL="0">
+              <a:buNone/>
+            </a:pPr>
+            <a:r>
+              <a:rPr lang="en-US" sz="1400" b="1" dirty="0">
+                <a:solidFill>
+                  <a:srgbClr val="0D9488"/>
+                </a:solidFill>
+                <a:latin typeface="Trebuchet MS" pitchFamily="34" charset="0"/>
+                <a:ea typeface="Trebuchet MS" pitchFamily="34" charset="-122"/>
+                <a:cs typeface="Trebuchet MS" pitchFamily="34" charset="-120"/>
+              </a:rPr>
+              <a:t>ing</a:t>
+            </a:r>
+            <a:endParaRPr lang="en-US" sz="1400" dirty="0"/>
+          </a:p>
+        </p:txBody>
+      </p:sp>
+      <p:sp>
+        <p:nvSpPr>
+          <p:cNvPr id="36" name="Shape 34"/>
           <p:cNvSpPr/>
           <p:nvPr/>
         </p:nvSpPr>
@@ -31015,7 +32266,7 @@
       </p:sp>
       <p:sp>
         <p:nvSpPr>
-          <p:cNvPr id="31" name="Text 29"/>
+          <p:cNvPr id="37" name="Text 35"/>
           <p:cNvSpPr/>
           <p:nvPr/>
         </p:nvSpPr>
@@ -31054,7 +32305,7 @@
       </p:sp>
       <p:sp>
         <p:nvSpPr>
-          <p:cNvPr id="32" name="Shape 30"/>
+          <p:cNvPr id="38" name="Shape 36"/>
           <p:cNvSpPr/>
           <p:nvPr/>
         </p:nvSpPr>
@@ -31081,13 +32332,13 @@
       </p:sp>
       <p:sp>
         <p:nvSpPr>
-          <p:cNvPr id="33" name="Shape 31"/>
-          <p:cNvSpPr/>
-          <p:nvPr/>
-        </p:nvSpPr>
-        <p:spPr>
-          <a:xfrm>
-            <a:off x="2254649" y="4169664"/>
+          <p:cNvPr id="39" name="Shape 37"/>
+          <p:cNvSpPr/>
+          <p:nvPr/>
+        </p:nvSpPr>
+        <p:spPr>
+          <a:xfrm>
+            <a:off x="2124837" y="4169664"/>
             <a:ext cx="685800" cy="475488"/>
           </a:xfrm>
           <a:prstGeom prst="rect">
@@ -31108,13 +32359,13 @@
       </p:sp>
       <p:sp>
         <p:nvSpPr>
-          <p:cNvPr id="34" name="Text 32"/>
-          <p:cNvSpPr/>
-          <p:nvPr/>
-        </p:nvSpPr>
-        <p:spPr>
-          <a:xfrm>
-            <a:off x="2254649" y="4169664"/>
+          <p:cNvPr id="40" name="Text 38"/>
+          <p:cNvSpPr/>
+          <p:nvPr/>
+        </p:nvSpPr>
+        <p:spPr>
+          <a:xfrm>
+            <a:off x="2124837" y="4169664"/>
             <a:ext cx="685800" cy="475488"/>
           </a:xfrm>
           <a:prstGeom prst="rect">
@@ -31139,7 +32390,7 @@
                 <a:ea typeface="Trebuchet MS" pitchFamily="34" charset="-122"/>
                 <a:cs typeface="Trebuchet MS" pitchFamily="34" charset="-120"/>
               </a:rPr>
-              <a:t>d</a:t>
+              <a:t>a</a:t>
             </a:r>
             <a:endParaRPr lang="en-US" sz="900" dirty="0"/>
           </a:p>
@@ -31147,13 +32398,13 @@
       </p:sp>
       <p:sp>
         <p:nvSpPr>
-          <p:cNvPr id="35" name="Shape 33"/>
-          <p:cNvSpPr/>
-          <p:nvPr/>
-        </p:nvSpPr>
-        <p:spPr>
-          <a:xfrm>
-            <a:off x="3293146" y="4169664"/>
+          <p:cNvPr id="41" name="Shape 39"/>
+          <p:cNvSpPr/>
+          <p:nvPr/>
+        </p:nvSpPr>
+        <p:spPr>
+          <a:xfrm>
+            <a:off x="3033522" y="4169664"/>
             <a:ext cx="685800" cy="475488"/>
           </a:xfrm>
           <a:prstGeom prst="rect">
@@ -31174,13 +32425,13 @@
       </p:sp>
       <p:sp>
         <p:nvSpPr>
-          <p:cNvPr id="36" name="Text 34"/>
-          <p:cNvSpPr/>
-          <p:nvPr/>
-        </p:nvSpPr>
-        <p:spPr>
-          <a:xfrm>
-            <a:off x="3293146" y="4169664"/>
+          <p:cNvPr id="42" name="Text 40"/>
+          <p:cNvSpPr/>
+          <p:nvPr/>
+        </p:nvSpPr>
+        <p:spPr>
+          <a:xfrm>
+            <a:off x="3033522" y="4169664"/>
             <a:ext cx="685800" cy="475488"/>
           </a:xfrm>
           <a:prstGeom prst="rect">
@@ -31205,7 +32456,7 @@
                 <a:ea typeface="Trebuchet MS" pitchFamily="34" charset="-122"/>
                 <a:cs typeface="Trebuchet MS" pitchFamily="34" charset="-120"/>
               </a:rPr>
-              <a:t>i</a:t>
+              <a:t>d</a:t>
             </a:r>
             <a:endParaRPr lang="en-US" sz="900" dirty="0"/>
           </a:p>
@@ -31213,13 +32464,13 @@
       </p:sp>
       <p:sp>
         <p:nvSpPr>
-          <p:cNvPr id="37" name="Shape 35"/>
-          <p:cNvSpPr/>
-          <p:nvPr/>
-        </p:nvSpPr>
-        <p:spPr>
-          <a:xfrm>
-            <a:off x="4331643" y="4169664"/>
+          <p:cNvPr id="43" name="Shape 41"/>
+          <p:cNvSpPr/>
+          <p:nvPr/>
+        </p:nvSpPr>
+        <p:spPr>
+          <a:xfrm>
+            <a:off x="3942207" y="4169664"/>
             <a:ext cx="685800" cy="475488"/>
           </a:xfrm>
           <a:prstGeom prst="rect">
@@ -31240,13 +32491,13 @@
       </p:sp>
       <p:sp>
         <p:nvSpPr>
-          <p:cNvPr id="38" name="Text 36"/>
-          <p:cNvSpPr/>
-          <p:nvPr/>
-        </p:nvSpPr>
-        <p:spPr>
-          <a:xfrm>
-            <a:off x="4331643" y="4169664"/>
+          <p:cNvPr id="44" name="Text 42"/>
+          <p:cNvSpPr/>
+          <p:nvPr/>
+        </p:nvSpPr>
+        <p:spPr>
+          <a:xfrm>
+            <a:off x="3942207" y="4169664"/>
             <a:ext cx="685800" cy="475488"/>
           </a:xfrm>
           <a:prstGeom prst="rect">
@@ -31271,7 +32522,7 @@
                 <a:ea typeface="Trebuchet MS" pitchFamily="34" charset="-122"/>
                 <a:cs typeface="Trebuchet MS" pitchFamily="34" charset="-120"/>
               </a:rPr>
-              <a:t>s</a:t>
+              <a:t>j</a:t>
             </a:r>
             <a:endParaRPr lang="en-US" sz="900" dirty="0"/>
           </a:p>
@@ -31279,13 +32530,13 @@
       </p:sp>
       <p:sp>
         <p:nvSpPr>
-          <p:cNvPr id="39" name="Shape 37"/>
-          <p:cNvSpPr/>
-          <p:nvPr/>
-        </p:nvSpPr>
-        <p:spPr>
-          <a:xfrm>
-            <a:off x="5370141" y="4169664"/>
+          <p:cNvPr id="45" name="Shape 43"/>
+          <p:cNvSpPr/>
+          <p:nvPr/>
+        </p:nvSpPr>
+        <p:spPr>
+          <a:xfrm>
+            <a:off x="4850892" y="4169664"/>
             <a:ext cx="685800" cy="475488"/>
           </a:xfrm>
           <a:prstGeom prst="rect">
@@ -31306,13 +32557,13 @@
       </p:sp>
       <p:sp>
         <p:nvSpPr>
-          <p:cNvPr id="40" name="Text 38"/>
-          <p:cNvSpPr/>
-          <p:nvPr/>
-        </p:nvSpPr>
-        <p:spPr>
-          <a:xfrm>
-            <a:off x="5370141" y="4169664"/>
+          <p:cNvPr id="46" name="Text 44"/>
+          <p:cNvSpPr/>
+          <p:nvPr/>
+        </p:nvSpPr>
+        <p:spPr>
+          <a:xfrm>
+            <a:off x="4850892" y="4169664"/>
             <a:ext cx="685800" cy="475488"/>
           </a:xfrm>
           <a:prstGeom prst="rect">
@@ -31337,7 +32588,7 @@
                 <a:ea typeface="Trebuchet MS" pitchFamily="34" charset="-122"/>
                 <a:cs typeface="Trebuchet MS" pitchFamily="34" charset="-120"/>
               </a:rPr>
-              <a:t>j</a:t>
+              <a:t>oi</a:t>
             </a:r>
             <a:endParaRPr lang="en-US" sz="900" dirty="0"/>
           </a:p>
@@ -31345,13 +32596,13 @@
       </p:sp>
       <p:sp>
         <p:nvSpPr>
-          <p:cNvPr id="41" name="Shape 39"/>
-          <p:cNvSpPr/>
-          <p:nvPr/>
-        </p:nvSpPr>
-        <p:spPr>
-          <a:xfrm>
-            <a:off x="6408638" y="4169664"/>
+          <p:cNvPr id="47" name="Shape 45"/>
+          <p:cNvSpPr/>
+          <p:nvPr/>
+        </p:nvSpPr>
+        <p:spPr>
+          <a:xfrm>
+            <a:off x="5759577" y="4169664"/>
             <a:ext cx="685800" cy="475488"/>
           </a:xfrm>
           <a:prstGeom prst="rect">
@@ -31372,13 +32623,13 @@
       </p:sp>
       <p:sp>
         <p:nvSpPr>
-          <p:cNvPr id="42" name="Text 40"/>
-          <p:cNvSpPr/>
-          <p:nvPr/>
-        </p:nvSpPr>
-        <p:spPr>
-          <a:xfrm>
-            <a:off x="6408638" y="4169664"/>
+          <p:cNvPr id="48" name="Text 46"/>
+          <p:cNvSpPr/>
+          <p:nvPr/>
+        </p:nvSpPr>
+        <p:spPr>
+          <a:xfrm>
+            <a:off x="5759577" y="4169664"/>
             <a:ext cx="685800" cy="475488"/>
           </a:xfrm>
           <a:prstGeom prst="rect">
@@ -31403,7 +32654,7 @@
                 <a:ea typeface="Trebuchet MS" pitchFamily="34" charset="-122"/>
                 <a:cs typeface="Trebuchet MS" pitchFamily="34" charset="-120"/>
               </a:rPr>
-              <a:t>oi</a:t>
+              <a:t>n</a:t>
             </a:r>
             <a:endParaRPr lang="en-US" sz="900" dirty="0"/>
           </a:p>
@@ -31411,13 +32662,13 @@
       </p:sp>
       <p:sp>
         <p:nvSpPr>
-          <p:cNvPr id="43" name="Shape 41"/>
-          <p:cNvSpPr/>
-          <p:nvPr/>
-        </p:nvSpPr>
-        <p:spPr>
-          <a:xfrm>
-            <a:off x="7447135" y="4169664"/>
+          <p:cNvPr id="49" name="Shape 47"/>
+          <p:cNvSpPr/>
+          <p:nvPr/>
+        </p:nvSpPr>
+        <p:spPr>
+          <a:xfrm>
+            <a:off x="6668262" y="4169664"/>
             <a:ext cx="685800" cy="475488"/>
           </a:xfrm>
           <a:prstGeom prst="rect">
@@ -31438,13 +32689,13 @@
       </p:sp>
       <p:sp>
         <p:nvSpPr>
-          <p:cNvPr id="44" name="Text 42"/>
-          <p:cNvSpPr/>
-          <p:nvPr/>
-        </p:nvSpPr>
-        <p:spPr>
-          <a:xfrm>
-            <a:off x="7447135" y="4169664"/>
+          <p:cNvPr id="50" name="Text 48"/>
+          <p:cNvSpPr/>
+          <p:nvPr/>
+        </p:nvSpPr>
+        <p:spPr>
+          <a:xfrm>
+            <a:off x="6668262" y="4169664"/>
             <a:ext cx="685800" cy="475488"/>
           </a:xfrm>
           <a:prstGeom prst="rect">
@@ -31469,7 +32720,73 @@
                 <a:ea typeface="Trebuchet MS" pitchFamily="34" charset="-122"/>
                 <a:cs typeface="Trebuchet MS" pitchFamily="34" charset="-120"/>
               </a:rPr>
-              <a:t>n</a:t>
+              <a:t>i</a:t>
+            </a:r>
+            <a:endParaRPr lang="en-US" sz="900" dirty="0"/>
+          </a:p>
+        </p:txBody>
+      </p:sp>
+      <p:sp>
+        <p:nvSpPr>
+          <p:cNvPr id="51" name="Shape 49"/>
+          <p:cNvSpPr/>
+          <p:nvPr/>
+        </p:nvSpPr>
+        <p:spPr>
+          <a:xfrm>
+            <a:off x="7576947" y="4169664"/>
+            <a:ext cx="685800" cy="475488"/>
+          </a:xfrm>
+          <a:prstGeom prst="rect">
+            <a:avLst>
+              <a:gd name="adj" fmla="val 7692"/>
+            </a:avLst>
+          </a:prstGeom>
+          <a:solidFill>
+            <a:srgbClr val="FFFFFF"/>
+          </a:solidFill>
+          <a:ln w="12700">
+            <a:solidFill>
+              <a:srgbClr val="DB2777"/>
+            </a:solidFill>
+            <a:prstDash val="solid"/>
+          </a:ln>
+        </p:spPr>
+      </p:sp>
+      <p:sp>
+        <p:nvSpPr>
+          <p:cNvPr id="52" name="Text 50"/>
+          <p:cNvSpPr/>
+          <p:nvPr/>
+        </p:nvSpPr>
+        <p:spPr>
+          <a:xfrm>
+            <a:off x="7576947" y="4169664"/>
+            <a:ext cx="685800" cy="475488"/>
+          </a:xfrm>
+          <a:prstGeom prst="rect">
+            <a:avLst/>
+          </a:prstGeom>
+          <a:noFill/>
+          <a:ln/>
+        </p:spPr>
+        <p:txBody>
+          <a:bodyPr wrap="square" lIns="0" tIns="0" rIns="0" bIns="0" rtlCol="0" anchor="ctr"/>
+          <a:lstStyle/>
+          <a:p>
+            <a:pPr algn="ctr" indent="0" marL="0">
+              <a:buNone/>
+            </a:pPr>
+            <a:r>
+              <a:rPr lang="en-US" sz="900" b="1" dirty="0">
+                <a:solidFill>
+                  <a:srgbClr val="9D174D"/>
+                </a:solidFill>
+                <a:latin typeface="Trebuchet MS" pitchFamily="34" charset="0"/>
+                <a:ea typeface="Trebuchet MS" pitchFamily="34" charset="-122"/>
+                <a:cs typeface="Trebuchet MS" pitchFamily="34" charset="-120"/>
+              </a:rPr>
+              <a:t>ng</a:t>
             </a:r>
             <a:endParaRPr lang="en-US" sz="900" dirty="0"/>
           </a:p>
@@ -31761,7 +33078,7 @@
                 <a:ea typeface="Calibri" pitchFamily="34" charset="-122"/>
                 <a:cs typeface="Calibri" pitchFamily="34" charset="-120"/>
               </a:rPr>
-              <a:t>Word Labs  •  wordlabs.app  •  Root: 'join' = to connect or bring together</a:t>
+              <a:t>Word Labs  •  wordlabs.app  •  Root: 'join' = connect</a:t>
             </a:r>
             <a:endParaRPr lang="en-US" sz="800" dirty="0"/>
           </a:p>
@@ -32930,7 +34247,7 @@
                 <a:ea typeface="Calibri" pitchFamily="34" charset="-122"/>
                 <a:cs typeface="Calibri" pitchFamily="34" charset="-120"/>
               </a:rPr>
-              <a:t>Word Labs  •  wordlabs.app  •  Root: 'join' = to connect or bring together</a:t>
+              <a:t>Word Labs  •  wordlabs.app  •  Root: 'join' = connect</a:t>
             </a:r>
             <a:endParaRPr lang="en-US" sz="800" dirty="0"/>
           </a:p>
@@ -33231,7 +34548,7 @@
                 <a:ea typeface="Trebuchet MS" pitchFamily="34" charset="-122"/>
                 <a:cs typeface="Trebuchet MS" pitchFamily="34" charset="-120"/>
               </a:rPr>
-              <a:t>re-</a:t>
+              <a:t>ad-</a:t>
             </a:r>
             <a:endParaRPr lang="en-US" sz="1300" dirty="0"/>
           </a:p>
@@ -33359,7 +34676,7 @@
                 <a:ea typeface="Trebuchet MS" pitchFamily="34" charset="-122"/>
                 <a:cs typeface="Trebuchet MS" pitchFamily="34" charset="-120"/>
               </a:rPr>
-              <a:t>-ed</a:t>
+              <a:t>-ing</a:t>
             </a:r>
             <a:endParaRPr lang="en-US" sz="1300" dirty="0"/>
           </a:p>
@@ -33423,7 +34740,7 @@
                 <a:ea typeface="Trebuchet MS" pitchFamily="34" charset="-122"/>
                 <a:cs typeface="Trebuchet MS" pitchFamily="34" charset="-120"/>
               </a:rPr>
-              <a:t>con-</a:t>
+              <a:t>re-</a:t>
             </a:r>
             <a:endParaRPr lang="en-US" sz="1300" dirty="0"/>
           </a:p>
@@ -33512,7 +34829,7 @@
                 <a:ea typeface="Trebuchet MS" pitchFamily="34" charset="-122"/>
                 <a:cs typeface="Trebuchet MS" pitchFamily="34" charset="-120"/>
               </a:rPr>
-              <a:t>-ing</a:t>
+              <a:t>-ed</a:t>
             </a:r>
             <a:endParaRPr lang="en-US" sz="1300" dirty="0"/>
           </a:p>
@@ -33533,7 +34850,7 @@
             <a:avLst/>
           </a:prstGeom>
           <a:solidFill>
-            <a:srgbClr val="DDD6FE"/>
+            <a:srgbClr val="F8FAFC"/>
           </a:solidFill>
           <a:ln w="12700">
             <a:solidFill>
@@ -33545,14 +34862,64 @@
       </p:sp>
       <p:sp>
         <p:nvSpPr>
-          <p:cNvPr id="29" name="Text 27"/>
-          <p:cNvSpPr/>
-          <p:nvPr/>
-        </p:nvSpPr>
-        <p:spPr>
-          <a:xfrm>
-            <a:off x="365760" y="2404872"/>
-            <a:ext cx="2468880" cy="402336"/>
+          <p:cNvPr id="29" name="Shape 27"/>
+          <p:cNvSpPr/>
+          <p:nvPr/>
+        </p:nvSpPr>
+        <p:spPr>
+          <a:xfrm>
+            <a:off x="2971800" y="2404872"/>
+            <a:ext cx="2834640" cy="402336"/>
+          </a:xfrm>
+          <a:prstGeom prst="rect">
+            <a:avLst/>
+          </a:prstGeom>
+          <a:solidFill>
+            <a:srgbClr val="F8FAFC"/>
+          </a:solidFill>
+          <a:ln w="12700">
+            <a:solidFill>
+              <a:srgbClr val="E2E8F0"/>
+            </a:solidFill>
+            <a:prstDash val="solid"/>
+          </a:ln>
+        </p:spPr>
+      </p:sp>
+      <p:sp>
+        <p:nvSpPr>
+          <p:cNvPr id="30" name="Shape 28"/>
+          <p:cNvSpPr/>
+          <p:nvPr/>
+        </p:nvSpPr>
+        <p:spPr>
+          <a:xfrm>
+            <a:off x="5943600" y="2404872"/>
+            <a:ext cx="2834640" cy="402336"/>
+          </a:xfrm>
+          <a:prstGeom prst="rect">
+            <a:avLst/>
+          </a:prstGeom>
+          <a:solidFill>
+            <a:srgbClr val="FCE7F3"/>
+          </a:solidFill>
+          <a:ln w="12700">
+            <a:solidFill>
+              <a:srgbClr val="E2E8F0"/>
+            </a:solidFill>
+            <a:prstDash val="solid"/>
+          </a:ln>
+        </p:spPr>
+      </p:sp>
+      <p:sp>
+        <p:nvSpPr>
+          <p:cNvPr id="31" name="Text 29"/>
+          <p:cNvSpPr/>
+          <p:nvPr/>
+        </p:nvSpPr>
+        <p:spPr>
+          <a:xfrm>
+            <a:off x="5943600" y="2404872"/>
+            <a:ext cx="2834640" cy="402336"/>
           </a:xfrm>
           <a:prstGeom prst="rect">
             <a:avLst/>
@@ -33570,13 +34937,13 @@
             <a:r>
               <a:rPr lang="en-US" sz="1300" b="1" dirty="0">
                 <a:solidFill>
-                  <a:srgbClr val="4C1D95"/>
+                  <a:srgbClr val="9D174D"/>
                 </a:solidFill>
                 <a:latin typeface="Trebuchet MS" pitchFamily="34" charset="0"/>
                 <a:ea typeface="Trebuchet MS" pitchFamily="34" charset="-122"/>
                 <a:cs typeface="Trebuchet MS" pitchFamily="34" charset="-120"/>
               </a:rPr>
-              <a:t>dis-</a:t>
+              <a:t>-er</a:t>
             </a:r>
             <a:endParaRPr lang="en-US" sz="1300" dirty="0"/>
           </a:p>
@@ -33584,20 +34951,45 @@
       </p:sp>
       <p:sp>
         <p:nvSpPr>
-          <p:cNvPr id="30" name="Shape 28"/>
-          <p:cNvSpPr/>
-          <p:nvPr/>
-        </p:nvSpPr>
-        <p:spPr>
-          <a:xfrm>
-            <a:off x="2971800" y="2404872"/>
+          <p:cNvPr id="32" name="Shape 30"/>
+          <p:cNvSpPr/>
+          <p:nvPr/>
+        </p:nvSpPr>
+        <p:spPr>
+          <a:xfrm>
+            <a:off x="365760" y="2825496"/>
+            <a:ext cx="2468880" cy="402336"/>
+          </a:xfrm>
+          <a:prstGeom prst="rect">
+            <a:avLst/>
+          </a:prstGeom>
+          <a:solidFill>
+            <a:srgbClr val="F1F5F9"/>
+          </a:solidFill>
+          <a:ln w="12700">
+            <a:solidFill>
+              <a:srgbClr val="E2E8F0"/>
+            </a:solidFill>
+            <a:prstDash val="solid"/>
+          </a:ln>
+        </p:spPr>
+      </p:sp>
+      <p:sp>
+        <p:nvSpPr>
+          <p:cNvPr id="33" name="Shape 31"/>
+          <p:cNvSpPr/>
+          <p:nvPr/>
+        </p:nvSpPr>
+        <p:spPr>
+          <a:xfrm>
+            <a:off x="2971800" y="2825496"/>
             <a:ext cx="2834640" cy="402336"/>
           </a:xfrm>
           <a:prstGeom prst="rect">
             <a:avLst/>
           </a:prstGeom>
           <a:solidFill>
-            <a:srgbClr val="F8FAFC"/>
+            <a:srgbClr val="F1F5F9"/>
           </a:solidFill>
           <a:ln w="12700">
             <a:solidFill>
@@ -33609,13 +35001,13 @@
       </p:sp>
       <p:sp>
         <p:nvSpPr>
-          <p:cNvPr id="31" name="Shape 29"/>
-          <p:cNvSpPr/>
-          <p:nvPr/>
-        </p:nvSpPr>
-        <p:spPr>
-          <a:xfrm>
-            <a:off x="5943600" y="2404872"/>
+          <p:cNvPr id="34" name="Shape 32"/>
+          <p:cNvSpPr/>
+          <p:nvPr/>
+        </p:nvSpPr>
+        <p:spPr>
+          <a:xfrm>
+            <a:off x="5943600" y="2825496"/>
             <a:ext cx="2834640" cy="402336"/>
           </a:xfrm>
           <a:prstGeom prst="rect">
@@ -33634,13 +35026,13 @@
       </p:sp>
       <p:sp>
         <p:nvSpPr>
-          <p:cNvPr id="32" name="Text 30"/>
-          <p:cNvSpPr/>
-          <p:nvPr/>
-        </p:nvSpPr>
-        <p:spPr>
-          <a:xfrm>
-            <a:off x="5943600" y="2404872"/>
+          <p:cNvPr id="35" name="Text 33"/>
+          <p:cNvSpPr/>
+          <p:nvPr/>
+        </p:nvSpPr>
+        <p:spPr>
+          <a:xfrm>
+            <a:off x="5943600" y="2825496"/>
             <a:ext cx="2834640" cy="402336"/>
           </a:xfrm>
           <a:prstGeom prst="rect">
@@ -33665,7 +35057,7 @@
                 <a:ea typeface="Trebuchet MS" pitchFamily="34" charset="-122"/>
                 <a:cs typeface="Trebuchet MS" pitchFamily="34" charset="-120"/>
               </a:rPr>
-              <a:t>-er</a:t>
+              <a:t>-s</a:t>
             </a:r>
             <a:endParaRPr lang="en-US" sz="1300" dirty="0"/>
           </a:p>
@@ -33673,39 +35065,14 @@
       </p:sp>
       <p:sp>
         <p:nvSpPr>
-          <p:cNvPr id="33" name="Shape 31"/>
-          <p:cNvSpPr/>
-          <p:nvPr/>
-        </p:nvSpPr>
-        <p:spPr>
-          <a:xfrm>
-            <a:off x="365760" y="2825496"/>
-            <a:ext cx="2468880" cy="402336"/>
-          </a:xfrm>
-          <a:prstGeom prst="rect">
-            <a:avLst/>
-          </a:prstGeom>
-          <a:solidFill>
-            <a:srgbClr val="DDD6FE"/>
-          </a:solidFill>
-          <a:ln w="12700">
-            <a:solidFill>
-              <a:srgbClr val="E2E8F0"/>
-            </a:solidFill>
-            <a:prstDash val="solid"/>
-          </a:ln>
-        </p:spPr>
-      </p:sp>
-      <p:sp>
-        <p:nvSpPr>
-          <p:cNvPr id="34" name="Text 32"/>
-          <p:cNvSpPr/>
-          <p:nvPr/>
-        </p:nvSpPr>
-        <p:spPr>
-          <a:xfrm>
-            <a:off x="365760" y="2825496"/>
-            <a:ext cx="2468880" cy="402336"/>
+          <p:cNvPr id="36" name="Text 34"/>
+          <p:cNvSpPr/>
+          <p:nvPr/>
+        </p:nvSpPr>
+        <p:spPr>
+          <a:xfrm>
+            <a:off x="365760" y="3611880"/>
+            <a:ext cx="1828800" cy="347472"/>
           </a:xfrm>
           <a:prstGeom prst="rect">
             <a:avLst/>
@@ -33717,84 +35084,61 @@
           <a:bodyPr wrap="square" lIns="0" tIns="0" rIns="0" bIns="0" rtlCol="0" anchor="ctr"/>
           <a:lstStyle/>
           <a:p>
-            <a:pPr algn="ctr" indent="0" marL="0">
-              <a:buNone/>
-            </a:pPr>
-            <a:r>
-              <a:rPr lang="en-US" sz="1300" b="1" dirty="0">
-                <a:solidFill>
-                  <a:srgbClr val="4C1D95"/>
+            <a:pPr algn="l" indent="0" marL="0">
+              <a:buNone/>
+            </a:pPr>
+            <a:r>
+              <a:rPr lang="en-US" sz="1200" b="1" dirty="0">
+                <a:solidFill>
+                  <a:srgbClr val="0F172A"/>
                 </a:solidFill>
                 <a:latin typeface="Trebuchet MS" pitchFamily="34" charset="0"/>
                 <a:ea typeface="Trebuchet MS" pitchFamily="34" charset="-122"/>
                 <a:cs typeface="Trebuchet MS" pitchFamily="34" charset="-120"/>
               </a:rPr>
-              <a:t>en-</a:t>
-            </a:r>
-            <a:endParaRPr lang="en-US" sz="1300" dirty="0"/>
-          </a:p>
-        </p:txBody>
-      </p:sp>
-      <p:sp>
-        <p:nvSpPr>
-          <p:cNvPr id="35" name="Shape 33"/>
-          <p:cNvSpPr/>
-          <p:nvPr/>
-        </p:nvSpPr>
-        <p:spPr>
-          <a:xfrm>
-            <a:off x="2971800" y="2825496"/>
-            <a:ext cx="2834640" cy="402336"/>
-          </a:xfrm>
-          <a:prstGeom prst="rect">
-            <a:avLst/>
-          </a:prstGeom>
-          <a:solidFill>
-            <a:srgbClr val="F1F5F9"/>
-          </a:solidFill>
-          <a:ln w="12700">
-            <a:solidFill>
-              <a:srgbClr val="E2E8F0"/>
-            </a:solidFill>
-            <a:prstDash val="solid"/>
-          </a:ln>
-        </p:spPr>
-      </p:sp>
-      <p:sp>
-        <p:nvSpPr>
-          <p:cNvPr id="36" name="Shape 34"/>
-          <p:cNvSpPr/>
-          <p:nvPr/>
-        </p:nvSpPr>
-        <p:spPr>
-          <a:xfrm>
-            <a:off x="5943600" y="2825496"/>
-            <a:ext cx="2834640" cy="402336"/>
-          </a:xfrm>
-          <a:prstGeom prst="rect">
-            <a:avLst/>
-          </a:prstGeom>
-          <a:solidFill>
-            <a:srgbClr val="FCE7F3"/>
-          </a:solidFill>
-          <a:ln w="12700">
-            <a:solidFill>
-              <a:srgbClr val="E2E8F0"/>
-            </a:solidFill>
-            <a:prstDash val="solid"/>
-          </a:ln>
-        </p:spPr>
-      </p:sp>
-      <p:sp>
-        <p:nvSpPr>
-          <p:cNvPr id="37" name="Text 35"/>
-          <p:cNvSpPr/>
-          <p:nvPr/>
-        </p:nvSpPr>
-        <p:spPr>
-          <a:xfrm>
-            <a:off x="5943600" y="2825496"/>
-            <a:ext cx="2834640" cy="402336"/>
+              <a:t>Sample words:</a:t>
+            </a:r>
+            <a:endParaRPr lang="en-US" sz="1200" dirty="0"/>
+          </a:p>
+        </p:txBody>
+      </p:sp>
+      <p:sp>
+        <p:nvSpPr>
+          <p:cNvPr id="37" name="Shape 35"/>
+          <p:cNvSpPr/>
+          <p:nvPr/>
+        </p:nvSpPr>
+        <p:spPr>
+          <a:xfrm>
+            <a:off x="365760" y="4023360"/>
+            <a:ext cx="2011680" cy="402336"/>
+          </a:xfrm>
+          <a:prstGeom prst="rect">
+            <a:avLst>
+              <a:gd name="adj" fmla="val 13636"/>
+            </a:avLst>
+          </a:prstGeom>
+          <a:solidFill>
+            <a:srgbClr val="EEF2FF"/>
+          </a:solidFill>
+          <a:ln w="12700">
+            <a:solidFill>
+              <a:srgbClr val="6366F1"/>
+            </a:solidFill>
+            <a:prstDash val="solid"/>
+          </a:ln>
+        </p:spPr>
+      </p:sp>
+      <p:sp>
+        <p:nvSpPr>
+          <p:cNvPr id="38" name="Text 36"/>
+          <p:cNvSpPr/>
+          <p:nvPr/>
+        </p:nvSpPr>
+        <p:spPr>
+          <a:xfrm>
+            <a:off x="365760" y="4023360"/>
+            <a:ext cx="2011680" cy="402336"/>
           </a:xfrm>
           <a:prstGeom prst="rect">
             <a:avLst/>
@@ -33810,55 +35154,57 @@
               <a:buNone/>
             </a:pPr>
             <a:r>
-              <a:rPr lang="en-US" sz="1300" b="1" dirty="0">
-                <a:solidFill>
-                  <a:srgbClr val="9D174D"/>
+              <a:rPr lang="en-US" sz="1200" b="1" dirty="0">
+                <a:solidFill>
+                  <a:srgbClr val="4338CA"/>
                 </a:solidFill>
                 <a:latin typeface="Trebuchet MS" pitchFamily="34" charset="0"/>
                 <a:ea typeface="Trebuchet MS" pitchFamily="34" charset="-122"/>
                 <a:cs typeface="Trebuchet MS" pitchFamily="34" charset="-120"/>
               </a:rPr>
-              <a:t>-t</a:t>
-            </a:r>
-            <a:endParaRPr lang="en-US" sz="1300" dirty="0"/>
-          </a:p>
-        </p:txBody>
-      </p:sp>
-      <p:sp>
-        <p:nvSpPr>
-          <p:cNvPr id="38" name="Shape 36"/>
-          <p:cNvSpPr/>
-          <p:nvPr/>
-        </p:nvSpPr>
-        <p:spPr>
-          <a:xfrm>
-            <a:off x="365760" y="3246120"/>
-            <a:ext cx="2468880" cy="402336"/>
-          </a:xfrm>
-          <a:prstGeom prst="rect">
-            <a:avLst/>
-          </a:prstGeom>
-          <a:solidFill>
-            <a:srgbClr val="DDD6FE"/>
-          </a:solidFill>
-          <a:ln w="12700">
-            <a:solidFill>
-              <a:srgbClr val="E2E8F0"/>
-            </a:solidFill>
-            <a:prstDash val="solid"/>
-          </a:ln>
-        </p:spPr>
-      </p:sp>
-      <p:sp>
-        <p:nvSpPr>
-          <p:cNvPr id="39" name="Text 37"/>
-          <p:cNvSpPr/>
-          <p:nvPr/>
-        </p:nvSpPr>
-        <p:spPr>
-          <a:xfrm>
-            <a:off x="365760" y="3246120"/>
-            <a:ext cx="2468880" cy="402336"/>
+              <a:t>join</a:t>
+            </a:r>
+            <a:endParaRPr lang="en-US" sz="1200" dirty="0"/>
+          </a:p>
+        </p:txBody>
+      </p:sp>
+      <p:sp>
+        <p:nvSpPr>
+          <p:cNvPr id="39" name="Shape 37"/>
+          <p:cNvSpPr/>
+          <p:nvPr/>
+        </p:nvSpPr>
+        <p:spPr>
+          <a:xfrm>
+            <a:off x="2542032" y="4023360"/>
+            <a:ext cx="2011680" cy="402336"/>
+          </a:xfrm>
+          <a:prstGeom prst="rect">
+            <a:avLst>
+              <a:gd name="adj" fmla="val 13636"/>
+            </a:avLst>
+          </a:prstGeom>
+          <a:solidFill>
+            <a:srgbClr val="EEF2FF"/>
+          </a:solidFill>
+          <a:ln w="12700">
+            <a:solidFill>
+              <a:srgbClr val="6366F1"/>
+            </a:solidFill>
+            <a:prstDash val="solid"/>
+          </a:ln>
+        </p:spPr>
+      </p:sp>
+      <p:sp>
+        <p:nvSpPr>
+          <p:cNvPr id="40" name="Text 38"/>
+          <p:cNvSpPr/>
+          <p:nvPr/>
+        </p:nvSpPr>
+        <p:spPr>
+          <a:xfrm>
+            <a:off x="2542032" y="4023360"/>
+            <a:ext cx="2011680" cy="402336"/>
           </a:xfrm>
           <a:prstGeom prst="rect">
             <a:avLst/>
@@ -33874,44 +35220,19 @@
               <a:buNone/>
             </a:pPr>
             <a:r>
-              <a:rPr lang="en-US" sz="1300" b="1" dirty="0">
-                <a:solidFill>
-                  <a:srgbClr val="4C1D95"/>
+              <a:rPr lang="en-US" sz="1200" b="1" dirty="0">
+                <a:solidFill>
+                  <a:srgbClr val="4338CA"/>
                 </a:solidFill>
                 <a:latin typeface="Trebuchet MS" pitchFamily="34" charset="0"/>
                 <a:ea typeface="Trebuchet MS" pitchFamily="34" charset="-122"/>
                 <a:cs typeface="Trebuchet MS" pitchFamily="34" charset="-120"/>
               </a:rPr>
-              <a:t>ad-</a:t>
-            </a:r>
-            <a:endParaRPr lang="en-US" sz="1300" dirty="0"/>
-          </a:p>
-        </p:txBody>
-      </p:sp>
-      <p:sp>
-        <p:nvSpPr>
-          <p:cNvPr id="40" name="Shape 38"/>
-          <p:cNvSpPr/>
-          <p:nvPr/>
-        </p:nvSpPr>
-        <p:spPr>
-          <a:xfrm>
-            <a:off x="2971800" y="3246120"/>
-            <a:ext cx="2834640" cy="402336"/>
-          </a:xfrm>
-          <a:prstGeom prst="rect">
-            <a:avLst/>
-          </a:prstGeom>
-          <a:solidFill>
-            <a:srgbClr val="F8FAFC"/>
-          </a:solidFill>
-          <a:ln w="12700">
-            <a:solidFill>
-              <a:srgbClr val="E2E8F0"/>
-            </a:solidFill>
-            <a:prstDash val="solid"/>
-          </a:ln>
-        </p:spPr>
+              <a:t>joins</a:t>
+            </a:r>
+            <a:endParaRPr lang="en-US" sz="1200" dirty="0"/>
+          </a:p>
+        </p:txBody>
       </p:sp>
       <p:sp>
         <p:nvSpPr>
@@ -33921,18 +35242,20 @@
         </p:nvSpPr>
         <p:spPr>
           <a:xfrm>
-            <a:off x="5943600" y="3246120"/>
-            <a:ext cx="2834640" cy="402336"/>
-          </a:xfrm>
-          <a:prstGeom prst="rect">
-            <a:avLst/>
-          </a:prstGeom>
-          <a:solidFill>
-            <a:srgbClr val="FCE7F3"/>
-          </a:solidFill>
-          <a:ln w="12700">
-            <a:solidFill>
-              <a:srgbClr val="E2E8F0"/>
+            <a:off x="4718304" y="4023360"/>
+            <a:ext cx="2011680" cy="402336"/>
+          </a:xfrm>
+          <a:prstGeom prst="rect">
+            <a:avLst>
+              <a:gd name="adj" fmla="val 13636"/>
+            </a:avLst>
+          </a:prstGeom>
+          <a:solidFill>
+            <a:srgbClr val="EEF2FF"/>
+          </a:solidFill>
+          <a:ln w="12700">
+            <a:solidFill>
+              <a:srgbClr val="6366F1"/>
             </a:solidFill>
             <a:prstDash val="solid"/>
           </a:ln>
@@ -33946,8 +35269,8 @@
         </p:nvSpPr>
         <p:spPr>
           <a:xfrm>
-            <a:off x="5943600" y="3246120"/>
-            <a:ext cx="2834640" cy="402336"/>
+            <a:off x="4718304" y="4023360"/>
+            <a:ext cx="2011680" cy="402336"/>
           </a:xfrm>
           <a:prstGeom prst="rect">
             <a:avLst/>
@@ -33963,30 +35286,57 @@
               <a:buNone/>
             </a:pPr>
             <a:r>
-              <a:rPr lang="en-US" sz="1300" b="1" dirty="0">
-                <a:solidFill>
-                  <a:srgbClr val="9D174D"/>
+              <a:rPr lang="en-US" sz="1200" b="1" dirty="0">
+                <a:solidFill>
+                  <a:srgbClr val="4338CA"/>
                 </a:solidFill>
                 <a:latin typeface="Trebuchet MS" pitchFamily="34" charset="0"/>
                 <a:ea typeface="Trebuchet MS" pitchFamily="34" charset="-122"/>
                 <a:cs typeface="Trebuchet MS" pitchFamily="34" charset="-120"/>
               </a:rPr>
-              <a:t>-s</a:t>
-            </a:r>
-            <a:endParaRPr lang="en-US" sz="1300" dirty="0"/>
-          </a:p>
-        </p:txBody>
-      </p:sp>
-      <p:sp>
-        <p:nvSpPr>
-          <p:cNvPr id="43" name="Text 41"/>
-          <p:cNvSpPr/>
-          <p:nvPr/>
-        </p:nvSpPr>
-        <p:spPr>
-          <a:xfrm>
-            <a:off x="365760" y="3611880"/>
-            <a:ext cx="1828800" cy="347472"/>
+              <a:t>joined</a:t>
+            </a:r>
+            <a:endParaRPr lang="en-US" sz="1200" dirty="0"/>
+          </a:p>
+        </p:txBody>
+      </p:sp>
+      <p:sp>
+        <p:nvSpPr>
+          <p:cNvPr id="43" name="Shape 41"/>
+          <p:cNvSpPr/>
+          <p:nvPr/>
+        </p:nvSpPr>
+        <p:spPr>
+          <a:xfrm>
+            <a:off x="6894576" y="4023360"/>
+            <a:ext cx="2011680" cy="402336"/>
+          </a:xfrm>
+          <a:prstGeom prst="rect">
+            <a:avLst>
+              <a:gd name="adj" fmla="val 13636"/>
+            </a:avLst>
+          </a:prstGeom>
+          <a:solidFill>
+            <a:srgbClr val="EEF2FF"/>
+          </a:solidFill>
+          <a:ln w="12700">
+            <a:solidFill>
+              <a:srgbClr val="6366F1"/>
+            </a:solidFill>
+            <a:prstDash val="solid"/>
+          </a:ln>
+        </p:spPr>
+      </p:sp>
+      <p:sp>
+        <p:nvSpPr>
+          <p:cNvPr id="44" name="Text 42"/>
+          <p:cNvSpPr/>
+          <p:nvPr/>
+        </p:nvSpPr>
+        <p:spPr>
+          <a:xfrm>
+            <a:off x="6894576" y="4023360"/>
+            <a:ext cx="2011680" cy="402336"/>
           </a:xfrm>
           <a:prstGeom prst="rect">
             <a:avLst/>
@@ -33998,19 +35348,19 @@
           <a:bodyPr wrap="square" lIns="0" tIns="0" rIns="0" bIns="0" rtlCol="0" anchor="ctr"/>
           <a:lstStyle/>
           <a:p>
-            <a:pPr algn="l" indent="0" marL="0">
+            <a:pPr algn="ctr" indent="0" marL="0">
               <a:buNone/>
             </a:pPr>
             <a:r>
               <a:rPr lang="en-US" sz="1200" b="1" dirty="0">
                 <a:solidFill>
-                  <a:srgbClr val="0F172A"/>
+                  <a:srgbClr val="4338CA"/>
                 </a:solidFill>
                 <a:latin typeface="Trebuchet MS" pitchFamily="34" charset="0"/>
                 <a:ea typeface="Trebuchet MS" pitchFamily="34" charset="-122"/>
                 <a:cs typeface="Trebuchet MS" pitchFamily="34" charset="-120"/>
               </a:rPr>
-              <a:t>Sample words:</a:t>
+              <a:t>joiner</a:t>
             </a:r>
             <a:endParaRPr lang="en-US" sz="1200" dirty="0"/>
           </a:p>
@@ -34018,13 +35368,13 @@
       </p:sp>
       <p:sp>
         <p:nvSpPr>
-          <p:cNvPr id="44" name="Shape 42"/>
-          <p:cNvSpPr/>
-          <p:nvPr/>
-        </p:nvSpPr>
-        <p:spPr>
-          <a:xfrm>
-            <a:off x="365760" y="4023360"/>
+          <p:cNvPr id="45" name="Shape 43"/>
+          <p:cNvSpPr/>
+          <p:nvPr/>
+        </p:nvSpPr>
+        <p:spPr>
+          <a:xfrm>
+            <a:off x="365760" y="4498848"/>
             <a:ext cx="2011680" cy="402336"/>
           </a:xfrm>
           <a:prstGeom prst="rect">
@@ -34045,13 +35395,13 @@
       </p:sp>
       <p:sp>
         <p:nvSpPr>
-          <p:cNvPr id="45" name="Text 43"/>
-          <p:cNvSpPr/>
-          <p:nvPr/>
-        </p:nvSpPr>
-        <p:spPr>
-          <a:xfrm>
-            <a:off x="365760" y="4023360"/>
+          <p:cNvPr id="46" name="Text 44"/>
+          <p:cNvSpPr/>
+          <p:nvPr/>
+        </p:nvSpPr>
+        <p:spPr>
+          <a:xfrm>
+            <a:off x="365760" y="4498848"/>
             <a:ext cx="2011680" cy="402336"/>
           </a:xfrm>
           <a:prstGeom prst="rect">
@@ -34076,7 +35426,7 @@
                 <a:ea typeface="Trebuchet MS" pitchFamily="34" charset="-122"/>
                 <a:cs typeface="Trebuchet MS" pitchFamily="34" charset="-120"/>
               </a:rPr>
-              <a:t>join</a:t>
+              <a:t>rejoin</a:t>
             </a:r>
             <a:endParaRPr lang="en-US" sz="1200" dirty="0"/>
           </a:p>
@@ -34084,13 +35434,13 @@
       </p:sp>
       <p:sp>
         <p:nvSpPr>
-          <p:cNvPr id="46" name="Shape 44"/>
-          <p:cNvSpPr/>
-          <p:nvPr/>
-        </p:nvSpPr>
-        <p:spPr>
-          <a:xfrm>
-            <a:off x="2542032" y="4023360"/>
+          <p:cNvPr id="47" name="Shape 45"/>
+          <p:cNvSpPr/>
+          <p:nvPr/>
+        </p:nvSpPr>
+        <p:spPr>
+          <a:xfrm>
+            <a:off x="2542032" y="4498848"/>
             <a:ext cx="2011680" cy="402336"/>
           </a:xfrm>
           <a:prstGeom prst="rect">
@@ -34111,13 +35461,13 @@
       </p:sp>
       <p:sp>
         <p:nvSpPr>
-          <p:cNvPr id="47" name="Text 45"/>
-          <p:cNvSpPr/>
-          <p:nvPr/>
-        </p:nvSpPr>
-        <p:spPr>
-          <a:xfrm>
-            <a:off x="2542032" y="4023360"/>
+          <p:cNvPr id="48" name="Text 46"/>
+          <p:cNvSpPr/>
+          <p:nvPr/>
+        </p:nvSpPr>
+        <p:spPr>
+          <a:xfrm>
+            <a:off x="2542032" y="4498848"/>
             <a:ext cx="2011680" cy="402336"/>
           </a:xfrm>
           <a:prstGeom prst="rect">
@@ -34142,403 +35492,7 @@
                 <a:ea typeface="Trebuchet MS" pitchFamily="34" charset="-122"/>
                 <a:cs typeface="Trebuchet MS" pitchFamily="34" charset="-120"/>
               </a:rPr>
-              <a:t>joined</a:t>
-            </a:r>
-            <a:endParaRPr lang="en-US" sz="1200" dirty="0"/>
-          </a:p>
-        </p:txBody>
-      </p:sp>
-      <p:sp>
-        <p:nvSpPr>
-          <p:cNvPr id="48" name="Shape 46"/>
-          <p:cNvSpPr/>
-          <p:nvPr/>
-        </p:nvSpPr>
-        <p:spPr>
-          <a:xfrm>
-            <a:off x="4718304" y="4023360"/>
-            <a:ext cx="2011680" cy="402336"/>
-          </a:xfrm>
-          <a:prstGeom prst="rect">
-            <a:avLst>
-              <a:gd name="adj" fmla="val 13636"/>
-            </a:avLst>
-          </a:prstGeom>
-          <a:solidFill>
-            <a:srgbClr val="EEF2FF"/>
-          </a:solidFill>
-          <a:ln w="12700">
-            <a:solidFill>
-              <a:srgbClr val="6366F1"/>
-            </a:solidFill>
-            <a:prstDash val="solid"/>
-          </a:ln>
-        </p:spPr>
-      </p:sp>
-      <p:sp>
-        <p:nvSpPr>
-          <p:cNvPr id="49" name="Text 47"/>
-          <p:cNvSpPr/>
-          <p:nvPr/>
-        </p:nvSpPr>
-        <p:spPr>
-          <a:xfrm>
-            <a:off x="4718304" y="4023360"/>
-            <a:ext cx="2011680" cy="402336"/>
-          </a:xfrm>
-          <a:prstGeom prst="rect">
-            <a:avLst/>
-          </a:prstGeom>
-          <a:noFill/>
-          <a:ln/>
-        </p:spPr>
-        <p:txBody>
-          <a:bodyPr wrap="square" lIns="0" tIns="0" rIns="0" bIns="0" rtlCol="0" anchor="ctr"/>
-          <a:lstStyle/>
-          <a:p>
-            <a:pPr algn="ctr" indent="0" marL="0">
-              <a:buNone/>
-            </a:pPr>
-            <a:r>
-              <a:rPr lang="en-US" sz="1200" b="1" dirty="0">
-                <a:solidFill>
-                  <a:srgbClr val="4338CA"/>
-                </a:solidFill>
-                <a:latin typeface="Trebuchet MS" pitchFamily="34" charset="0"/>
-                <a:ea typeface="Trebuchet MS" pitchFamily="34" charset="-122"/>
-                <a:cs typeface="Trebuchet MS" pitchFamily="34" charset="-120"/>
-              </a:rPr>
-              <a:t>joining</a:t>
-            </a:r>
-            <a:endParaRPr lang="en-US" sz="1200" dirty="0"/>
-          </a:p>
-        </p:txBody>
-      </p:sp>
-      <p:sp>
-        <p:nvSpPr>
-          <p:cNvPr id="50" name="Shape 48"/>
-          <p:cNvSpPr/>
-          <p:nvPr/>
-        </p:nvSpPr>
-        <p:spPr>
-          <a:xfrm>
-            <a:off x="6894576" y="4023360"/>
-            <a:ext cx="2011680" cy="402336"/>
-          </a:xfrm>
-          <a:prstGeom prst="rect">
-            <a:avLst>
-              <a:gd name="adj" fmla="val 13636"/>
-            </a:avLst>
-          </a:prstGeom>
-          <a:solidFill>
-            <a:srgbClr val="EEF2FF"/>
-          </a:solidFill>
-          <a:ln w="12700">
-            <a:solidFill>
-              <a:srgbClr val="6366F1"/>
-            </a:solidFill>
-            <a:prstDash val="solid"/>
-          </a:ln>
-        </p:spPr>
-      </p:sp>
-      <p:sp>
-        <p:nvSpPr>
-          <p:cNvPr id="51" name="Text 49"/>
-          <p:cNvSpPr/>
-          <p:nvPr/>
-        </p:nvSpPr>
-        <p:spPr>
-          <a:xfrm>
-            <a:off x="6894576" y="4023360"/>
-            <a:ext cx="2011680" cy="402336"/>
-          </a:xfrm>
-          <a:prstGeom prst="rect">
-            <a:avLst/>
-          </a:prstGeom>
-          <a:noFill/>
-          <a:ln/>
-        </p:spPr>
-        <p:txBody>
-          <a:bodyPr wrap="square" lIns="0" tIns="0" rIns="0" bIns="0" rtlCol="0" anchor="ctr"/>
-          <a:lstStyle/>
-          <a:p>
-            <a:pPr algn="ctr" indent="0" marL="0">
-              <a:buNone/>
-            </a:pPr>
-            <a:r>
-              <a:rPr lang="en-US" sz="1200" b="1" dirty="0">
-                <a:solidFill>
-                  <a:srgbClr val="4338CA"/>
-                </a:solidFill>
-                <a:latin typeface="Trebuchet MS" pitchFamily="34" charset="0"/>
-                <a:ea typeface="Trebuchet MS" pitchFamily="34" charset="-122"/>
-                <a:cs typeface="Trebuchet MS" pitchFamily="34" charset="-120"/>
-              </a:rPr>
-              <a:t>joiner</a:t>
-            </a:r>
-            <a:endParaRPr lang="en-US" sz="1200" dirty="0"/>
-          </a:p>
-        </p:txBody>
-      </p:sp>
-      <p:sp>
-        <p:nvSpPr>
-          <p:cNvPr id="52" name="Shape 50"/>
-          <p:cNvSpPr/>
-          <p:nvPr/>
-        </p:nvSpPr>
-        <p:spPr>
-          <a:xfrm>
-            <a:off x="365760" y="4498848"/>
-            <a:ext cx="2011680" cy="402336"/>
-          </a:xfrm>
-          <a:prstGeom prst="rect">
-            <a:avLst>
-              <a:gd name="adj" fmla="val 13636"/>
-            </a:avLst>
-          </a:prstGeom>
-          <a:solidFill>
-            <a:srgbClr val="EEF2FF"/>
-          </a:solidFill>
-          <a:ln w="12700">
-            <a:solidFill>
-              <a:srgbClr val="6366F1"/>
-            </a:solidFill>
-            <a:prstDash val="solid"/>
-          </a:ln>
-        </p:spPr>
-      </p:sp>
-      <p:sp>
-        <p:nvSpPr>
-          <p:cNvPr id="53" name="Text 51"/>
-          <p:cNvSpPr/>
-          <p:nvPr/>
-        </p:nvSpPr>
-        <p:spPr>
-          <a:xfrm>
-            <a:off x="365760" y="4498848"/>
-            <a:ext cx="2011680" cy="402336"/>
-          </a:xfrm>
-          <a:prstGeom prst="rect">
-            <a:avLst/>
-          </a:prstGeom>
-          <a:noFill/>
-          <a:ln/>
-        </p:spPr>
-        <p:txBody>
-          <a:bodyPr wrap="square" lIns="0" tIns="0" rIns="0" bIns="0" rtlCol="0" anchor="ctr"/>
-          <a:lstStyle/>
-          <a:p>
-            <a:pPr algn="ctr" indent="0" marL="0">
-              <a:buNone/>
-            </a:pPr>
-            <a:r>
-              <a:rPr lang="en-US" sz="1200" b="1" dirty="0">
-                <a:solidFill>
-                  <a:srgbClr val="4338CA"/>
-                </a:solidFill>
-                <a:latin typeface="Trebuchet MS" pitchFamily="34" charset="0"/>
-                <a:ea typeface="Trebuchet MS" pitchFamily="34" charset="-122"/>
-                <a:cs typeface="Trebuchet MS" pitchFamily="34" charset="-120"/>
-              </a:rPr>
-              <a:t>rejoin</a:t>
-            </a:r>
-            <a:endParaRPr lang="en-US" sz="1200" dirty="0"/>
-          </a:p>
-        </p:txBody>
-      </p:sp>
-      <p:sp>
-        <p:nvSpPr>
-          <p:cNvPr id="54" name="Shape 52"/>
-          <p:cNvSpPr/>
-          <p:nvPr/>
-        </p:nvSpPr>
-        <p:spPr>
-          <a:xfrm>
-            <a:off x="2542032" y="4498848"/>
-            <a:ext cx="2011680" cy="402336"/>
-          </a:xfrm>
-          <a:prstGeom prst="rect">
-            <a:avLst>
-              <a:gd name="adj" fmla="val 13636"/>
-            </a:avLst>
-          </a:prstGeom>
-          <a:solidFill>
-            <a:srgbClr val="EEF2FF"/>
-          </a:solidFill>
-          <a:ln w="12700">
-            <a:solidFill>
-              <a:srgbClr val="6366F1"/>
-            </a:solidFill>
-            <a:prstDash val="solid"/>
-          </a:ln>
-        </p:spPr>
-      </p:sp>
-      <p:sp>
-        <p:nvSpPr>
-          <p:cNvPr id="55" name="Text 53"/>
-          <p:cNvSpPr/>
-          <p:nvPr/>
-        </p:nvSpPr>
-        <p:spPr>
-          <a:xfrm>
-            <a:off x="2542032" y="4498848"/>
-            <a:ext cx="2011680" cy="402336"/>
-          </a:xfrm>
-          <a:prstGeom prst="rect">
-            <a:avLst/>
-          </a:prstGeom>
-          <a:noFill/>
-          <a:ln/>
-        </p:spPr>
-        <p:txBody>
-          <a:bodyPr wrap="square" lIns="0" tIns="0" rIns="0" bIns="0" rtlCol="0" anchor="ctr"/>
-          <a:lstStyle/>
-          <a:p>
-            <a:pPr algn="ctr" indent="0" marL="0">
-              <a:buNone/>
-            </a:pPr>
-            <a:r>
-              <a:rPr lang="en-US" sz="1200" b="1" dirty="0">
-                <a:solidFill>
-                  <a:srgbClr val="4338CA"/>
-                </a:solidFill>
-                <a:latin typeface="Trebuchet MS" pitchFamily="34" charset="0"/>
-                <a:ea typeface="Trebuchet MS" pitchFamily="34" charset="-122"/>
-                <a:cs typeface="Trebuchet MS" pitchFamily="34" charset="-120"/>
-              </a:rPr>
-              <a:t>disjoin</a:t>
-            </a:r>
-            <a:endParaRPr lang="en-US" sz="1200" dirty="0"/>
-          </a:p>
-        </p:txBody>
-      </p:sp>
-      <p:sp>
-        <p:nvSpPr>
-          <p:cNvPr id="56" name="Shape 54"/>
-          <p:cNvSpPr/>
-          <p:nvPr/>
-        </p:nvSpPr>
-        <p:spPr>
-          <a:xfrm>
-            <a:off x="4718304" y="4498848"/>
-            <a:ext cx="2011680" cy="402336"/>
-          </a:xfrm>
-          <a:prstGeom prst="rect">
-            <a:avLst>
-              <a:gd name="adj" fmla="val 13636"/>
-            </a:avLst>
-          </a:prstGeom>
-          <a:solidFill>
-            <a:srgbClr val="EEF2FF"/>
-          </a:solidFill>
-          <a:ln w="12700">
-            <a:solidFill>
-              <a:srgbClr val="6366F1"/>
-            </a:solidFill>
-            <a:prstDash val="solid"/>
-          </a:ln>
-        </p:spPr>
-      </p:sp>
-      <p:sp>
-        <p:nvSpPr>
-          <p:cNvPr id="57" name="Text 55"/>
-          <p:cNvSpPr/>
-          <p:nvPr/>
-        </p:nvSpPr>
-        <p:spPr>
-          <a:xfrm>
-            <a:off x="4718304" y="4498848"/>
-            <a:ext cx="2011680" cy="402336"/>
-          </a:xfrm>
-          <a:prstGeom prst="rect">
-            <a:avLst/>
-          </a:prstGeom>
-          <a:noFill/>
-          <a:ln/>
-        </p:spPr>
-        <p:txBody>
-          <a:bodyPr wrap="square" lIns="0" tIns="0" rIns="0" bIns="0" rtlCol="0" anchor="ctr"/>
-          <a:lstStyle/>
-          <a:p>
-            <a:pPr algn="ctr" indent="0" marL="0">
-              <a:buNone/>
-            </a:pPr>
-            <a:r>
-              <a:rPr lang="en-US" sz="1200" b="1" dirty="0">
-                <a:solidFill>
-                  <a:srgbClr val="4338CA"/>
-                </a:solidFill>
-                <a:latin typeface="Trebuchet MS" pitchFamily="34" charset="0"/>
-                <a:ea typeface="Trebuchet MS" pitchFamily="34" charset="-122"/>
-                <a:cs typeface="Trebuchet MS" pitchFamily="34" charset="-120"/>
-              </a:rPr>
-              <a:t>conjoin</a:t>
-            </a:r>
-            <a:endParaRPr lang="en-US" sz="1200" dirty="0"/>
-          </a:p>
-        </p:txBody>
-      </p:sp>
-      <p:sp>
-        <p:nvSpPr>
-          <p:cNvPr id="58" name="Shape 56"/>
-          <p:cNvSpPr/>
-          <p:nvPr/>
-        </p:nvSpPr>
-        <p:spPr>
-          <a:xfrm>
-            <a:off x="6894576" y="4498848"/>
-            <a:ext cx="2011680" cy="402336"/>
-          </a:xfrm>
-          <a:prstGeom prst="rect">
-            <a:avLst>
-              <a:gd name="adj" fmla="val 13636"/>
-            </a:avLst>
-          </a:prstGeom>
-          <a:solidFill>
-            <a:srgbClr val="EEF2FF"/>
-          </a:solidFill>
-          <a:ln w="12700">
-            <a:solidFill>
-              <a:srgbClr val="6366F1"/>
-            </a:solidFill>
-            <a:prstDash val="solid"/>
-          </a:ln>
-        </p:spPr>
-      </p:sp>
-      <p:sp>
-        <p:nvSpPr>
-          <p:cNvPr id="59" name="Text 57"/>
-          <p:cNvSpPr/>
-          <p:nvPr/>
-        </p:nvSpPr>
-        <p:spPr>
-          <a:xfrm>
-            <a:off x="6894576" y="4498848"/>
-            <a:ext cx="2011680" cy="402336"/>
-          </a:xfrm>
-          <a:prstGeom prst="rect">
-            <a:avLst/>
-          </a:prstGeom>
-          <a:noFill/>
-          <a:ln/>
-        </p:spPr>
-        <p:txBody>
-          <a:bodyPr wrap="square" lIns="0" tIns="0" rIns="0" bIns="0" rtlCol="0" anchor="ctr"/>
-          <a:lstStyle/>
-          <a:p>
-            <a:pPr algn="ctr" indent="0" marL="0">
-              <a:buNone/>
-            </a:pPr>
-            <a:r>
-              <a:rPr lang="en-US" sz="1200" b="1" dirty="0">
-                <a:solidFill>
-                  <a:srgbClr val="4338CA"/>
-                </a:solidFill>
-                <a:latin typeface="Trebuchet MS" pitchFamily="34" charset="0"/>
-                <a:ea typeface="Trebuchet MS" pitchFamily="34" charset="-122"/>
-                <a:cs typeface="Trebuchet MS" pitchFamily="34" charset="-120"/>
-              </a:rPr>
-              <a:t>joint</a:t>
+              <a:t>joiners</a:t>
             </a:r>
             <a:endParaRPr lang="en-US" sz="1200" dirty="0"/>
           </a:p>
@@ -34830,7 +35784,7 @@
                 <a:ea typeface="Calibri" pitchFamily="34" charset="-122"/>
                 <a:cs typeface="Calibri" pitchFamily="34" charset="-120"/>
               </a:rPr>
-              <a:t>Word Labs  •  wordlabs.app  •  Root: 'join' = to connect or bring together</a:t>
+              <a:t>Word Labs  •  wordlabs.app  •  Root: 'join' = connect</a:t>
             </a:r>
             <a:endParaRPr lang="en-US" sz="800" dirty="0"/>
           </a:p>
@@ -34994,7 +35948,7 @@
                 <a:ea typeface="Calibri" pitchFamily="34" charset="-122"/>
                 <a:cs typeface="Calibri" pitchFamily="34" charset="-120"/>
               </a:rPr>
-              <a:t>The core part of a word carrying its basic meaning. For example, 'join' means 'to connect or bring together'.</a:t>
+              <a:t>The core part of a word carrying its basic meaning. For example, 'join' means 'connect'.</a:t>
             </a:r>
             <a:endParaRPr lang="en-US" sz="1350" dirty="0"/>
           </a:p>
@@ -35614,7 +36568,7 @@
                 <a:ea typeface="Calibri" pitchFamily="34" charset="-122"/>
                 <a:cs typeface="Calibri" pitchFamily="34" charset="-120"/>
               </a:rPr>
-              <a:t>Word Labs  •  wordlabs.app  •  Root: 'join' = to connect or bring together</a:t>
+              <a:t>Word Labs  •  wordlabs.app  •  Root: 'join' = connect</a:t>
             </a:r>
             <a:endParaRPr lang="en-US" sz="800" dirty="0"/>
           </a:p>
@@ -35726,7 +36680,7 @@
                 <a:ea typeface="Calibri" pitchFamily="34" charset="-122"/>
                 <a:cs typeface="Calibri" pitchFamily="34" charset="-120"/>
               </a:rPr>
-              <a:t>1.  The prefix 'dis' in 'disjoin' means to do more joining.</a:t>
+              <a:t>1.  'joins' means 'shouts loudly across a room'.</a:t>
             </a:r>
             <a:endParaRPr lang="en-US" sz="1300" dirty="0"/>
           </a:p>
@@ -35865,7 +36819,7 @@
                 <a:ea typeface="Calibri" pitchFamily="34" charset="-122"/>
                 <a:cs typeface="Calibri" pitchFamily="34" charset="-120"/>
               </a:rPr>
-              <a:t>2.  The word 'joint' contains the root 'join' and means a place where things meet.</a:t>
+              <a:t>2.  'join' means 'connect'.</a:t>
             </a:r>
             <a:endParaRPr lang="en-US" sz="1300" dirty="0"/>
           </a:p>
@@ -36004,7 +36958,7 @@
                 <a:ea typeface="Calibri" pitchFamily="34" charset="-122"/>
                 <a:cs typeface="Calibri" pitchFamily="34" charset="-120"/>
               </a:rPr>
-              <a:t>3.  The root 'join' comes from a Greek word.</a:t>
+              <a:t>3.  'join' means 'to become a member of a group, or to connect two things together'.</a:t>
             </a:r>
             <a:endParaRPr lang="en-US" sz="1300" dirty="0"/>
           </a:p>
@@ -36027,11 +36981,11 @@
             </a:avLst>
           </a:prstGeom>
           <a:solidFill>
-            <a:srgbClr val="FEE2E2"/>
-          </a:solidFill>
-          <a:ln w="12700">
-            <a:solidFill>
-              <a:srgbClr val="DC2626"/>
+            <a:srgbClr val="DCFCE7"/>
+          </a:solidFill>
+          <a:ln w="12700">
+            <a:solidFill>
+              <a:srgbClr val="16A34A"/>
             </a:solidFill>
             <a:prstDash val="solid"/>
           </a:ln>
@@ -36064,13 +37018,13 @@
             <a:r>
               <a:rPr lang="en-US" sz="1100" b="1" dirty="0">
                 <a:solidFill>
-                  <a:srgbClr val="DC2626"/>
+                  <a:srgbClr val="16A34A"/>
                 </a:solidFill>
                 <a:latin typeface="Trebuchet MS" pitchFamily="34" charset="0"/>
                 <a:ea typeface="Trebuchet MS" pitchFamily="34" charset="-122"/>
                 <a:cs typeface="Trebuchet MS" pitchFamily="34" charset="-120"/>
               </a:rPr>
-              <a:t>FALSE</a:t>
+              <a:t>TRUE</a:t>
             </a:r>
             <a:endParaRPr lang="en-US" sz="1100" dirty="0"/>
           </a:p>
@@ -36143,7 +37097,7 @@
                 <a:ea typeface="Calibri" pitchFamily="34" charset="-122"/>
                 <a:cs typeface="Calibri" pitchFamily="34" charset="-120"/>
               </a:rPr>
-              <a:t>4.  A 'joiner' is someone or something that connects things together.</a:t>
+              <a:t>4.  'join' means 'to shout loudly in anger'.</a:t>
             </a:r>
             <a:endParaRPr lang="en-US" sz="1300" dirty="0"/>
           </a:p>
@@ -36166,11 +37120,11 @@
             </a:avLst>
           </a:prstGeom>
           <a:solidFill>
-            <a:srgbClr val="DCFCE7"/>
-          </a:solidFill>
-          <a:ln w="12700">
-            <a:solidFill>
-              <a:srgbClr val="16A34A"/>
+            <a:srgbClr val="FEE2E2"/>
+          </a:solidFill>
+          <a:ln w="12700">
+            <a:solidFill>
+              <a:srgbClr val="DC2626"/>
             </a:solidFill>
             <a:prstDash val="solid"/>
           </a:ln>
@@ -36203,13 +37157,13 @@
             <a:r>
               <a:rPr lang="en-US" sz="1100" b="1" dirty="0">
                 <a:solidFill>
-                  <a:srgbClr val="16A34A"/>
+                  <a:srgbClr val="DC2626"/>
                 </a:solidFill>
                 <a:latin typeface="Trebuchet MS" pitchFamily="34" charset="0"/>
                 <a:ea typeface="Trebuchet MS" pitchFamily="34" charset="-122"/>
                 <a:cs typeface="Trebuchet MS" pitchFamily="34" charset="-120"/>
               </a:rPr>
-              <a:t>TRUE</a:t>
+              <a:t>FALSE</a:t>
             </a:r>
             <a:endParaRPr lang="en-US" sz="1100" dirty="0"/>
           </a:p>
@@ -36282,7 +37236,7 @@
                 <a:ea typeface="Calibri" pitchFamily="34" charset="-122"/>
                 <a:cs typeface="Calibri" pitchFamily="34" charset="-120"/>
               </a:rPr>
-              <a:t>5.  The word 'rejoin' means to join again after leaving.</a:t>
+              <a:t>5.  'joins' means 'becomes a member of, or connects with something'.</a:t>
             </a:r>
             <a:endParaRPr lang="en-US" sz="1300" dirty="0"/>
           </a:p>
@@ -36640,7 +37594,7 @@
                 <a:ea typeface="Calibri" pitchFamily="34" charset="-122"/>
                 <a:cs typeface="Calibri" pitchFamily="34" charset="-120"/>
               </a:rPr>
-              <a:t>Word Labs  •  wordlabs.app  •  Root: 'join' = to connect or bring together</a:t>
+              <a:t>Word Labs  •  wordlabs.app  •  Root: 'join' = connect</a:t>
             </a:r>
             <a:endParaRPr lang="en-US" sz="800" dirty="0"/>
           </a:p>
@@ -36777,7 +37731,7 @@
                 <a:ea typeface="Trebuchet MS" pitchFamily="34" charset="-122"/>
                 <a:cs typeface="Trebuchet MS" pitchFamily="34" charset="-120"/>
               </a:rPr>
-              <a:t>to connect or bring together</a:t>
+              <a:t>connect</a:t>
             </a:r>
             <a:endParaRPr lang="en-US" sz="2000" dirty="0"/>
           </a:p>
@@ -36816,7 +37770,7 @@
                 <a:ea typeface="Calibri" pitchFamily="34" charset="-122"/>
                 <a:cs typeface="Calibri" pitchFamily="34" charset="-120"/>
               </a:rPr>
-              <a:t>Origin: Latin: jungere</a:t>
+              <a:t>Origin: Core English root</a:t>
             </a:r>
             <a:endParaRPr lang="en-US" sz="1100" dirty="0"/>
           </a:p>
@@ -36987,7 +37941,7 @@
                 <a:ea typeface="Trebuchet MS" pitchFamily="34" charset="-122"/>
                 <a:cs typeface="Trebuchet MS" pitchFamily="34" charset="-120"/>
               </a:rPr>
-              <a:t>joined</a:t>
+              <a:t>joins</a:t>
             </a:r>
             <a:endParaRPr lang="en-US" sz="1300" dirty="0"/>
           </a:p>
@@ -37053,7 +38007,7 @@
                 <a:ea typeface="Trebuchet MS" pitchFamily="34" charset="-122"/>
                 <a:cs typeface="Trebuchet MS" pitchFamily="34" charset="-120"/>
               </a:rPr>
-              <a:t>joining</a:t>
+              <a:t>joined</a:t>
             </a:r>
             <a:endParaRPr lang="en-US" sz="1300" dirty="0"/>
           </a:p>
@@ -37251,73 +38205,7 @@
                 <a:ea typeface="Trebuchet MS" pitchFamily="34" charset="-122"/>
                 <a:cs typeface="Trebuchet MS" pitchFamily="34" charset="-120"/>
               </a:rPr>
-              <a:t>disjoin</a:t>
-            </a:r>
-            <a:endParaRPr lang="en-US" sz="1300" dirty="0"/>
-          </a:p>
-        </p:txBody>
-      </p:sp>
-      <p:sp>
-        <p:nvSpPr>
-          <p:cNvPr id="28" name="Shape 26"/>
-          <p:cNvSpPr/>
-          <p:nvPr/>
-        </p:nvSpPr>
-        <p:spPr>
-          <a:xfrm>
-            <a:off x="4663440" y="3401568"/>
-            <a:ext cx="2011680" cy="502920"/>
-          </a:xfrm>
-          <a:prstGeom prst="rect">
-            <a:avLst>
-              <a:gd name="adj" fmla="val 14545"/>
-            </a:avLst>
-          </a:prstGeom>
-          <a:solidFill>
-            <a:srgbClr val="EEF2FF"/>
-          </a:solidFill>
-          <a:ln w="12700">
-            <a:solidFill>
-              <a:srgbClr val="6366F1"/>
-            </a:solidFill>
-            <a:prstDash val="solid"/>
-          </a:ln>
-        </p:spPr>
-      </p:sp>
-      <p:sp>
-        <p:nvSpPr>
-          <p:cNvPr id="29" name="Text 27"/>
-          <p:cNvSpPr/>
-          <p:nvPr/>
-        </p:nvSpPr>
-        <p:spPr>
-          <a:xfrm>
-            <a:off x="4663440" y="3401568"/>
-            <a:ext cx="2011680" cy="502920"/>
-          </a:xfrm>
-          <a:prstGeom prst="rect">
-            <a:avLst/>
-          </a:prstGeom>
-          <a:noFill/>
-          <a:ln/>
-        </p:spPr>
-        <p:txBody>
-          <a:bodyPr wrap="square" lIns="0" tIns="0" rIns="0" bIns="0" rtlCol="0" anchor="ctr"/>
-          <a:lstStyle/>
-          <a:p>
-            <a:pPr algn="ctr" indent="0" marL="0">
-              <a:buNone/>
-            </a:pPr>
-            <a:r>
-              <a:rPr lang="en-US" sz="1300" b="1" dirty="0">
-                <a:solidFill>
-                  <a:srgbClr val="4338CA"/>
-                </a:solidFill>
-                <a:latin typeface="Trebuchet MS" pitchFamily="34" charset="0"/>
-                <a:ea typeface="Trebuchet MS" pitchFamily="34" charset="-122"/>
-                <a:cs typeface="Trebuchet MS" pitchFamily="34" charset="-120"/>
-              </a:rPr>
-              <a:t>conjoin</a:t>
+              <a:t>joiners</a:t>
             </a:r>
             <a:endParaRPr lang="en-US" sz="1300" dirty="0"/>
           </a:p>
@@ -37609,7 +38497,7 @@
                 <a:ea typeface="Calibri" pitchFamily="34" charset="-122"/>
                 <a:cs typeface="Calibri" pitchFamily="34" charset="-120"/>
               </a:rPr>
-              <a:t>Word Labs  •  wordlabs.app  •  Root: 'join' = to connect or bring together</a:t>
+              <a:t>Word Labs  •  wordlabs.app  •  Root: 'join' = connect</a:t>
             </a:r>
             <a:endParaRPr lang="en-US" sz="800" dirty="0"/>
           </a:p>
@@ -37910,7 +38798,7 @@
                 <a:ea typeface="Trebuchet MS" pitchFamily="34" charset="-122"/>
                 <a:cs typeface="Trebuchet MS" pitchFamily="34" charset="-120"/>
               </a:rPr>
-              <a:t>re-</a:t>
+              <a:t>ad-</a:t>
             </a:r>
             <a:endParaRPr lang="en-US" sz="1300" dirty="0"/>
           </a:p>
@@ -38038,7 +38926,7 @@
                 <a:ea typeface="Trebuchet MS" pitchFamily="34" charset="-122"/>
                 <a:cs typeface="Trebuchet MS" pitchFamily="34" charset="-120"/>
               </a:rPr>
-              <a:t>-ed</a:t>
+              <a:t>-ing</a:t>
             </a:r>
             <a:endParaRPr lang="en-US" sz="1300" dirty="0"/>
           </a:p>
@@ -38102,7 +38990,7 @@
                 <a:ea typeface="Trebuchet MS" pitchFamily="34" charset="-122"/>
                 <a:cs typeface="Trebuchet MS" pitchFamily="34" charset="-120"/>
               </a:rPr>
-              <a:t>con-</a:t>
+              <a:t>re-</a:t>
             </a:r>
             <a:endParaRPr lang="en-US" sz="1300" dirty="0"/>
           </a:p>
@@ -38191,7 +39079,7 @@
                 <a:ea typeface="Trebuchet MS" pitchFamily="34" charset="-122"/>
                 <a:cs typeface="Trebuchet MS" pitchFamily="34" charset="-120"/>
               </a:rPr>
-              <a:t>-ing</a:t>
+              <a:t>-ed</a:t>
             </a:r>
             <a:endParaRPr lang="en-US" sz="1300" dirty="0"/>
           </a:p>
@@ -38212,7 +39100,7 @@
             <a:avLst/>
           </a:prstGeom>
           <a:solidFill>
-            <a:srgbClr val="DDD6FE"/>
+            <a:srgbClr val="F8FAFC"/>
           </a:solidFill>
           <a:ln w="12700">
             <a:solidFill>
@@ -38224,18 +39112,68 @@
       </p:sp>
       <p:sp>
         <p:nvSpPr>
-          <p:cNvPr id="29" name="Text 27"/>
-          <p:cNvSpPr/>
-          <p:nvPr/>
-        </p:nvSpPr>
-        <p:spPr>
-          <a:xfrm>
-            <a:off x="640080" y="2670048"/>
+          <p:cNvPr id="29" name="Shape 27"/>
+          <p:cNvSpPr/>
+          <p:nvPr/>
+        </p:nvSpPr>
+        <p:spPr>
+          <a:xfrm>
+            <a:off x="3291840" y="2670048"/>
+            <a:ext cx="1645920" cy="420624"/>
+          </a:xfrm>
+          <a:prstGeom prst="rect">
+            <a:avLst/>
+          </a:prstGeom>
+          <a:solidFill>
+            <a:srgbClr val="F8FAFC"/>
+          </a:solidFill>
+          <a:ln w="12700">
+            <a:solidFill>
+              <a:srgbClr val="E5E7EB"/>
+            </a:solidFill>
+            <a:prstDash val="solid"/>
+          </a:ln>
+        </p:spPr>
+      </p:sp>
+      <p:sp>
+        <p:nvSpPr>
+          <p:cNvPr id="30" name="Shape 28"/>
+          <p:cNvSpPr/>
+          <p:nvPr/>
+        </p:nvSpPr>
+        <p:spPr>
+          <a:xfrm>
+            <a:off x="5943600" y="2670048"/>
             <a:ext cx="1463040" cy="420624"/>
           </a:xfrm>
           <a:prstGeom prst="rect">
             <a:avLst/>
           </a:prstGeom>
+          <a:solidFill>
+            <a:srgbClr val="FCE7F3"/>
+          </a:solidFill>
+          <a:ln w="12700">
+            <a:solidFill>
+              <a:srgbClr val="E5E7EB"/>
+            </a:solidFill>
+            <a:prstDash val="solid"/>
+          </a:ln>
+        </p:spPr>
+      </p:sp>
+      <p:sp>
+        <p:nvSpPr>
+          <p:cNvPr id="31" name="Text 29"/>
+          <p:cNvSpPr/>
+          <p:nvPr/>
+        </p:nvSpPr>
+        <p:spPr>
+          <a:xfrm>
+            <a:off x="5943600" y="2670048"/>
+            <a:ext cx="1463040" cy="420624"/>
+          </a:xfrm>
+          <a:prstGeom prst="rect">
+            <a:avLst/>
+          </a:prstGeom>
           <a:noFill/>
           <a:ln/>
         </p:spPr>
@@ -38249,13 +39187,13 @@
             <a:r>
               <a:rPr lang="en-US" sz="1300" b="1" dirty="0">
                 <a:solidFill>
-                  <a:srgbClr val="4C1D95"/>
+                  <a:srgbClr val="9D174D"/>
                 </a:solidFill>
                 <a:latin typeface="Trebuchet MS" pitchFamily="34" charset="0"/>
                 <a:ea typeface="Trebuchet MS" pitchFamily="34" charset="-122"/>
                 <a:cs typeface="Trebuchet MS" pitchFamily="34" charset="-120"/>
               </a:rPr>
-              <a:t>dis-</a:t>
+              <a:t>-er</a:t>
             </a:r>
             <a:endParaRPr lang="en-US" sz="1300" dirty="0"/>
           </a:p>
@@ -38263,20 +39201,45 @@
       </p:sp>
       <p:sp>
         <p:nvSpPr>
-          <p:cNvPr id="30" name="Shape 28"/>
-          <p:cNvSpPr/>
-          <p:nvPr/>
-        </p:nvSpPr>
-        <p:spPr>
-          <a:xfrm>
-            <a:off x="3291840" y="2670048"/>
+          <p:cNvPr id="32" name="Shape 30"/>
+          <p:cNvSpPr/>
+          <p:nvPr/>
+        </p:nvSpPr>
+        <p:spPr>
+          <a:xfrm>
+            <a:off x="640080" y="3127248"/>
+            <a:ext cx="1463040" cy="420624"/>
+          </a:xfrm>
+          <a:prstGeom prst="rect">
+            <a:avLst/>
+          </a:prstGeom>
+          <a:solidFill>
+            <a:srgbClr val="F1F5F9"/>
+          </a:solidFill>
+          <a:ln w="12700">
+            <a:solidFill>
+              <a:srgbClr val="E5E7EB"/>
+            </a:solidFill>
+            <a:prstDash val="solid"/>
+          </a:ln>
+        </p:spPr>
+      </p:sp>
+      <p:sp>
+        <p:nvSpPr>
+          <p:cNvPr id="33" name="Shape 31"/>
+          <p:cNvSpPr/>
+          <p:nvPr/>
+        </p:nvSpPr>
+        <p:spPr>
+          <a:xfrm>
+            <a:off x="3291840" y="3127248"/>
             <a:ext cx="1645920" cy="420624"/>
           </a:xfrm>
           <a:prstGeom prst="rect">
             <a:avLst/>
           </a:prstGeom>
           <a:solidFill>
-            <a:srgbClr val="F8FAFC"/>
+            <a:srgbClr val="F1F5F9"/>
           </a:solidFill>
           <a:ln w="12700">
             <a:solidFill>
@@ -38288,13 +39251,13 @@
       </p:sp>
       <p:sp>
         <p:nvSpPr>
-          <p:cNvPr id="31" name="Shape 29"/>
-          <p:cNvSpPr/>
-          <p:nvPr/>
-        </p:nvSpPr>
-        <p:spPr>
-          <a:xfrm>
-            <a:off x="5943600" y="2670048"/>
+          <p:cNvPr id="34" name="Shape 32"/>
+          <p:cNvSpPr/>
+          <p:nvPr/>
+        </p:nvSpPr>
+        <p:spPr>
+          <a:xfrm>
+            <a:off x="5943600" y="3127248"/>
             <a:ext cx="1463040" cy="420624"/>
           </a:xfrm>
           <a:prstGeom prst="rect">
@@ -38313,13 +39276,13 @@
       </p:sp>
       <p:sp>
         <p:nvSpPr>
-          <p:cNvPr id="32" name="Text 30"/>
-          <p:cNvSpPr/>
-          <p:nvPr/>
-        </p:nvSpPr>
-        <p:spPr>
-          <a:xfrm>
-            <a:off x="5943600" y="2670048"/>
+          <p:cNvPr id="35" name="Text 33"/>
+          <p:cNvSpPr/>
+          <p:nvPr/>
+        </p:nvSpPr>
+        <p:spPr>
+          <a:xfrm>
+            <a:off x="5943600" y="3127248"/>
             <a:ext cx="1463040" cy="420624"/>
           </a:xfrm>
           <a:prstGeom prst="rect">
@@ -38344,7 +39307,7 @@
                 <a:ea typeface="Trebuchet MS" pitchFamily="34" charset="-122"/>
                 <a:cs typeface="Trebuchet MS" pitchFamily="34" charset="-120"/>
               </a:rPr>
-              <a:t>-er</a:t>
+              <a:t>-s</a:t>
             </a:r>
             <a:endParaRPr lang="en-US" sz="1300" dirty="0"/>
           </a:p>
@@ -38352,319 +39315,13 @@
       </p:sp>
       <p:sp>
         <p:nvSpPr>
-          <p:cNvPr id="33" name="Shape 31"/>
-          <p:cNvSpPr/>
-          <p:nvPr/>
-        </p:nvSpPr>
-        <p:spPr>
-          <a:xfrm>
-            <a:off x="640080" y="3127248"/>
-            <a:ext cx="1463040" cy="420624"/>
-          </a:xfrm>
-          <a:prstGeom prst="rect">
-            <a:avLst/>
-          </a:prstGeom>
-          <a:solidFill>
-            <a:srgbClr val="DDD6FE"/>
-          </a:solidFill>
-          <a:ln w="12700">
-            <a:solidFill>
-              <a:srgbClr val="E5E7EB"/>
-            </a:solidFill>
-            <a:prstDash val="solid"/>
-          </a:ln>
-        </p:spPr>
-      </p:sp>
-      <p:sp>
-        <p:nvSpPr>
-          <p:cNvPr id="34" name="Text 32"/>
-          <p:cNvSpPr/>
-          <p:nvPr/>
-        </p:nvSpPr>
-        <p:spPr>
-          <a:xfrm>
-            <a:off x="640080" y="3127248"/>
-            <a:ext cx="1463040" cy="420624"/>
-          </a:xfrm>
-          <a:prstGeom prst="rect">
-            <a:avLst/>
-          </a:prstGeom>
-          <a:noFill/>
-          <a:ln/>
-        </p:spPr>
-        <p:txBody>
-          <a:bodyPr wrap="square" lIns="0" tIns="0" rIns="0" bIns="0" rtlCol="0" anchor="ctr"/>
-          <a:lstStyle/>
-          <a:p>
-            <a:pPr algn="ctr" indent="0" marL="0">
-              <a:buNone/>
-            </a:pPr>
-            <a:r>
-              <a:rPr lang="en-US" sz="1300" b="1" dirty="0">
-                <a:solidFill>
-                  <a:srgbClr val="4C1D95"/>
-                </a:solidFill>
-                <a:latin typeface="Trebuchet MS" pitchFamily="34" charset="0"/>
-                <a:ea typeface="Trebuchet MS" pitchFamily="34" charset="-122"/>
-                <a:cs typeface="Trebuchet MS" pitchFamily="34" charset="-120"/>
-              </a:rPr>
-              <a:t>en-</a:t>
-            </a:r>
-            <a:endParaRPr lang="en-US" sz="1300" dirty="0"/>
-          </a:p>
-        </p:txBody>
-      </p:sp>
-      <p:sp>
-        <p:nvSpPr>
-          <p:cNvPr id="35" name="Shape 33"/>
-          <p:cNvSpPr/>
-          <p:nvPr/>
-        </p:nvSpPr>
-        <p:spPr>
-          <a:xfrm>
-            <a:off x="3291840" y="3127248"/>
-            <a:ext cx="1645920" cy="420624"/>
-          </a:xfrm>
-          <a:prstGeom prst="rect">
-            <a:avLst/>
-          </a:prstGeom>
-          <a:solidFill>
-            <a:srgbClr val="F1F5F9"/>
-          </a:solidFill>
-          <a:ln w="12700">
-            <a:solidFill>
-              <a:srgbClr val="E5E7EB"/>
-            </a:solidFill>
-            <a:prstDash val="solid"/>
-          </a:ln>
-        </p:spPr>
-      </p:sp>
-      <p:sp>
-        <p:nvSpPr>
-          <p:cNvPr id="36" name="Shape 34"/>
-          <p:cNvSpPr/>
-          <p:nvPr/>
-        </p:nvSpPr>
-        <p:spPr>
-          <a:xfrm>
-            <a:off x="5943600" y="3127248"/>
-            <a:ext cx="1463040" cy="420624"/>
-          </a:xfrm>
-          <a:prstGeom prst="rect">
-            <a:avLst/>
-          </a:prstGeom>
-          <a:solidFill>
-            <a:srgbClr val="FCE7F3"/>
-          </a:solidFill>
-          <a:ln w="12700">
-            <a:solidFill>
-              <a:srgbClr val="E5E7EB"/>
-            </a:solidFill>
-            <a:prstDash val="solid"/>
-          </a:ln>
-        </p:spPr>
-      </p:sp>
-      <p:sp>
-        <p:nvSpPr>
-          <p:cNvPr id="37" name="Text 35"/>
-          <p:cNvSpPr/>
-          <p:nvPr/>
-        </p:nvSpPr>
-        <p:spPr>
-          <a:xfrm>
-            <a:off x="5943600" y="3127248"/>
-            <a:ext cx="1463040" cy="420624"/>
-          </a:xfrm>
-          <a:prstGeom prst="rect">
-            <a:avLst/>
-          </a:prstGeom>
-          <a:noFill/>
-          <a:ln/>
-        </p:spPr>
-        <p:txBody>
-          <a:bodyPr wrap="square" lIns="0" tIns="0" rIns="0" bIns="0" rtlCol="0" anchor="ctr"/>
-          <a:lstStyle/>
-          <a:p>
-            <a:pPr algn="ctr" indent="0" marL="0">
-              <a:buNone/>
-            </a:pPr>
-            <a:r>
-              <a:rPr lang="en-US" sz="1300" b="1" dirty="0">
-                <a:solidFill>
-                  <a:srgbClr val="9D174D"/>
-                </a:solidFill>
-                <a:latin typeface="Trebuchet MS" pitchFamily="34" charset="0"/>
-                <a:ea typeface="Trebuchet MS" pitchFamily="34" charset="-122"/>
-                <a:cs typeface="Trebuchet MS" pitchFamily="34" charset="-120"/>
-              </a:rPr>
-              <a:t>-t</a:t>
-            </a:r>
-            <a:endParaRPr lang="en-US" sz="1300" dirty="0"/>
-          </a:p>
-        </p:txBody>
-      </p:sp>
-      <p:sp>
-        <p:nvSpPr>
-          <p:cNvPr id="38" name="Shape 36"/>
-          <p:cNvSpPr/>
-          <p:nvPr/>
-        </p:nvSpPr>
-        <p:spPr>
-          <a:xfrm>
-            <a:off x="640080" y="3584448"/>
-            <a:ext cx="1463040" cy="420624"/>
-          </a:xfrm>
-          <a:prstGeom prst="rect">
-            <a:avLst/>
-          </a:prstGeom>
-          <a:solidFill>
-            <a:srgbClr val="DDD6FE"/>
-          </a:solidFill>
-          <a:ln w="12700">
-            <a:solidFill>
-              <a:srgbClr val="E5E7EB"/>
-            </a:solidFill>
-            <a:prstDash val="solid"/>
-          </a:ln>
-        </p:spPr>
-      </p:sp>
-      <p:sp>
-        <p:nvSpPr>
-          <p:cNvPr id="39" name="Text 37"/>
-          <p:cNvSpPr/>
-          <p:nvPr/>
-        </p:nvSpPr>
-        <p:spPr>
-          <a:xfrm>
-            <a:off x="640080" y="3584448"/>
-            <a:ext cx="1463040" cy="420624"/>
-          </a:xfrm>
-          <a:prstGeom prst="rect">
-            <a:avLst/>
-          </a:prstGeom>
-          <a:noFill/>
-          <a:ln/>
-        </p:spPr>
-        <p:txBody>
-          <a:bodyPr wrap="square" lIns="0" tIns="0" rIns="0" bIns="0" rtlCol="0" anchor="ctr"/>
-          <a:lstStyle/>
-          <a:p>
-            <a:pPr algn="ctr" indent="0" marL="0">
-              <a:buNone/>
-            </a:pPr>
-            <a:r>
-              <a:rPr lang="en-US" sz="1300" b="1" dirty="0">
-                <a:solidFill>
-                  <a:srgbClr val="4C1D95"/>
-                </a:solidFill>
-                <a:latin typeface="Trebuchet MS" pitchFamily="34" charset="0"/>
-                <a:ea typeface="Trebuchet MS" pitchFamily="34" charset="-122"/>
-                <a:cs typeface="Trebuchet MS" pitchFamily="34" charset="-120"/>
-              </a:rPr>
-              <a:t>ad-</a:t>
-            </a:r>
-            <a:endParaRPr lang="en-US" sz="1300" dirty="0"/>
-          </a:p>
-        </p:txBody>
-      </p:sp>
-      <p:sp>
-        <p:nvSpPr>
-          <p:cNvPr id="40" name="Shape 38"/>
-          <p:cNvSpPr/>
-          <p:nvPr/>
-        </p:nvSpPr>
-        <p:spPr>
-          <a:xfrm>
-            <a:off x="3291840" y="3584448"/>
-            <a:ext cx="1645920" cy="420624"/>
-          </a:xfrm>
-          <a:prstGeom prst="rect">
-            <a:avLst/>
-          </a:prstGeom>
-          <a:solidFill>
-            <a:srgbClr val="F8FAFC"/>
-          </a:solidFill>
-          <a:ln w="12700">
-            <a:solidFill>
-              <a:srgbClr val="E5E7EB"/>
-            </a:solidFill>
-            <a:prstDash val="solid"/>
-          </a:ln>
-        </p:spPr>
-      </p:sp>
-      <p:sp>
-        <p:nvSpPr>
-          <p:cNvPr id="41" name="Shape 39"/>
-          <p:cNvSpPr/>
-          <p:nvPr/>
-        </p:nvSpPr>
-        <p:spPr>
-          <a:xfrm>
-            <a:off x="5943600" y="3584448"/>
-            <a:ext cx="1463040" cy="420624"/>
-          </a:xfrm>
-          <a:prstGeom prst="rect">
-            <a:avLst/>
-          </a:prstGeom>
-          <a:solidFill>
-            <a:srgbClr val="FCE7F3"/>
-          </a:solidFill>
-          <a:ln w="12700">
-            <a:solidFill>
-              <a:srgbClr val="E5E7EB"/>
-            </a:solidFill>
-            <a:prstDash val="solid"/>
-          </a:ln>
-        </p:spPr>
-      </p:sp>
-      <p:sp>
-        <p:nvSpPr>
-          <p:cNvPr id="42" name="Text 40"/>
-          <p:cNvSpPr/>
-          <p:nvPr/>
-        </p:nvSpPr>
-        <p:spPr>
-          <a:xfrm>
-            <a:off x="5943600" y="3584448"/>
-            <a:ext cx="1463040" cy="420624"/>
-          </a:xfrm>
-          <a:prstGeom prst="rect">
-            <a:avLst/>
-          </a:prstGeom>
-          <a:noFill/>
-          <a:ln/>
-        </p:spPr>
-        <p:txBody>
-          <a:bodyPr wrap="square" lIns="0" tIns="0" rIns="0" bIns="0" rtlCol="0" anchor="ctr"/>
-          <a:lstStyle/>
-          <a:p>
-            <a:pPr algn="ctr" indent="0" marL="0">
-              <a:buNone/>
-            </a:pPr>
-            <a:r>
-              <a:rPr lang="en-US" sz="1300" b="1" dirty="0">
-                <a:solidFill>
-                  <a:srgbClr val="9D174D"/>
-                </a:solidFill>
-                <a:latin typeface="Trebuchet MS" pitchFamily="34" charset="0"/>
-                <a:ea typeface="Trebuchet MS" pitchFamily="34" charset="-122"/>
-                <a:cs typeface="Trebuchet MS" pitchFamily="34" charset="-120"/>
-              </a:rPr>
-              <a:t>-s</a:t>
-            </a:r>
-            <a:endParaRPr lang="en-US" sz="1300" dirty="0"/>
-          </a:p>
-        </p:txBody>
-      </p:sp>
-      <p:sp>
-        <p:nvSpPr>
-          <p:cNvPr id="43" name="Text 41"/>
-          <p:cNvSpPr/>
-          <p:nvPr/>
-        </p:nvSpPr>
-        <p:spPr>
-          <a:xfrm>
-            <a:off x="365760" y="4178808"/>
+          <p:cNvPr id="36" name="Text 34"/>
+          <p:cNvSpPr/>
+          <p:nvPr/>
+        </p:nvSpPr>
+        <p:spPr>
+          <a:xfrm>
+            <a:off x="365760" y="3721608"/>
             <a:ext cx="1097280" cy="420624"/>
           </a:xfrm>
           <a:prstGeom prst="rect">
@@ -38697,13 +39354,13 @@
       </p:sp>
       <p:sp>
         <p:nvSpPr>
-          <p:cNvPr id="44" name="Shape 42"/>
-          <p:cNvSpPr/>
-          <p:nvPr/>
-        </p:nvSpPr>
-        <p:spPr>
-          <a:xfrm>
-            <a:off x="1508760" y="4178808"/>
+          <p:cNvPr id="37" name="Shape 35"/>
+          <p:cNvSpPr/>
+          <p:nvPr/>
+        </p:nvSpPr>
+        <p:spPr>
+          <a:xfrm>
+            <a:off x="1508760" y="3721608"/>
             <a:ext cx="822960" cy="420624"/>
           </a:xfrm>
           <a:prstGeom prst="rect">
@@ -38731,13 +39388,13 @@
       </p:sp>
       <p:sp>
         <p:nvSpPr>
-          <p:cNvPr id="45" name="Text 43"/>
-          <p:cNvSpPr/>
-          <p:nvPr/>
-        </p:nvSpPr>
-        <p:spPr>
-          <a:xfrm>
-            <a:off x="1508760" y="4178808"/>
+          <p:cNvPr id="38" name="Text 36"/>
+          <p:cNvSpPr/>
+          <p:nvPr/>
+        </p:nvSpPr>
+        <p:spPr>
+          <a:xfrm>
+            <a:off x="1508760" y="3721608"/>
             <a:ext cx="822960" cy="420624"/>
           </a:xfrm>
           <a:prstGeom prst="rect">
@@ -38762,7 +39419,7 @@
                 <a:ea typeface="Trebuchet MS" pitchFamily="34" charset="-122"/>
                 <a:cs typeface="Trebuchet MS" pitchFamily="34" charset="-120"/>
               </a:rPr>
-              <a:t>re-</a:t>
+              <a:t>ad-</a:t>
             </a:r>
             <a:endParaRPr lang="en-US" sz="1300" dirty="0"/>
           </a:p>
@@ -38770,13 +39427,13 @@
       </p:sp>
       <p:sp>
         <p:nvSpPr>
-          <p:cNvPr id="46" name="Text 44"/>
-          <p:cNvSpPr/>
-          <p:nvPr/>
-        </p:nvSpPr>
-        <p:spPr>
-          <a:xfrm>
-            <a:off x="2359152" y="4178808"/>
+          <p:cNvPr id="39" name="Text 37"/>
+          <p:cNvSpPr/>
+          <p:nvPr/>
+        </p:nvSpPr>
+        <p:spPr>
+          <a:xfrm>
+            <a:off x="2359152" y="3721608"/>
             <a:ext cx="320040" cy="420624"/>
           </a:xfrm>
           <a:prstGeom prst="rect">
@@ -38809,13 +39466,13 @@
       </p:sp>
       <p:sp>
         <p:nvSpPr>
-          <p:cNvPr id="47" name="Shape 45"/>
-          <p:cNvSpPr/>
-          <p:nvPr/>
-        </p:nvSpPr>
-        <p:spPr>
-          <a:xfrm>
-            <a:off x="2706624" y="4178808"/>
+          <p:cNvPr id="40" name="Shape 38"/>
+          <p:cNvSpPr/>
+          <p:nvPr/>
+        </p:nvSpPr>
+        <p:spPr>
+          <a:xfrm>
+            <a:off x="2706624" y="3721608"/>
             <a:ext cx="1243584" cy="420624"/>
           </a:xfrm>
           <a:prstGeom prst="rect">
@@ -38843,13 +39500,13 @@
       </p:sp>
       <p:sp>
         <p:nvSpPr>
-          <p:cNvPr id="48" name="Text 46"/>
-          <p:cNvSpPr/>
-          <p:nvPr/>
-        </p:nvSpPr>
-        <p:spPr>
-          <a:xfrm>
-            <a:off x="2706624" y="4178808"/>
+          <p:cNvPr id="41" name="Text 39"/>
+          <p:cNvSpPr/>
+          <p:nvPr/>
+        </p:nvSpPr>
+        <p:spPr>
+          <a:xfrm>
+            <a:off x="2706624" y="3721608"/>
             <a:ext cx="1243584" cy="420624"/>
           </a:xfrm>
           <a:prstGeom prst="rect">
@@ -38882,13 +39539,13 @@
       </p:sp>
       <p:sp>
         <p:nvSpPr>
-          <p:cNvPr id="49" name="Text 47"/>
-          <p:cNvSpPr/>
-          <p:nvPr/>
-        </p:nvSpPr>
-        <p:spPr>
-          <a:xfrm>
-            <a:off x="3977640" y="4178808"/>
+          <p:cNvPr id="42" name="Text 40"/>
+          <p:cNvSpPr/>
+          <p:nvPr/>
+        </p:nvSpPr>
+        <p:spPr>
+          <a:xfrm>
+            <a:off x="3977640" y="3721608"/>
             <a:ext cx="320040" cy="420624"/>
           </a:xfrm>
           <a:prstGeom prst="rect">
@@ -38921,14 +39578,14 @@
       </p:sp>
       <p:sp>
         <p:nvSpPr>
-          <p:cNvPr id="50" name="Shape 48"/>
-          <p:cNvSpPr/>
-          <p:nvPr/>
-        </p:nvSpPr>
-        <p:spPr>
-          <a:xfrm>
-            <a:off x="4325112" y="4178808"/>
-            <a:ext cx="822960" cy="420624"/>
+          <p:cNvPr id="43" name="Shape 41"/>
+          <p:cNvSpPr/>
+          <p:nvPr/>
+        </p:nvSpPr>
+        <p:spPr>
+          <a:xfrm>
+            <a:off x="4325112" y="3721608"/>
+            <a:ext cx="950976" cy="420624"/>
           </a:xfrm>
           <a:prstGeom prst="rect">
             <a:avLst>
@@ -38955,14 +39612,14 @@
       </p:sp>
       <p:sp>
         <p:nvSpPr>
-          <p:cNvPr id="51" name="Text 49"/>
-          <p:cNvSpPr/>
-          <p:nvPr/>
-        </p:nvSpPr>
-        <p:spPr>
-          <a:xfrm>
-            <a:off x="4325112" y="4178808"/>
-            <a:ext cx="822960" cy="420624"/>
+          <p:cNvPr id="44" name="Text 42"/>
+          <p:cNvSpPr/>
+          <p:nvPr/>
+        </p:nvSpPr>
+        <p:spPr>
+          <a:xfrm>
+            <a:off x="4325112" y="3721608"/>
+            <a:ext cx="950976" cy="420624"/>
           </a:xfrm>
           <a:prstGeom prst="rect">
             <a:avLst/>
@@ -38986,7 +39643,7 @@
                 <a:ea typeface="Trebuchet MS" pitchFamily="34" charset="-122"/>
                 <a:cs typeface="Trebuchet MS" pitchFamily="34" charset="-120"/>
               </a:rPr>
-              <a:t>-ed</a:t>
+              <a:t>-ing</a:t>
             </a:r>
             <a:endParaRPr lang="en-US" sz="1300" dirty="0"/>
           </a:p>
@@ -38994,13 +39651,13 @@
       </p:sp>
       <p:sp>
         <p:nvSpPr>
-          <p:cNvPr id="52" name="Text 50"/>
-          <p:cNvSpPr/>
-          <p:nvPr/>
-        </p:nvSpPr>
-        <p:spPr>
-          <a:xfrm>
-            <a:off x="5221224" y="4178808"/>
+          <p:cNvPr id="45" name="Text 43"/>
+          <p:cNvSpPr/>
+          <p:nvPr/>
+        </p:nvSpPr>
+        <p:spPr>
+          <a:xfrm>
+            <a:off x="5349240" y="3721608"/>
             <a:ext cx="365760" cy="420624"/>
           </a:xfrm>
           <a:prstGeom prst="rect">
@@ -39033,13 +39690,13 @@
       </p:sp>
       <p:sp>
         <p:nvSpPr>
-          <p:cNvPr id="53" name="Shape 51"/>
-          <p:cNvSpPr/>
-          <p:nvPr/>
-        </p:nvSpPr>
-        <p:spPr>
-          <a:xfrm>
-            <a:off x="5632704" y="4178808"/>
+          <p:cNvPr id="46" name="Shape 44"/>
+          <p:cNvSpPr/>
+          <p:nvPr/>
+        </p:nvSpPr>
+        <p:spPr>
+          <a:xfrm>
+            <a:off x="5760720" y="3721608"/>
             <a:ext cx="2194560" cy="420624"/>
           </a:xfrm>
           <a:prstGeom prst="rect">
@@ -39060,13 +39717,13 @@
       </p:sp>
       <p:sp>
         <p:nvSpPr>
-          <p:cNvPr id="54" name="Text 52"/>
-          <p:cNvSpPr/>
-          <p:nvPr/>
-        </p:nvSpPr>
-        <p:spPr>
-          <a:xfrm>
-            <a:off x="5632704" y="4178808"/>
+          <p:cNvPr id="47" name="Text 45"/>
+          <p:cNvSpPr/>
+          <p:nvPr/>
+        </p:nvSpPr>
+        <p:spPr>
+          <a:xfrm>
+            <a:off x="5760720" y="3721608"/>
             <a:ext cx="2194560" cy="420624"/>
           </a:xfrm>
           <a:prstGeom prst="rect">
@@ -39383,7 +40040,7 @@
                 <a:ea typeface="Calibri" pitchFamily="34" charset="-122"/>
                 <a:cs typeface="Calibri" pitchFamily="34" charset="-120"/>
               </a:rPr>
-              <a:t>Word Labs  •  wordlabs.app  •  Root: 'join' = to connect or bring together</a:t>
+              <a:t>Word Labs  •  wordlabs.app  •  Root: 'join' = connect</a:t>
             </a:r>
             <a:endParaRPr lang="en-US" sz="800" dirty="0"/>
           </a:p>
@@ -39561,7 +40218,7 @@
                 <a:ea typeface="Calibri" pitchFamily="34" charset="-122"/>
                 <a:cs typeface="Calibri" pitchFamily="34" charset="-120"/>
               </a:rPr>
-              <a:t>The act of connecting or coming together with others.</a:t>
+              <a:t>became a member of, or connected together</a:t>
             </a:r>
             <a:endParaRPr lang="en-US" sz="1200" dirty="0"/>
           </a:p>
@@ -39634,7 +40291,7 @@
                 <a:ea typeface="Trebuchet MS" pitchFamily="34" charset="-122"/>
                 <a:cs typeface="Trebuchet MS" pitchFamily="34" charset="-120"/>
               </a:rPr>
-              <a:t>joined</a:t>
+              <a:t>joins</a:t>
             </a:r>
             <a:endParaRPr lang="en-US" sz="1200" dirty="0"/>
           </a:p>
@@ -39700,7 +40357,7 @@
                 <a:ea typeface="Calibri" pitchFamily="34" charset="-122"/>
                 <a:cs typeface="Calibri" pitchFamily="34" charset="-120"/>
               </a:rPr>
-              <a:t>To separate or disconnect things that were joined together.</a:t>
+              <a:t>people who make or join things together, especially in woodwork</a:t>
             </a:r>
             <a:endParaRPr lang="en-US" sz="1200" dirty="0"/>
           </a:p>
@@ -39773,7 +40430,7 @@
                 <a:ea typeface="Trebuchet MS" pitchFamily="34" charset="-122"/>
                 <a:cs typeface="Trebuchet MS" pitchFamily="34" charset="-120"/>
               </a:rPr>
-              <a:t>joining</a:t>
+              <a:t>joined</a:t>
             </a:r>
             <a:endParaRPr lang="en-US" sz="1200" dirty="0"/>
           </a:p>
@@ -39839,7 +40496,7 @@
                 <a:ea typeface="Calibri" pitchFamily="34" charset="-122"/>
                 <a:cs typeface="Calibri" pitchFamily="34" charset="-120"/>
               </a:rPr>
-              <a:t>To connect two or more things or people together.</a:t>
+              <a:t>to become a member of a group, or to connect two things together</a:t>
             </a:r>
             <a:endParaRPr lang="en-US" sz="1200" dirty="0"/>
           </a:p>
@@ -39978,7 +40635,7 @@
                 <a:ea typeface="Calibri" pitchFamily="34" charset="-122"/>
                 <a:cs typeface="Calibri" pitchFamily="34" charset="-120"/>
               </a:rPr>
-              <a:t>To join two things together to make one combined thing.</a:t>
+              <a:t>becomes a member of, or connects with something</a:t>
             </a:r>
             <a:endParaRPr lang="en-US" sz="1200" dirty="0"/>
           </a:p>
@@ -40117,7 +40774,7 @@
                 <a:ea typeface="Calibri" pitchFamily="34" charset="-122"/>
                 <a:cs typeface="Calibri" pitchFamily="34" charset="-120"/>
               </a:rPr>
-              <a:t>To go back and connect with a group or path again.</a:t>
+              <a:t>to join something again after leaving it</a:t>
             </a:r>
             <a:endParaRPr lang="en-US" sz="1200" dirty="0"/>
           </a:p>
@@ -40190,7 +40847,7 @@
                 <a:ea typeface="Trebuchet MS" pitchFamily="34" charset="-122"/>
                 <a:cs typeface="Trebuchet MS" pitchFamily="34" charset="-120"/>
               </a:rPr>
-              <a:t>disjoin</a:t>
+              <a:t>joiners</a:t>
             </a:r>
             <a:endParaRPr lang="en-US" sz="1200" dirty="0"/>
           </a:p>
@@ -40256,146 +40913,7 @@
                 <a:ea typeface="Calibri" pitchFamily="34" charset="-122"/>
                 <a:cs typeface="Calibri" pitchFamily="34" charset="-120"/>
               </a:rPr>
-              <a:t>A person who joins things together, or someone who likes to join groups.</a:t>
-            </a:r>
-            <a:endParaRPr lang="en-US" sz="1200" dirty="0"/>
-          </a:p>
-        </p:txBody>
-      </p:sp>
-      <p:sp>
-        <p:nvSpPr>
-          <p:cNvPr id="35" name="Shape 33"/>
-          <p:cNvSpPr/>
-          <p:nvPr/>
-        </p:nvSpPr>
-        <p:spPr>
-          <a:xfrm>
-            <a:off x="365760" y="4370832"/>
-            <a:ext cx="2011680" cy="457200"/>
-          </a:xfrm>
-          <a:prstGeom prst="rect">
-            <a:avLst>
-              <a:gd name="adj" fmla="val 12000"/>
-            </a:avLst>
-          </a:prstGeom>
-          <a:solidFill>
-            <a:srgbClr val="EEF2FF"/>
-          </a:solidFill>
-          <a:ln w="12700">
-            <a:solidFill>
-              <a:srgbClr val="6366F1"/>
-            </a:solidFill>
-            <a:prstDash val="solid"/>
-          </a:ln>
-          <a:effectLst>
-            <a:outerShdw sx="100000" sy="100000" kx="0" ky="0" algn="bl" rotWithShape="0" blurRad="101600" dist="38100" dir="8100000">
-              <a:srgbClr val="000000">
-                <a:alpha val="12000"/>
-              </a:srgbClr>
-            </a:outerShdw>
-          </a:effectLst>
-        </p:spPr>
-      </p:sp>
-      <p:sp>
-        <p:nvSpPr>
-          <p:cNvPr id="36" name="Text 34"/>
-          <p:cNvSpPr/>
-          <p:nvPr/>
-        </p:nvSpPr>
-        <p:spPr>
-          <a:xfrm>
-            <a:off x="365760" y="4370832"/>
-            <a:ext cx="2011680" cy="457200"/>
-          </a:xfrm>
-          <a:prstGeom prst="rect">
-            <a:avLst/>
-          </a:prstGeom>
-          <a:noFill/>
-          <a:ln/>
-        </p:spPr>
-        <p:txBody>
-          <a:bodyPr wrap="square" lIns="0" tIns="0" rIns="0" bIns="0" rtlCol="0" anchor="ctr"/>
-          <a:lstStyle/>
-          <a:p>
-            <a:pPr algn="ctr" indent="0" marL="0">
-              <a:buNone/>
-            </a:pPr>
-            <a:r>
-              <a:rPr lang="en-US" sz="1200" b="1" dirty="0">
-                <a:solidFill>
-                  <a:srgbClr val="4338CA"/>
-                </a:solidFill>
-                <a:latin typeface="Trebuchet MS" pitchFamily="34" charset="0"/>
-                <a:ea typeface="Trebuchet MS" pitchFamily="34" charset="-122"/>
-                <a:cs typeface="Trebuchet MS" pitchFamily="34" charset="-120"/>
-              </a:rPr>
-              <a:t>conjoin</a:t>
-            </a:r>
-            <a:endParaRPr lang="en-US" sz="1200" dirty="0"/>
-          </a:p>
-        </p:txBody>
-      </p:sp>
-      <p:sp>
-        <p:nvSpPr>
-          <p:cNvPr id="37" name="Shape 35"/>
-          <p:cNvSpPr/>
-          <p:nvPr/>
-        </p:nvSpPr>
-        <p:spPr>
-          <a:xfrm>
-            <a:off x="2514600" y="4370832"/>
-            <a:ext cx="6263640" cy="457200"/>
-          </a:xfrm>
-          <a:prstGeom prst="rect">
-            <a:avLst>
-              <a:gd name="adj" fmla="val 12000"/>
-            </a:avLst>
-          </a:prstGeom>
-          <a:solidFill>
-            <a:srgbClr val="F8FAFC"/>
-          </a:solidFill>
-          <a:ln w="12700">
-            <a:solidFill>
-              <a:srgbClr val="E2E8F0"/>
-            </a:solidFill>
-            <a:prstDash val="solid"/>
-          </a:ln>
-        </p:spPr>
-      </p:sp>
-      <p:sp>
-        <p:nvSpPr>
-          <p:cNvPr id="38" name="Text 36"/>
-          <p:cNvSpPr/>
-          <p:nvPr/>
-        </p:nvSpPr>
-        <p:spPr>
-          <a:xfrm>
-            <a:off x="2651760" y="4370832"/>
-            <a:ext cx="6035040" cy="457200"/>
-          </a:xfrm>
-          <a:prstGeom prst="rect">
-            <a:avLst/>
-          </a:prstGeom>
-          <a:noFill/>
-          <a:ln/>
-        </p:spPr>
-        <p:txBody>
-          <a:bodyPr wrap="square" rtlCol="0" anchor="ctr"/>
-          <a:lstStyle/>
-          <a:p>
-            <a:pPr algn="l" indent="0" marL="0">
-              <a:buNone/>
-            </a:pPr>
-            <a:r>
-              <a:rPr lang="en-US" sz="1200" dirty="0">
-                <a:solidFill>
-                  <a:srgbClr val="0F172A"/>
-                </a:solidFill>
-                <a:latin typeface="Calibri" pitchFamily="34" charset="0"/>
-                <a:ea typeface="Calibri" pitchFamily="34" charset="-122"/>
-                <a:cs typeface="Calibri" pitchFamily="34" charset="-120"/>
-              </a:rPr>
-              <a:t>Already connected or brought together with something else.</a:t>
+              <a:t>someone whose job is to make or join wood, or a person who joins in</a:t>
             </a:r>
             <a:endParaRPr lang="en-US" sz="1200" dirty="0"/>
           </a:p>
@@ -40687,7 +41205,7 @@
                 <a:ea typeface="Calibri" pitchFamily="34" charset="-122"/>
                 <a:cs typeface="Calibri" pitchFamily="34" charset="-120"/>
               </a:rPr>
-              <a:t>Word Labs  •  wordlabs.app  •  Root: 'join' = to connect or bring together</a:t>
+              <a:t>Word Labs  •  wordlabs.app  •  Root: 'join' = connect</a:t>
             </a:r>
             <a:endParaRPr lang="en-US" sz="800" dirty="0"/>
           </a:p>
@@ -40890,7 +41408,7 @@
                 <a:ea typeface="Calibri" pitchFamily="34" charset="-122"/>
                 <a:cs typeface="Calibri" pitchFamily="34" charset="-120"/>
               </a:rPr>
-              <a:t>The two rivers conjoin at the bottom of the valley to form one wide, powerful river.</a:t>
+              <a:t>Would you like to join our football team?</a:t>
             </a:r>
             <a:endParaRPr lang="en-US" sz="1500" dirty="0"/>
           </a:p>
@@ -41054,7 +41572,7 @@
                 <a:ea typeface="Calibri" pitchFamily="34" charset="-122"/>
                 <a:cs typeface="Calibri" pitchFamily="34" charset="-120"/>
               </a:rPr>
-              <a:t>After the holidays, Marcus was excited to rejoin his friends at school and share his stories.</a:t>
+              <a:t>This road joins the motorway just outside town.</a:t>
             </a:r>
             <a:endParaRPr lang="en-US" sz="1500" dirty="0"/>
           </a:p>
@@ -41218,7 +41736,7 @@
                 <a:ea typeface="Calibri" pitchFamily="34" charset="-122"/>
                 <a:cs typeface="Calibri" pitchFamily="34" charset="-120"/>
               </a:rPr>
-              <a:t>The carpenter checked every joint carefully to make sure the wooden frame would hold together.</a:t>
+              <a:t>Last year she joined the swimming club.</a:t>
             </a:r>
             <a:endParaRPr lang="en-US" sz="1500" dirty="0"/>
           </a:p>
